--- a/中越詩歌/A262_聖餐_Nhìn Cây Thập Tự.pptx
+++ b/中越詩歌/A262_聖餐_Nhìn Cây Thập Tự.pptx
@@ -5,7 +5,7 @@
     <p:sldMasterId id="2147483660" r:id="rId1"/>
   </p:sldMasterIdLst>
   <p:sldIdLst>
-    <p:sldId id="257" r:id="rId2"/>
+    <p:sldId id="843" r:id="rId2"/>
     <p:sldId id="258" r:id="rId3"/>
     <p:sldId id="259" r:id="rId4"/>
     <p:sldId id="260" r:id="rId5"/>
@@ -128,6 +128,11 @@
       </a:defRPr>
     </a:lvl9pPr>
   </p:defaultTextStyle>
+  <p:extLst>
+    <p:ext uri="{EFAFB233-063F-42B5-8137-9DF3F51BA10A}">
+      <p15:sldGuideLst xmlns:p15="http://schemas.microsoft.com/office/powerpoint/2012/main"/>
+    </p:ext>
+  </p:extLst>
 </p:presentation>
 </file>
 
@@ -169,7 +174,7 @@
           <a:lstStyle/>
           <a:p>
             <a:r>
-              <a:rPr lang="en-US" altLang="zh-TW" smtClean="0"/>
+              <a:rPr lang="en-US" altLang="zh-TW"/>
               <a:t>Click to edit Master title style</a:t>
             </a:r>
             <a:endParaRPr lang="zh-TW" altLang="en-US"/>
@@ -288,7 +293,7 @@
           </a:lstStyle>
           <a:p>
             <a:r>
-              <a:rPr lang="en-US" altLang="zh-TW" smtClean="0"/>
+              <a:rPr lang="en-US" altLang="zh-TW"/>
               <a:t>Click to edit Master subtitle style</a:t>
             </a:r>
             <a:endParaRPr lang="zh-TW" altLang="en-US"/>
@@ -312,7 +317,7 @@
           <a:p>
             <a:fld id="{955BBC47-A03A-4AFE-AE48-A88B2BBBDFA7}" type="datetimeFigureOut">
               <a:rPr lang="vi-VN" smtClean="0"/>
-              <a:t>14/04/2022</a:t>
+              <a:t>31/08/2024</a:t>
             </a:fld>
             <a:endParaRPr lang="vi-VN"/>
           </a:p>
@@ -406,7 +411,7 @@
           <a:lstStyle/>
           <a:p>
             <a:r>
-              <a:rPr lang="en-US" altLang="zh-TW" smtClean="0"/>
+              <a:rPr lang="en-US" altLang="zh-TW"/>
               <a:t>Click to edit Master title style</a:t>
             </a:r>
             <a:endParaRPr lang="zh-TW" altLang="en-US"/>
@@ -430,35 +435,35 @@
           <a:p>
             <a:pPr lvl="0"/>
             <a:r>
-              <a:rPr lang="en-US" altLang="zh-TW" smtClean="0"/>
+              <a:rPr lang="en-US" altLang="zh-TW"/>
               <a:t>Edit Master text styles</a:t>
             </a:r>
           </a:p>
           <a:p>
             <a:pPr lvl="1"/>
             <a:r>
-              <a:rPr lang="en-US" altLang="zh-TW" smtClean="0"/>
+              <a:rPr lang="en-US" altLang="zh-TW"/>
               <a:t>Second level</a:t>
             </a:r>
           </a:p>
           <a:p>
             <a:pPr lvl="2"/>
             <a:r>
-              <a:rPr lang="en-US" altLang="zh-TW" smtClean="0"/>
+              <a:rPr lang="en-US" altLang="zh-TW"/>
               <a:t>Third level</a:t>
             </a:r>
           </a:p>
           <a:p>
             <a:pPr lvl="3"/>
             <a:r>
-              <a:rPr lang="en-US" altLang="zh-TW" smtClean="0"/>
+              <a:rPr lang="en-US" altLang="zh-TW"/>
               <a:t>Fourth level</a:t>
             </a:r>
           </a:p>
           <a:p>
             <a:pPr lvl="4"/>
             <a:r>
-              <a:rPr lang="en-US" altLang="zh-TW" smtClean="0"/>
+              <a:rPr lang="en-US" altLang="zh-TW"/>
               <a:t>Fifth level</a:t>
             </a:r>
             <a:endParaRPr lang="zh-TW" altLang="en-US"/>
@@ -482,7 +487,7 @@
           <a:p>
             <a:fld id="{955BBC47-A03A-4AFE-AE48-A88B2BBBDFA7}" type="datetimeFigureOut">
               <a:rPr lang="vi-VN" smtClean="0"/>
-              <a:t>14/04/2022</a:t>
+              <a:t>31/08/2024</a:t>
             </a:fld>
             <a:endParaRPr lang="vi-VN"/>
           </a:p>
@@ -581,7 +586,7 @@
           <a:lstStyle/>
           <a:p>
             <a:r>
-              <a:rPr lang="en-US" altLang="zh-TW" smtClean="0"/>
+              <a:rPr lang="en-US" altLang="zh-TW"/>
               <a:t>Click to edit Master title style</a:t>
             </a:r>
             <a:endParaRPr lang="zh-TW" altLang="en-US"/>
@@ -610,35 +615,35 @@
           <a:p>
             <a:pPr lvl="0"/>
             <a:r>
-              <a:rPr lang="en-US" altLang="zh-TW" smtClean="0"/>
+              <a:rPr lang="en-US" altLang="zh-TW"/>
               <a:t>Edit Master text styles</a:t>
             </a:r>
           </a:p>
           <a:p>
             <a:pPr lvl="1"/>
             <a:r>
-              <a:rPr lang="en-US" altLang="zh-TW" smtClean="0"/>
+              <a:rPr lang="en-US" altLang="zh-TW"/>
               <a:t>Second level</a:t>
             </a:r>
           </a:p>
           <a:p>
             <a:pPr lvl="2"/>
             <a:r>
-              <a:rPr lang="en-US" altLang="zh-TW" smtClean="0"/>
+              <a:rPr lang="en-US" altLang="zh-TW"/>
               <a:t>Third level</a:t>
             </a:r>
           </a:p>
           <a:p>
             <a:pPr lvl="3"/>
             <a:r>
-              <a:rPr lang="en-US" altLang="zh-TW" smtClean="0"/>
+              <a:rPr lang="en-US" altLang="zh-TW"/>
               <a:t>Fourth level</a:t>
             </a:r>
           </a:p>
           <a:p>
             <a:pPr lvl="4"/>
             <a:r>
-              <a:rPr lang="en-US" altLang="zh-TW" smtClean="0"/>
+              <a:rPr lang="en-US" altLang="zh-TW"/>
               <a:t>Fifth level</a:t>
             </a:r>
             <a:endParaRPr lang="zh-TW" altLang="en-US"/>
@@ -662,7 +667,7 @@
           <a:p>
             <a:fld id="{955BBC47-A03A-4AFE-AE48-A88B2BBBDFA7}" type="datetimeFigureOut">
               <a:rPr lang="vi-VN" smtClean="0"/>
-              <a:t>14/04/2022</a:t>
+              <a:t>31/08/2024</a:t>
             </a:fld>
             <a:endParaRPr lang="vi-VN"/>
           </a:p>
@@ -756,7 +761,7 @@
           <a:lstStyle/>
           <a:p>
             <a:r>
-              <a:rPr lang="en-US" altLang="zh-TW" smtClean="0"/>
+              <a:rPr lang="en-US" altLang="zh-TW"/>
               <a:t>Click to edit Master title style</a:t>
             </a:r>
             <a:endParaRPr lang="zh-TW" altLang="en-US"/>
@@ -780,35 +785,35 @@
           <a:p>
             <a:pPr lvl="0"/>
             <a:r>
-              <a:rPr lang="en-US" altLang="zh-TW" smtClean="0"/>
+              <a:rPr lang="en-US" altLang="zh-TW"/>
               <a:t>Edit Master text styles</a:t>
             </a:r>
           </a:p>
           <a:p>
             <a:pPr lvl="1"/>
             <a:r>
-              <a:rPr lang="en-US" altLang="zh-TW" smtClean="0"/>
+              <a:rPr lang="en-US" altLang="zh-TW"/>
               <a:t>Second level</a:t>
             </a:r>
           </a:p>
           <a:p>
             <a:pPr lvl="2"/>
             <a:r>
-              <a:rPr lang="en-US" altLang="zh-TW" smtClean="0"/>
+              <a:rPr lang="en-US" altLang="zh-TW"/>
               <a:t>Third level</a:t>
             </a:r>
           </a:p>
           <a:p>
             <a:pPr lvl="3"/>
             <a:r>
-              <a:rPr lang="en-US" altLang="zh-TW" smtClean="0"/>
+              <a:rPr lang="en-US" altLang="zh-TW"/>
               <a:t>Fourth level</a:t>
             </a:r>
           </a:p>
           <a:p>
             <a:pPr lvl="4"/>
             <a:r>
-              <a:rPr lang="en-US" altLang="zh-TW" smtClean="0"/>
+              <a:rPr lang="en-US" altLang="zh-TW"/>
               <a:t>Fifth level</a:t>
             </a:r>
             <a:endParaRPr lang="zh-TW" altLang="en-US"/>
@@ -832,7 +837,7 @@
           <a:p>
             <a:fld id="{955BBC47-A03A-4AFE-AE48-A88B2BBBDFA7}" type="datetimeFigureOut">
               <a:rPr lang="vi-VN" smtClean="0"/>
-              <a:t>14/04/2022</a:t>
+              <a:t>31/08/2024</a:t>
             </a:fld>
             <a:endParaRPr lang="vi-VN"/>
           </a:p>
@@ -935,7 +940,7 @@
           </a:lstStyle>
           <a:p>
             <a:r>
-              <a:rPr lang="en-US" altLang="zh-TW" smtClean="0"/>
+              <a:rPr lang="en-US" altLang="zh-TW"/>
               <a:t>Click to edit Master title style</a:t>
             </a:r>
             <a:endParaRPr lang="zh-TW" altLang="en-US"/>
@@ -1055,7 +1060,7 @@
           <a:p>
             <a:pPr lvl="0"/>
             <a:r>
-              <a:rPr lang="en-US" altLang="zh-TW" smtClean="0"/>
+              <a:rPr lang="en-US" altLang="zh-TW"/>
               <a:t>Edit Master text styles</a:t>
             </a:r>
           </a:p>
@@ -1078,7 +1083,7 @@
           <a:p>
             <a:fld id="{955BBC47-A03A-4AFE-AE48-A88B2BBBDFA7}" type="datetimeFigureOut">
               <a:rPr lang="vi-VN" smtClean="0"/>
-              <a:t>14/04/2022</a:t>
+              <a:t>31/08/2024</a:t>
             </a:fld>
             <a:endParaRPr lang="vi-VN"/>
           </a:p>
@@ -1172,7 +1177,7 @@
           <a:lstStyle/>
           <a:p>
             <a:r>
-              <a:rPr lang="en-US" altLang="zh-TW" smtClean="0"/>
+              <a:rPr lang="en-US" altLang="zh-TW"/>
               <a:t>Click to edit Master title style</a:t>
             </a:r>
             <a:endParaRPr lang="zh-TW" altLang="en-US"/>
@@ -1229,35 +1234,35 @@
           <a:p>
             <a:pPr lvl="0"/>
             <a:r>
-              <a:rPr lang="en-US" altLang="zh-TW" smtClean="0"/>
+              <a:rPr lang="en-US" altLang="zh-TW"/>
               <a:t>Edit Master text styles</a:t>
             </a:r>
           </a:p>
           <a:p>
             <a:pPr lvl="1"/>
             <a:r>
-              <a:rPr lang="en-US" altLang="zh-TW" smtClean="0"/>
+              <a:rPr lang="en-US" altLang="zh-TW"/>
               <a:t>Second level</a:t>
             </a:r>
           </a:p>
           <a:p>
             <a:pPr lvl="2"/>
             <a:r>
-              <a:rPr lang="en-US" altLang="zh-TW" smtClean="0"/>
+              <a:rPr lang="en-US" altLang="zh-TW"/>
               <a:t>Third level</a:t>
             </a:r>
           </a:p>
           <a:p>
             <a:pPr lvl="3"/>
             <a:r>
-              <a:rPr lang="en-US" altLang="zh-TW" smtClean="0"/>
+              <a:rPr lang="en-US" altLang="zh-TW"/>
               <a:t>Fourth level</a:t>
             </a:r>
           </a:p>
           <a:p>
             <a:pPr lvl="4"/>
             <a:r>
-              <a:rPr lang="en-US" altLang="zh-TW" smtClean="0"/>
+              <a:rPr lang="en-US" altLang="zh-TW"/>
               <a:t>Fifth level</a:t>
             </a:r>
             <a:endParaRPr lang="zh-TW" altLang="en-US"/>
@@ -1314,35 +1319,35 @@
           <a:p>
             <a:pPr lvl="0"/>
             <a:r>
-              <a:rPr lang="en-US" altLang="zh-TW" smtClean="0"/>
+              <a:rPr lang="en-US" altLang="zh-TW"/>
               <a:t>Edit Master text styles</a:t>
             </a:r>
           </a:p>
           <a:p>
             <a:pPr lvl="1"/>
             <a:r>
-              <a:rPr lang="en-US" altLang="zh-TW" smtClean="0"/>
+              <a:rPr lang="en-US" altLang="zh-TW"/>
               <a:t>Second level</a:t>
             </a:r>
           </a:p>
           <a:p>
             <a:pPr lvl="2"/>
             <a:r>
-              <a:rPr lang="en-US" altLang="zh-TW" smtClean="0"/>
+              <a:rPr lang="en-US" altLang="zh-TW"/>
               <a:t>Third level</a:t>
             </a:r>
           </a:p>
           <a:p>
             <a:pPr lvl="3"/>
             <a:r>
-              <a:rPr lang="en-US" altLang="zh-TW" smtClean="0"/>
+              <a:rPr lang="en-US" altLang="zh-TW"/>
               <a:t>Fourth level</a:t>
             </a:r>
           </a:p>
           <a:p>
             <a:pPr lvl="4"/>
             <a:r>
-              <a:rPr lang="en-US" altLang="zh-TW" smtClean="0"/>
+              <a:rPr lang="en-US" altLang="zh-TW"/>
               <a:t>Fifth level</a:t>
             </a:r>
             <a:endParaRPr lang="zh-TW" altLang="en-US"/>
@@ -1366,7 +1371,7 @@
           <a:p>
             <a:fld id="{955BBC47-A03A-4AFE-AE48-A88B2BBBDFA7}" type="datetimeFigureOut">
               <a:rPr lang="vi-VN" smtClean="0"/>
-              <a:t>14/04/2022</a:t>
+              <a:t>31/08/2024</a:t>
             </a:fld>
             <a:endParaRPr lang="vi-VN"/>
           </a:p>
@@ -1464,7 +1469,7 @@
           </a:lstStyle>
           <a:p>
             <a:r>
-              <a:rPr lang="en-US" altLang="zh-TW" smtClean="0"/>
+              <a:rPr lang="en-US" altLang="zh-TW"/>
               <a:t>Click to edit Master title style</a:t>
             </a:r>
             <a:endParaRPr lang="zh-TW" altLang="en-US"/>
@@ -1530,7 +1535,7 @@
           <a:p>
             <a:pPr lvl="0"/>
             <a:r>
-              <a:rPr lang="en-US" altLang="zh-TW" smtClean="0"/>
+              <a:rPr lang="en-US" altLang="zh-TW"/>
               <a:t>Edit Master text styles</a:t>
             </a:r>
           </a:p>
@@ -1586,35 +1591,35 @@
           <a:p>
             <a:pPr lvl="0"/>
             <a:r>
-              <a:rPr lang="en-US" altLang="zh-TW" smtClean="0"/>
+              <a:rPr lang="en-US" altLang="zh-TW"/>
               <a:t>Edit Master text styles</a:t>
             </a:r>
           </a:p>
           <a:p>
             <a:pPr lvl="1"/>
             <a:r>
-              <a:rPr lang="en-US" altLang="zh-TW" smtClean="0"/>
+              <a:rPr lang="en-US" altLang="zh-TW"/>
               <a:t>Second level</a:t>
             </a:r>
           </a:p>
           <a:p>
             <a:pPr lvl="2"/>
             <a:r>
-              <a:rPr lang="en-US" altLang="zh-TW" smtClean="0"/>
+              <a:rPr lang="en-US" altLang="zh-TW"/>
               <a:t>Third level</a:t>
             </a:r>
           </a:p>
           <a:p>
             <a:pPr lvl="3"/>
             <a:r>
-              <a:rPr lang="en-US" altLang="zh-TW" smtClean="0"/>
+              <a:rPr lang="en-US" altLang="zh-TW"/>
               <a:t>Fourth level</a:t>
             </a:r>
           </a:p>
           <a:p>
             <a:pPr lvl="4"/>
             <a:r>
-              <a:rPr lang="en-US" altLang="zh-TW" smtClean="0"/>
+              <a:rPr lang="en-US" altLang="zh-TW"/>
               <a:t>Fifth level</a:t>
             </a:r>
             <a:endParaRPr lang="zh-TW" altLang="en-US"/>
@@ -1680,7 +1685,7 @@
           <a:p>
             <a:pPr lvl="0"/>
             <a:r>
-              <a:rPr lang="en-US" altLang="zh-TW" smtClean="0"/>
+              <a:rPr lang="en-US" altLang="zh-TW"/>
               <a:t>Edit Master text styles</a:t>
             </a:r>
           </a:p>
@@ -1736,35 +1741,35 @@
           <a:p>
             <a:pPr lvl="0"/>
             <a:r>
-              <a:rPr lang="en-US" altLang="zh-TW" smtClean="0"/>
+              <a:rPr lang="en-US" altLang="zh-TW"/>
               <a:t>Edit Master text styles</a:t>
             </a:r>
           </a:p>
           <a:p>
             <a:pPr lvl="1"/>
             <a:r>
-              <a:rPr lang="en-US" altLang="zh-TW" smtClean="0"/>
+              <a:rPr lang="en-US" altLang="zh-TW"/>
               <a:t>Second level</a:t>
             </a:r>
           </a:p>
           <a:p>
             <a:pPr lvl="2"/>
             <a:r>
-              <a:rPr lang="en-US" altLang="zh-TW" smtClean="0"/>
+              <a:rPr lang="en-US" altLang="zh-TW"/>
               <a:t>Third level</a:t>
             </a:r>
           </a:p>
           <a:p>
             <a:pPr lvl="3"/>
             <a:r>
-              <a:rPr lang="en-US" altLang="zh-TW" smtClean="0"/>
+              <a:rPr lang="en-US" altLang="zh-TW"/>
               <a:t>Fourth level</a:t>
             </a:r>
           </a:p>
           <a:p>
             <a:pPr lvl="4"/>
             <a:r>
-              <a:rPr lang="en-US" altLang="zh-TW" smtClean="0"/>
+              <a:rPr lang="en-US" altLang="zh-TW"/>
               <a:t>Fifth level</a:t>
             </a:r>
             <a:endParaRPr lang="zh-TW" altLang="en-US"/>
@@ -1788,7 +1793,7 @@
           <a:p>
             <a:fld id="{955BBC47-A03A-4AFE-AE48-A88B2BBBDFA7}" type="datetimeFigureOut">
               <a:rPr lang="vi-VN" smtClean="0"/>
-              <a:t>14/04/2022</a:t>
+              <a:t>31/08/2024</a:t>
             </a:fld>
             <a:endParaRPr lang="vi-VN"/>
           </a:p>
@@ -1882,7 +1887,7 @@
           <a:lstStyle/>
           <a:p>
             <a:r>
-              <a:rPr lang="en-US" altLang="zh-TW" smtClean="0"/>
+              <a:rPr lang="en-US" altLang="zh-TW"/>
               <a:t>Click to edit Master title style</a:t>
             </a:r>
             <a:endParaRPr lang="zh-TW" altLang="en-US"/>
@@ -1906,7 +1911,7 @@
           <a:p>
             <a:fld id="{955BBC47-A03A-4AFE-AE48-A88B2BBBDFA7}" type="datetimeFigureOut">
               <a:rPr lang="vi-VN" smtClean="0"/>
-              <a:t>14/04/2022</a:t>
+              <a:t>31/08/2024</a:t>
             </a:fld>
             <a:endParaRPr lang="vi-VN"/>
           </a:p>
@@ -2001,7 +2006,7 @@
           <a:p>
             <a:fld id="{955BBC47-A03A-4AFE-AE48-A88B2BBBDFA7}" type="datetimeFigureOut">
               <a:rPr lang="vi-VN" smtClean="0"/>
-              <a:t>14/04/2022</a:t>
+              <a:t>31/08/2024</a:t>
             </a:fld>
             <a:endParaRPr lang="vi-VN"/>
           </a:p>
@@ -2104,7 +2109,7 @@
           </a:lstStyle>
           <a:p>
             <a:r>
-              <a:rPr lang="en-US" altLang="zh-TW" smtClean="0"/>
+              <a:rPr lang="en-US" altLang="zh-TW"/>
               <a:t>Click to edit Master title style</a:t>
             </a:r>
             <a:endParaRPr lang="zh-TW" altLang="en-US"/>
@@ -2161,35 +2166,35 @@
           <a:p>
             <a:pPr lvl="0"/>
             <a:r>
-              <a:rPr lang="en-US" altLang="zh-TW" smtClean="0"/>
+              <a:rPr lang="en-US" altLang="zh-TW"/>
               <a:t>Edit Master text styles</a:t>
             </a:r>
           </a:p>
           <a:p>
             <a:pPr lvl="1"/>
             <a:r>
-              <a:rPr lang="en-US" altLang="zh-TW" smtClean="0"/>
+              <a:rPr lang="en-US" altLang="zh-TW"/>
               <a:t>Second level</a:t>
             </a:r>
           </a:p>
           <a:p>
             <a:pPr lvl="2"/>
             <a:r>
-              <a:rPr lang="en-US" altLang="zh-TW" smtClean="0"/>
+              <a:rPr lang="en-US" altLang="zh-TW"/>
               <a:t>Third level</a:t>
             </a:r>
           </a:p>
           <a:p>
             <a:pPr lvl="3"/>
             <a:r>
-              <a:rPr lang="en-US" altLang="zh-TW" smtClean="0"/>
+              <a:rPr lang="en-US" altLang="zh-TW"/>
               <a:t>Fourth level</a:t>
             </a:r>
           </a:p>
           <a:p>
             <a:pPr lvl="4"/>
             <a:r>
-              <a:rPr lang="en-US" altLang="zh-TW" smtClean="0"/>
+              <a:rPr lang="en-US" altLang="zh-TW"/>
               <a:t>Fifth level</a:t>
             </a:r>
             <a:endParaRPr lang="zh-TW" altLang="en-US"/>
@@ -2255,7 +2260,7 @@
           <a:p>
             <a:pPr lvl="0"/>
             <a:r>
-              <a:rPr lang="en-US" altLang="zh-TW" smtClean="0"/>
+              <a:rPr lang="en-US" altLang="zh-TW"/>
               <a:t>Edit Master text styles</a:t>
             </a:r>
           </a:p>
@@ -2278,7 +2283,7 @@
           <a:p>
             <a:fld id="{955BBC47-A03A-4AFE-AE48-A88B2BBBDFA7}" type="datetimeFigureOut">
               <a:rPr lang="vi-VN" smtClean="0"/>
-              <a:t>14/04/2022</a:t>
+              <a:t>31/08/2024</a:t>
             </a:fld>
             <a:endParaRPr lang="vi-VN"/>
           </a:p>
@@ -2381,7 +2386,7 @@
           </a:lstStyle>
           <a:p>
             <a:r>
-              <a:rPr lang="en-US" altLang="zh-TW" smtClean="0"/>
+              <a:rPr lang="en-US" altLang="zh-TW"/>
               <a:t>Click to edit Master title style</a:t>
             </a:r>
             <a:endParaRPr lang="zh-TW" altLang="en-US"/>
@@ -2446,7 +2451,7 @@
           </a:lstStyle>
           <a:p>
             <a:r>
-              <a:rPr lang="en-US" altLang="zh-TW" smtClean="0"/>
+              <a:rPr lang="en-US" altLang="zh-TW"/>
               <a:t>Click icon to add picture</a:t>
             </a:r>
             <a:endParaRPr lang="zh-TW" altLang="en-US"/>
@@ -2512,7 +2517,7 @@
           <a:p>
             <a:pPr lvl="0"/>
             <a:r>
-              <a:rPr lang="en-US" altLang="zh-TW" smtClean="0"/>
+              <a:rPr lang="en-US" altLang="zh-TW"/>
               <a:t>Edit Master text styles</a:t>
             </a:r>
           </a:p>
@@ -2535,7 +2540,7 @@
           <a:p>
             <a:fld id="{955BBC47-A03A-4AFE-AE48-A88B2BBBDFA7}" type="datetimeFigureOut">
               <a:rPr lang="vi-VN" smtClean="0"/>
-              <a:t>14/04/2022</a:t>
+              <a:t>31/08/2024</a:t>
             </a:fld>
             <a:endParaRPr lang="vi-VN"/>
           </a:p>
@@ -2649,10 +2654,9 @@
           <a:lstStyle/>
           <a:p>
             <a:r>
-              <a:rPr lang="zh-TW" altLang="en-US" smtClean="0"/>
+              <a:rPr lang="zh-TW" altLang="en-US"/>
               <a:t>按一下以編輯母片標題樣式</a:t>
             </a:r>
-            <a:endParaRPr lang="zh-TW" altLang="en-US"/>
           </a:p>
         </p:txBody>
       </p:sp>
@@ -2683,38 +2687,37 @@
           <a:p>
             <a:pPr lvl="0"/>
             <a:r>
-              <a:rPr lang="zh-TW" altLang="en-US" smtClean="0"/>
+              <a:rPr lang="zh-TW" altLang="en-US"/>
               <a:t>按一下以編輯母片文字樣式</a:t>
             </a:r>
           </a:p>
           <a:p>
             <a:pPr lvl="1"/>
             <a:r>
-              <a:rPr lang="zh-TW" altLang="en-US" smtClean="0"/>
+              <a:rPr lang="zh-TW" altLang="en-US"/>
               <a:t>第二層</a:t>
             </a:r>
           </a:p>
           <a:p>
             <a:pPr lvl="2"/>
             <a:r>
-              <a:rPr lang="zh-TW" altLang="en-US" smtClean="0"/>
+              <a:rPr lang="zh-TW" altLang="en-US"/>
               <a:t>第三層</a:t>
             </a:r>
           </a:p>
           <a:p>
             <a:pPr lvl="3"/>
             <a:r>
-              <a:rPr lang="zh-TW" altLang="en-US" smtClean="0"/>
+              <a:rPr lang="zh-TW" altLang="en-US"/>
               <a:t>第四層</a:t>
             </a:r>
           </a:p>
           <a:p>
             <a:pPr lvl="4"/>
             <a:r>
-              <a:rPr lang="zh-TW" altLang="en-US" smtClean="0"/>
+              <a:rPr lang="zh-TW" altLang="en-US"/>
               <a:t>第五層</a:t>
             </a:r>
-            <a:endParaRPr lang="zh-TW" altLang="en-US"/>
           </a:p>
         </p:txBody>
       </p:sp>
@@ -2753,7 +2756,7 @@
           <a:p>
             <a:fld id="{955BBC47-A03A-4AFE-AE48-A88B2BBBDFA7}" type="datetimeFigureOut">
               <a:rPr lang="vi-VN" smtClean="0"/>
-              <a:t>14/04/2022</a:t>
+              <a:t>31/08/2024</a:t>
             </a:fld>
             <a:endParaRPr lang="vi-VN"/>
           </a:p>
@@ -3151,7 +3154,7 @@
           <a:lstStyle/>
           <a:p>
             <a:r>
-              <a:rPr lang="zh-CN" altLang="en-US" sz="7200" b="1" i="1" dirty="0">
+              <a:rPr lang="zh-CN" altLang="en-US" b="1" i="1" dirty="0">
                 <a:solidFill>
                   <a:srgbClr val="000066"/>
                 </a:solidFill>
@@ -3165,9 +3168,73 @@
                 <a:latin typeface="微軟正黑體" pitchFamily="34" charset="-120"/>
                 <a:ea typeface="微軟正黑體" pitchFamily="34" charset="-120"/>
               </a:rPr>
+              <a:t>宣 </a:t>
+            </a:r>
+            <a:r>
+              <a:rPr lang="en-US" altLang="zh-CN" b="1" i="1" dirty="0">
+                <a:solidFill>
+                  <a:srgbClr val="000066"/>
+                </a:solidFill>
+                <a:effectLst>
+                  <a:outerShdw blurRad="38100" dist="38100" dir="2700000" algn="tl">
+                    <a:srgbClr val="000000">
+                      <a:alpha val="43137"/>
+                    </a:srgbClr>
+                  </a:outerShdw>
+                </a:effectLst>
+                <a:latin typeface="微軟正黑體" pitchFamily="34" charset="-120"/>
+                <a:ea typeface="微軟正黑體" pitchFamily="34" charset="-120"/>
+              </a:rPr>
+              <a:t>262A</a:t>
+            </a:r>
+            <a:r>
+              <a:rPr lang="en-US" altLang="zh-CN" sz="7200" b="1" i="1" dirty="0">
+                <a:solidFill>
+                  <a:srgbClr val="000066"/>
+                </a:solidFill>
+                <a:effectLst>
+                  <a:outerShdw blurRad="38100" dist="38100" dir="2700000" algn="tl">
+                    <a:srgbClr val="000000">
+                      <a:alpha val="43137"/>
+                    </a:srgbClr>
+                  </a:outerShdw>
+                </a:effectLst>
+                <a:latin typeface="微軟正黑體" pitchFamily="34" charset="-120"/>
+                <a:ea typeface="微軟正黑體" pitchFamily="34" charset="-120"/>
+              </a:rPr>
+              <a:t> -</a:t>
+            </a:r>
+            <a:r>
+              <a:rPr lang="zh-CN" altLang="en-US" sz="7200" b="1" i="1" dirty="0">
+                <a:solidFill>
+                  <a:srgbClr val="000066"/>
+                </a:solidFill>
+                <a:effectLst>
+                  <a:outerShdw blurRad="38100" dist="38100" dir="2700000" algn="tl">
+                    <a:srgbClr val="000000">
+                      <a:alpha val="43137"/>
+                    </a:srgbClr>
+                  </a:outerShdw>
+                </a:effectLst>
+                <a:latin typeface="微軟正黑體" pitchFamily="34" charset="-120"/>
+                <a:ea typeface="微軟正黑體" pitchFamily="34" charset="-120"/>
+              </a:rPr>
               <a:t>聖餐</a:t>
             </a:r>
-            <a:endParaRPr lang="zh-TW" altLang="en-US" dirty="0"/>
+            <a:endParaRPr lang="zh-TW" altLang="en-US" sz="7200" b="1" i="1" dirty="0">
+              <a:solidFill>
+                <a:srgbClr val="000066"/>
+              </a:solidFill>
+              <a:effectLst>
+                <a:outerShdw blurRad="38100" dist="38100" dir="2700000" algn="tl">
+                  <a:srgbClr val="000000">
+                    <a:alpha val="43137"/>
+                  </a:srgbClr>
+                </a:outerShdw>
+              </a:effectLst>
+              <a:latin typeface="微軟正黑體" pitchFamily="34" charset="-120"/>
+              <a:ea typeface="微軟正黑體" pitchFamily="34" charset="-120"/>
+            </a:endParaRPr>
           </a:p>
         </p:txBody>
       </p:sp>
@@ -3209,11 +3276,8 @@
             </a:lvl1pPr>
           </a:lstStyle>
           <a:p>
-            <a:pPr>
-              <a:defRPr/>
-            </a:pPr>
-            <a:r>
-              <a:rPr lang="it-IT" sz="5400" b="1" i="1" dirty="0" smtClean="0">
+            <a:r>
+              <a:rPr lang="it-IT" sz="5400" b="1" i="1" dirty="0">
                 <a:solidFill>
                   <a:srgbClr val="660033"/>
                 </a:solidFill>
@@ -3224,14 +3288,14 @@
                     </a:srgbClr>
                   </a:outerShdw>
                 </a:effectLst>
-                <a:latin typeface="Calibri" panose="020F0502020204030204" pitchFamily="34" charset="0"/>
-                <a:ea typeface="微軟正黑體" pitchFamily="34" charset="-120"/>
-                <a:cs typeface="Calibri" panose="020F0502020204030204" pitchFamily="34" charset="0"/>
-              </a:rPr>
-              <a:t>Nhìn </a:t>
-            </a:r>
-            <a:r>
-              <a:rPr lang="it-IT" sz="5400" b="1" i="1" dirty="0">
+                <a:latin typeface="Times New Roman" panose="02020603050405020304" pitchFamily="18" charset="0"/>
+                <a:ea typeface="微軟正黑體" pitchFamily="34" charset="-120"/>
+                <a:cs typeface="Times New Roman" panose="02020603050405020304" pitchFamily="18" charset="0"/>
+              </a:rPr>
+              <a:t>Nhìn Cây Thập Tự</a:t>
+            </a:r>
+            <a:r>
+              <a:rPr lang="vi-VN" sz="5400" b="1" i="1" dirty="0">
                 <a:solidFill>
                   <a:srgbClr val="660033"/>
                 </a:solidFill>
@@ -3242,13 +3306,65 @@
                     </a:srgbClr>
                   </a:outerShdw>
                 </a:effectLst>
-                <a:latin typeface="Calibri" panose="020F0502020204030204" pitchFamily="34" charset="0"/>
+                <a:latin typeface="Times New Roman" panose="02020603050405020304" pitchFamily="18" charset="0"/>
+                <a:ea typeface="微軟正黑體" pitchFamily="34" charset="-120"/>
+                <a:cs typeface="Times New Roman" panose="02020603050405020304" pitchFamily="18" charset="0"/>
+              </a:rPr>
+              <a:t> </a:t>
+            </a:r>
+            <a:r>
+              <a:rPr lang="vi-VN" sz="5400" b="1" i="1" dirty="0">
+                <a:solidFill>
+                  <a:srgbClr val="660033"/>
+                </a:solidFill>
+                <a:effectLst>
+                  <a:outerShdw blurRad="38100" dist="38100" dir="2700000" algn="tl">
+                    <a:srgbClr val="000000">
+                      <a:alpha val="43137"/>
+                    </a:srgbClr>
+                  </a:outerShdw>
+                </a:effectLst>
                 <a:ea typeface="微軟正黑體" pitchFamily="34" charset="-120"/>
                 <a:cs typeface="Calibri" panose="020F0502020204030204" pitchFamily="34" charset="0"/>
               </a:rPr>
-              <a:t>Cây Thập Tự</a:t>
-            </a:r>
-            <a:endParaRPr lang="vi-VN" sz="5400" b="1" i="1" dirty="0">
+              <a:t>(TC </a:t>
+            </a:r>
+            <a:r>
+              <a:rPr lang="en-US" sz="5400" b="1" i="1" dirty="0">
+                <a:solidFill>
+                  <a:srgbClr val="660033"/>
+                </a:solidFill>
+                <a:effectLst>
+                  <a:outerShdw blurRad="38100" dist="38100" dir="2700000" algn="tl">
+                    <a:srgbClr val="000000">
+                      <a:alpha val="43137"/>
+                    </a:srgbClr>
+                  </a:outerShdw>
+                </a:effectLst>
+                <a:latin typeface="Times New Roman" panose="02020603050405020304" pitchFamily="18" charset="0"/>
+                <a:ea typeface="微軟正黑體" pitchFamily="34" charset="-120"/>
+                <a:cs typeface="Times New Roman" panose="02020603050405020304" pitchFamily="18" charset="0"/>
+              </a:rPr>
+              <a:t>93</a:t>
+            </a:r>
+            <a:r>
+              <a:rPr lang="vi-VN" sz="5400" b="1" i="1" dirty="0">
+                <a:solidFill>
+                  <a:srgbClr val="660033"/>
+                </a:solidFill>
+                <a:effectLst>
+                  <a:outerShdw blurRad="38100" dist="38100" dir="2700000" algn="tl">
+                    <a:srgbClr val="000000">
+                      <a:alpha val="43137"/>
+                    </a:srgbClr>
+                  </a:outerShdw>
+                </a:effectLst>
+                <a:ea typeface="微軟正黑體" pitchFamily="34" charset="-120"/>
+                <a:cs typeface="Calibri" panose="020F0502020204030204" pitchFamily="34" charset="0"/>
+              </a:rPr>
+              <a:t>)</a:t>
+            </a:r>
+            <a:endParaRPr lang="zh-TW" altLang="en-US" sz="5400" b="1" i="1" dirty="0">
               <a:solidFill>
                 <a:srgbClr val="660033"/>
               </a:solidFill>
@@ -3259,7 +3375,6 @@
                   </a:srgbClr>
                 </a:outerShdw>
               </a:effectLst>
-              <a:latin typeface="Calibri" panose="020F0502020204030204" pitchFamily="34" charset="0"/>
               <a:ea typeface="微軟正黑體" pitchFamily="34" charset="-120"/>
               <a:cs typeface="Calibri" panose="020F0502020204030204" pitchFamily="34" charset="0"/>
             </a:endParaRPr>
@@ -3269,7 +3384,7 @@
     </p:spTree>
     <p:extLst>
       <p:ext uri="{BB962C8B-B14F-4D97-AF65-F5344CB8AC3E}">
-        <p14:creationId xmlns:p14="http://schemas.microsoft.com/office/powerpoint/2010/main" val="3886636104"/>
+        <p14:creationId xmlns:p14="http://schemas.microsoft.com/office/powerpoint/2010/main" val="3204052396"/>
       </p:ext>
     </p:extLst>
   </p:cSld>
@@ -3494,128 +3609,125 @@
           </a:lstStyle>
           <a:p>
             <a:pPr marL="0" indent="0" algn="ctr">
-              <a:lnSpc>
-                <a:spcPts val="9000"/>
-              </a:lnSpc>
               <a:buNone/>
               <a:defRPr/>
             </a:pPr>
             <a:r>
-              <a:rPr lang="en-US" altLang="zh-TW" sz="4000" b="1" dirty="0" err="1">
-                <a:solidFill>
-                  <a:srgbClr val="660033"/>
-                </a:solidFill>
-                <a:effectLst/>
-                <a:latin typeface="Calibri" panose="020F0502020204030204" pitchFamily="34" charset="0"/>
-                <a:ea typeface="微軟正黑體" pitchFamily="34" charset="-120"/>
-                <a:cs typeface="Calibri" panose="020F0502020204030204" pitchFamily="34" charset="0"/>
+              <a:rPr lang="en-US" altLang="zh-TW" sz="3733" b="1" dirty="0" err="1">
+                <a:solidFill>
+                  <a:srgbClr val="660033"/>
+                </a:solidFill>
+                <a:effectLst/>
+                <a:latin typeface="Times New Roman" panose="02020603050405020304" pitchFamily="18" charset="0"/>
+                <a:ea typeface="微軟正黑體" pitchFamily="34" charset="-120"/>
+                <a:cs typeface="Times New Roman" panose="02020603050405020304" pitchFamily="18" charset="0"/>
               </a:rPr>
               <a:t>Tại</a:t>
             </a:r>
             <a:r>
-              <a:rPr lang="en-US" altLang="zh-TW" sz="4000" b="1" dirty="0">
-                <a:solidFill>
-                  <a:srgbClr val="660033"/>
-                </a:solidFill>
-                <a:effectLst/>
-                <a:latin typeface="Calibri" panose="020F0502020204030204" pitchFamily="34" charset="0"/>
-                <a:ea typeface="微軟正黑體" pitchFamily="34" charset="-120"/>
-                <a:cs typeface="Calibri" panose="020F0502020204030204" pitchFamily="34" charset="0"/>
+              <a:rPr lang="en-US" altLang="zh-TW" sz="3733" b="1" dirty="0">
+                <a:solidFill>
+                  <a:srgbClr val="660033"/>
+                </a:solidFill>
+                <a:effectLst/>
+                <a:latin typeface="Times New Roman" panose="02020603050405020304" pitchFamily="18" charset="0"/>
+                <a:ea typeface="微軟正黑體" pitchFamily="34" charset="-120"/>
+                <a:cs typeface="Times New Roman" panose="02020603050405020304" pitchFamily="18" charset="0"/>
               </a:rPr>
               <a:t> </a:t>
             </a:r>
             <a:r>
-              <a:rPr lang="en-US" altLang="zh-TW" sz="4000" b="1" dirty="0" err="1">
-                <a:solidFill>
-                  <a:srgbClr val="660033"/>
-                </a:solidFill>
-                <a:effectLst/>
-                <a:latin typeface="Calibri" panose="020F0502020204030204" pitchFamily="34" charset="0"/>
-                <a:ea typeface="微軟正黑體" pitchFamily="34" charset="-120"/>
-                <a:cs typeface="Calibri" panose="020F0502020204030204" pitchFamily="34" charset="0"/>
+              <a:rPr lang="en-US" altLang="zh-TW" sz="3733" b="1" dirty="0" err="1">
+                <a:solidFill>
+                  <a:srgbClr val="660033"/>
+                </a:solidFill>
+                <a:effectLst/>
+                <a:latin typeface="Times New Roman" panose="02020603050405020304" pitchFamily="18" charset="0"/>
+                <a:ea typeface="微軟正黑體" pitchFamily="34" charset="-120"/>
+                <a:cs typeface="Times New Roman" panose="02020603050405020304" pitchFamily="18" charset="0"/>
               </a:rPr>
               <a:t>đây</a:t>
             </a:r>
             <a:r>
-              <a:rPr lang="en-US" altLang="zh-TW" sz="4000" b="1" dirty="0">
-                <a:solidFill>
-                  <a:srgbClr val="660033"/>
-                </a:solidFill>
-                <a:effectLst/>
-                <a:latin typeface="Calibri" panose="020F0502020204030204" pitchFamily="34" charset="0"/>
-                <a:ea typeface="微軟正黑體" pitchFamily="34" charset="-120"/>
-                <a:cs typeface="Calibri" panose="020F0502020204030204" pitchFamily="34" charset="0"/>
+              <a:rPr lang="en-US" altLang="zh-TW" sz="3733" b="1" dirty="0">
+                <a:solidFill>
+                  <a:srgbClr val="660033"/>
+                </a:solidFill>
+                <a:effectLst/>
+                <a:latin typeface="Times New Roman" panose="02020603050405020304" pitchFamily="18" charset="0"/>
+                <a:ea typeface="微軟正黑體" pitchFamily="34" charset="-120"/>
+                <a:cs typeface="Times New Roman" panose="02020603050405020304" pitchFamily="18" charset="0"/>
               </a:rPr>
               <a:t> </a:t>
             </a:r>
             <a:r>
-              <a:rPr lang="en-US" altLang="zh-TW" sz="4000" b="1" dirty="0" err="1">
-                <a:solidFill>
-                  <a:srgbClr val="660033"/>
-                </a:solidFill>
-                <a:effectLst/>
-                <a:latin typeface="Calibri" panose="020F0502020204030204" pitchFamily="34" charset="0"/>
-                <a:ea typeface="微軟正黑體" pitchFamily="34" charset="-120"/>
-                <a:cs typeface="Calibri" panose="020F0502020204030204" pitchFamily="34" charset="0"/>
+              <a:rPr lang="en-US" altLang="zh-TW" sz="3733" b="1" dirty="0" err="1">
+                <a:solidFill>
+                  <a:srgbClr val="660033"/>
+                </a:solidFill>
+                <a:effectLst/>
+                <a:latin typeface="Times New Roman" panose="02020603050405020304" pitchFamily="18" charset="0"/>
+                <a:ea typeface="微軟正黑體" pitchFamily="34" charset="-120"/>
+                <a:cs typeface="Times New Roman" panose="02020603050405020304" pitchFamily="18" charset="0"/>
               </a:rPr>
               <a:t>Jêsus</a:t>
             </a:r>
             <a:r>
-              <a:rPr lang="en-US" altLang="zh-TW" sz="4000" b="1" dirty="0">
-                <a:solidFill>
-                  <a:srgbClr val="660033"/>
-                </a:solidFill>
-                <a:effectLst/>
-                <a:latin typeface="Calibri" panose="020F0502020204030204" pitchFamily="34" charset="0"/>
-                <a:ea typeface="微軟正黑體" pitchFamily="34" charset="-120"/>
-                <a:cs typeface="Calibri" panose="020F0502020204030204" pitchFamily="34" charset="0"/>
+              <a:rPr lang="en-US" altLang="zh-TW" sz="3733" b="1" dirty="0">
+                <a:solidFill>
+                  <a:srgbClr val="660033"/>
+                </a:solidFill>
+                <a:effectLst/>
+                <a:latin typeface="Times New Roman" panose="02020603050405020304" pitchFamily="18" charset="0"/>
+                <a:ea typeface="微軟正黑體" pitchFamily="34" charset="-120"/>
+                <a:cs typeface="Times New Roman" panose="02020603050405020304" pitchFamily="18" charset="0"/>
               </a:rPr>
               <a:t> </a:t>
             </a:r>
             <a:r>
-              <a:rPr lang="en-US" altLang="zh-TW" sz="4000" b="1" dirty="0" err="1">
-                <a:solidFill>
-                  <a:srgbClr val="660033"/>
-                </a:solidFill>
-                <a:effectLst/>
-                <a:latin typeface="Calibri" panose="020F0502020204030204" pitchFamily="34" charset="0"/>
-                <a:ea typeface="微軟正黑體" pitchFamily="34" charset="-120"/>
-                <a:cs typeface="Calibri" panose="020F0502020204030204" pitchFamily="34" charset="0"/>
+              <a:rPr lang="en-US" altLang="zh-TW" sz="3733" b="1" dirty="0" err="1">
+                <a:solidFill>
+                  <a:srgbClr val="660033"/>
+                </a:solidFill>
+                <a:effectLst/>
+                <a:latin typeface="Times New Roman" panose="02020603050405020304" pitchFamily="18" charset="0"/>
+                <a:ea typeface="微軟正黑體" pitchFamily="34" charset="-120"/>
+                <a:cs typeface="Times New Roman" panose="02020603050405020304" pitchFamily="18" charset="0"/>
               </a:rPr>
               <a:t>cất</a:t>
             </a:r>
             <a:r>
-              <a:rPr lang="en-US" altLang="zh-TW" sz="4000" b="1" dirty="0">
-                <a:solidFill>
-                  <a:srgbClr val="660033"/>
-                </a:solidFill>
-                <a:effectLst/>
-                <a:latin typeface="Calibri" panose="020F0502020204030204" pitchFamily="34" charset="0"/>
-                <a:ea typeface="微軟正黑體" pitchFamily="34" charset="-120"/>
-                <a:cs typeface="Calibri" panose="020F0502020204030204" pitchFamily="34" charset="0"/>
+              <a:rPr lang="en-US" altLang="zh-TW" sz="3733" b="1" dirty="0">
+                <a:solidFill>
+                  <a:srgbClr val="660033"/>
+                </a:solidFill>
+                <a:effectLst/>
+                <a:latin typeface="Times New Roman" panose="02020603050405020304" pitchFamily="18" charset="0"/>
+                <a:ea typeface="微軟正黑體" pitchFamily="34" charset="-120"/>
+                <a:cs typeface="Times New Roman" panose="02020603050405020304" pitchFamily="18" charset="0"/>
               </a:rPr>
               <a:t> </a:t>
             </a:r>
             <a:r>
-              <a:rPr lang="en-US" altLang="zh-TW" sz="4000" b="1" dirty="0" err="1">
-                <a:solidFill>
-                  <a:srgbClr val="660033"/>
-                </a:solidFill>
-                <a:effectLst/>
-                <a:latin typeface="Calibri" panose="020F0502020204030204" pitchFamily="34" charset="0"/>
-                <a:ea typeface="微軟正黑體" pitchFamily="34" charset="-120"/>
-                <a:cs typeface="Calibri" panose="020F0502020204030204" pitchFamily="34" charset="0"/>
+              <a:rPr lang="en-US" altLang="zh-TW" sz="3733" b="1" dirty="0" err="1">
+                <a:solidFill>
+                  <a:srgbClr val="660033"/>
+                </a:solidFill>
+                <a:effectLst/>
+                <a:latin typeface="Times New Roman" panose="02020603050405020304" pitchFamily="18" charset="0"/>
+                <a:ea typeface="微軟正黑體" pitchFamily="34" charset="-120"/>
+                <a:cs typeface="Times New Roman" panose="02020603050405020304" pitchFamily="18" charset="0"/>
               </a:rPr>
               <a:t>tiếng</a:t>
             </a:r>
-            <a:endParaRPr lang="en-US" sz="4000" b="1" dirty="0">
+            <a:endParaRPr lang="en-US" sz="3733" b="1" dirty="0">
               <a:solidFill>
                 <a:srgbClr val="660033"/>
               </a:solidFill>
               <a:effectLst/>
-              <a:latin typeface="Calibri" panose="020F0502020204030204" pitchFamily="34" charset="0"/>
+              <a:latin typeface="Times New Roman" panose="02020603050405020304" pitchFamily="18" charset="0"/>
               <a:ea typeface="微軟正黑體" pitchFamily="34" charset="-120"/>
-              <a:cs typeface="Calibri" panose="020F0502020204030204" pitchFamily="34" charset="0"/>
+              <a:cs typeface="Times New Roman" panose="02020603050405020304" pitchFamily="18" charset="0"/>
             </a:endParaRPr>
           </a:p>
         </p:txBody>
@@ -3629,7 +3741,7 @@
         <p:spPr>
           <a:xfrm>
             <a:off x="0" y="5253203"/>
-            <a:ext cx="12192000" cy="748988"/>
+            <a:ext cx="12192000" cy="584775"/>
           </a:xfrm>
           <a:prstGeom prst="rect">
             <a:avLst/>
@@ -3644,37 +3756,21 @@
           <a:p>
             <a:pPr algn="ctr"/>
             <a:r>
-              <a:rPr lang="en-US" sz="4267" b="1" dirty="0">
+              <a:rPr lang="en-US" sz="3200" b="1" dirty="0">
                 <a:solidFill>
                   <a:srgbClr val="000066"/>
                 </a:solidFill>
                 <a:effectLst/>
-              </a:rPr>
-              <a:t>( </a:t>
-            </a:r>
-            <a:r>
-              <a:rPr lang="en-US" sz="4267" b="1" dirty="0" smtClean="0">
-                <a:solidFill>
-                  <a:srgbClr val="000066"/>
-                </a:solidFill>
-                <a:effectLst/>
-              </a:rPr>
-              <a:t>3 / 6 </a:t>
-            </a:r>
-            <a:r>
-              <a:rPr lang="en-US" sz="4267" b="1" dirty="0">
-                <a:solidFill>
-                  <a:srgbClr val="000066"/>
-                </a:solidFill>
-                <a:effectLst/>
-              </a:rPr>
-              <a:t>)</a:t>
-            </a:r>
-            <a:endParaRPr lang="vi-VN" sz="4267" b="1" dirty="0">
+                <a:ea typeface="Microsoft JhengHei" panose="020B0604030504040204" pitchFamily="34" charset="-120"/>
+              </a:rPr>
+              <a:t>( 3 / 6 )</a:t>
+            </a:r>
+            <a:endParaRPr lang="vi-VN" sz="3200" b="1" dirty="0">
               <a:solidFill>
                 <a:srgbClr val="000066"/>
               </a:solidFill>
               <a:effectLst/>
+              <a:ea typeface="Microsoft JhengHei" panose="020B0604030504040204" pitchFamily="34" charset="-120"/>
             </a:endParaRPr>
           </a:p>
         </p:txBody>
@@ -3907,164 +4003,161 @@
           </a:lstStyle>
           <a:p>
             <a:pPr marL="0" indent="0" algn="ctr">
-              <a:lnSpc>
-                <a:spcPts val="9000"/>
-              </a:lnSpc>
               <a:buNone/>
               <a:defRPr/>
             </a:pPr>
             <a:r>
-              <a:rPr lang="en-US" altLang="zh-TW" sz="4000" b="1" dirty="0">
-                <a:solidFill>
-                  <a:srgbClr val="660033"/>
-                </a:solidFill>
-                <a:effectLst/>
-                <a:latin typeface="Calibri" panose="020F0502020204030204" pitchFamily="34" charset="0"/>
-                <a:ea typeface="微軟正黑體" pitchFamily="34" charset="-120"/>
-                <a:cs typeface="Calibri" panose="020F0502020204030204" pitchFamily="34" charset="0"/>
+              <a:rPr lang="en-US" altLang="zh-TW" sz="3733" b="1" dirty="0">
+                <a:solidFill>
+                  <a:srgbClr val="660033"/>
+                </a:solidFill>
+                <a:effectLst/>
+                <a:latin typeface="Times New Roman" panose="02020603050405020304" pitchFamily="18" charset="0"/>
+                <a:ea typeface="微軟正黑體" pitchFamily="34" charset="-120"/>
+                <a:cs typeface="Times New Roman" panose="02020603050405020304" pitchFamily="18" charset="0"/>
               </a:rPr>
               <a:t>“Cha </a:t>
             </a:r>
             <a:r>
-              <a:rPr lang="en-US" altLang="zh-TW" sz="4000" b="1" dirty="0" err="1">
-                <a:solidFill>
-                  <a:srgbClr val="660033"/>
-                </a:solidFill>
-                <a:effectLst/>
-                <a:latin typeface="Calibri" panose="020F0502020204030204" pitchFamily="34" charset="0"/>
-                <a:ea typeface="微軟正黑體" pitchFamily="34" charset="-120"/>
-                <a:cs typeface="Calibri" panose="020F0502020204030204" pitchFamily="34" charset="0"/>
+              <a:rPr lang="en-US" altLang="zh-TW" sz="3733" b="1" dirty="0" err="1">
+                <a:solidFill>
+                  <a:srgbClr val="660033"/>
+                </a:solidFill>
+                <a:effectLst/>
+                <a:latin typeface="Times New Roman" panose="02020603050405020304" pitchFamily="18" charset="0"/>
+                <a:ea typeface="微軟正黑體" pitchFamily="34" charset="-120"/>
+                <a:cs typeface="Times New Roman" panose="02020603050405020304" pitchFamily="18" charset="0"/>
               </a:rPr>
               <a:t>ôi</a:t>
             </a:r>
             <a:r>
-              <a:rPr lang="en-US" altLang="zh-TW" sz="4000" b="1" dirty="0">
-                <a:solidFill>
-                  <a:srgbClr val="660033"/>
-                </a:solidFill>
-                <a:effectLst/>
-                <a:latin typeface="Calibri" panose="020F0502020204030204" pitchFamily="34" charset="0"/>
-                <a:ea typeface="微軟正黑體" pitchFamily="34" charset="-120"/>
-                <a:cs typeface="Calibri" panose="020F0502020204030204" pitchFamily="34" charset="0"/>
+              <a:rPr lang="en-US" altLang="zh-TW" sz="3733" b="1" dirty="0">
+                <a:solidFill>
+                  <a:srgbClr val="660033"/>
+                </a:solidFill>
+                <a:effectLst/>
+                <a:latin typeface="Times New Roman" panose="02020603050405020304" pitchFamily="18" charset="0"/>
+                <a:ea typeface="微軟正黑體" pitchFamily="34" charset="-120"/>
+                <a:cs typeface="Times New Roman" panose="02020603050405020304" pitchFamily="18" charset="0"/>
               </a:rPr>
               <a:t>, nay </a:t>
             </a:r>
             <a:r>
-              <a:rPr lang="en-US" altLang="zh-TW" sz="4000" b="1" dirty="0" err="1">
-                <a:solidFill>
-                  <a:srgbClr val="660033"/>
-                </a:solidFill>
-                <a:effectLst/>
-                <a:latin typeface="Calibri" panose="020F0502020204030204" pitchFamily="34" charset="0"/>
-                <a:ea typeface="微軟正黑體" pitchFamily="34" charset="-120"/>
-                <a:cs typeface="Calibri" panose="020F0502020204030204" pitchFamily="34" charset="0"/>
+              <a:rPr lang="en-US" altLang="zh-TW" sz="3733" b="1" dirty="0" err="1">
+                <a:solidFill>
+                  <a:srgbClr val="660033"/>
+                </a:solidFill>
+                <a:effectLst/>
+                <a:latin typeface="Times New Roman" panose="02020603050405020304" pitchFamily="18" charset="0"/>
+                <a:ea typeface="微軟正黑體" pitchFamily="34" charset="-120"/>
+                <a:cs typeface="Times New Roman" panose="02020603050405020304" pitchFamily="18" charset="0"/>
               </a:rPr>
               <a:t>đã</a:t>
             </a:r>
             <a:r>
-              <a:rPr lang="en-US" altLang="zh-TW" sz="4000" b="1" dirty="0">
-                <a:solidFill>
-                  <a:srgbClr val="660033"/>
-                </a:solidFill>
-                <a:effectLst/>
-                <a:latin typeface="Calibri" panose="020F0502020204030204" pitchFamily="34" charset="0"/>
-                <a:ea typeface="微軟正黑體" pitchFamily="34" charset="-120"/>
-                <a:cs typeface="Calibri" panose="020F0502020204030204" pitchFamily="34" charset="0"/>
+              <a:rPr lang="en-US" altLang="zh-TW" sz="3733" b="1" dirty="0">
+                <a:solidFill>
+                  <a:srgbClr val="660033"/>
+                </a:solidFill>
+                <a:effectLst/>
+                <a:latin typeface="Times New Roman" panose="02020603050405020304" pitchFamily="18" charset="0"/>
+                <a:ea typeface="微軟正黑體" pitchFamily="34" charset="-120"/>
+                <a:cs typeface="Times New Roman" panose="02020603050405020304" pitchFamily="18" charset="0"/>
               </a:rPr>
               <a:t> </a:t>
             </a:r>
             <a:r>
-              <a:rPr lang="en-US" altLang="zh-TW" sz="4000" b="1" dirty="0" err="1">
-                <a:solidFill>
-                  <a:srgbClr val="660033"/>
-                </a:solidFill>
-                <a:effectLst/>
-                <a:latin typeface="Calibri" panose="020F0502020204030204" pitchFamily="34" charset="0"/>
-                <a:ea typeface="微軟正黑體" pitchFamily="34" charset="-120"/>
-                <a:cs typeface="Calibri" panose="020F0502020204030204" pitchFamily="34" charset="0"/>
+              <a:rPr lang="en-US" altLang="zh-TW" sz="3733" b="1" dirty="0" err="1">
+                <a:solidFill>
+                  <a:srgbClr val="660033"/>
+                </a:solidFill>
+                <a:effectLst/>
+                <a:latin typeface="Times New Roman" panose="02020603050405020304" pitchFamily="18" charset="0"/>
+                <a:ea typeface="微軟正黑體" pitchFamily="34" charset="-120"/>
+                <a:cs typeface="Times New Roman" panose="02020603050405020304" pitchFamily="18" charset="0"/>
               </a:rPr>
               <a:t>xong</a:t>
             </a:r>
             <a:r>
-              <a:rPr lang="en-US" altLang="zh-TW" sz="4000" b="1" dirty="0">
-                <a:solidFill>
-                  <a:srgbClr val="660033"/>
-                </a:solidFill>
-                <a:effectLst/>
-                <a:latin typeface="Calibri" panose="020F0502020204030204" pitchFamily="34" charset="0"/>
-                <a:ea typeface="微軟正黑體" pitchFamily="34" charset="-120"/>
-                <a:cs typeface="Calibri" panose="020F0502020204030204" pitchFamily="34" charset="0"/>
+              <a:rPr lang="en-US" altLang="zh-TW" sz="3733" b="1" dirty="0">
+                <a:solidFill>
+                  <a:srgbClr val="660033"/>
+                </a:solidFill>
+                <a:effectLst/>
+                <a:latin typeface="Times New Roman" panose="02020603050405020304" pitchFamily="18" charset="0"/>
+                <a:ea typeface="微軟正黑體" pitchFamily="34" charset="-120"/>
+                <a:cs typeface="Times New Roman" panose="02020603050405020304" pitchFamily="18" charset="0"/>
               </a:rPr>
               <a:t> </a:t>
             </a:r>
             <a:r>
-              <a:rPr lang="en-US" altLang="zh-TW" sz="4000" b="1" dirty="0" err="1">
-                <a:solidFill>
-                  <a:srgbClr val="660033"/>
-                </a:solidFill>
-                <a:effectLst/>
-                <a:latin typeface="Calibri" panose="020F0502020204030204" pitchFamily="34" charset="0"/>
-                <a:ea typeface="微軟正黑體" pitchFamily="34" charset="-120"/>
-                <a:cs typeface="Calibri" panose="020F0502020204030204" pitchFamily="34" charset="0"/>
+              <a:rPr lang="en-US" altLang="zh-TW" sz="3733" b="1" dirty="0" err="1">
+                <a:solidFill>
+                  <a:srgbClr val="660033"/>
+                </a:solidFill>
+                <a:effectLst/>
+                <a:latin typeface="Times New Roman" panose="02020603050405020304" pitchFamily="18" charset="0"/>
+                <a:ea typeface="微軟正黑體" pitchFamily="34" charset="-120"/>
+                <a:cs typeface="Times New Roman" panose="02020603050405020304" pitchFamily="18" charset="0"/>
               </a:rPr>
               <a:t>việc</a:t>
             </a:r>
             <a:r>
-              <a:rPr lang="en-US" altLang="zh-TW" sz="4000" b="1" dirty="0">
-                <a:solidFill>
-                  <a:srgbClr val="660033"/>
-                </a:solidFill>
-                <a:effectLst/>
-                <a:latin typeface="Calibri" panose="020F0502020204030204" pitchFamily="34" charset="0"/>
-                <a:ea typeface="微軟正黑體" pitchFamily="34" charset="-120"/>
-                <a:cs typeface="Calibri" panose="020F0502020204030204" pitchFamily="34" charset="0"/>
+              <a:rPr lang="en-US" altLang="zh-TW" sz="3733" b="1" dirty="0">
+                <a:solidFill>
+                  <a:srgbClr val="660033"/>
+                </a:solidFill>
+                <a:effectLst/>
+                <a:latin typeface="Times New Roman" panose="02020603050405020304" pitchFamily="18" charset="0"/>
+                <a:ea typeface="微軟正黑體" pitchFamily="34" charset="-120"/>
+                <a:cs typeface="Times New Roman" panose="02020603050405020304" pitchFamily="18" charset="0"/>
               </a:rPr>
               <a:t> </a:t>
             </a:r>
             <a:r>
-              <a:rPr lang="en-US" altLang="zh-TW" sz="4000" b="1" dirty="0" err="1">
-                <a:solidFill>
-                  <a:srgbClr val="660033"/>
-                </a:solidFill>
-                <a:effectLst/>
-                <a:latin typeface="Calibri" panose="020F0502020204030204" pitchFamily="34" charset="0"/>
-                <a:ea typeface="微軟正黑體" pitchFamily="34" charset="-120"/>
-                <a:cs typeface="Calibri" panose="020F0502020204030204" pitchFamily="34" charset="0"/>
+              <a:rPr lang="en-US" altLang="zh-TW" sz="3733" b="1" dirty="0" err="1">
+                <a:solidFill>
+                  <a:srgbClr val="660033"/>
+                </a:solidFill>
+                <a:effectLst/>
+                <a:latin typeface="Times New Roman" panose="02020603050405020304" pitchFamily="18" charset="0"/>
+                <a:ea typeface="微軟正黑體" pitchFamily="34" charset="-120"/>
+                <a:cs typeface="Times New Roman" panose="02020603050405020304" pitchFamily="18" charset="0"/>
               </a:rPr>
               <a:t>của</a:t>
             </a:r>
             <a:r>
-              <a:rPr lang="en-US" altLang="zh-TW" sz="4000" b="1" dirty="0">
-                <a:solidFill>
-                  <a:srgbClr val="660033"/>
-                </a:solidFill>
-                <a:effectLst/>
-                <a:latin typeface="Calibri" panose="020F0502020204030204" pitchFamily="34" charset="0"/>
-                <a:ea typeface="微軟正黑體" pitchFamily="34" charset="-120"/>
-                <a:cs typeface="Calibri" panose="020F0502020204030204" pitchFamily="34" charset="0"/>
+              <a:rPr lang="en-US" altLang="zh-TW" sz="3733" b="1" dirty="0">
+                <a:solidFill>
+                  <a:srgbClr val="660033"/>
+                </a:solidFill>
+                <a:effectLst/>
+                <a:latin typeface="Times New Roman" panose="02020603050405020304" pitchFamily="18" charset="0"/>
+                <a:ea typeface="微軟正黑體" pitchFamily="34" charset="-120"/>
+                <a:cs typeface="Times New Roman" panose="02020603050405020304" pitchFamily="18" charset="0"/>
               </a:rPr>
               <a:t> </a:t>
             </a:r>
             <a:r>
-              <a:rPr lang="en-US" altLang="zh-TW" sz="4000" b="1" dirty="0" err="1">
-                <a:solidFill>
-                  <a:srgbClr val="660033"/>
-                </a:solidFill>
-                <a:effectLst/>
-                <a:latin typeface="Calibri" panose="020F0502020204030204" pitchFamily="34" charset="0"/>
-                <a:ea typeface="微軟正黑體" pitchFamily="34" charset="-120"/>
-                <a:cs typeface="Calibri" panose="020F0502020204030204" pitchFamily="34" charset="0"/>
+              <a:rPr lang="en-US" altLang="zh-TW" sz="3733" b="1" dirty="0" err="1">
+                <a:solidFill>
+                  <a:srgbClr val="660033"/>
+                </a:solidFill>
+                <a:effectLst/>
+                <a:latin typeface="Times New Roman" panose="02020603050405020304" pitchFamily="18" charset="0"/>
+                <a:ea typeface="微軟正黑體" pitchFamily="34" charset="-120"/>
+                <a:cs typeface="Times New Roman" panose="02020603050405020304" pitchFamily="18" charset="0"/>
               </a:rPr>
               <a:t>tôi</a:t>
             </a:r>
-            <a:endParaRPr lang="en-US" sz="4000" b="1" dirty="0">
+            <a:endParaRPr lang="en-US" sz="3733" b="1" dirty="0">
               <a:solidFill>
                 <a:srgbClr val="660033"/>
               </a:solidFill>
               <a:effectLst/>
-              <a:latin typeface="Calibri" panose="020F0502020204030204" pitchFamily="34" charset="0"/>
+              <a:latin typeface="Times New Roman" panose="02020603050405020304" pitchFamily="18" charset="0"/>
               <a:ea typeface="微軟正黑體" pitchFamily="34" charset="-120"/>
-              <a:cs typeface="Calibri" panose="020F0502020204030204" pitchFamily="34" charset="0"/>
+              <a:cs typeface="Times New Roman" panose="02020603050405020304" pitchFamily="18" charset="0"/>
             </a:endParaRPr>
           </a:p>
         </p:txBody>
@@ -4078,7 +4171,7 @@
         <p:spPr>
           <a:xfrm>
             <a:off x="0" y="5253203"/>
-            <a:ext cx="12192000" cy="748988"/>
+            <a:ext cx="12192000" cy="584775"/>
           </a:xfrm>
           <a:prstGeom prst="rect">
             <a:avLst/>
@@ -4093,37 +4186,21 @@
           <a:p>
             <a:pPr algn="ctr"/>
             <a:r>
-              <a:rPr lang="en-US" sz="4267" b="1" dirty="0">
+              <a:rPr lang="en-US" sz="3200" b="1" dirty="0">
                 <a:solidFill>
                   <a:srgbClr val="000066"/>
                 </a:solidFill>
                 <a:effectLst/>
-              </a:rPr>
-              <a:t>( </a:t>
-            </a:r>
-            <a:r>
-              <a:rPr lang="en-US" sz="4267" b="1" dirty="0" smtClean="0">
-                <a:solidFill>
-                  <a:srgbClr val="000066"/>
-                </a:solidFill>
-                <a:effectLst/>
-              </a:rPr>
-              <a:t>3 / 6 </a:t>
-            </a:r>
-            <a:r>
-              <a:rPr lang="en-US" sz="4267" b="1" dirty="0">
-                <a:solidFill>
-                  <a:srgbClr val="000066"/>
-                </a:solidFill>
-                <a:effectLst/>
-              </a:rPr>
-              <a:t>)</a:t>
-            </a:r>
-            <a:endParaRPr lang="vi-VN" sz="4267" b="1" dirty="0">
+                <a:ea typeface="Microsoft JhengHei" panose="020B0604030504040204" pitchFamily="34" charset="-120"/>
+              </a:rPr>
+              <a:t>( 3 / 6 )</a:t>
+            </a:r>
+            <a:endParaRPr lang="vi-VN" sz="3200" b="1" dirty="0">
               <a:solidFill>
                 <a:srgbClr val="000066"/>
               </a:solidFill>
               <a:effectLst/>
+              <a:ea typeface="Microsoft JhengHei" panose="020B0604030504040204" pitchFamily="34" charset="-120"/>
             </a:endParaRPr>
           </a:p>
         </p:txBody>
@@ -4356,188 +4433,185 @@
           </a:lstStyle>
           <a:p>
             <a:pPr marL="0" indent="0" algn="ctr">
-              <a:lnSpc>
-                <a:spcPts val="9000"/>
-              </a:lnSpc>
               <a:buNone/>
               <a:defRPr/>
             </a:pPr>
             <a:r>
-              <a:rPr lang="en-US" altLang="zh-TW" sz="4000" b="1" dirty="0" err="1">
-                <a:solidFill>
-                  <a:srgbClr val="660033"/>
-                </a:solidFill>
-                <a:effectLst/>
-                <a:latin typeface="Calibri" panose="020F0502020204030204" pitchFamily="34" charset="0"/>
-                <a:ea typeface="微軟正黑體" pitchFamily="34" charset="-120"/>
-                <a:cs typeface="Calibri" panose="020F0502020204030204" pitchFamily="34" charset="0"/>
+              <a:rPr lang="en-US" altLang="zh-TW" sz="3733" b="1" dirty="0" err="1">
+                <a:solidFill>
+                  <a:srgbClr val="660033"/>
+                </a:solidFill>
+                <a:effectLst/>
+                <a:latin typeface="Times New Roman" panose="02020603050405020304" pitchFamily="18" charset="0"/>
+                <a:ea typeface="微軟正黑體" pitchFamily="34" charset="-120"/>
+                <a:cs typeface="Times New Roman" panose="02020603050405020304" pitchFamily="18" charset="0"/>
               </a:rPr>
               <a:t>kính</a:t>
             </a:r>
             <a:r>
-              <a:rPr lang="en-US" altLang="zh-TW" sz="4000" b="1" dirty="0">
-                <a:solidFill>
-                  <a:srgbClr val="660033"/>
-                </a:solidFill>
-                <a:effectLst/>
-                <a:latin typeface="Calibri" panose="020F0502020204030204" pitchFamily="34" charset="0"/>
-                <a:ea typeface="微軟正黑體" pitchFamily="34" charset="-120"/>
-                <a:cs typeface="Calibri" panose="020F0502020204030204" pitchFamily="34" charset="0"/>
+              <a:rPr lang="en-US" altLang="zh-TW" sz="3733" b="1" dirty="0">
+                <a:solidFill>
+                  <a:srgbClr val="660033"/>
+                </a:solidFill>
+                <a:effectLst/>
+                <a:latin typeface="Times New Roman" panose="02020603050405020304" pitchFamily="18" charset="0"/>
+                <a:ea typeface="微軟正黑體" pitchFamily="34" charset="-120"/>
+                <a:cs typeface="Times New Roman" panose="02020603050405020304" pitchFamily="18" charset="0"/>
               </a:rPr>
               <a:t> </a:t>
             </a:r>
             <a:r>
-              <a:rPr lang="en-US" altLang="zh-TW" sz="4000" b="1" dirty="0" err="1">
-                <a:solidFill>
-                  <a:srgbClr val="660033"/>
-                </a:solidFill>
-                <a:effectLst/>
-                <a:latin typeface="Calibri" panose="020F0502020204030204" pitchFamily="34" charset="0"/>
-                <a:ea typeface="微軟正黑體" pitchFamily="34" charset="-120"/>
-                <a:cs typeface="Calibri" panose="020F0502020204030204" pitchFamily="34" charset="0"/>
+              <a:rPr lang="en-US" altLang="zh-TW" sz="3733" b="1" dirty="0" err="1">
+                <a:solidFill>
+                  <a:srgbClr val="660033"/>
+                </a:solidFill>
+                <a:effectLst/>
+                <a:latin typeface="Times New Roman" panose="02020603050405020304" pitchFamily="18" charset="0"/>
+                <a:ea typeface="微軟正黑體" pitchFamily="34" charset="-120"/>
+                <a:cs typeface="Times New Roman" panose="02020603050405020304" pitchFamily="18" charset="0"/>
               </a:rPr>
               <a:t>giao</a:t>
             </a:r>
             <a:r>
-              <a:rPr lang="en-US" altLang="zh-TW" sz="4000" b="1" dirty="0">
-                <a:solidFill>
-                  <a:srgbClr val="660033"/>
-                </a:solidFill>
-                <a:effectLst/>
-                <a:latin typeface="Calibri" panose="020F0502020204030204" pitchFamily="34" charset="0"/>
-                <a:ea typeface="微軟正黑體" pitchFamily="34" charset="-120"/>
-                <a:cs typeface="Calibri" panose="020F0502020204030204" pitchFamily="34" charset="0"/>
+              <a:rPr lang="en-US" altLang="zh-TW" sz="3733" b="1" dirty="0">
+                <a:solidFill>
+                  <a:srgbClr val="660033"/>
+                </a:solidFill>
+                <a:effectLst/>
+                <a:latin typeface="Times New Roman" panose="02020603050405020304" pitchFamily="18" charset="0"/>
+                <a:ea typeface="微軟正黑體" pitchFamily="34" charset="-120"/>
+                <a:cs typeface="Times New Roman" panose="02020603050405020304" pitchFamily="18" charset="0"/>
               </a:rPr>
               <a:t> </a:t>
             </a:r>
             <a:r>
-              <a:rPr lang="en-US" altLang="zh-TW" sz="4000" b="1" dirty="0" err="1">
-                <a:solidFill>
-                  <a:srgbClr val="660033"/>
-                </a:solidFill>
-                <a:effectLst/>
-                <a:latin typeface="Calibri" panose="020F0502020204030204" pitchFamily="34" charset="0"/>
-                <a:ea typeface="微軟正黑體" pitchFamily="34" charset="-120"/>
-                <a:cs typeface="Calibri" panose="020F0502020204030204" pitchFamily="34" charset="0"/>
+              <a:rPr lang="en-US" altLang="zh-TW" sz="3733" b="1" dirty="0" err="1">
+                <a:solidFill>
+                  <a:srgbClr val="660033"/>
+                </a:solidFill>
+                <a:effectLst/>
+                <a:latin typeface="Times New Roman" panose="02020603050405020304" pitchFamily="18" charset="0"/>
+                <a:ea typeface="微軟正黑體" pitchFamily="34" charset="-120"/>
+                <a:cs typeface="Times New Roman" panose="02020603050405020304" pitchFamily="18" charset="0"/>
               </a:rPr>
               <a:t>linh</a:t>
             </a:r>
             <a:r>
-              <a:rPr lang="en-US" altLang="zh-TW" sz="4000" b="1" dirty="0">
-                <a:solidFill>
-                  <a:srgbClr val="660033"/>
-                </a:solidFill>
-                <a:effectLst/>
-                <a:latin typeface="Calibri" panose="020F0502020204030204" pitchFamily="34" charset="0"/>
-                <a:ea typeface="微軟正黑體" pitchFamily="34" charset="-120"/>
-                <a:cs typeface="Calibri" panose="020F0502020204030204" pitchFamily="34" charset="0"/>
+              <a:rPr lang="en-US" altLang="zh-TW" sz="3733" b="1" dirty="0">
+                <a:solidFill>
+                  <a:srgbClr val="660033"/>
+                </a:solidFill>
+                <a:effectLst/>
+                <a:latin typeface="Times New Roman" panose="02020603050405020304" pitchFamily="18" charset="0"/>
+                <a:ea typeface="微軟正黑體" pitchFamily="34" charset="-120"/>
+                <a:cs typeface="Times New Roman" panose="02020603050405020304" pitchFamily="18" charset="0"/>
               </a:rPr>
               <a:t> </a:t>
             </a:r>
             <a:r>
-              <a:rPr lang="en-US" altLang="zh-TW" sz="4000" b="1" dirty="0" err="1">
-                <a:solidFill>
-                  <a:srgbClr val="660033"/>
-                </a:solidFill>
-                <a:effectLst/>
-                <a:latin typeface="Calibri" panose="020F0502020204030204" pitchFamily="34" charset="0"/>
-                <a:ea typeface="微軟正黑體" pitchFamily="34" charset="-120"/>
-                <a:cs typeface="Calibri" panose="020F0502020204030204" pitchFamily="34" charset="0"/>
+              <a:rPr lang="en-US" altLang="zh-TW" sz="3733" b="1" dirty="0" err="1">
+                <a:solidFill>
+                  <a:srgbClr val="660033"/>
+                </a:solidFill>
+                <a:effectLst/>
+                <a:latin typeface="Times New Roman" panose="02020603050405020304" pitchFamily="18" charset="0"/>
+                <a:ea typeface="微軟正黑體" pitchFamily="34" charset="-120"/>
+                <a:cs typeface="Times New Roman" panose="02020603050405020304" pitchFamily="18" charset="0"/>
               </a:rPr>
               <a:t>hồn</a:t>
             </a:r>
             <a:r>
-              <a:rPr lang="en-US" altLang="zh-TW" sz="4000" b="1" dirty="0">
-                <a:solidFill>
-                  <a:srgbClr val="660033"/>
-                </a:solidFill>
-                <a:effectLst/>
-                <a:latin typeface="Calibri" panose="020F0502020204030204" pitchFamily="34" charset="0"/>
-                <a:ea typeface="微軟正黑體" pitchFamily="34" charset="-120"/>
-                <a:cs typeface="Calibri" panose="020F0502020204030204" pitchFamily="34" charset="0"/>
+              <a:rPr lang="en-US" altLang="zh-TW" sz="3733" b="1" dirty="0">
+                <a:solidFill>
+                  <a:srgbClr val="660033"/>
+                </a:solidFill>
+                <a:effectLst/>
+                <a:latin typeface="Times New Roman" panose="02020603050405020304" pitchFamily="18" charset="0"/>
+                <a:ea typeface="微軟正黑體" pitchFamily="34" charset="-120"/>
+                <a:cs typeface="Times New Roman" panose="02020603050405020304" pitchFamily="18" charset="0"/>
               </a:rPr>
               <a:t> </a:t>
             </a:r>
             <a:r>
-              <a:rPr lang="en-US" altLang="zh-TW" sz="4000" b="1" dirty="0" err="1">
-                <a:solidFill>
-                  <a:srgbClr val="660033"/>
-                </a:solidFill>
-                <a:effectLst/>
-                <a:latin typeface="Calibri" panose="020F0502020204030204" pitchFamily="34" charset="0"/>
-                <a:ea typeface="微軟正黑體" pitchFamily="34" charset="-120"/>
-                <a:cs typeface="Calibri" panose="020F0502020204030204" pitchFamily="34" charset="0"/>
+              <a:rPr lang="en-US" altLang="zh-TW" sz="3733" b="1" dirty="0" err="1">
+                <a:solidFill>
+                  <a:srgbClr val="660033"/>
+                </a:solidFill>
+                <a:effectLst/>
+                <a:latin typeface="Times New Roman" panose="02020603050405020304" pitchFamily="18" charset="0"/>
+                <a:ea typeface="微軟正黑體" pitchFamily="34" charset="-120"/>
+                <a:cs typeface="Times New Roman" panose="02020603050405020304" pitchFamily="18" charset="0"/>
               </a:rPr>
               <a:t>trong</a:t>
             </a:r>
             <a:r>
-              <a:rPr lang="en-US" altLang="zh-TW" sz="4000" b="1" dirty="0">
-                <a:solidFill>
-                  <a:srgbClr val="660033"/>
-                </a:solidFill>
-                <a:effectLst/>
-                <a:latin typeface="Calibri" panose="020F0502020204030204" pitchFamily="34" charset="0"/>
-                <a:ea typeface="微軟正黑體" pitchFamily="34" charset="-120"/>
-                <a:cs typeface="Calibri" panose="020F0502020204030204" pitchFamily="34" charset="0"/>
+              <a:rPr lang="en-US" altLang="zh-TW" sz="3733" b="1" dirty="0">
+                <a:solidFill>
+                  <a:srgbClr val="660033"/>
+                </a:solidFill>
+                <a:effectLst/>
+                <a:latin typeface="Times New Roman" panose="02020603050405020304" pitchFamily="18" charset="0"/>
+                <a:ea typeface="微軟正黑體" pitchFamily="34" charset="-120"/>
+                <a:cs typeface="Times New Roman" panose="02020603050405020304" pitchFamily="18" charset="0"/>
               </a:rPr>
               <a:t> </a:t>
             </a:r>
             <a:r>
-              <a:rPr lang="en-US" altLang="zh-TW" sz="4000" b="1" dirty="0" err="1">
-                <a:solidFill>
-                  <a:srgbClr val="660033"/>
-                </a:solidFill>
-                <a:effectLst/>
-                <a:latin typeface="Calibri" panose="020F0502020204030204" pitchFamily="34" charset="0"/>
-                <a:ea typeface="微軟正黑體" pitchFamily="34" charset="-120"/>
-                <a:cs typeface="Calibri" panose="020F0502020204030204" pitchFamily="34" charset="0"/>
+              <a:rPr lang="en-US" altLang="zh-TW" sz="3733" b="1" dirty="0" err="1">
+                <a:solidFill>
+                  <a:srgbClr val="660033"/>
+                </a:solidFill>
+                <a:effectLst/>
+                <a:latin typeface="Times New Roman" panose="02020603050405020304" pitchFamily="18" charset="0"/>
+                <a:ea typeface="微軟正黑體" pitchFamily="34" charset="-120"/>
+                <a:cs typeface="Times New Roman" panose="02020603050405020304" pitchFamily="18" charset="0"/>
               </a:rPr>
               <a:t>cánh</a:t>
             </a:r>
             <a:r>
-              <a:rPr lang="en-US" altLang="zh-TW" sz="4000" b="1" dirty="0">
-                <a:solidFill>
-                  <a:srgbClr val="660033"/>
-                </a:solidFill>
-                <a:effectLst/>
-                <a:latin typeface="Calibri" panose="020F0502020204030204" pitchFamily="34" charset="0"/>
-                <a:ea typeface="微軟正黑體" pitchFamily="34" charset="-120"/>
-                <a:cs typeface="Calibri" panose="020F0502020204030204" pitchFamily="34" charset="0"/>
+              <a:rPr lang="en-US" altLang="zh-TW" sz="3733" b="1" dirty="0">
+                <a:solidFill>
+                  <a:srgbClr val="660033"/>
+                </a:solidFill>
+                <a:effectLst/>
+                <a:latin typeface="Times New Roman" panose="02020603050405020304" pitchFamily="18" charset="0"/>
+                <a:ea typeface="微軟正黑體" pitchFamily="34" charset="-120"/>
+                <a:cs typeface="Times New Roman" panose="02020603050405020304" pitchFamily="18" charset="0"/>
               </a:rPr>
               <a:t> </a:t>
             </a:r>
             <a:r>
-              <a:rPr lang="en-US" altLang="zh-TW" sz="4000" b="1" dirty="0" err="1">
-                <a:solidFill>
-                  <a:srgbClr val="660033"/>
-                </a:solidFill>
-                <a:effectLst/>
-                <a:latin typeface="Calibri" panose="020F0502020204030204" pitchFamily="34" charset="0"/>
-                <a:ea typeface="微軟正黑體" pitchFamily="34" charset="-120"/>
-                <a:cs typeface="Calibri" panose="020F0502020204030204" pitchFamily="34" charset="0"/>
+              <a:rPr lang="en-US" altLang="zh-TW" sz="3733" b="1" dirty="0" err="1">
+                <a:solidFill>
+                  <a:srgbClr val="660033"/>
+                </a:solidFill>
+                <a:effectLst/>
+                <a:latin typeface="Times New Roman" panose="02020603050405020304" pitchFamily="18" charset="0"/>
+                <a:ea typeface="微軟正黑體" pitchFamily="34" charset="-120"/>
+                <a:cs typeface="Times New Roman" panose="02020603050405020304" pitchFamily="18" charset="0"/>
               </a:rPr>
               <a:t>tay</a:t>
             </a:r>
             <a:r>
-              <a:rPr lang="en-US" altLang="zh-TW" sz="4000" b="1" dirty="0">
-                <a:solidFill>
-                  <a:srgbClr val="660033"/>
-                </a:solidFill>
-                <a:effectLst/>
-                <a:latin typeface="Calibri" panose="020F0502020204030204" pitchFamily="34" charset="0"/>
-                <a:ea typeface="微軟正黑體" pitchFamily="34" charset="-120"/>
-                <a:cs typeface="Calibri" panose="020F0502020204030204" pitchFamily="34" charset="0"/>
+              <a:rPr lang="en-US" altLang="zh-TW" sz="3733" b="1" dirty="0">
+                <a:solidFill>
+                  <a:srgbClr val="660033"/>
+                </a:solidFill>
+                <a:effectLst/>
+                <a:latin typeface="Times New Roman" panose="02020603050405020304" pitchFamily="18" charset="0"/>
+                <a:ea typeface="微軟正黑體" pitchFamily="34" charset="-120"/>
+                <a:cs typeface="Times New Roman" panose="02020603050405020304" pitchFamily="18" charset="0"/>
               </a:rPr>
               <a:t> Cha.”</a:t>
             </a:r>
-            <a:endParaRPr lang="en-US" sz="4000" b="1" dirty="0">
+            <a:endParaRPr lang="en-US" sz="3733" b="1" dirty="0">
               <a:solidFill>
                 <a:srgbClr val="660033"/>
               </a:solidFill>
               <a:effectLst/>
-              <a:latin typeface="Calibri" panose="020F0502020204030204" pitchFamily="34" charset="0"/>
+              <a:latin typeface="Times New Roman" panose="02020603050405020304" pitchFamily="18" charset="0"/>
               <a:ea typeface="微軟正黑體" pitchFamily="34" charset="-120"/>
-              <a:cs typeface="Calibri" panose="020F0502020204030204" pitchFamily="34" charset="0"/>
+              <a:cs typeface="Times New Roman" panose="02020603050405020304" pitchFamily="18" charset="0"/>
             </a:endParaRPr>
           </a:p>
         </p:txBody>
@@ -4551,7 +4625,7 @@
         <p:spPr>
           <a:xfrm>
             <a:off x="0" y="5253203"/>
-            <a:ext cx="12192000" cy="748988"/>
+            <a:ext cx="12192000" cy="584775"/>
           </a:xfrm>
           <a:prstGeom prst="rect">
             <a:avLst/>
@@ -4566,37 +4640,21 @@
           <a:p>
             <a:pPr algn="ctr"/>
             <a:r>
-              <a:rPr lang="en-US" sz="4267" b="1" dirty="0">
+              <a:rPr lang="en-US" sz="3200" b="1" dirty="0">
                 <a:solidFill>
                   <a:srgbClr val="000066"/>
                 </a:solidFill>
                 <a:effectLst/>
-              </a:rPr>
-              <a:t>( </a:t>
-            </a:r>
-            <a:r>
-              <a:rPr lang="en-US" sz="4267" b="1" dirty="0" smtClean="0">
-                <a:solidFill>
-                  <a:srgbClr val="000066"/>
-                </a:solidFill>
-                <a:effectLst/>
-              </a:rPr>
-              <a:t>3 / 6 </a:t>
-            </a:r>
-            <a:r>
-              <a:rPr lang="en-US" sz="4267" b="1" dirty="0">
-                <a:solidFill>
-                  <a:srgbClr val="000066"/>
-                </a:solidFill>
-                <a:effectLst/>
-              </a:rPr>
-              <a:t>)</a:t>
-            </a:r>
-            <a:endParaRPr lang="vi-VN" sz="4267" b="1" dirty="0">
+                <a:ea typeface="Microsoft JhengHei" panose="020B0604030504040204" pitchFamily="34" charset="-120"/>
+              </a:rPr>
+              <a:t>( 3 / 6 )</a:t>
+            </a:r>
+            <a:endParaRPr lang="vi-VN" sz="3200" b="1" dirty="0">
               <a:solidFill>
                 <a:srgbClr val="000066"/>
               </a:solidFill>
               <a:effectLst/>
+              <a:ea typeface="Microsoft JhengHei" panose="020B0604030504040204" pitchFamily="34" charset="-120"/>
             </a:endParaRPr>
           </a:p>
         </p:txBody>
@@ -4829,152 +4887,149 @@
           </a:lstStyle>
           <a:p>
             <a:pPr marL="0" indent="0" algn="ctr">
-              <a:lnSpc>
-                <a:spcPts val="9000"/>
-              </a:lnSpc>
               <a:buNone/>
               <a:defRPr/>
             </a:pPr>
             <a:r>
-              <a:rPr lang="en-US" altLang="zh-TW" sz="4000" b="1" dirty="0" err="1">
-                <a:solidFill>
-                  <a:srgbClr val="660033"/>
-                </a:solidFill>
-                <a:effectLst/>
-                <a:latin typeface="Calibri" panose="020F0502020204030204" pitchFamily="34" charset="0"/>
-                <a:ea typeface="微軟正黑體" pitchFamily="34" charset="-120"/>
-                <a:cs typeface="Calibri" panose="020F0502020204030204" pitchFamily="34" charset="0"/>
+              <a:rPr lang="en-US" altLang="zh-TW" sz="3733" b="1" dirty="0" err="1">
+                <a:solidFill>
+                  <a:srgbClr val="660033"/>
+                </a:solidFill>
+                <a:effectLst/>
+                <a:latin typeface="Times New Roman" panose="02020603050405020304" pitchFamily="18" charset="0"/>
+                <a:ea typeface="微軟正黑體" pitchFamily="34" charset="-120"/>
+                <a:cs typeface="Times New Roman" panose="02020603050405020304" pitchFamily="18" charset="0"/>
               </a:rPr>
               <a:t>Nói</a:t>
             </a:r>
             <a:r>
-              <a:rPr lang="en-US" altLang="zh-TW" sz="4000" b="1" dirty="0">
-                <a:solidFill>
-                  <a:srgbClr val="660033"/>
-                </a:solidFill>
-                <a:effectLst/>
-                <a:latin typeface="Calibri" panose="020F0502020204030204" pitchFamily="34" charset="0"/>
-                <a:ea typeface="微軟正黑體" pitchFamily="34" charset="-120"/>
-                <a:cs typeface="Calibri" panose="020F0502020204030204" pitchFamily="34" charset="0"/>
+              <a:rPr lang="en-US" altLang="zh-TW" sz="3733" b="1" dirty="0">
+                <a:solidFill>
+                  <a:srgbClr val="660033"/>
+                </a:solidFill>
+                <a:effectLst/>
+                <a:latin typeface="Times New Roman" panose="02020603050405020304" pitchFamily="18" charset="0"/>
+                <a:ea typeface="微軟正黑體" pitchFamily="34" charset="-120"/>
+                <a:cs typeface="Times New Roman" panose="02020603050405020304" pitchFamily="18" charset="0"/>
               </a:rPr>
               <a:t> </a:t>
             </a:r>
             <a:r>
-              <a:rPr lang="en-US" altLang="zh-TW" sz="4000" b="1" dirty="0" err="1">
-                <a:solidFill>
-                  <a:srgbClr val="660033"/>
-                </a:solidFill>
-                <a:effectLst/>
-                <a:latin typeface="Calibri" panose="020F0502020204030204" pitchFamily="34" charset="0"/>
-                <a:ea typeface="微軟正黑體" pitchFamily="34" charset="-120"/>
-                <a:cs typeface="Calibri" panose="020F0502020204030204" pitchFamily="34" charset="0"/>
+              <a:rPr lang="en-US" altLang="zh-TW" sz="3733" b="1" dirty="0" err="1">
+                <a:solidFill>
+                  <a:srgbClr val="660033"/>
+                </a:solidFill>
+                <a:effectLst/>
+                <a:latin typeface="Times New Roman" panose="02020603050405020304" pitchFamily="18" charset="0"/>
+                <a:ea typeface="微軟正黑體" pitchFamily="34" charset="-120"/>
+                <a:cs typeface="Times New Roman" panose="02020603050405020304" pitchFamily="18" charset="0"/>
               </a:rPr>
               <a:t>rồi</a:t>
             </a:r>
             <a:r>
-              <a:rPr lang="en-US" altLang="zh-TW" sz="4000" b="1" dirty="0">
-                <a:solidFill>
-                  <a:srgbClr val="660033"/>
-                </a:solidFill>
-                <a:effectLst/>
-                <a:latin typeface="Calibri" panose="020F0502020204030204" pitchFamily="34" charset="0"/>
-                <a:ea typeface="微軟正黑體" pitchFamily="34" charset="-120"/>
-                <a:cs typeface="Calibri" panose="020F0502020204030204" pitchFamily="34" charset="0"/>
+              <a:rPr lang="en-US" altLang="zh-TW" sz="3733" b="1" dirty="0">
+                <a:solidFill>
+                  <a:srgbClr val="660033"/>
+                </a:solidFill>
+                <a:effectLst/>
+                <a:latin typeface="Times New Roman" panose="02020603050405020304" pitchFamily="18" charset="0"/>
+                <a:ea typeface="微軟正黑體" pitchFamily="34" charset="-120"/>
+                <a:cs typeface="Times New Roman" panose="02020603050405020304" pitchFamily="18" charset="0"/>
               </a:rPr>
               <a:t>, </a:t>
             </a:r>
             <a:r>
-              <a:rPr lang="en-US" altLang="zh-TW" sz="4000" b="1" dirty="0" err="1">
-                <a:solidFill>
-                  <a:srgbClr val="660033"/>
-                </a:solidFill>
-                <a:effectLst/>
-                <a:latin typeface="Calibri" panose="020F0502020204030204" pitchFamily="34" charset="0"/>
-                <a:ea typeface="微軟正黑體" pitchFamily="34" charset="-120"/>
-                <a:cs typeface="Calibri" panose="020F0502020204030204" pitchFamily="34" charset="0"/>
+              <a:rPr lang="en-US" altLang="zh-TW" sz="3733" b="1" dirty="0" err="1">
+                <a:solidFill>
+                  <a:srgbClr val="660033"/>
+                </a:solidFill>
+                <a:effectLst/>
+                <a:latin typeface="Times New Roman" panose="02020603050405020304" pitchFamily="18" charset="0"/>
+                <a:ea typeface="微軟正黑體" pitchFamily="34" charset="-120"/>
+                <a:cs typeface="Times New Roman" panose="02020603050405020304" pitchFamily="18" charset="0"/>
               </a:rPr>
               <a:t>Chúa</a:t>
             </a:r>
             <a:r>
-              <a:rPr lang="en-US" altLang="zh-TW" sz="4000" b="1" dirty="0">
-                <a:solidFill>
-                  <a:srgbClr val="660033"/>
-                </a:solidFill>
-                <a:effectLst/>
-                <a:latin typeface="Calibri" panose="020F0502020204030204" pitchFamily="34" charset="0"/>
-                <a:ea typeface="微軟正黑體" pitchFamily="34" charset="-120"/>
-                <a:cs typeface="Calibri" panose="020F0502020204030204" pitchFamily="34" charset="0"/>
+              <a:rPr lang="en-US" altLang="zh-TW" sz="3733" b="1" dirty="0">
+                <a:solidFill>
+                  <a:srgbClr val="660033"/>
+                </a:solidFill>
+                <a:effectLst/>
+                <a:latin typeface="Times New Roman" panose="02020603050405020304" pitchFamily="18" charset="0"/>
+                <a:ea typeface="微軟正黑體" pitchFamily="34" charset="-120"/>
+                <a:cs typeface="Times New Roman" panose="02020603050405020304" pitchFamily="18" charset="0"/>
               </a:rPr>
               <a:t> </a:t>
             </a:r>
             <a:r>
-              <a:rPr lang="en-US" altLang="zh-TW" sz="4000" b="1" dirty="0" err="1">
-                <a:solidFill>
-                  <a:srgbClr val="660033"/>
-                </a:solidFill>
-                <a:effectLst/>
-                <a:latin typeface="Calibri" panose="020F0502020204030204" pitchFamily="34" charset="0"/>
-                <a:ea typeface="微軟正黑體" pitchFamily="34" charset="-120"/>
-                <a:cs typeface="Calibri" panose="020F0502020204030204" pitchFamily="34" charset="0"/>
+              <a:rPr lang="en-US" altLang="zh-TW" sz="3733" b="1" dirty="0" err="1">
+                <a:solidFill>
+                  <a:srgbClr val="660033"/>
+                </a:solidFill>
+                <a:effectLst/>
+                <a:latin typeface="Times New Roman" panose="02020603050405020304" pitchFamily="18" charset="0"/>
+                <a:ea typeface="微軟正黑體" pitchFamily="34" charset="-120"/>
+                <a:cs typeface="Times New Roman" panose="02020603050405020304" pitchFamily="18" charset="0"/>
               </a:rPr>
               <a:t>trút</a:t>
             </a:r>
             <a:r>
-              <a:rPr lang="en-US" altLang="zh-TW" sz="4000" b="1" dirty="0">
-                <a:solidFill>
-                  <a:srgbClr val="660033"/>
-                </a:solidFill>
-                <a:effectLst/>
-                <a:latin typeface="Calibri" panose="020F0502020204030204" pitchFamily="34" charset="0"/>
-                <a:ea typeface="微軟正黑體" pitchFamily="34" charset="-120"/>
-                <a:cs typeface="Calibri" panose="020F0502020204030204" pitchFamily="34" charset="0"/>
+              <a:rPr lang="en-US" altLang="zh-TW" sz="3733" b="1" dirty="0">
+                <a:solidFill>
+                  <a:srgbClr val="660033"/>
+                </a:solidFill>
+                <a:effectLst/>
+                <a:latin typeface="Times New Roman" panose="02020603050405020304" pitchFamily="18" charset="0"/>
+                <a:ea typeface="微軟正黑體" pitchFamily="34" charset="-120"/>
+                <a:cs typeface="Times New Roman" panose="02020603050405020304" pitchFamily="18" charset="0"/>
               </a:rPr>
               <a:t> </a:t>
             </a:r>
             <a:r>
-              <a:rPr lang="en-US" altLang="zh-TW" sz="4000" b="1" dirty="0" err="1">
-                <a:solidFill>
-                  <a:srgbClr val="660033"/>
-                </a:solidFill>
-                <a:effectLst/>
-                <a:latin typeface="Calibri" panose="020F0502020204030204" pitchFamily="34" charset="0"/>
-                <a:ea typeface="微軟正黑體" pitchFamily="34" charset="-120"/>
-                <a:cs typeface="Calibri" panose="020F0502020204030204" pitchFamily="34" charset="0"/>
+              <a:rPr lang="en-US" altLang="zh-TW" sz="3733" b="1" dirty="0" err="1">
+                <a:solidFill>
+                  <a:srgbClr val="660033"/>
+                </a:solidFill>
+                <a:effectLst/>
+                <a:latin typeface="Times New Roman" panose="02020603050405020304" pitchFamily="18" charset="0"/>
+                <a:ea typeface="微軟正黑體" pitchFamily="34" charset="-120"/>
+                <a:cs typeface="Times New Roman" panose="02020603050405020304" pitchFamily="18" charset="0"/>
               </a:rPr>
               <a:t>hơi</a:t>
             </a:r>
             <a:r>
-              <a:rPr lang="en-US" altLang="zh-TW" sz="4000" b="1" dirty="0">
-                <a:solidFill>
-                  <a:srgbClr val="660033"/>
-                </a:solidFill>
-                <a:effectLst/>
-                <a:latin typeface="Calibri" panose="020F0502020204030204" pitchFamily="34" charset="0"/>
-                <a:ea typeface="微軟正黑體" pitchFamily="34" charset="-120"/>
-                <a:cs typeface="Calibri" panose="020F0502020204030204" pitchFamily="34" charset="0"/>
+              <a:rPr lang="en-US" altLang="zh-TW" sz="3733" b="1" dirty="0">
+                <a:solidFill>
+                  <a:srgbClr val="660033"/>
+                </a:solidFill>
+                <a:effectLst/>
+                <a:latin typeface="Times New Roman" panose="02020603050405020304" pitchFamily="18" charset="0"/>
+                <a:ea typeface="微軟正黑體" pitchFamily="34" charset="-120"/>
+                <a:cs typeface="Times New Roman" panose="02020603050405020304" pitchFamily="18" charset="0"/>
               </a:rPr>
               <a:t> </a:t>
             </a:r>
             <a:r>
-              <a:rPr lang="en-US" altLang="zh-TW" sz="4000" b="1" dirty="0" err="1">
-                <a:solidFill>
-                  <a:srgbClr val="660033"/>
-                </a:solidFill>
-                <a:effectLst/>
-                <a:latin typeface="Calibri" panose="020F0502020204030204" pitchFamily="34" charset="0"/>
-                <a:ea typeface="微軟正黑體" pitchFamily="34" charset="-120"/>
-                <a:cs typeface="Calibri" panose="020F0502020204030204" pitchFamily="34" charset="0"/>
+              <a:rPr lang="en-US" altLang="zh-TW" sz="3733" b="1" dirty="0" err="1">
+                <a:solidFill>
+                  <a:srgbClr val="660033"/>
+                </a:solidFill>
+                <a:effectLst/>
+                <a:latin typeface="Times New Roman" panose="02020603050405020304" pitchFamily="18" charset="0"/>
+                <a:ea typeface="微軟正黑體" pitchFamily="34" charset="-120"/>
+                <a:cs typeface="Times New Roman" panose="02020603050405020304" pitchFamily="18" charset="0"/>
               </a:rPr>
               <a:t>ra</a:t>
             </a:r>
-            <a:endParaRPr lang="en-US" sz="4000" b="1" dirty="0">
+            <a:endParaRPr lang="en-US" sz="3733" b="1" dirty="0">
               <a:solidFill>
                 <a:srgbClr val="660033"/>
               </a:solidFill>
               <a:effectLst/>
-              <a:latin typeface="Calibri" panose="020F0502020204030204" pitchFamily="34" charset="0"/>
+              <a:latin typeface="Times New Roman" panose="02020603050405020304" pitchFamily="18" charset="0"/>
               <a:ea typeface="微軟正黑體" pitchFamily="34" charset="-120"/>
-              <a:cs typeface="Calibri" panose="020F0502020204030204" pitchFamily="34" charset="0"/>
+              <a:cs typeface="Times New Roman" panose="02020603050405020304" pitchFamily="18" charset="0"/>
             </a:endParaRPr>
           </a:p>
         </p:txBody>
@@ -4988,7 +5043,7 @@
         <p:spPr>
           <a:xfrm>
             <a:off x="0" y="5253203"/>
-            <a:ext cx="12192000" cy="748988"/>
+            <a:ext cx="12192000" cy="584775"/>
           </a:xfrm>
           <a:prstGeom prst="rect">
             <a:avLst/>
@@ -5003,37 +5058,21 @@
           <a:p>
             <a:pPr algn="ctr"/>
             <a:r>
-              <a:rPr lang="en-US" sz="4267" b="1" dirty="0">
+              <a:rPr lang="en-US" sz="3200" b="1" dirty="0">
                 <a:solidFill>
                   <a:srgbClr val="000066"/>
                 </a:solidFill>
                 <a:effectLst/>
-              </a:rPr>
-              <a:t>( </a:t>
-            </a:r>
-            <a:r>
-              <a:rPr lang="en-US" sz="4267" b="1" dirty="0" smtClean="0">
-                <a:solidFill>
-                  <a:srgbClr val="000066"/>
-                </a:solidFill>
-                <a:effectLst/>
-              </a:rPr>
-              <a:t>3 / 6 </a:t>
-            </a:r>
-            <a:r>
-              <a:rPr lang="en-US" sz="4267" b="1" dirty="0">
-                <a:solidFill>
-                  <a:srgbClr val="000066"/>
-                </a:solidFill>
-                <a:effectLst/>
-              </a:rPr>
-              <a:t>)</a:t>
-            </a:r>
-            <a:endParaRPr lang="vi-VN" sz="4267" b="1" dirty="0">
+                <a:ea typeface="Microsoft JhengHei" panose="020B0604030504040204" pitchFamily="34" charset="-120"/>
+              </a:rPr>
+              <a:t>( 3 / 6 )</a:t>
+            </a:r>
+            <a:endParaRPr lang="vi-VN" sz="3200" b="1" dirty="0">
               <a:solidFill>
                 <a:srgbClr val="000066"/>
               </a:solidFill>
               <a:effectLst/>
+              <a:ea typeface="Microsoft JhengHei" panose="020B0604030504040204" pitchFamily="34" charset="-120"/>
             </a:endParaRPr>
           </a:p>
         </p:txBody>
@@ -5266,200 +5305,197 @@
           </a:lstStyle>
           <a:p>
             <a:pPr marL="0" indent="0" algn="ctr">
-              <a:lnSpc>
-                <a:spcPts val="9000"/>
-              </a:lnSpc>
               <a:buNone/>
               <a:defRPr/>
             </a:pPr>
             <a:r>
-              <a:rPr lang="en-US" altLang="zh-TW" sz="4000" b="1" dirty="0" err="1">
-                <a:solidFill>
-                  <a:srgbClr val="660033"/>
-                </a:solidFill>
-                <a:effectLst/>
-                <a:latin typeface="Calibri" panose="020F0502020204030204" pitchFamily="34" charset="0"/>
-                <a:ea typeface="微軟正黑體" pitchFamily="34" charset="-120"/>
-                <a:cs typeface="Calibri" panose="020F0502020204030204" pitchFamily="34" charset="0"/>
+              <a:rPr lang="en-US" altLang="zh-TW" sz="3733" b="1" dirty="0" err="1">
+                <a:solidFill>
+                  <a:srgbClr val="660033"/>
+                </a:solidFill>
+                <a:effectLst/>
+                <a:latin typeface="Times New Roman" panose="02020603050405020304" pitchFamily="18" charset="0"/>
+                <a:ea typeface="微軟正黑體" pitchFamily="34" charset="-120"/>
+                <a:cs typeface="Times New Roman" panose="02020603050405020304" pitchFamily="18" charset="0"/>
               </a:rPr>
               <a:t>Từ</a:t>
             </a:r>
             <a:r>
-              <a:rPr lang="en-US" altLang="zh-TW" sz="4000" b="1" dirty="0">
-                <a:solidFill>
-                  <a:srgbClr val="660033"/>
-                </a:solidFill>
-                <a:effectLst/>
-                <a:latin typeface="Calibri" panose="020F0502020204030204" pitchFamily="34" charset="0"/>
-                <a:ea typeface="微軟正黑體" pitchFamily="34" charset="-120"/>
-                <a:cs typeface="Calibri" panose="020F0502020204030204" pitchFamily="34" charset="0"/>
+              <a:rPr lang="en-US" altLang="zh-TW" sz="3733" b="1" dirty="0">
+                <a:solidFill>
+                  <a:srgbClr val="660033"/>
+                </a:solidFill>
+                <a:effectLst/>
+                <a:latin typeface="Times New Roman" panose="02020603050405020304" pitchFamily="18" charset="0"/>
+                <a:ea typeface="微軟正黑體" pitchFamily="34" charset="-120"/>
+                <a:cs typeface="Times New Roman" panose="02020603050405020304" pitchFamily="18" charset="0"/>
               </a:rPr>
               <a:t> </a:t>
             </a:r>
             <a:r>
-              <a:rPr lang="en-US" altLang="zh-TW" sz="4000" b="1" dirty="0" err="1">
-                <a:solidFill>
-                  <a:srgbClr val="660033"/>
-                </a:solidFill>
-                <a:effectLst/>
-                <a:latin typeface="Calibri" panose="020F0502020204030204" pitchFamily="34" charset="0"/>
-                <a:ea typeface="微軟正黑體" pitchFamily="34" charset="-120"/>
-                <a:cs typeface="Calibri" panose="020F0502020204030204" pitchFamily="34" charset="0"/>
+              <a:rPr lang="en-US" altLang="zh-TW" sz="3733" b="1" dirty="0" err="1">
+                <a:solidFill>
+                  <a:srgbClr val="660033"/>
+                </a:solidFill>
+                <a:effectLst/>
+                <a:latin typeface="Times New Roman" panose="02020603050405020304" pitchFamily="18" charset="0"/>
+                <a:ea typeface="微軟正黑體" pitchFamily="34" charset="-120"/>
+                <a:cs typeface="Times New Roman" panose="02020603050405020304" pitchFamily="18" charset="0"/>
               </a:rPr>
               <a:t>nơi</a:t>
             </a:r>
             <a:r>
-              <a:rPr lang="en-US" altLang="zh-TW" sz="4000" b="1" dirty="0">
-                <a:solidFill>
-                  <a:srgbClr val="660033"/>
-                </a:solidFill>
-                <a:effectLst/>
-                <a:latin typeface="Calibri" panose="020F0502020204030204" pitchFamily="34" charset="0"/>
-                <a:ea typeface="微軟正黑體" pitchFamily="34" charset="-120"/>
-                <a:cs typeface="Calibri" panose="020F0502020204030204" pitchFamily="34" charset="0"/>
+              <a:rPr lang="en-US" altLang="zh-TW" sz="3733" b="1" dirty="0">
+                <a:solidFill>
+                  <a:srgbClr val="660033"/>
+                </a:solidFill>
+                <a:effectLst/>
+                <a:latin typeface="Times New Roman" panose="02020603050405020304" pitchFamily="18" charset="0"/>
+                <a:ea typeface="微軟正黑體" pitchFamily="34" charset="-120"/>
+                <a:cs typeface="Times New Roman" panose="02020603050405020304" pitchFamily="18" charset="0"/>
               </a:rPr>
               <a:t> </a:t>
             </a:r>
             <a:r>
-              <a:rPr lang="en-US" altLang="zh-TW" sz="4000" b="1" dirty="0" err="1">
-                <a:solidFill>
-                  <a:srgbClr val="660033"/>
-                </a:solidFill>
-                <a:effectLst/>
-                <a:latin typeface="Calibri" panose="020F0502020204030204" pitchFamily="34" charset="0"/>
-                <a:ea typeface="微軟正黑體" pitchFamily="34" charset="-120"/>
-                <a:cs typeface="Calibri" panose="020F0502020204030204" pitchFamily="34" charset="0"/>
+              <a:rPr lang="en-US" altLang="zh-TW" sz="3733" b="1" dirty="0" err="1">
+                <a:solidFill>
+                  <a:srgbClr val="660033"/>
+                </a:solidFill>
+                <a:effectLst/>
+                <a:latin typeface="Times New Roman" panose="02020603050405020304" pitchFamily="18" charset="0"/>
+                <a:ea typeface="微軟正黑體" pitchFamily="34" charset="-120"/>
+                <a:cs typeface="Times New Roman" panose="02020603050405020304" pitchFamily="18" charset="0"/>
               </a:rPr>
               <a:t>mộ</a:t>
             </a:r>
             <a:r>
-              <a:rPr lang="en-US" altLang="zh-TW" sz="4000" b="1" dirty="0">
-                <a:solidFill>
-                  <a:srgbClr val="660033"/>
-                </a:solidFill>
-                <a:effectLst/>
-                <a:latin typeface="Calibri" panose="020F0502020204030204" pitchFamily="34" charset="0"/>
-                <a:ea typeface="微軟正黑體" pitchFamily="34" charset="-120"/>
-                <a:cs typeface="Calibri" panose="020F0502020204030204" pitchFamily="34" charset="0"/>
+              <a:rPr lang="en-US" altLang="zh-TW" sz="3733" b="1" dirty="0">
+                <a:solidFill>
+                  <a:srgbClr val="660033"/>
+                </a:solidFill>
+                <a:effectLst/>
+                <a:latin typeface="Times New Roman" panose="02020603050405020304" pitchFamily="18" charset="0"/>
+                <a:ea typeface="微軟正黑體" pitchFamily="34" charset="-120"/>
+                <a:cs typeface="Times New Roman" panose="02020603050405020304" pitchFamily="18" charset="0"/>
               </a:rPr>
               <a:t> </a:t>
             </a:r>
             <a:r>
-              <a:rPr lang="en-US" altLang="zh-TW" sz="4000" b="1" dirty="0" err="1">
-                <a:solidFill>
-                  <a:srgbClr val="660033"/>
-                </a:solidFill>
-                <a:effectLst/>
-                <a:latin typeface="Calibri" panose="020F0502020204030204" pitchFamily="34" charset="0"/>
-                <a:ea typeface="微軟正黑體" pitchFamily="34" charset="-120"/>
-                <a:cs typeface="Calibri" panose="020F0502020204030204" pitchFamily="34" charset="0"/>
+              <a:rPr lang="en-US" altLang="zh-TW" sz="3733" b="1" dirty="0" err="1">
+                <a:solidFill>
+                  <a:srgbClr val="660033"/>
+                </a:solidFill>
+                <a:effectLst/>
+                <a:latin typeface="Times New Roman" panose="02020603050405020304" pitchFamily="18" charset="0"/>
+                <a:ea typeface="微軟正黑體" pitchFamily="34" charset="-120"/>
+                <a:cs typeface="Times New Roman" panose="02020603050405020304" pitchFamily="18" charset="0"/>
               </a:rPr>
               <a:t>phần</a:t>
             </a:r>
             <a:r>
-              <a:rPr lang="en-US" altLang="zh-TW" sz="4000" b="1" dirty="0">
-                <a:solidFill>
-                  <a:srgbClr val="660033"/>
-                </a:solidFill>
-                <a:effectLst/>
-                <a:latin typeface="Calibri" panose="020F0502020204030204" pitchFamily="34" charset="0"/>
-                <a:ea typeface="微軟正黑體" pitchFamily="34" charset="-120"/>
-                <a:cs typeface="Calibri" panose="020F0502020204030204" pitchFamily="34" charset="0"/>
+              <a:rPr lang="en-US" altLang="zh-TW" sz="3733" b="1" dirty="0">
+                <a:solidFill>
+                  <a:srgbClr val="660033"/>
+                </a:solidFill>
+                <a:effectLst/>
+                <a:latin typeface="Times New Roman" panose="02020603050405020304" pitchFamily="18" charset="0"/>
+                <a:ea typeface="微軟正黑體" pitchFamily="34" charset="-120"/>
+                <a:cs typeface="Times New Roman" panose="02020603050405020304" pitchFamily="18" charset="0"/>
               </a:rPr>
               <a:t> </a:t>
             </a:r>
             <a:r>
-              <a:rPr lang="en-US" altLang="zh-TW" sz="4000" b="1" dirty="0" err="1">
-                <a:solidFill>
-                  <a:srgbClr val="660033"/>
-                </a:solidFill>
-                <a:effectLst/>
-                <a:latin typeface="Calibri" panose="020F0502020204030204" pitchFamily="34" charset="0"/>
-                <a:ea typeface="微軟正黑體" pitchFamily="34" charset="-120"/>
-                <a:cs typeface="Calibri" panose="020F0502020204030204" pitchFamily="34" charset="0"/>
+              <a:rPr lang="en-US" altLang="zh-TW" sz="3733" b="1" dirty="0" err="1">
+                <a:solidFill>
+                  <a:srgbClr val="660033"/>
+                </a:solidFill>
+                <a:effectLst/>
+                <a:latin typeface="Times New Roman" panose="02020603050405020304" pitchFamily="18" charset="0"/>
+                <a:ea typeface="微軟正黑體" pitchFamily="34" charset="-120"/>
+                <a:cs typeface="Times New Roman" panose="02020603050405020304" pitchFamily="18" charset="0"/>
               </a:rPr>
               <a:t>Chúa</a:t>
             </a:r>
             <a:r>
-              <a:rPr lang="en-US" altLang="zh-TW" sz="4000" b="1" dirty="0">
-                <a:solidFill>
-                  <a:srgbClr val="660033"/>
-                </a:solidFill>
-                <a:effectLst/>
-                <a:latin typeface="Calibri" panose="020F0502020204030204" pitchFamily="34" charset="0"/>
-                <a:ea typeface="微軟正黑體" pitchFamily="34" charset="-120"/>
-                <a:cs typeface="Calibri" panose="020F0502020204030204" pitchFamily="34" charset="0"/>
+              <a:rPr lang="en-US" altLang="zh-TW" sz="3733" b="1" dirty="0">
+                <a:solidFill>
+                  <a:srgbClr val="660033"/>
+                </a:solidFill>
+                <a:effectLst/>
+                <a:latin typeface="Times New Roman" panose="02020603050405020304" pitchFamily="18" charset="0"/>
+                <a:ea typeface="微軟正黑體" pitchFamily="34" charset="-120"/>
+                <a:cs typeface="Times New Roman" panose="02020603050405020304" pitchFamily="18" charset="0"/>
               </a:rPr>
               <a:t> </a:t>
             </a:r>
             <a:r>
-              <a:rPr lang="en-US" altLang="zh-TW" sz="4000" b="1" dirty="0" err="1">
-                <a:solidFill>
-                  <a:srgbClr val="660033"/>
-                </a:solidFill>
-                <a:effectLst/>
-                <a:latin typeface="Calibri" panose="020F0502020204030204" pitchFamily="34" charset="0"/>
-                <a:ea typeface="微軟正黑體" pitchFamily="34" charset="-120"/>
-                <a:cs typeface="Calibri" panose="020F0502020204030204" pitchFamily="34" charset="0"/>
+              <a:rPr lang="en-US" altLang="zh-TW" sz="3733" b="1" dirty="0" err="1">
+                <a:solidFill>
+                  <a:srgbClr val="660033"/>
+                </a:solidFill>
+                <a:effectLst/>
+                <a:latin typeface="Times New Roman" panose="02020603050405020304" pitchFamily="18" charset="0"/>
+                <a:ea typeface="微軟正黑體" pitchFamily="34" charset="-120"/>
+                <a:cs typeface="Times New Roman" panose="02020603050405020304" pitchFamily="18" charset="0"/>
               </a:rPr>
               <a:t>sống</a:t>
             </a:r>
             <a:r>
-              <a:rPr lang="en-US" altLang="zh-TW" sz="4000" b="1" dirty="0">
-                <a:solidFill>
-                  <a:srgbClr val="660033"/>
-                </a:solidFill>
-                <a:effectLst/>
-                <a:latin typeface="Calibri" panose="020F0502020204030204" pitchFamily="34" charset="0"/>
-                <a:ea typeface="微軟正黑體" pitchFamily="34" charset="-120"/>
-                <a:cs typeface="Calibri" panose="020F0502020204030204" pitchFamily="34" charset="0"/>
+              <a:rPr lang="en-US" altLang="zh-TW" sz="3733" b="1" dirty="0">
+                <a:solidFill>
+                  <a:srgbClr val="660033"/>
+                </a:solidFill>
+                <a:effectLst/>
+                <a:latin typeface="Times New Roman" panose="02020603050405020304" pitchFamily="18" charset="0"/>
+                <a:ea typeface="微軟正黑體" pitchFamily="34" charset="-120"/>
+                <a:cs typeface="Times New Roman" panose="02020603050405020304" pitchFamily="18" charset="0"/>
               </a:rPr>
               <a:t> </a:t>
             </a:r>
             <a:r>
-              <a:rPr lang="en-US" altLang="zh-TW" sz="4000" b="1" dirty="0" err="1">
-                <a:solidFill>
-                  <a:srgbClr val="660033"/>
-                </a:solidFill>
-                <a:effectLst/>
-                <a:latin typeface="Calibri" panose="020F0502020204030204" pitchFamily="34" charset="0"/>
-                <a:ea typeface="微軟正黑體" pitchFamily="34" charset="-120"/>
-                <a:cs typeface="Calibri" panose="020F0502020204030204" pitchFamily="34" charset="0"/>
+              <a:rPr lang="en-US" altLang="zh-TW" sz="3733" b="1" dirty="0" err="1">
+                <a:solidFill>
+                  <a:srgbClr val="660033"/>
+                </a:solidFill>
+                <a:effectLst/>
+                <a:latin typeface="Times New Roman" panose="02020603050405020304" pitchFamily="18" charset="0"/>
+                <a:ea typeface="微軟正黑體" pitchFamily="34" charset="-120"/>
+                <a:cs typeface="Times New Roman" panose="02020603050405020304" pitchFamily="18" charset="0"/>
               </a:rPr>
               <a:t>vẻ</a:t>
             </a:r>
             <a:r>
-              <a:rPr lang="en-US" altLang="zh-TW" sz="4000" b="1" dirty="0">
-                <a:solidFill>
-                  <a:srgbClr val="660033"/>
-                </a:solidFill>
-                <a:effectLst/>
-                <a:latin typeface="Calibri" panose="020F0502020204030204" pitchFamily="34" charset="0"/>
-                <a:ea typeface="微軟正黑體" pitchFamily="34" charset="-120"/>
-                <a:cs typeface="Calibri" panose="020F0502020204030204" pitchFamily="34" charset="0"/>
+              <a:rPr lang="en-US" altLang="zh-TW" sz="3733" b="1" dirty="0">
+                <a:solidFill>
+                  <a:srgbClr val="660033"/>
+                </a:solidFill>
+                <a:effectLst/>
+                <a:latin typeface="Times New Roman" panose="02020603050405020304" pitchFamily="18" charset="0"/>
+                <a:ea typeface="微軟正黑體" pitchFamily="34" charset="-120"/>
+                <a:cs typeface="Times New Roman" panose="02020603050405020304" pitchFamily="18" charset="0"/>
               </a:rPr>
               <a:t> </a:t>
             </a:r>
             <a:r>
-              <a:rPr lang="en-US" altLang="zh-TW" sz="4000" b="1" dirty="0" err="1">
-                <a:solidFill>
-                  <a:srgbClr val="660033"/>
-                </a:solidFill>
-                <a:effectLst/>
-                <a:latin typeface="Calibri" panose="020F0502020204030204" pitchFamily="34" charset="0"/>
-                <a:ea typeface="微軟正黑體" pitchFamily="34" charset="-120"/>
-                <a:cs typeface="Calibri" panose="020F0502020204030204" pitchFamily="34" charset="0"/>
+              <a:rPr lang="en-US" altLang="zh-TW" sz="3733" b="1" dirty="0" err="1">
+                <a:solidFill>
+                  <a:srgbClr val="660033"/>
+                </a:solidFill>
+                <a:effectLst/>
+                <a:latin typeface="Times New Roman" panose="02020603050405020304" pitchFamily="18" charset="0"/>
+                <a:ea typeface="微軟正黑體" pitchFamily="34" charset="-120"/>
+                <a:cs typeface="Times New Roman" panose="02020603050405020304" pitchFamily="18" charset="0"/>
               </a:rPr>
               <a:t>vang</a:t>
             </a:r>
-            <a:endParaRPr lang="en-US" sz="4000" b="1" dirty="0">
+            <a:endParaRPr lang="en-US" sz="3733" b="1" dirty="0">
               <a:solidFill>
                 <a:srgbClr val="660033"/>
               </a:solidFill>
               <a:effectLst/>
-              <a:latin typeface="Calibri" panose="020F0502020204030204" pitchFamily="34" charset="0"/>
+              <a:latin typeface="Times New Roman" panose="02020603050405020304" pitchFamily="18" charset="0"/>
               <a:ea typeface="微軟正黑體" pitchFamily="34" charset="-120"/>
-              <a:cs typeface="Calibri" panose="020F0502020204030204" pitchFamily="34" charset="0"/>
+              <a:cs typeface="Times New Roman" panose="02020603050405020304" pitchFamily="18" charset="0"/>
             </a:endParaRPr>
           </a:p>
         </p:txBody>
@@ -5473,7 +5509,7 @@
         <p:spPr>
           <a:xfrm>
             <a:off x="0" y="5253203"/>
-            <a:ext cx="12192000" cy="748988"/>
+            <a:ext cx="12192000" cy="584775"/>
           </a:xfrm>
           <a:prstGeom prst="rect">
             <a:avLst/>
@@ -5488,37 +5524,21 @@
           <a:p>
             <a:pPr algn="ctr"/>
             <a:r>
-              <a:rPr lang="en-US" sz="4267" b="1" dirty="0">
+              <a:rPr lang="en-US" sz="3200" b="1" dirty="0">
                 <a:solidFill>
                   <a:srgbClr val="000066"/>
                 </a:solidFill>
                 <a:effectLst/>
-              </a:rPr>
-              <a:t>( </a:t>
-            </a:r>
-            <a:r>
-              <a:rPr lang="en-US" sz="4267" b="1" dirty="0" smtClean="0">
-                <a:solidFill>
-                  <a:srgbClr val="000066"/>
-                </a:solidFill>
-                <a:effectLst/>
-              </a:rPr>
-              <a:t>4 / 6 </a:t>
-            </a:r>
-            <a:r>
-              <a:rPr lang="en-US" sz="4267" b="1" dirty="0">
-                <a:solidFill>
-                  <a:srgbClr val="000066"/>
-                </a:solidFill>
-                <a:effectLst/>
-              </a:rPr>
-              <a:t>)</a:t>
-            </a:r>
-            <a:endParaRPr lang="vi-VN" sz="4267" b="1" dirty="0">
+                <a:ea typeface="Microsoft JhengHei" panose="020B0604030504040204" pitchFamily="34" charset="-120"/>
+              </a:rPr>
+              <a:t>( 4 / 6 )</a:t>
+            </a:r>
+            <a:endParaRPr lang="vi-VN" sz="3200" b="1" dirty="0">
               <a:solidFill>
                 <a:srgbClr val="000066"/>
               </a:solidFill>
               <a:effectLst/>
+              <a:ea typeface="Microsoft JhengHei" panose="020B0604030504040204" pitchFamily="34" charset="-120"/>
             </a:endParaRPr>
           </a:p>
         </p:txBody>
@@ -5751,116 +5771,113 @@
           </a:lstStyle>
           <a:p>
             <a:pPr marL="0" indent="0" algn="ctr">
-              <a:lnSpc>
-                <a:spcPts val="9000"/>
-              </a:lnSpc>
               <a:buNone/>
               <a:defRPr/>
             </a:pPr>
             <a:r>
-              <a:rPr lang="en-US" altLang="zh-TW" sz="4000" b="1" dirty="0" err="1">
-                <a:solidFill>
-                  <a:srgbClr val="660033"/>
-                </a:solidFill>
-                <a:effectLst/>
-                <a:latin typeface="Calibri" panose="020F0502020204030204" pitchFamily="34" charset="0"/>
-                <a:ea typeface="微軟正黑體" pitchFamily="34" charset="-120"/>
-                <a:cs typeface="Calibri" panose="020F0502020204030204" pitchFamily="34" charset="0"/>
+              <a:rPr lang="en-US" altLang="zh-TW" sz="3733" b="1" dirty="0" err="1">
+                <a:solidFill>
+                  <a:srgbClr val="660033"/>
+                </a:solidFill>
+                <a:effectLst/>
+                <a:latin typeface="Times New Roman" panose="02020603050405020304" pitchFamily="18" charset="0"/>
+                <a:ea typeface="微軟正黑體" pitchFamily="34" charset="-120"/>
+                <a:cs typeface="Times New Roman" panose="02020603050405020304" pitchFamily="18" charset="0"/>
               </a:rPr>
               <a:t>cõi</a:t>
             </a:r>
             <a:r>
-              <a:rPr lang="en-US" altLang="zh-TW" sz="4000" b="1" dirty="0">
-                <a:solidFill>
-                  <a:srgbClr val="660033"/>
-                </a:solidFill>
-                <a:effectLst/>
-                <a:latin typeface="Calibri" panose="020F0502020204030204" pitchFamily="34" charset="0"/>
-                <a:ea typeface="微軟正黑體" pitchFamily="34" charset="-120"/>
-                <a:cs typeface="Calibri" panose="020F0502020204030204" pitchFamily="34" charset="0"/>
+              <a:rPr lang="en-US" altLang="zh-TW" sz="3733" b="1" dirty="0">
+                <a:solidFill>
+                  <a:srgbClr val="660033"/>
+                </a:solidFill>
+                <a:effectLst/>
+                <a:latin typeface="Times New Roman" panose="02020603050405020304" pitchFamily="18" charset="0"/>
+                <a:ea typeface="微軟正黑體" pitchFamily="34" charset="-120"/>
+                <a:cs typeface="Times New Roman" panose="02020603050405020304" pitchFamily="18" charset="0"/>
               </a:rPr>
               <a:t> </a:t>
             </a:r>
             <a:r>
-              <a:rPr lang="en-US" altLang="zh-TW" sz="4000" b="1" dirty="0" err="1">
-                <a:solidFill>
-                  <a:srgbClr val="660033"/>
-                </a:solidFill>
-                <a:effectLst/>
-                <a:latin typeface="Calibri" panose="020F0502020204030204" pitchFamily="34" charset="0"/>
-                <a:ea typeface="微軟正黑體" pitchFamily="34" charset="-120"/>
-                <a:cs typeface="Calibri" panose="020F0502020204030204" pitchFamily="34" charset="0"/>
+              <a:rPr lang="en-US" altLang="zh-TW" sz="3733" b="1" dirty="0" err="1">
+                <a:solidFill>
+                  <a:srgbClr val="660033"/>
+                </a:solidFill>
+                <a:effectLst/>
+                <a:latin typeface="Times New Roman" panose="02020603050405020304" pitchFamily="18" charset="0"/>
+                <a:ea typeface="微軟正黑體" pitchFamily="34" charset="-120"/>
+                <a:cs typeface="Times New Roman" panose="02020603050405020304" pitchFamily="18" charset="0"/>
               </a:rPr>
               <a:t>chết</a:t>
             </a:r>
             <a:r>
-              <a:rPr lang="en-US" altLang="zh-TW" sz="4000" b="1" dirty="0">
-                <a:solidFill>
-                  <a:srgbClr val="660033"/>
-                </a:solidFill>
-                <a:effectLst/>
-                <a:latin typeface="Calibri" panose="020F0502020204030204" pitchFamily="34" charset="0"/>
-                <a:ea typeface="微軟正黑體" pitchFamily="34" charset="-120"/>
-                <a:cs typeface="Calibri" panose="020F0502020204030204" pitchFamily="34" charset="0"/>
+              <a:rPr lang="en-US" altLang="zh-TW" sz="3733" b="1" dirty="0">
+                <a:solidFill>
+                  <a:srgbClr val="660033"/>
+                </a:solidFill>
+                <a:effectLst/>
+                <a:latin typeface="Times New Roman" panose="02020603050405020304" pitchFamily="18" charset="0"/>
+                <a:ea typeface="微軟正黑體" pitchFamily="34" charset="-120"/>
+                <a:cs typeface="Times New Roman" panose="02020603050405020304" pitchFamily="18" charset="0"/>
               </a:rPr>
               <a:t> nay </a:t>
             </a:r>
             <a:r>
-              <a:rPr lang="en-US" altLang="zh-TW" sz="4000" b="1" dirty="0" err="1">
-                <a:solidFill>
-                  <a:srgbClr val="660033"/>
-                </a:solidFill>
-                <a:effectLst/>
-                <a:latin typeface="Calibri" panose="020F0502020204030204" pitchFamily="34" charset="0"/>
-                <a:ea typeface="微軟正黑體" pitchFamily="34" charset="-120"/>
-                <a:cs typeface="Calibri" panose="020F0502020204030204" pitchFamily="34" charset="0"/>
+              <a:rPr lang="en-US" altLang="zh-TW" sz="3733" b="1" dirty="0" err="1">
+                <a:solidFill>
+                  <a:srgbClr val="660033"/>
+                </a:solidFill>
+                <a:effectLst/>
+                <a:latin typeface="Times New Roman" panose="02020603050405020304" pitchFamily="18" charset="0"/>
+                <a:ea typeface="微軟正黑體" pitchFamily="34" charset="-120"/>
+                <a:cs typeface="Times New Roman" panose="02020603050405020304" pitchFamily="18" charset="0"/>
               </a:rPr>
               <a:t>bị</a:t>
             </a:r>
             <a:r>
-              <a:rPr lang="en-US" altLang="zh-TW" sz="4000" b="1" dirty="0">
-                <a:solidFill>
-                  <a:srgbClr val="660033"/>
-                </a:solidFill>
-                <a:effectLst/>
-                <a:latin typeface="Calibri" panose="020F0502020204030204" pitchFamily="34" charset="0"/>
-                <a:ea typeface="微軟正黑體" pitchFamily="34" charset="-120"/>
-                <a:cs typeface="Calibri" panose="020F0502020204030204" pitchFamily="34" charset="0"/>
+              <a:rPr lang="en-US" altLang="zh-TW" sz="3733" b="1" dirty="0">
+                <a:solidFill>
+                  <a:srgbClr val="660033"/>
+                </a:solidFill>
+                <a:effectLst/>
+                <a:latin typeface="Times New Roman" panose="02020603050405020304" pitchFamily="18" charset="0"/>
+                <a:ea typeface="微軟正黑體" pitchFamily="34" charset="-120"/>
+                <a:cs typeface="Times New Roman" panose="02020603050405020304" pitchFamily="18" charset="0"/>
               </a:rPr>
               <a:t> </a:t>
             </a:r>
             <a:r>
-              <a:rPr lang="en-US" altLang="zh-TW" sz="4000" b="1" dirty="0" err="1">
-                <a:solidFill>
-                  <a:srgbClr val="660033"/>
-                </a:solidFill>
-                <a:effectLst/>
-                <a:latin typeface="Calibri" panose="020F0502020204030204" pitchFamily="34" charset="0"/>
-                <a:ea typeface="微軟正黑體" pitchFamily="34" charset="-120"/>
-                <a:cs typeface="Calibri" panose="020F0502020204030204" pitchFamily="34" charset="0"/>
+              <a:rPr lang="en-US" altLang="zh-TW" sz="3733" b="1" dirty="0" err="1">
+                <a:solidFill>
+                  <a:srgbClr val="660033"/>
+                </a:solidFill>
+                <a:effectLst/>
+                <a:latin typeface="Times New Roman" panose="02020603050405020304" pitchFamily="18" charset="0"/>
+                <a:ea typeface="微軟正黑體" pitchFamily="34" charset="-120"/>
+                <a:cs typeface="Times New Roman" panose="02020603050405020304" pitchFamily="18" charset="0"/>
               </a:rPr>
               <a:t>phá</a:t>
             </a:r>
             <a:r>
-              <a:rPr lang="en-US" altLang="zh-TW" sz="4000" b="1" dirty="0">
-                <a:solidFill>
-                  <a:srgbClr val="660033"/>
-                </a:solidFill>
-                <a:effectLst/>
-                <a:latin typeface="Calibri" panose="020F0502020204030204" pitchFamily="34" charset="0"/>
-                <a:ea typeface="微軟正黑體" pitchFamily="34" charset="-120"/>
-                <a:cs typeface="Calibri" panose="020F0502020204030204" pitchFamily="34" charset="0"/>
+              <a:rPr lang="en-US" altLang="zh-TW" sz="3733" b="1" dirty="0">
+                <a:solidFill>
+                  <a:srgbClr val="660033"/>
+                </a:solidFill>
+                <a:effectLst/>
+                <a:latin typeface="Times New Roman" panose="02020603050405020304" pitchFamily="18" charset="0"/>
+                <a:ea typeface="微軟正黑體" pitchFamily="34" charset="-120"/>
+                <a:cs typeface="Times New Roman" panose="02020603050405020304" pitchFamily="18" charset="0"/>
               </a:rPr>
               <a:t> tan</a:t>
             </a:r>
-            <a:endParaRPr lang="en-US" sz="4000" b="1" dirty="0">
+            <a:endParaRPr lang="en-US" sz="3733" b="1" dirty="0">
               <a:solidFill>
                 <a:srgbClr val="660033"/>
               </a:solidFill>
               <a:effectLst/>
-              <a:latin typeface="Calibri" panose="020F0502020204030204" pitchFamily="34" charset="0"/>
+              <a:latin typeface="Times New Roman" panose="02020603050405020304" pitchFamily="18" charset="0"/>
               <a:ea typeface="微軟正黑體" pitchFamily="34" charset="-120"/>
-              <a:cs typeface="Calibri" panose="020F0502020204030204" pitchFamily="34" charset="0"/>
+              <a:cs typeface="Times New Roman" panose="02020603050405020304" pitchFamily="18" charset="0"/>
             </a:endParaRPr>
           </a:p>
         </p:txBody>
@@ -5874,7 +5891,7 @@
         <p:spPr>
           <a:xfrm>
             <a:off x="0" y="5253203"/>
-            <a:ext cx="12192000" cy="748988"/>
+            <a:ext cx="12192000" cy="584775"/>
           </a:xfrm>
           <a:prstGeom prst="rect">
             <a:avLst/>
@@ -5889,37 +5906,21 @@
           <a:p>
             <a:pPr algn="ctr"/>
             <a:r>
-              <a:rPr lang="en-US" sz="4267" b="1" dirty="0">
+              <a:rPr lang="en-US" sz="3200" b="1" dirty="0">
                 <a:solidFill>
                   <a:srgbClr val="000066"/>
                 </a:solidFill>
                 <a:effectLst/>
-              </a:rPr>
-              <a:t>( </a:t>
-            </a:r>
-            <a:r>
-              <a:rPr lang="en-US" sz="4267" b="1" dirty="0" smtClean="0">
-                <a:solidFill>
-                  <a:srgbClr val="000066"/>
-                </a:solidFill>
-                <a:effectLst/>
-              </a:rPr>
-              <a:t>4 / 6 </a:t>
-            </a:r>
-            <a:r>
-              <a:rPr lang="en-US" sz="4267" b="1" dirty="0">
-                <a:solidFill>
-                  <a:srgbClr val="000066"/>
-                </a:solidFill>
-                <a:effectLst/>
-              </a:rPr>
-              <a:t>)</a:t>
-            </a:r>
-            <a:endParaRPr lang="vi-VN" sz="4267" b="1" dirty="0">
+                <a:ea typeface="Microsoft JhengHei" panose="020B0604030504040204" pitchFamily="34" charset="-120"/>
+              </a:rPr>
+              <a:t>( 4 / 6 )</a:t>
+            </a:r>
+            <a:endParaRPr lang="vi-VN" sz="3200" b="1" dirty="0">
               <a:solidFill>
                 <a:srgbClr val="000066"/>
               </a:solidFill>
               <a:effectLst/>
+              <a:ea typeface="Microsoft JhengHei" panose="020B0604030504040204" pitchFamily="34" charset="-120"/>
             </a:endParaRPr>
           </a:p>
         </p:txBody>
@@ -6152,152 +6153,149 @@
           </a:lstStyle>
           <a:p>
             <a:pPr marL="0" indent="0" algn="ctr">
-              <a:lnSpc>
-                <a:spcPts val="9000"/>
-              </a:lnSpc>
               <a:buNone/>
               <a:defRPr/>
             </a:pPr>
             <a:r>
-              <a:rPr lang="en-US" altLang="zh-TW" sz="4000" b="1" dirty="0" err="1">
-                <a:solidFill>
-                  <a:srgbClr val="660033"/>
-                </a:solidFill>
-                <a:effectLst/>
-                <a:latin typeface="Calibri" panose="020F0502020204030204" pitchFamily="34" charset="0"/>
-                <a:ea typeface="微軟正黑體" pitchFamily="34" charset="-120"/>
-                <a:cs typeface="Calibri" panose="020F0502020204030204" pitchFamily="34" charset="0"/>
+              <a:rPr lang="en-US" altLang="zh-TW" sz="3733" b="1" dirty="0" err="1">
+                <a:solidFill>
+                  <a:srgbClr val="660033"/>
+                </a:solidFill>
+                <a:effectLst/>
+                <a:latin typeface="Times New Roman" panose="02020603050405020304" pitchFamily="18" charset="0"/>
+                <a:ea typeface="微軟正黑體" pitchFamily="34" charset="-120"/>
+                <a:cs typeface="Times New Roman" panose="02020603050405020304" pitchFamily="18" charset="0"/>
               </a:rPr>
               <a:t>bẻ</a:t>
             </a:r>
             <a:r>
-              <a:rPr lang="en-US" altLang="zh-TW" sz="4000" b="1" dirty="0">
-                <a:solidFill>
-                  <a:srgbClr val="660033"/>
-                </a:solidFill>
-                <a:effectLst/>
-                <a:latin typeface="Calibri" panose="020F0502020204030204" pitchFamily="34" charset="0"/>
-                <a:ea typeface="微軟正黑體" pitchFamily="34" charset="-120"/>
-                <a:cs typeface="Calibri" panose="020F0502020204030204" pitchFamily="34" charset="0"/>
+              <a:rPr lang="en-US" altLang="zh-TW" sz="3733" b="1" dirty="0">
+                <a:solidFill>
+                  <a:srgbClr val="660033"/>
+                </a:solidFill>
+                <a:effectLst/>
+                <a:latin typeface="Times New Roman" panose="02020603050405020304" pitchFamily="18" charset="0"/>
+                <a:ea typeface="微軟正黑體" pitchFamily="34" charset="-120"/>
+                <a:cs typeface="Times New Roman" panose="02020603050405020304" pitchFamily="18" charset="0"/>
               </a:rPr>
               <a:t> then </a:t>
             </a:r>
             <a:r>
-              <a:rPr lang="en-US" altLang="zh-TW" sz="4000" b="1" dirty="0" err="1">
-                <a:solidFill>
-                  <a:srgbClr val="660033"/>
-                </a:solidFill>
-                <a:effectLst/>
-                <a:latin typeface="Calibri" panose="020F0502020204030204" pitchFamily="34" charset="0"/>
-                <a:ea typeface="微軟正黑體" pitchFamily="34" charset="-120"/>
-                <a:cs typeface="Calibri" panose="020F0502020204030204" pitchFamily="34" charset="0"/>
+              <a:rPr lang="en-US" altLang="zh-TW" sz="3733" b="1" dirty="0" err="1">
+                <a:solidFill>
+                  <a:srgbClr val="660033"/>
+                </a:solidFill>
+                <a:effectLst/>
+                <a:latin typeface="Times New Roman" panose="02020603050405020304" pitchFamily="18" charset="0"/>
+                <a:ea typeface="微軟正黑體" pitchFamily="34" charset="-120"/>
+                <a:cs typeface="Times New Roman" panose="02020603050405020304" pitchFamily="18" charset="0"/>
               </a:rPr>
               <a:t>địa</a:t>
             </a:r>
             <a:r>
-              <a:rPr lang="en-US" altLang="zh-TW" sz="4000" b="1" dirty="0">
-                <a:solidFill>
-                  <a:srgbClr val="660033"/>
-                </a:solidFill>
-                <a:effectLst/>
-                <a:latin typeface="Calibri" panose="020F0502020204030204" pitchFamily="34" charset="0"/>
-                <a:ea typeface="微軟正黑體" pitchFamily="34" charset="-120"/>
-                <a:cs typeface="Calibri" panose="020F0502020204030204" pitchFamily="34" charset="0"/>
+              <a:rPr lang="en-US" altLang="zh-TW" sz="3733" b="1" dirty="0">
+                <a:solidFill>
+                  <a:srgbClr val="660033"/>
+                </a:solidFill>
+                <a:effectLst/>
+                <a:latin typeface="Times New Roman" panose="02020603050405020304" pitchFamily="18" charset="0"/>
+                <a:ea typeface="微軟正黑體" pitchFamily="34" charset="-120"/>
+                <a:cs typeface="Times New Roman" panose="02020603050405020304" pitchFamily="18" charset="0"/>
               </a:rPr>
               <a:t> </a:t>
             </a:r>
             <a:r>
-              <a:rPr lang="en-US" altLang="zh-TW" sz="4000" b="1" dirty="0" err="1">
-                <a:solidFill>
-                  <a:srgbClr val="660033"/>
-                </a:solidFill>
-                <a:effectLst/>
-                <a:latin typeface="Calibri" panose="020F0502020204030204" pitchFamily="34" charset="0"/>
-                <a:ea typeface="微軟正黑體" pitchFamily="34" charset="-120"/>
-                <a:cs typeface="Calibri" panose="020F0502020204030204" pitchFamily="34" charset="0"/>
+              <a:rPr lang="en-US" altLang="zh-TW" sz="3733" b="1" dirty="0" err="1">
+                <a:solidFill>
+                  <a:srgbClr val="660033"/>
+                </a:solidFill>
+                <a:effectLst/>
+                <a:latin typeface="Times New Roman" panose="02020603050405020304" pitchFamily="18" charset="0"/>
+                <a:ea typeface="微軟正黑體" pitchFamily="34" charset="-120"/>
+                <a:cs typeface="Times New Roman" panose="02020603050405020304" pitchFamily="18" charset="0"/>
               </a:rPr>
               <a:t>ngục</a:t>
             </a:r>
             <a:r>
-              <a:rPr lang="en-US" altLang="zh-TW" sz="4000" b="1" dirty="0">
-                <a:solidFill>
-                  <a:srgbClr val="660033"/>
-                </a:solidFill>
-                <a:effectLst/>
-                <a:latin typeface="Calibri" panose="020F0502020204030204" pitchFamily="34" charset="0"/>
-                <a:ea typeface="微軟正黑體" pitchFamily="34" charset="-120"/>
-                <a:cs typeface="Calibri" panose="020F0502020204030204" pitchFamily="34" charset="0"/>
+              <a:rPr lang="en-US" altLang="zh-TW" sz="3733" b="1" dirty="0">
+                <a:solidFill>
+                  <a:srgbClr val="660033"/>
+                </a:solidFill>
+                <a:effectLst/>
+                <a:latin typeface="Times New Roman" panose="02020603050405020304" pitchFamily="18" charset="0"/>
+                <a:ea typeface="微軟正黑體" pitchFamily="34" charset="-120"/>
+                <a:cs typeface="Times New Roman" panose="02020603050405020304" pitchFamily="18" charset="0"/>
               </a:rPr>
               <a:t> </a:t>
             </a:r>
             <a:r>
-              <a:rPr lang="en-US" altLang="zh-TW" sz="4000" b="1" dirty="0" err="1">
-                <a:solidFill>
-                  <a:srgbClr val="660033"/>
-                </a:solidFill>
-                <a:effectLst/>
-                <a:latin typeface="Calibri" panose="020F0502020204030204" pitchFamily="34" charset="0"/>
-                <a:ea typeface="微軟正黑體" pitchFamily="34" charset="-120"/>
-                <a:cs typeface="Calibri" panose="020F0502020204030204" pitchFamily="34" charset="0"/>
+              <a:rPr lang="en-US" altLang="zh-TW" sz="3733" b="1" dirty="0" err="1">
+                <a:solidFill>
+                  <a:srgbClr val="660033"/>
+                </a:solidFill>
+                <a:effectLst/>
+                <a:latin typeface="Times New Roman" panose="02020603050405020304" pitchFamily="18" charset="0"/>
+                <a:ea typeface="微軟正黑體" pitchFamily="34" charset="-120"/>
+                <a:cs typeface="Times New Roman" panose="02020603050405020304" pitchFamily="18" charset="0"/>
               </a:rPr>
               <a:t>duy</a:t>
             </a:r>
             <a:r>
-              <a:rPr lang="en-US" altLang="zh-TW" sz="4000" b="1" dirty="0">
-                <a:solidFill>
-                  <a:srgbClr val="660033"/>
-                </a:solidFill>
-                <a:effectLst/>
-                <a:latin typeface="Calibri" panose="020F0502020204030204" pitchFamily="34" charset="0"/>
-                <a:ea typeface="微軟正黑體" pitchFamily="34" charset="-120"/>
-                <a:cs typeface="Calibri" panose="020F0502020204030204" pitchFamily="34" charset="0"/>
+              <a:rPr lang="en-US" altLang="zh-TW" sz="3733" b="1" dirty="0">
+                <a:solidFill>
+                  <a:srgbClr val="660033"/>
+                </a:solidFill>
+                <a:effectLst/>
+                <a:latin typeface="Times New Roman" panose="02020603050405020304" pitchFamily="18" charset="0"/>
+                <a:ea typeface="微軟正黑體" pitchFamily="34" charset="-120"/>
+                <a:cs typeface="Times New Roman" panose="02020603050405020304" pitchFamily="18" charset="0"/>
               </a:rPr>
               <a:t> </a:t>
             </a:r>
             <a:r>
-              <a:rPr lang="en-US" altLang="zh-TW" sz="4000" b="1" dirty="0" err="1">
-                <a:solidFill>
-                  <a:srgbClr val="660033"/>
-                </a:solidFill>
-                <a:effectLst/>
-                <a:latin typeface="Calibri" panose="020F0502020204030204" pitchFamily="34" charset="0"/>
-                <a:ea typeface="微軟正黑體" pitchFamily="34" charset="-120"/>
-                <a:cs typeface="Calibri" panose="020F0502020204030204" pitchFamily="34" charset="0"/>
+              <a:rPr lang="en-US" altLang="zh-TW" sz="3733" b="1" dirty="0" err="1">
+                <a:solidFill>
+                  <a:srgbClr val="660033"/>
+                </a:solidFill>
+                <a:effectLst/>
+                <a:latin typeface="Times New Roman" panose="02020603050405020304" pitchFamily="18" charset="0"/>
+                <a:ea typeface="微軟正黑體" pitchFamily="34" charset="-120"/>
+                <a:cs typeface="Times New Roman" panose="02020603050405020304" pitchFamily="18" charset="0"/>
               </a:rPr>
               <a:t>Chúa</a:t>
             </a:r>
             <a:r>
-              <a:rPr lang="en-US" altLang="zh-TW" sz="4000" b="1" dirty="0">
-                <a:solidFill>
-                  <a:srgbClr val="660033"/>
-                </a:solidFill>
-                <a:effectLst/>
-                <a:latin typeface="Calibri" panose="020F0502020204030204" pitchFamily="34" charset="0"/>
-                <a:ea typeface="微軟正黑體" pitchFamily="34" charset="-120"/>
-                <a:cs typeface="Calibri" panose="020F0502020204030204" pitchFamily="34" charset="0"/>
+              <a:rPr lang="en-US" altLang="zh-TW" sz="3733" b="1" dirty="0">
+                <a:solidFill>
+                  <a:srgbClr val="660033"/>
+                </a:solidFill>
+                <a:effectLst/>
+                <a:latin typeface="Times New Roman" panose="02020603050405020304" pitchFamily="18" charset="0"/>
+                <a:ea typeface="微軟正黑體" pitchFamily="34" charset="-120"/>
+                <a:cs typeface="Times New Roman" panose="02020603050405020304" pitchFamily="18" charset="0"/>
               </a:rPr>
               <a:t> </a:t>
             </a:r>
             <a:r>
-              <a:rPr lang="en-US" altLang="zh-TW" sz="4000" b="1" dirty="0" err="1">
-                <a:solidFill>
-                  <a:srgbClr val="660033"/>
-                </a:solidFill>
-                <a:effectLst/>
-                <a:latin typeface="Calibri" panose="020F0502020204030204" pitchFamily="34" charset="0"/>
-                <a:ea typeface="微軟正黑體" pitchFamily="34" charset="-120"/>
-                <a:cs typeface="Calibri" panose="020F0502020204030204" pitchFamily="34" charset="0"/>
+              <a:rPr lang="en-US" altLang="zh-TW" sz="3733" b="1" dirty="0" err="1">
+                <a:solidFill>
+                  <a:srgbClr val="660033"/>
+                </a:solidFill>
+                <a:effectLst/>
+                <a:latin typeface="Times New Roman" panose="02020603050405020304" pitchFamily="18" charset="0"/>
+                <a:ea typeface="微軟正黑體" pitchFamily="34" charset="-120"/>
+                <a:cs typeface="Times New Roman" panose="02020603050405020304" pitchFamily="18" charset="0"/>
               </a:rPr>
               <a:t>Jêsus</a:t>
             </a:r>
-            <a:endParaRPr lang="en-US" sz="4000" b="1" dirty="0">
+            <a:endParaRPr lang="en-US" sz="3733" b="1" dirty="0">
               <a:solidFill>
                 <a:srgbClr val="660033"/>
               </a:solidFill>
               <a:effectLst/>
-              <a:latin typeface="Calibri" panose="020F0502020204030204" pitchFamily="34" charset="0"/>
+              <a:latin typeface="Times New Roman" panose="02020603050405020304" pitchFamily="18" charset="0"/>
               <a:ea typeface="微軟正黑體" pitchFamily="34" charset="-120"/>
-              <a:cs typeface="Calibri" panose="020F0502020204030204" pitchFamily="34" charset="0"/>
+              <a:cs typeface="Times New Roman" panose="02020603050405020304" pitchFamily="18" charset="0"/>
             </a:endParaRPr>
           </a:p>
         </p:txBody>
@@ -6311,7 +6309,7 @@
         <p:spPr>
           <a:xfrm>
             <a:off x="0" y="5253203"/>
-            <a:ext cx="12192000" cy="748988"/>
+            <a:ext cx="12192000" cy="584775"/>
           </a:xfrm>
           <a:prstGeom prst="rect">
             <a:avLst/>
@@ -6326,37 +6324,21 @@
           <a:p>
             <a:pPr algn="ctr"/>
             <a:r>
-              <a:rPr lang="en-US" sz="4267" b="1" dirty="0">
+              <a:rPr lang="en-US" sz="3200" b="1" dirty="0">
                 <a:solidFill>
                   <a:srgbClr val="000066"/>
                 </a:solidFill>
                 <a:effectLst/>
-              </a:rPr>
-              <a:t>( </a:t>
-            </a:r>
-            <a:r>
-              <a:rPr lang="en-US" sz="4267" b="1" dirty="0" smtClean="0">
-                <a:solidFill>
-                  <a:srgbClr val="000066"/>
-                </a:solidFill>
-                <a:effectLst/>
-              </a:rPr>
-              <a:t>4 / 6 </a:t>
-            </a:r>
-            <a:r>
-              <a:rPr lang="en-US" sz="4267" b="1" dirty="0">
-                <a:solidFill>
-                  <a:srgbClr val="000066"/>
-                </a:solidFill>
-                <a:effectLst/>
-              </a:rPr>
-              <a:t>)</a:t>
-            </a:r>
-            <a:endParaRPr lang="vi-VN" sz="4267" b="1" dirty="0">
+                <a:ea typeface="Microsoft JhengHei" panose="020B0604030504040204" pitchFamily="34" charset="-120"/>
+              </a:rPr>
+              <a:t>( 4 / 6 )</a:t>
+            </a:r>
+            <a:endParaRPr lang="vi-VN" sz="3200" b="1" dirty="0">
               <a:solidFill>
                 <a:srgbClr val="000066"/>
               </a:solidFill>
               <a:effectLst/>
+              <a:ea typeface="Microsoft JhengHei" panose="020B0604030504040204" pitchFamily="34" charset="-120"/>
             </a:endParaRPr>
           </a:p>
         </p:txBody>
@@ -6589,152 +6571,149 @@
           </a:lstStyle>
           <a:p>
             <a:pPr marL="0" indent="0" algn="ctr">
-              <a:lnSpc>
-                <a:spcPts val="9000"/>
-              </a:lnSpc>
               <a:buNone/>
               <a:defRPr/>
             </a:pPr>
             <a:r>
-              <a:rPr lang="en-US" altLang="zh-TW" sz="4000" b="1" dirty="0" err="1">
-                <a:solidFill>
-                  <a:srgbClr val="660033"/>
-                </a:solidFill>
-                <a:effectLst/>
-                <a:latin typeface="Calibri" panose="020F0502020204030204" pitchFamily="34" charset="0"/>
-                <a:ea typeface="微軟正黑體" pitchFamily="34" charset="-120"/>
-                <a:cs typeface="Calibri" panose="020F0502020204030204" pitchFamily="34" charset="0"/>
+              <a:rPr lang="en-US" altLang="zh-TW" sz="3733" b="1" dirty="0" err="1">
+                <a:solidFill>
+                  <a:srgbClr val="660033"/>
+                </a:solidFill>
+                <a:effectLst/>
+                <a:latin typeface="Times New Roman" panose="02020603050405020304" pitchFamily="18" charset="0"/>
+                <a:ea typeface="微軟正黑體" pitchFamily="34" charset="-120"/>
+                <a:cs typeface="Times New Roman" panose="02020603050405020304" pitchFamily="18" charset="0"/>
               </a:rPr>
               <a:t>Đấng</a:t>
             </a:r>
             <a:r>
-              <a:rPr lang="en-US" altLang="zh-TW" sz="4000" b="1" dirty="0">
-                <a:solidFill>
-                  <a:srgbClr val="660033"/>
-                </a:solidFill>
-                <a:effectLst/>
-                <a:latin typeface="Calibri" panose="020F0502020204030204" pitchFamily="34" charset="0"/>
-                <a:ea typeface="微軟正黑體" pitchFamily="34" charset="-120"/>
-                <a:cs typeface="Calibri" panose="020F0502020204030204" pitchFamily="34" charset="0"/>
+              <a:rPr lang="en-US" altLang="zh-TW" sz="3733" b="1" dirty="0">
+                <a:solidFill>
+                  <a:srgbClr val="660033"/>
+                </a:solidFill>
+                <a:effectLst/>
+                <a:latin typeface="Times New Roman" panose="02020603050405020304" pitchFamily="18" charset="0"/>
+                <a:ea typeface="微軟正黑體" pitchFamily="34" charset="-120"/>
+                <a:cs typeface="Times New Roman" panose="02020603050405020304" pitchFamily="18" charset="0"/>
               </a:rPr>
               <a:t> </a:t>
             </a:r>
             <a:r>
-              <a:rPr lang="en-US" altLang="zh-TW" sz="4000" b="1" dirty="0" err="1">
-                <a:solidFill>
-                  <a:srgbClr val="660033"/>
-                </a:solidFill>
-                <a:effectLst/>
-                <a:latin typeface="Calibri" panose="020F0502020204030204" pitchFamily="34" charset="0"/>
-                <a:ea typeface="微軟正黑體" pitchFamily="34" charset="-120"/>
-                <a:cs typeface="Calibri" panose="020F0502020204030204" pitchFamily="34" charset="0"/>
+              <a:rPr lang="en-US" altLang="zh-TW" sz="3733" b="1" dirty="0" err="1">
+                <a:solidFill>
+                  <a:srgbClr val="660033"/>
+                </a:solidFill>
+                <a:effectLst/>
+                <a:latin typeface="Times New Roman" panose="02020603050405020304" pitchFamily="18" charset="0"/>
+                <a:ea typeface="微軟正黑體" pitchFamily="34" charset="-120"/>
+                <a:cs typeface="Times New Roman" panose="02020603050405020304" pitchFamily="18" charset="0"/>
               </a:rPr>
               <a:t>được</a:t>
             </a:r>
             <a:r>
-              <a:rPr lang="en-US" altLang="zh-TW" sz="4000" b="1" dirty="0">
-                <a:solidFill>
-                  <a:srgbClr val="660033"/>
-                </a:solidFill>
-                <a:effectLst/>
-                <a:latin typeface="Calibri" panose="020F0502020204030204" pitchFamily="34" charset="0"/>
-                <a:ea typeface="微軟正黑體" pitchFamily="34" charset="-120"/>
-                <a:cs typeface="Calibri" panose="020F0502020204030204" pitchFamily="34" charset="0"/>
+              <a:rPr lang="en-US" altLang="zh-TW" sz="3733" b="1" dirty="0">
+                <a:solidFill>
+                  <a:srgbClr val="660033"/>
+                </a:solidFill>
+                <a:effectLst/>
+                <a:latin typeface="Times New Roman" panose="02020603050405020304" pitchFamily="18" charset="0"/>
+                <a:ea typeface="微軟正黑體" pitchFamily="34" charset="-120"/>
+                <a:cs typeface="Times New Roman" panose="02020603050405020304" pitchFamily="18" charset="0"/>
               </a:rPr>
               <a:t> </a:t>
             </a:r>
             <a:r>
-              <a:rPr lang="en-US" altLang="zh-TW" sz="4000" b="1" dirty="0" err="1">
-                <a:solidFill>
-                  <a:srgbClr val="660033"/>
-                </a:solidFill>
-                <a:effectLst/>
-                <a:latin typeface="Calibri" panose="020F0502020204030204" pitchFamily="34" charset="0"/>
-                <a:ea typeface="微軟正黑體" pitchFamily="34" charset="-120"/>
-                <a:cs typeface="Calibri" panose="020F0502020204030204" pitchFamily="34" charset="0"/>
+              <a:rPr lang="en-US" altLang="zh-TW" sz="3733" b="1" dirty="0" err="1">
+                <a:solidFill>
+                  <a:srgbClr val="660033"/>
+                </a:solidFill>
+                <a:effectLst/>
+                <a:latin typeface="Times New Roman" panose="02020603050405020304" pitchFamily="18" charset="0"/>
+                <a:ea typeface="微軟正黑體" pitchFamily="34" charset="-120"/>
+                <a:cs typeface="Times New Roman" panose="02020603050405020304" pitchFamily="18" charset="0"/>
               </a:rPr>
               <a:t>tán</a:t>
             </a:r>
             <a:r>
-              <a:rPr lang="en-US" altLang="zh-TW" sz="4000" b="1" dirty="0">
-                <a:solidFill>
-                  <a:srgbClr val="660033"/>
-                </a:solidFill>
-                <a:effectLst/>
-                <a:latin typeface="Calibri" panose="020F0502020204030204" pitchFamily="34" charset="0"/>
-                <a:ea typeface="微軟正黑體" pitchFamily="34" charset="-120"/>
-                <a:cs typeface="Calibri" panose="020F0502020204030204" pitchFamily="34" charset="0"/>
+              <a:rPr lang="en-US" altLang="zh-TW" sz="3733" b="1" dirty="0">
+                <a:solidFill>
+                  <a:srgbClr val="660033"/>
+                </a:solidFill>
+                <a:effectLst/>
+                <a:latin typeface="Times New Roman" panose="02020603050405020304" pitchFamily="18" charset="0"/>
+                <a:ea typeface="微軟正黑體" pitchFamily="34" charset="-120"/>
+                <a:cs typeface="Times New Roman" panose="02020603050405020304" pitchFamily="18" charset="0"/>
               </a:rPr>
               <a:t> </a:t>
             </a:r>
             <a:r>
-              <a:rPr lang="en-US" altLang="zh-TW" sz="4000" b="1" dirty="0" err="1">
-                <a:solidFill>
-                  <a:srgbClr val="660033"/>
-                </a:solidFill>
-                <a:effectLst/>
-                <a:latin typeface="Calibri" panose="020F0502020204030204" pitchFamily="34" charset="0"/>
-                <a:ea typeface="微軟正黑體" pitchFamily="34" charset="-120"/>
-                <a:cs typeface="Calibri" panose="020F0502020204030204" pitchFamily="34" charset="0"/>
+              <a:rPr lang="en-US" altLang="zh-TW" sz="3733" b="1" dirty="0" err="1">
+                <a:solidFill>
+                  <a:srgbClr val="660033"/>
+                </a:solidFill>
+                <a:effectLst/>
+                <a:latin typeface="Times New Roman" panose="02020603050405020304" pitchFamily="18" charset="0"/>
+                <a:ea typeface="微軟正黑體" pitchFamily="34" charset="-120"/>
+                <a:cs typeface="Times New Roman" panose="02020603050405020304" pitchFamily="18" charset="0"/>
               </a:rPr>
               <a:t>mỹ</a:t>
             </a:r>
             <a:r>
-              <a:rPr lang="en-US" altLang="zh-TW" sz="4000" b="1" dirty="0">
-                <a:solidFill>
-                  <a:srgbClr val="660033"/>
-                </a:solidFill>
-                <a:effectLst/>
-                <a:latin typeface="Calibri" panose="020F0502020204030204" pitchFamily="34" charset="0"/>
-                <a:ea typeface="微軟正黑體" pitchFamily="34" charset="-120"/>
-                <a:cs typeface="Calibri" panose="020F0502020204030204" pitchFamily="34" charset="0"/>
+              <a:rPr lang="en-US" altLang="zh-TW" sz="3733" b="1" dirty="0">
+                <a:solidFill>
+                  <a:srgbClr val="660033"/>
+                </a:solidFill>
+                <a:effectLst/>
+                <a:latin typeface="Times New Roman" panose="02020603050405020304" pitchFamily="18" charset="0"/>
+                <a:ea typeface="微軟正黑體" pitchFamily="34" charset="-120"/>
+                <a:cs typeface="Times New Roman" panose="02020603050405020304" pitchFamily="18" charset="0"/>
               </a:rPr>
               <a:t> </a:t>
             </a:r>
             <a:r>
-              <a:rPr lang="en-US" altLang="zh-TW" sz="4000" b="1" dirty="0" err="1">
-                <a:solidFill>
-                  <a:srgbClr val="660033"/>
-                </a:solidFill>
-                <a:effectLst/>
-                <a:latin typeface="Calibri" panose="020F0502020204030204" pitchFamily="34" charset="0"/>
-                <a:ea typeface="微軟正黑體" pitchFamily="34" charset="-120"/>
-                <a:cs typeface="Calibri" panose="020F0502020204030204" pitchFamily="34" charset="0"/>
+              <a:rPr lang="en-US" altLang="zh-TW" sz="3733" b="1" dirty="0" err="1">
+                <a:solidFill>
+                  <a:srgbClr val="660033"/>
+                </a:solidFill>
+                <a:effectLst/>
+                <a:latin typeface="Times New Roman" panose="02020603050405020304" pitchFamily="18" charset="0"/>
+                <a:ea typeface="微軟正黑體" pitchFamily="34" charset="-120"/>
+                <a:cs typeface="Times New Roman" panose="02020603050405020304" pitchFamily="18" charset="0"/>
               </a:rPr>
               <a:t>muôn</a:t>
             </a:r>
             <a:r>
-              <a:rPr lang="en-US" altLang="zh-TW" sz="4000" b="1" dirty="0">
-                <a:solidFill>
-                  <a:srgbClr val="660033"/>
-                </a:solidFill>
-                <a:effectLst/>
-                <a:latin typeface="Calibri" panose="020F0502020204030204" pitchFamily="34" charset="0"/>
-                <a:ea typeface="微軟正黑體" pitchFamily="34" charset="-120"/>
-                <a:cs typeface="Calibri" panose="020F0502020204030204" pitchFamily="34" charset="0"/>
+              <a:rPr lang="en-US" altLang="zh-TW" sz="3733" b="1" dirty="0">
+                <a:solidFill>
+                  <a:srgbClr val="660033"/>
+                </a:solidFill>
+                <a:effectLst/>
+                <a:latin typeface="Times New Roman" panose="02020603050405020304" pitchFamily="18" charset="0"/>
+                <a:ea typeface="微軟正黑體" pitchFamily="34" charset="-120"/>
+                <a:cs typeface="Times New Roman" panose="02020603050405020304" pitchFamily="18" charset="0"/>
               </a:rPr>
               <a:t> </a:t>
             </a:r>
             <a:r>
-              <a:rPr lang="en-US" altLang="zh-TW" sz="4000" b="1" dirty="0" err="1">
-                <a:solidFill>
-                  <a:srgbClr val="660033"/>
-                </a:solidFill>
-                <a:effectLst/>
-                <a:latin typeface="Calibri" panose="020F0502020204030204" pitchFamily="34" charset="0"/>
-                <a:ea typeface="微軟正黑體" pitchFamily="34" charset="-120"/>
-                <a:cs typeface="Calibri" panose="020F0502020204030204" pitchFamily="34" charset="0"/>
+              <a:rPr lang="en-US" altLang="zh-TW" sz="3733" b="1" dirty="0" err="1">
+                <a:solidFill>
+                  <a:srgbClr val="660033"/>
+                </a:solidFill>
+                <a:effectLst/>
+                <a:latin typeface="Times New Roman" panose="02020603050405020304" pitchFamily="18" charset="0"/>
+                <a:ea typeface="微軟正黑體" pitchFamily="34" charset="-120"/>
+                <a:cs typeface="Times New Roman" panose="02020603050405020304" pitchFamily="18" charset="0"/>
               </a:rPr>
               <a:t>thu</a:t>
             </a:r>
-            <a:endParaRPr lang="en-US" sz="4000" b="1" dirty="0">
+            <a:endParaRPr lang="en-US" sz="3733" b="1" dirty="0">
               <a:solidFill>
                 <a:srgbClr val="660033"/>
               </a:solidFill>
               <a:effectLst/>
-              <a:latin typeface="Calibri" panose="020F0502020204030204" pitchFamily="34" charset="0"/>
+              <a:latin typeface="Times New Roman" panose="02020603050405020304" pitchFamily="18" charset="0"/>
               <a:ea typeface="微軟正黑體" pitchFamily="34" charset="-120"/>
-              <a:cs typeface="Calibri" panose="020F0502020204030204" pitchFamily="34" charset="0"/>
+              <a:cs typeface="Times New Roman" panose="02020603050405020304" pitchFamily="18" charset="0"/>
             </a:endParaRPr>
           </a:p>
         </p:txBody>
@@ -6748,7 +6727,7 @@
         <p:spPr>
           <a:xfrm>
             <a:off x="0" y="5253203"/>
-            <a:ext cx="12192000" cy="748988"/>
+            <a:ext cx="12192000" cy="584775"/>
           </a:xfrm>
           <a:prstGeom prst="rect">
             <a:avLst/>
@@ -6763,37 +6742,21 @@
           <a:p>
             <a:pPr algn="ctr"/>
             <a:r>
-              <a:rPr lang="en-US" sz="4267" b="1" dirty="0">
+              <a:rPr lang="en-US" sz="3200" b="1" dirty="0">
                 <a:solidFill>
                   <a:srgbClr val="000066"/>
                 </a:solidFill>
                 <a:effectLst/>
-              </a:rPr>
-              <a:t>( </a:t>
-            </a:r>
-            <a:r>
-              <a:rPr lang="en-US" sz="4267" b="1" dirty="0" smtClean="0">
-                <a:solidFill>
-                  <a:srgbClr val="000066"/>
-                </a:solidFill>
-                <a:effectLst/>
-              </a:rPr>
-              <a:t>4 / 6 </a:t>
-            </a:r>
-            <a:r>
-              <a:rPr lang="en-US" sz="4267" b="1" dirty="0">
-                <a:solidFill>
-                  <a:srgbClr val="000066"/>
-                </a:solidFill>
-                <a:effectLst/>
-              </a:rPr>
-              <a:t>)</a:t>
-            </a:r>
-            <a:endParaRPr lang="vi-VN" sz="4267" b="1" dirty="0">
+                <a:ea typeface="Microsoft JhengHei" panose="020B0604030504040204" pitchFamily="34" charset="-120"/>
+              </a:rPr>
+              <a:t>( 4 / 6 )</a:t>
+            </a:r>
+            <a:endParaRPr lang="vi-VN" sz="3200" b="1" dirty="0">
               <a:solidFill>
                 <a:srgbClr val="000066"/>
               </a:solidFill>
               <a:effectLst/>
+              <a:ea typeface="Microsoft JhengHei" panose="020B0604030504040204" pitchFamily="34" charset="-120"/>
             </a:endParaRPr>
           </a:p>
         </p:txBody>
@@ -7026,176 +6989,173 @@
           </a:lstStyle>
           <a:p>
             <a:pPr marL="0" indent="0" algn="ctr">
-              <a:lnSpc>
-                <a:spcPts val="9000"/>
-              </a:lnSpc>
               <a:buNone/>
               <a:defRPr/>
             </a:pPr>
             <a:r>
-              <a:rPr lang="en-US" altLang="zh-TW" sz="4000" b="1" dirty="0" err="1">
-                <a:solidFill>
-                  <a:srgbClr val="660033"/>
-                </a:solidFill>
-                <a:effectLst/>
-                <a:latin typeface="Calibri" panose="020F0502020204030204" pitchFamily="34" charset="0"/>
-                <a:ea typeface="微軟正黑體" pitchFamily="34" charset="-120"/>
-                <a:cs typeface="Calibri" panose="020F0502020204030204" pitchFamily="34" charset="0"/>
+              <a:rPr lang="en-US" altLang="zh-TW" sz="3733" b="1" dirty="0" err="1">
+                <a:solidFill>
+                  <a:srgbClr val="660033"/>
+                </a:solidFill>
+                <a:effectLst/>
+                <a:latin typeface="Times New Roman" panose="02020603050405020304" pitchFamily="18" charset="0"/>
+                <a:ea typeface="微軟正黑體" pitchFamily="34" charset="-120"/>
+                <a:cs typeface="Times New Roman" panose="02020603050405020304" pitchFamily="18" charset="0"/>
               </a:rPr>
               <a:t>Nhìn</a:t>
             </a:r>
             <a:r>
-              <a:rPr lang="en-US" altLang="zh-TW" sz="4000" b="1" dirty="0">
-                <a:solidFill>
-                  <a:srgbClr val="660033"/>
-                </a:solidFill>
-                <a:effectLst/>
-                <a:latin typeface="Calibri" panose="020F0502020204030204" pitchFamily="34" charset="0"/>
-                <a:ea typeface="微軟正黑體" pitchFamily="34" charset="-120"/>
-                <a:cs typeface="Calibri" panose="020F0502020204030204" pitchFamily="34" charset="0"/>
+              <a:rPr lang="en-US" altLang="zh-TW" sz="3733" b="1" dirty="0">
+                <a:solidFill>
+                  <a:srgbClr val="660033"/>
+                </a:solidFill>
+                <a:effectLst/>
+                <a:latin typeface="Times New Roman" panose="02020603050405020304" pitchFamily="18" charset="0"/>
+                <a:ea typeface="微軟正黑體" pitchFamily="34" charset="-120"/>
+                <a:cs typeface="Times New Roman" panose="02020603050405020304" pitchFamily="18" charset="0"/>
               </a:rPr>
               <a:t> </a:t>
             </a:r>
             <a:r>
-              <a:rPr lang="en-US" altLang="zh-TW" sz="4000" b="1" dirty="0" err="1">
-                <a:solidFill>
-                  <a:srgbClr val="660033"/>
-                </a:solidFill>
-                <a:effectLst/>
-                <a:latin typeface="Calibri" panose="020F0502020204030204" pitchFamily="34" charset="0"/>
-                <a:ea typeface="微軟正黑體" pitchFamily="34" charset="-120"/>
-                <a:cs typeface="Calibri" panose="020F0502020204030204" pitchFamily="34" charset="0"/>
+              <a:rPr lang="en-US" altLang="zh-TW" sz="3733" b="1" dirty="0" err="1">
+                <a:solidFill>
+                  <a:srgbClr val="660033"/>
+                </a:solidFill>
+                <a:effectLst/>
+                <a:latin typeface="Times New Roman" panose="02020603050405020304" pitchFamily="18" charset="0"/>
+                <a:ea typeface="微軟正黑體" pitchFamily="34" charset="-120"/>
+                <a:cs typeface="Times New Roman" panose="02020603050405020304" pitchFamily="18" charset="0"/>
               </a:rPr>
               <a:t>cây</a:t>
             </a:r>
             <a:r>
-              <a:rPr lang="en-US" altLang="zh-TW" sz="4000" b="1" dirty="0">
-                <a:solidFill>
-                  <a:srgbClr val="660033"/>
-                </a:solidFill>
-                <a:effectLst/>
-                <a:latin typeface="Calibri" panose="020F0502020204030204" pitchFamily="34" charset="0"/>
-                <a:ea typeface="微軟正黑體" pitchFamily="34" charset="-120"/>
-                <a:cs typeface="Calibri" panose="020F0502020204030204" pitchFamily="34" charset="0"/>
+              <a:rPr lang="en-US" altLang="zh-TW" sz="3733" b="1" dirty="0">
+                <a:solidFill>
+                  <a:srgbClr val="660033"/>
+                </a:solidFill>
+                <a:effectLst/>
+                <a:latin typeface="Times New Roman" panose="02020603050405020304" pitchFamily="18" charset="0"/>
+                <a:ea typeface="微軟正黑體" pitchFamily="34" charset="-120"/>
+                <a:cs typeface="Times New Roman" panose="02020603050405020304" pitchFamily="18" charset="0"/>
               </a:rPr>
               <a:t> </a:t>
             </a:r>
             <a:r>
-              <a:rPr lang="en-US" altLang="zh-TW" sz="4000" b="1" dirty="0" err="1">
-                <a:solidFill>
-                  <a:srgbClr val="660033"/>
-                </a:solidFill>
-                <a:effectLst/>
-                <a:latin typeface="Calibri" panose="020F0502020204030204" pitchFamily="34" charset="0"/>
-                <a:ea typeface="微軟正黑體" pitchFamily="34" charset="-120"/>
-                <a:cs typeface="Calibri" panose="020F0502020204030204" pitchFamily="34" charset="0"/>
+              <a:rPr lang="en-US" altLang="zh-TW" sz="3733" b="1" dirty="0" err="1">
+                <a:solidFill>
+                  <a:srgbClr val="660033"/>
+                </a:solidFill>
+                <a:effectLst/>
+                <a:latin typeface="Times New Roman" panose="02020603050405020304" pitchFamily="18" charset="0"/>
+                <a:ea typeface="微軟正黑體" pitchFamily="34" charset="-120"/>
+                <a:cs typeface="Times New Roman" panose="02020603050405020304" pitchFamily="18" charset="0"/>
               </a:rPr>
               <a:t>thập</a:t>
             </a:r>
             <a:r>
-              <a:rPr lang="en-US" altLang="zh-TW" sz="4000" b="1" dirty="0">
-                <a:solidFill>
-                  <a:srgbClr val="660033"/>
-                </a:solidFill>
-                <a:effectLst/>
-                <a:latin typeface="Calibri" panose="020F0502020204030204" pitchFamily="34" charset="0"/>
-                <a:ea typeface="微軟正黑體" pitchFamily="34" charset="-120"/>
-                <a:cs typeface="Calibri" panose="020F0502020204030204" pitchFamily="34" charset="0"/>
+              <a:rPr lang="en-US" altLang="zh-TW" sz="3733" b="1" dirty="0">
+                <a:solidFill>
+                  <a:srgbClr val="660033"/>
+                </a:solidFill>
+                <a:effectLst/>
+                <a:latin typeface="Times New Roman" panose="02020603050405020304" pitchFamily="18" charset="0"/>
+                <a:ea typeface="微軟正黑體" pitchFamily="34" charset="-120"/>
+                <a:cs typeface="Times New Roman" panose="02020603050405020304" pitchFamily="18" charset="0"/>
               </a:rPr>
               <a:t> </a:t>
             </a:r>
             <a:r>
-              <a:rPr lang="en-US" altLang="zh-TW" sz="4000" b="1" dirty="0" err="1">
-                <a:solidFill>
-                  <a:srgbClr val="660033"/>
-                </a:solidFill>
-                <a:effectLst/>
-                <a:latin typeface="Calibri" panose="020F0502020204030204" pitchFamily="34" charset="0"/>
-                <a:ea typeface="微軟正黑體" pitchFamily="34" charset="-120"/>
-                <a:cs typeface="Calibri" panose="020F0502020204030204" pitchFamily="34" charset="0"/>
+              <a:rPr lang="en-US" altLang="zh-TW" sz="3733" b="1" dirty="0" err="1">
+                <a:solidFill>
+                  <a:srgbClr val="660033"/>
+                </a:solidFill>
+                <a:effectLst/>
+                <a:latin typeface="Times New Roman" panose="02020603050405020304" pitchFamily="18" charset="0"/>
+                <a:ea typeface="微軟正黑體" pitchFamily="34" charset="-120"/>
+                <a:cs typeface="Times New Roman" panose="02020603050405020304" pitchFamily="18" charset="0"/>
               </a:rPr>
               <a:t>tự</a:t>
             </a:r>
             <a:r>
-              <a:rPr lang="en-US" altLang="zh-TW" sz="4000" b="1" dirty="0">
-                <a:solidFill>
-                  <a:srgbClr val="660033"/>
-                </a:solidFill>
-                <a:effectLst/>
-                <a:latin typeface="Calibri" panose="020F0502020204030204" pitchFamily="34" charset="0"/>
-                <a:ea typeface="微軟正黑體" pitchFamily="34" charset="-120"/>
-                <a:cs typeface="Calibri" panose="020F0502020204030204" pitchFamily="34" charset="0"/>
+              <a:rPr lang="en-US" altLang="zh-TW" sz="3733" b="1" dirty="0">
+                <a:solidFill>
+                  <a:srgbClr val="660033"/>
+                </a:solidFill>
+                <a:effectLst/>
+                <a:latin typeface="Times New Roman" panose="02020603050405020304" pitchFamily="18" charset="0"/>
+                <a:ea typeface="微軟正黑體" pitchFamily="34" charset="-120"/>
+                <a:cs typeface="Times New Roman" panose="02020603050405020304" pitchFamily="18" charset="0"/>
               </a:rPr>
               <a:t> </a:t>
             </a:r>
             <a:r>
-              <a:rPr lang="en-US" altLang="zh-TW" sz="4000" b="1" dirty="0" err="1">
-                <a:solidFill>
-                  <a:srgbClr val="660033"/>
-                </a:solidFill>
-                <a:effectLst/>
-                <a:latin typeface="Calibri" panose="020F0502020204030204" pitchFamily="34" charset="0"/>
-                <a:ea typeface="微軟正黑體" pitchFamily="34" charset="-120"/>
-                <a:cs typeface="Calibri" panose="020F0502020204030204" pitchFamily="34" charset="0"/>
+              <a:rPr lang="en-US" altLang="zh-TW" sz="3733" b="1" dirty="0" err="1">
+                <a:solidFill>
+                  <a:srgbClr val="660033"/>
+                </a:solidFill>
+                <a:effectLst/>
+                <a:latin typeface="Times New Roman" panose="02020603050405020304" pitchFamily="18" charset="0"/>
+                <a:ea typeface="微軟正黑體" pitchFamily="34" charset="-120"/>
+                <a:cs typeface="Times New Roman" panose="02020603050405020304" pitchFamily="18" charset="0"/>
               </a:rPr>
               <a:t>gẫm</a:t>
             </a:r>
             <a:r>
-              <a:rPr lang="en-US" altLang="zh-TW" sz="4000" b="1" dirty="0">
-                <a:solidFill>
-                  <a:srgbClr val="660033"/>
-                </a:solidFill>
-                <a:effectLst/>
-                <a:latin typeface="Calibri" panose="020F0502020204030204" pitchFamily="34" charset="0"/>
-                <a:ea typeface="微軟正黑體" pitchFamily="34" charset="-120"/>
-                <a:cs typeface="Calibri" panose="020F0502020204030204" pitchFamily="34" charset="0"/>
+              <a:rPr lang="en-US" altLang="zh-TW" sz="3733" b="1" dirty="0">
+                <a:solidFill>
+                  <a:srgbClr val="660033"/>
+                </a:solidFill>
+                <a:effectLst/>
+                <a:latin typeface="Times New Roman" panose="02020603050405020304" pitchFamily="18" charset="0"/>
+                <a:ea typeface="微軟正黑體" pitchFamily="34" charset="-120"/>
+                <a:cs typeface="Times New Roman" panose="02020603050405020304" pitchFamily="18" charset="0"/>
               </a:rPr>
               <a:t> </a:t>
             </a:r>
             <a:r>
-              <a:rPr lang="en-US" altLang="zh-TW" sz="4000" b="1" dirty="0" err="1">
-                <a:solidFill>
-                  <a:srgbClr val="660033"/>
-                </a:solidFill>
-                <a:effectLst/>
-                <a:latin typeface="Calibri" panose="020F0502020204030204" pitchFamily="34" charset="0"/>
-                <a:ea typeface="微軟正黑體" pitchFamily="34" charset="-120"/>
-                <a:cs typeface="Calibri" panose="020F0502020204030204" pitchFamily="34" charset="0"/>
+              <a:rPr lang="en-US" altLang="zh-TW" sz="3733" b="1" dirty="0" err="1">
+                <a:solidFill>
+                  <a:srgbClr val="660033"/>
+                </a:solidFill>
+                <a:effectLst/>
+                <a:latin typeface="Times New Roman" panose="02020603050405020304" pitchFamily="18" charset="0"/>
+                <a:ea typeface="微軟正黑體" pitchFamily="34" charset="-120"/>
+                <a:cs typeface="Times New Roman" panose="02020603050405020304" pitchFamily="18" charset="0"/>
               </a:rPr>
               <a:t>Chúa</a:t>
             </a:r>
             <a:r>
-              <a:rPr lang="en-US" altLang="zh-TW" sz="4000" b="1" dirty="0">
-                <a:solidFill>
-                  <a:srgbClr val="660033"/>
-                </a:solidFill>
-                <a:effectLst/>
-                <a:latin typeface="Calibri" panose="020F0502020204030204" pitchFamily="34" charset="0"/>
-                <a:ea typeface="微軟正黑體" pitchFamily="34" charset="-120"/>
-                <a:cs typeface="Calibri" panose="020F0502020204030204" pitchFamily="34" charset="0"/>
+              <a:rPr lang="en-US" altLang="zh-TW" sz="3733" b="1" dirty="0">
+                <a:solidFill>
+                  <a:srgbClr val="660033"/>
+                </a:solidFill>
+                <a:effectLst/>
+                <a:latin typeface="Times New Roman" panose="02020603050405020304" pitchFamily="18" charset="0"/>
+                <a:ea typeface="微軟正黑體" pitchFamily="34" charset="-120"/>
+                <a:cs typeface="Times New Roman" panose="02020603050405020304" pitchFamily="18" charset="0"/>
               </a:rPr>
               <a:t> </a:t>
             </a:r>
             <a:r>
-              <a:rPr lang="en-US" altLang="zh-TW" sz="4000" b="1" dirty="0" err="1">
-                <a:solidFill>
-                  <a:srgbClr val="660033"/>
-                </a:solidFill>
-                <a:effectLst/>
-                <a:latin typeface="Calibri" panose="020F0502020204030204" pitchFamily="34" charset="0"/>
-                <a:ea typeface="微軟正黑體" pitchFamily="34" charset="-120"/>
-                <a:cs typeface="Calibri" panose="020F0502020204030204" pitchFamily="34" charset="0"/>
+              <a:rPr lang="en-US" altLang="zh-TW" sz="3733" b="1" dirty="0" err="1">
+                <a:solidFill>
+                  <a:srgbClr val="660033"/>
+                </a:solidFill>
+                <a:effectLst/>
+                <a:latin typeface="Times New Roman" panose="02020603050405020304" pitchFamily="18" charset="0"/>
+                <a:ea typeface="微軟正黑體" pitchFamily="34" charset="-120"/>
+                <a:cs typeface="Times New Roman" panose="02020603050405020304" pitchFamily="18" charset="0"/>
               </a:rPr>
               <a:t>Jêsus</a:t>
             </a:r>
-            <a:endParaRPr lang="en-US" sz="4000" b="1" dirty="0">
+            <a:endParaRPr lang="en-US" sz="3733" b="1" dirty="0">
               <a:solidFill>
                 <a:srgbClr val="660033"/>
               </a:solidFill>
               <a:effectLst/>
-              <a:latin typeface="Calibri" panose="020F0502020204030204" pitchFamily="34" charset="0"/>
+              <a:latin typeface="Times New Roman" panose="02020603050405020304" pitchFamily="18" charset="0"/>
               <a:ea typeface="微軟正黑體" pitchFamily="34" charset="-120"/>
-              <a:cs typeface="Calibri" panose="020F0502020204030204" pitchFamily="34" charset="0"/>
+              <a:cs typeface="Times New Roman" panose="02020603050405020304" pitchFamily="18" charset="0"/>
             </a:endParaRPr>
           </a:p>
         </p:txBody>
@@ -7209,7 +7169,7 @@
         <p:spPr>
           <a:xfrm>
             <a:off x="0" y="5253203"/>
-            <a:ext cx="12192000" cy="748988"/>
+            <a:ext cx="12192000" cy="584775"/>
           </a:xfrm>
           <a:prstGeom prst="rect">
             <a:avLst/>
@@ -7224,37 +7184,21 @@
           <a:p>
             <a:pPr algn="ctr"/>
             <a:r>
-              <a:rPr lang="en-US" sz="4267" b="1" dirty="0">
+              <a:rPr lang="en-US" sz="3200" b="1" dirty="0">
                 <a:solidFill>
                   <a:srgbClr val="000066"/>
                 </a:solidFill>
                 <a:effectLst/>
-              </a:rPr>
-              <a:t>( </a:t>
-            </a:r>
-            <a:r>
-              <a:rPr lang="en-US" sz="4267" b="1" dirty="0" smtClean="0">
-                <a:solidFill>
-                  <a:srgbClr val="000066"/>
-                </a:solidFill>
-                <a:effectLst/>
-              </a:rPr>
-              <a:t>5 / 6 </a:t>
-            </a:r>
-            <a:r>
-              <a:rPr lang="en-US" sz="4267" b="1" dirty="0">
-                <a:solidFill>
-                  <a:srgbClr val="000066"/>
-                </a:solidFill>
-                <a:effectLst/>
-              </a:rPr>
-              <a:t>)</a:t>
-            </a:r>
-            <a:endParaRPr lang="vi-VN" sz="4267" b="1" dirty="0">
+                <a:ea typeface="Microsoft JhengHei" panose="020B0604030504040204" pitchFamily="34" charset="-120"/>
+              </a:rPr>
+              <a:t>( 5 / 6 )</a:t>
+            </a:r>
+            <a:endParaRPr lang="vi-VN" sz="3200" b="1" dirty="0">
               <a:solidFill>
                 <a:srgbClr val="000066"/>
               </a:solidFill>
               <a:effectLst/>
+              <a:ea typeface="Microsoft JhengHei" panose="020B0604030504040204" pitchFamily="34" charset="-120"/>
             </a:endParaRPr>
           </a:p>
         </p:txBody>
@@ -7487,152 +7431,149 @@
           </a:lstStyle>
           <a:p>
             <a:pPr marL="0" indent="0" algn="ctr">
-              <a:lnSpc>
-                <a:spcPts val="9000"/>
-              </a:lnSpc>
               <a:buNone/>
               <a:defRPr/>
             </a:pPr>
             <a:r>
-              <a:rPr lang="en-US" altLang="zh-TW" sz="4000" b="1" dirty="0" err="1">
-                <a:solidFill>
-                  <a:srgbClr val="660033"/>
-                </a:solidFill>
-                <a:effectLst/>
-                <a:latin typeface="Calibri" panose="020F0502020204030204" pitchFamily="34" charset="0"/>
-                <a:ea typeface="微軟正黑體" pitchFamily="34" charset="-120"/>
-                <a:cs typeface="Calibri" panose="020F0502020204030204" pitchFamily="34" charset="0"/>
+              <a:rPr lang="en-US" altLang="zh-TW" sz="3733" b="1" dirty="0" err="1">
+                <a:solidFill>
+                  <a:srgbClr val="660033"/>
+                </a:solidFill>
+                <a:effectLst/>
+                <a:latin typeface="Times New Roman" panose="02020603050405020304" pitchFamily="18" charset="0"/>
+                <a:ea typeface="微軟正黑體" pitchFamily="34" charset="-120"/>
+                <a:cs typeface="Times New Roman" panose="02020603050405020304" pitchFamily="18" charset="0"/>
               </a:rPr>
               <a:t>phải</a:t>
             </a:r>
             <a:r>
-              <a:rPr lang="en-US" altLang="zh-TW" sz="4000" b="1" dirty="0">
-                <a:solidFill>
-                  <a:srgbClr val="660033"/>
-                </a:solidFill>
-                <a:effectLst/>
-                <a:latin typeface="Calibri" panose="020F0502020204030204" pitchFamily="34" charset="0"/>
-                <a:ea typeface="微軟正黑體" pitchFamily="34" charset="-120"/>
-                <a:cs typeface="Calibri" panose="020F0502020204030204" pitchFamily="34" charset="0"/>
+              <a:rPr lang="en-US" altLang="zh-TW" sz="3733" b="1" dirty="0">
+                <a:solidFill>
+                  <a:srgbClr val="660033"/>
+                </a:solidFill>
+                <a:effectLst/>
+                <a:latin typeface="Times New Roman" panose="02020603050405020304" pitchFamily="18" charset="0"/>
+                <a:ea typeface="微軟正黑體" pitchFamily="34" charset="-120"/>
+                <a:cs typeface="Times New Roman" panose="02020603050405020304" pitchFamily="18" charset="0"/>
               </a:rPr>
               <a:t> </a:t>
             </a:r>
             <a:r>
-              <a:rPr lang="en-US" altLang="zh-TW" sz="4000" b="1" dirty="0" err="1">
-                <a:solidFill>
-                  <a:srgbClr val="660033"/>
-                </a:solidFill>
-                <a:effectLst/>
-                <a:latin typeface="Calibri" panose="020F0502020204030204" pitchFamily="34" charset="0"/>
-                <a:ea typeface="微軟正黑體" pitchFamily="34" charset="-120"/>
-                <a:cs typeface="Calibri" panose="020F0502020204030204" pitchFamily="34" charset="0"/>
+              <a:rPr lang="en-US" altLang="zh-TW" sz="3733" b="1" dirty="0" err="1">
+                <a:solidFill>
+                  <a:srgbClr val="660033"/>
+                </a:solidFill>
+                <a:effectLst/>
+                <a:latin typeface="Times New Roman" panose="02020603050405020304" pitchFamily="18" charset="0"/>
+                <a:ea typeface="微軟正黑體" pitchFamily="34" charset="-120"/>
+                <a:cs typeface="Times New Roman" panose="02020603050405020304" pitchFamily="18" charset="0"/>
               </a:rPr>
               <a:t>đóng</a:t>
             </a:r>
             <a:r>
-              <a:rPr lang="en-US" altLang="zh-TW" sz="4000" b="1" dirty="0">
-                <a:solidFill>
-                  <a:srgbClr val="660033"/>
-                </a:solidFill>
-                <a:effectLst/>
-                <a:latin typeface="Calibri" panose="020F0502020204030204" pitchFamily="34" charset="0"/>
-                <a:ea typeface="微軟正黑體" pitchFamily="34" charset="-120"/>
-                <a:cs typeface="Calibri" panose="020F0502020204030204" pitchFamily="34" charset="0"/>
+              <a:rPr lang="en-US" altLang="zh-TW" sz="3733" b="1" dirty="0">
+                <a:solidFill>
+                  <a:srgbClr val="660033"/>
+                </a:solidFill>
+                <a:effectLst/>
+                <a:latin typeface="Times New Roman" panose="02020603050405020304" pitchFamily="18" charset="0"/>
+                <a:ea typeface="微軟正黑體" pitchFamily="34" charset="-120"/>
+                <a:cs typeface="Times New Roman" panose="02020603050405020304" pitchFamily="18" charset="0"/>
               </a:rPr>
               <a:t> </a:t>
             </a:r>
             <a:r>
-              <a:rPr lang="en-US" altLang="zh-TW" sz="4000" b="1" dirty="0" err="1">
-                <a:solidFill>
-                  <a:srgbClr val="660033"/>
-                </a:solidFill>
-                <a:effectLst/>
-                <a:latin typeface="Calibri" panose="020F0502020204030204" pitchFamily="34" charset="0"/>
-                <a:ea typeface="微軟正黑體" pitchFamily="34" charset="-120"/>
-                <a:cs typeface="Calibri" panose="020F0502020204030204" pitchFamily="34" charset="0"/>
+              <a:rPr lang="en-US" altLang="zh-TW" sz="3733" b="1" dirty="0" err="1">
+                <a:solidFill>
+                  <a:srgbClr val="660033"/>
+                </a:solidFill>
+                <a:effectLst/>
+                <a:latin typeface="Times New Roman" panose="02020603050405020304" pitchFamily="18" charset="0"/>
+                <a:ea typeface="微軟正黑體" pitchFamily="34" charset="-120"/>
+                <a:cs typeface="Times New Roman" panose="02020603050405020304" pitchFamily="18" charset="0"/>
               </a:rPr>
               <a:t>đinh</a:t>
             </a:r>
             <a:r>
-              <a:rPr lang="en-US" altLang="zh-TW" sz="4000" b="1" dirty="0">
-                <a:solidFill>
-                  <a:srgbClr val="660033"/>
-                </a:solidFill>
-                <a:effectLst/>
-                <a:latin typeface="Calibri" panose="020F0502020204030204" pitchFamily="34" charset="0"/>
-                <a:ea typeface="微軟正黑體" pitchFamily="34" charset="-120"/>
-                <a:cs typeface="Calibri" panose="020F0502020204030204" pitchFamily="34" charset="0"/>
+              <a:rPr lang="en-US" altLang="zh-TW" sz="3733" b="1" dirty="0">
+                <a:solidFill>
+                  <a:srgbClr val="660033"/>
+                </a:solidFill>
+                <a:effectLst/>
+                <a:latin typeface="Times New Roman" panose="02020603050405020304" pitchFamily="18" charset="0"/>
+                <a:ea typeface="微軟正黑體" pitchFamily="34" charset="-120"/>
+                <a:cs typeface="Times New Roman" panose="02020603050405020304" pitchFamily="18" charset="0"/>
               </a:rPr>
               <a:t> </a:t>
             </a:r>
             <a:r>
-              <a:rPr lang="en-US" altLang="zh-TW" sz="4000" b="1" dirty="0" err="1">
-                <a:solidFill>
-                  <a:srgbClr val="660033"/>
-                </a:solidFill>
-                <a:effectLst/>
-                <a:latin typeface="Calibri" panose="020F0502020204030204" pitchFamily="34" charset="0"/>
-                <a:ea typeface="微軟正黑體" pitchFamily="34" charset="-120"/>
-                <a:cs typeface="Calibri" panose="020F0502020204030204" pitchFamily="34" charset="0"/>
+              <a:rPr lang="en-US" altLang="zh-TW" sz="3733" b="1" dirty="0" err="1">
+                <a:solidFill>
+                  <a:srgbClr val="660033"/>
+                </a:solidFill>
+                <a:effectLst/>
+                <a:latin typeface="Times New Roman" panose="02020603050405020304" pitchFamily="18" charset="0"/>
+                <a:ea typeface="微軟正黑體" pitchFamily="34" charset="-120"/>
+                <a:cs typeface="Times New Roman" panose="02020603050405020304" pitchFamily="18" charset="0"/>
               </a:rPr>
               <a:t>chịu</a:t>
             </a:r>
             <a:r>
-              <a:rPr lang="en-US" altLang="zh-TW" sz="4000" b="1" dirty="0">
-                <a:solidFill>
-                  <a:srgbClr val="660033"/>
-                </a:solidFill>
-                <a:effectLst/>
-                <a:latin typeface="Calibri" panose="020F0502020204030204" pitchFamily="34" charset="0"/>
-                <a:ea typeface="微軟正黑體" pitchFamily="34" charset="-120"/>
-                <a:cs typeface="Calibri" panose="020F0502020204030204" pitchFamily="34" charset="0"/>
+              <a:rPr lang="en-US" altLang="zh-TW" sz="3733" b="1" dirty="0">
+                <a:solidFill>
+                  <a:srgbClr val="660033"/>
+                </a:solidFill>
+                <a:effectLst/>
+                <a:latin typeface="Times New Roman" panose="02020603050405020304" pitchFamily="18" charset="0"/>
+                <a:ea typeface="微軟正黑體" pitchFamily="34" charset="-120"/>
+                <a:cs typeface="Times New Roman" panose="02020603050405020304" pitchFamily="18" charset="0"/>
               </a:rPr>
               <a:t> </a:t>
             </a:r>
             <a:r>
-              <a:rPr lang="en-US" altLang="zh-TW" sz="4000" b="1" dirty="0" err="1">
-                <a:solidFill>
-                  <a:srgbClr val="660033"/>
-                </a:solidFill>
-                <a:effectLst/>
-                <a:latin typeface="Calibri" panose="020F0502020204030204" pitchFamily="34" charset="0"/>
-                <a:ea typeface="微軟正黑體" pitchFamily="34" charset="-120"/>
-                <a:cs typeface="Calibri" panose="020F0502020204030204" pitchFamily="34" charset="0"/>
+              <a:rPr lang="en-US" altLang="zh-TW" sz="3733" b="1" dirty="0" err="1">
+                <a:solidFill>
+                  <a:srgbClr val="660033"/>
+                </a:solidFill>
+                <a:effectLst/>
+                <a:latin typeface="Times New Roman" panose="02020603050405020304" pitchFamily="18" charset="0"/>
+                <a:ea typeface="微軟正黑體" pitchFamily="34" charset="-120"/>
+                <a:cs typeface="Times New Roman" panose="02020603050405020304" pitchFamily="18" charset="0"/>
               </a:rPr>
               <a:t>khổ</a:t>
             </a:r>
             <a:r>
-              <a:rPr lang="en-US" altLang="zh-TW" sz="4000" b="1" dirty="0">
-                <a:solidFill>
-                  <a:srgbClr val="660033"/>
-                </a:solidFill>
-                <a:effectLst/>
-                <a:latin typeface="Calibri" panose="020F0502020204030204" pitchFamily="34" charset="0"/>
-                <a:ea typeface="微軟正黑體" pitchFamily="34" charset="-120"/>
-                <a:cs typeface="Calibri" panose="020F0502020204030204" pitchFamily="34" charset="0"/>
+              <a:rPr lang="en-US" altLang="zh-TW" sz="3733" b="1" dirty="0">
+                <a:solidFill>
+                  <a:srgbClr val="660033"/>
+                </a:solidFill>
+                <a:effectLst/>
+                <a:latin typeface="Times New Roman" panose="02020603050405020304" pitchFamily="18" charset="0"/>
+                <a:ea typeface="微軟正黑體" pitchFamily="34" charset="-120"/>
+                <a:cs typeface="Times New Roman" panose="02020603050405020304" pitchFamily="18" charset="0"/>
               </a:rPr>
               <a:t> </a:t>
             </a:r>
             <a:r>
-              <a:rPr lang="en-US" altLang="zh-TW" sz="4000" b="1" dirty="0" err="1">
-                <a:solidFill>
-                  <a:srgbClr val="660033"/>
-                </a:solidFill>
-                <a:effectLst/>
-                <a:latin typeface="Calibri" panose="020F0502020204030204" pitchFamily="34" charset="0"/>
-                <a:ea typeface="微軟正黑體" pitchFamily="34" charset="-120"/>
-                <a:cs typeface="Calibri" panose="020F0502020204030204" pitchFamily="34" charset="0"/>
+              <a:rPr lang="en-US" altLang="zh-TW" sz="3733" b="1" dirty="0" err="1">
+                <a:solidFill>
+                  <a:srgbClr val="660033"/>
+                </a:solidFill>
+                <a:effectLst/>
+                <a:latin typeface="Times New Roman" panose="02020603050405020304" pitchFamily="18" charset="0"/>
+                <a:ea typeface="微軟正黑體" pitchFamily="34" charset="-120"/>
+                <a:cs typeface="Times New Roman" panose="02020603050405020304" pitchFamily="18" charset="0"/>
               </a:rPr>
               <a:t>đau</a:t>
             </a:r>
-            <a:endParaRPr lang="en-US" sz="4000" b="1" dirty="0">
+            <a:endParaRPr lang="en-US" sz="3733" b="1" dirty="0">
               <a:solidFill>
                 <a:srgbClr val="660033"/>
               </a:solidFill>
               <a:effectLst/>
-              <a:latin typeface="Calibri" panose="020F0502020204030204" pitchFamily="34" charset="0"/>
+              <a:latin typeface="Times New Roman" panose="02020603050405020304" pitchFamily="18" charset="0"/>
               <a:ea typeface="微軟正黑體" pitchFamily="34" charset="-120"/>
-              <a:cs typeface="Calibri" panose="020F0502020204030204" pitchFamily="34" charset="0"/>
+              <a:cs typeface="Times New Roman" panose="02020603050405020304" pitchFamily="18" charset="0"/>
             </a:endParaRPr>
           </a:p>
         </p:txBody>
@@ -7646,7 +7587,7 @@
         <p:spPr>
           <a:xfrm>
             <a:off x="0" y="5253203"/>
-            <a:ext cx="12192000" cy="748988"/>
+            <a:ext cx="12192000" cy="584775"/>
           </a:xfrm>
           <a:prstGeom prst="rect">
             <a:avLst/>
@@ -7661,17 +7602,21 @@
           <a:p>
             <a:pPr algn="ctr"/>
             <a:r>
-              <a:rPr lang="en-US" sz="4267" b="1" dirty="0">
+              <a:rPr lang="en-US" sz="3200" b="1" dirty="0">
                 <a:solidFill>
                   <a:srgbClr val="000066"/>
                 </a:solidFill>
+                <a:effectLst/>
+                <a:ea typeface="Microsoft JhengHei" panose="020B0604030504040204" pitchFamily="34" charset="-120"/>
               </a:rPr>
               <a:t>( 5 / 6 )</a:t>
             </a:r>
-            <a:endParaRPr lang="vi-VN" sz="4267" b="1" dirty="0">
+            <a:endParaRPr lang="vi-VN" sz="3200" b="1" dirty="0">
               <a:solidFill>
                 <a:srgbClr val="000066"/>
               </a:solidFill>
+              <a:effectLst/>
+              <a:ea typeface="Microsoft JhengHei" panose="020B0604030504040204" pitchFamily="34" charset="-120"/>
             </a:endParaRPr>
           </a:p>
         </p:txBody>
@@ -7736,28 +7681,12 @@
                 <a:solidFill>
                   <a:srgbClr val="000066"/>
                 </a:solidFill>
+                <a:effectLst/>
                 <a:latin typeface="微軟正黑體" pitchFamily="34" charset="-120"/>
                 <a:ea typeface="微軟正黑體" pitchFamily="34" charset="-120"/>
               </a:rPr>
-              <a:t>我等如今在主面</a:t>
-            </a:r>
-            <a:r>
-              <a:rPr lang="zh-CN" altLang="zh-TW" sz="6400" b="1" dirty="0">
-                <a:solidFill>
-                  <a:srgbClr val="000066"/>
-                </a:solidFill>
-                <a:latin typeface="微軟正黑體" pitchFamily="34" charset="-120"/>
-                <a:ea typeface="微軟正黑體" pitchFamily="34" charset="-120"/>
-              </a:rPr>
-              <a:t>前</a:t>
-            </a:r>
-            <a:endParaRPr lang="zh-CN" altLang="zh-TW" sz="6400" b="1" dirty="0">
-              <a:solidFill>
-                <a:srgbClr val="000066"/>
-              </a:solidFill>
-              <a:latin typeface="微軟正黑體" pitchFamily="34" charset="-120"/>
-              <a:ea typeface="微軟正黑體" pitchFamily="34" charset="-120"/>
-            </a:endParaRPr>
+              <a:t>我等如今在主面前</a:t>
+            </a:r>
           </a:p>
         </p:txBody>
       </p:sp>
@@ -7921,176 +7850,173 @@
           </a:lstStyle>
           <a:p>
             <a:pPr marL="0" indent="0" algn="ctr">
-              <a:lnSpc>
-                <a:spcPts val="9000"/>
-              </a:lnSpc>
               <a:buNone/>
               <a:defRPr/>
             </a:pPr>
             <a:r>
-              <a:rPr lang="en-US" altLang="zh-TW" sz="4000" b="1" dirty="0" err="1">
-                <a:solidFill>
-                  <a:srgbClr val="660033"/>
-                </a:solidFill>
-                <a:effectLst/>
-                <a:latin typeface="Calibri" panose="020F0502020204030204" pitchFamily="34" charset="0"/>
-                <a:ea typeface="微軟正黑體" pitchFamily="34" charset="-120"/>
-                <a:cs typeface="Calibri" panose="020F0502020204030204" pitchFamily="34" charset="0"/>
+              <a:rPr lang="en-US" altLang="zh-TW" sz="3733" b="1" dirty="0" err="1">
+                <a:solidFill>
+                  <a:srgbClr val="660033"/>
+                </a:solidFill>
+                <a:effectLst/>
+                <a:latin typeface="Times New Roman" panose="02020603050405020304" pitchFamily="18" charset="0"/>
+                <a:ea typeface="微軟正黑體" pitchFamily="34" charset="-120"/>
+                <a:cs typeface="Times New Roman" panose="02020603050405020304" pitchFamily="18" charset="0"/>
               </a:rPr>
               <a:t>Nhìn</a:t>
             </a:r>
             <a:r>
-              <a:rPr lang="en-US" altLang="zh-TW" sz="4000" b="1" dirty="0">
-                <a:solidFill>
-                  <a:srgbClr val="660033"/>
-                </a:solidFill>
-                <a:effectLst/>
-                <a:latin typeface="Calibri" panose="020F0502020204030204" pitchFamily="34" charset="0"/>
-                <a:ea typeface="微軟正黑體" pitchFamily="34" charset="-120"/>
-                <a:cs typeface="Calibri" panose="020F0502020204030204" pitchFamily="34" charset="0"/>
+              <a:rPr lang="en-US" altLang="zh-TW" sz="3733" b="1" dirty="0">
+                <a:solidFill>
+                  <a:srgbClr val="660033"/>
+                </a:solidFill>
+                <a:effectLst/>
+                <a:latin typeface="Times New Roman" panose="02020603050405020304" pitchFamily="18" charset="0"/>
+                <a:ea typeface="微軟正黑體" pitchFamily="34" charset="-120"/>
+                <a:cs typeface="Times New Roman" panose="02020603050405020304" pitchFamily="18" charset="0"/>
               </a:rPr>
               <a:t> </a:t>
             </a:r>
             <a:r>
-              <a:rPr lang="en-US" altLang="zh-TW" sz="4000" b="1" dirty="0" err="1">
-                <a:solidFill>
-                  <a:srgbClr val="660033"/>
-                </a:solidFill>
-                <a:effectLst/>
-                <a:latin typeface="Calibri" panose="020F0502020204030204" pitchFamily="34" charset="0"/>
-                <a:ea typeface="微軟正黑體" pitchFamily="34" charset="-120"/>
-                <a:cs typeface="Calibri" panose="020F0502020204030204" pitchFamily="34" charset="0"/>
+              <a:rPr lang="en-US" altLang="zh-TW" sz="3733" b="1" dirty="0" err="1">
+                <a:solidFill>
+                  <a:srgbClr val="660033"/>
+                </a:solidFill>
+                <a:effectLst/>
+                <a:latin typeface="Times New Roman" panose="02020603050405020304" pitchFamily="18" charset="0"/>
+                <a:ea typeface="微軟正黑體" pitchFamily="34" charset="-120"/>
+                <a:cs typeface="Times New Roman" panose="02020603050405020304" pitchFamily="18" charset="0"/>
               </a:rPr>
               <a:t>cây</a:t>
             </a:r>
             <a:r>
-              <a:rPr lang="en-US" altLang="zh-TW" sz="4000" b="1" dirty="0">
-                <a:solidFill>
-                  <a:srgbClr val="660033"/>
-                </a:solidFill>
-                <a:effectLst/>
-                <a:latin typeface="Calibri" panose="020F0502020204030204" pitchFamily="34" charset="0"/>
-                <a:ea typeface="微軟正黑體" pitchFamily="34" charset="-120"/>
-                <a:cs typeface="Calibri" panose="020F0502020204030204" pitchFamily="34" charset="0"/>
+              <a:rPr lang="en-US" altLang="zh-TW" sz="3733" b="1" dirty="0">
+                <a:solidFill>
+                  <a:srgbClr val="660033"/>
+                </a:solidFill>
+                <a:effectLst/>
+                <a:latin typeface="Times New Roman" panose="02020603050405020304" pitchFamily="18" charset="0"/>
+                <a:ea typeface="微軟正黑體" pitchFamily="34" charset="-120"/>
+                <a:cs typeface="Times New Roman" panose="02020603050405020304" pitchFamily="18" charset="0"/>
               </a:rPr>
               <a:t> </a:t>
             </a:r>
             <a:r>
-              <a:rPr lang="en-US" altLang="zh-TW" sz="4000" b="1" dirty="0" err="1">
-                <a:solidFill>
-                  <a:srgbClr val="660033"/>
-                </a:solidFill>
-                <a:effectLst/>
-                <a:latin typeface="Calibri" panose="020F0502020204030204" pitchFamily="34" charset="0"/>
-                <a:ea typeface="微軟正黑體" pitchFamily="34" charset="-120"/>
-                <a:cs typeface="Calibri" panose="020F0502020204030204" pitchFamily="34" charset="0"/>
+              <a:rPr lang="en-US" altLang="zh-TW" sz="3733" b="1" dirty="0" err="1">
+                <a:solidFill>
+                  <a:srgbClr val="660033"/>
+                </a:solidFill>
+                <a:effectLst/>
+                <a:latin typeface="Times New Roman" panose="02020603050405020304" pitchFamily="18" charset="0"/>
+                <a:ea typeface="微軟正黑體" pitchFamily="34" charset="-120"/>
+                <a:cs typeface="Times New Roman" panose="02020603050405020304" pitchFamily="18" charset="0"/>
               </a:rPr>
               <a:t>thập</a:t>
             </a:r>
             <a:r>
-              <a:rPr lang="en-US" altLang="zh-TW" sz="4000" b="1" dirty="0">
-                <a:solidFill>
-                  <a:srgbClr val="660033"/>
-                </a:solidFill>
-                <a:effectLst/>
-                <a:latin typeface="Calibri" panose="020F0502020204030204" pitchFamily="34" charset="0"/>
-                <a:ea typeface="微軟正黑體" pitchFamily="34" charset="-120"/>
-                <a:cs typeface="Calibri" panose="020F0502020204030204" pitchFamily="34" charset="0"/>
+              <a:rPr lang="en-US" altLang="zh-TW" sz="3733" b="1" dirty="0">
+                <a:solidFill>
+                  <a:srgbClr val="660033"/>
+                </a:solidFill>
+                <a:effectLst/>
+                <a:latin typeface="Times New Roman" panose="02020603050405020304" pitchFamily="18" charset="0"/>
+                <a:ea typeface="微軟正黑體" pitchFamily="34" charset="-120"/>
+                <a:cs typeface="Times New Roman" panose="02020603050405020304" pitchFamily="18" charset="0"/>
               </a:rPr>
               <a:t> </a:t>
             </a:r>
             <a:r>
-              <a:rPr lang="en-US" altLang="zh-TW" sz="4000" b="1" dirty="0" err="1">
-                <a:solidFill>
-                  <a:srgbClr val="660033"/>
-                </a:solidFill>
-                <a:effectLst/>
-                <a:latin typeface="Calibri" panose="020F0502020204030204" pitchFamily="34" charset="0"/>
-                <a:ea typeface="微軟正黑體" pitchFamily="34" charset="-120"/>
-                <a:cs typeface="Calibri" panose="020F0502020204030204" pitchFamily="34" charset="0"/>
+              <a:rPr lang="en-US" altLang="zh-TW" sz="3733" b="1" dirty="0" err="1">
+                <a:solidFill>
+                  <a:srgbClr val="660033"/>
+                </a:solidFill>
+                <a:effectLst/>
+                <a:latin typeface="Times New Roman" panose="02020603050405020304" pitchFamily="18" charset="0"/>
+                <a:ea typeface="微軟正黑體" pitchFamily="34" charset="-120"/>
+                <a:cs typeface="Times New Roman" panose="02020603050405020304" pitchFamily="18" charset="0"/>
               </a:rPr>
               <a:t>tự</a:t>
             </a:r>
             <a:r>
-              <a:rPr lang="en-US" altLang="zh-TW" sz="4000" b="1" dirty="0">
-                <a:solidFill>
-                  <a:srgbClr val="660033"/>
-                </a:solidFill>
-                <a:effectLst/>
-                <a:latin typeface="Calibri" panose="020F0502020204030204" pitchFamily="34" charset="0"/>
-                <a:ea typeface="微軟正黑體" pitchFamily="34" charset="-120"/>
-                <a:cs typeface="Calibri" panose="020F0502020204030204" pitchFamily="34" charset="0"/>
+              <a:rPr lang="en-US" altLang="zh-TW" sz="3733" b="1" dirty="0">
+                <a:solidFill>
+                  <a:srgbClr val="660033"/>
+                </a:solidFill>
+                <a:effectLst/>
+                <a:latin typeface="Times New Roman" panose="02020603050405020304" pitchFamily="18" charset="0"/>
+                <a:ea typeface="微軟正黑體" pitchFamily="34" charset="-120"/>
+                <a:cs typeface="Times New Roman" panose="02020603050405020304" pitchFamily="18" charset="0"/>
               </a:rPr>
               <a:t> </a:t>
             </a:r>
             <a:r>
-              <a:rPr lang="en-US" altLang="zh-TW" sz="4000" b="1" dirty="0" err="1">
-                <a:solidFill>
-                  <a:srgbClr val="660033"/>
-                </a:solidFill>
-                <a:effectLst/>
-                <a:latin typeface="Calibri" panose="020F0502020204030204" pitchFamily="34" charset="0"/>
-                <a:ea typeface="微軟正黑體" pitchFamily="34" charset="-120"/>
-                <a:cs typeface="Calibri" panose="020F0502020204030204" pitchFamily="34" charset="0"/>
+              <a:rPr lang="en-US" altLang="zh-TW" sz="3733" b="1" dirty="0" err="1">
+                <a:solidFill>
+                  <a:srgbClr val="660033"/>
+                </a:solidFill>
+                <a:effectLst/>
+                <a:latin typeface="Times New Roman" panose="02020603050405020304" pitchFamily="18" charset="0"/>
+                <a:ea typeface="微軟正黑體" pitchFamily="34" charset="-120"/>
+                <a:cs typeface="Times New Roman" panose="02020603050405020304" pitchFamily="18" charset="0"/>
               </a:rPr>
               <a:t>gẫm</a:t>
             </a:r>
             <a:r>
-              <a:rPr lang="en-US" altLang="zh-TW" sz="4000" b="1" dirty="0">
-                <a:solidFill>
-                  <a:srgbClr val="660033"/>
-                </a:solidFill>
-                <a:effectLst/>
-                <a:latin typeface="Calibri" panose="020F0502020204030204" pitchFamily="34" charset="0"/>
-                <a:ea typeface="微軟正黑體" pitchFamily="34" charset="-120"/>
-                <a:cs typeface="Calibri" panose="020F0502020204030204" pitchFamily="34" charset="0"/>
+              <a:rPr lang="en-US" altLang="zh-TW" sz="3733" b="1" dirty="0">
+                <a:solidFill>
+                  <a:srgbClr val="660033"/>
+                </a:solidFill>
+                <a:effectLst/>
+                <a:latin typeface="Times New Roman" panose="02020603050405020304" pitchFamily="18" charset="0"/>
+                <a:ea typeface="微軟正黑體" pitchFamily="34" charset="-120"/>
+                <a:cs typeface="Times New Roman" panose="02020603050405020304" pitchFamily="18" charset="0"/>
               </a:rPr>
               <a:t> </a:t>
             </a:r>
             <a:r>
-              <a:rPr lang="en-US" altLang="zh-TW" sz="4000" b="1" dirty="0" err="1">
-                <a:solidFill>
-                  <a:srgbClr val="660033"/>
-                </a:solidFill>
-                <a:effectLst/>
-                <a:latin typeface="Calibri" panose="020F0502020204030204" pitchFamily="34" charset="0"/>
-                <a:ea typeface="微軟正黑體" pitchFamily="34" charset="-120"/>
-                <a:cs typeface="Calibri" panose="020F0502020204030204" pitchFamily="34" charset="0"/>
+              <a:rPr lang="en-US" altLang="zh-TW" sz="3733" b="1" dirty="0" err="1">
+                <a:solidFill>
+                  <a:srgbClr val="660033"/>
+                </a:solidFill>
+                <a:effectLst/>
+                <a:latin typeface="Times New Roman" panose="02020603050405020304" pitchFamily="18" charset="0"/>
+                <a:ea typeface="微軟正黑體" pitchFamily="34" charset="-120"/>
+                <a:cs typeface="Times New Roman" panose="02020603050405020304" pitchFamily="18" charset="0"/>
               </a:rPr>
               <a:t>Chúa</a:t>
             </a:r>
             <a:r>
-              <a:rPr lang="en-US" altLang="zh-TW" sz="4000" b="1" dirty="0">
-                <a:solidFill>
-                  <a:srgbClr val="660033"/>
-                </a:solidFill>
-                <a:effectLst/>
-                <a:latin typeface="Calibri" panose="020F0502020204030204" pitchFamily="34" charset="0"/>
-                <a:ea typeface="微軟正黑體" pitchFamily="34" charset="-120"/>
-                <a:cs typeface="Calibri" panose="020F0502020204030204" pitchFamily="34" charset="0"/>
+              <a:rPr lang="en-US" altLang="zh-TW" sz="3733" b="1" dirty="0">
+                <a:solidFill>
+                  <a:srgbClr val="660033"/>
+                </a:solidFill>
+                <a:effectLst/>
+                <a:latin typeface="Times New Roman" panose="02020603050405020304" pitchFamily="18" charset="0"/>
+                <a:ea typeface="微軟正黑體" pitchFamily="34" charset="-120"/>
+                <a:cs typeface="Times New Roman" panose="02020603050405020304" pitchFamily="18" charset="0"/>
               </a:rPr>
               <a:t> </a:t>
             </a:r>
             <a:r>
-              <a:rPr lang="en-US" altLang="zh-TW" sz="4000" b="1" dirty="0" err="1">
-                <a:solidFill>
-                  <a:srgbClr val="660033"/>
-                </a:solidFill>
-                <a:effectLst/>
-                <a:latin typeface="Calibri" panose="020F0502020204030204" pitchFamily="34" charset="0"/>
-                <a:ea typeface="微軟正黑體" pitchFamily="34" charset="-120"/>
-                <a:cs typeface="Calibri" panose="020F0502020204030204" pitchFamily="34" charset="0"/>
+              <a:rPr lang="en-US" altLang="zh-TW" sz="3733" b="1" dirty="0" err="1">
+                <a:solidFill>
+                  <a:srgbClr val="660033"/>
+                </a:solidFill>
+                <a:effectLst/>
+                <a:latin typeface="Times New Roman" panose="02020603050405020304" pitchFamily="18" charset="0"/>
+                <a:ea typeface="微軟正黑體" pitchFamily="34" charset="-120"/>
+                <a:cs typeface="Times New Roman" panose="02020603050405020304" pitchFamily="18" charset="0"/>
               </a:rPr>
               <a:t>Jêsus</a:t>
             </a:r>
-            <a:endParaRPr lang="en-US" sz="4000" b="1" dirty="0">
+            <a:endParaRPr lang="en-US" sz="3733" b="1" dirty="0">
               <a:solidFill>
                 <a:srgbClr val="660033"/>
               </a:solidFill>
               <a:effectLst/>
-              <a:latin typeface="Calibri" panose="020F0502020204030204" pitchFamily="34" charset="0"/>
+              <a:latin typeface="Times New Roman" panose="02020603050405020304" pitchFamily="18" charset="0"/>
               <a:ea typeface="微軟正黑體" pitchFamily="34" charset="-120"/>
-              <a:cs typeface="Calibri" panose="020F0502020204030204" pitchFamily="34" charset="0"/>
+              <a:cs typeface="Times New Roman" panose="02020603050405020304" pitchFamily="18" charset="0"/>
             </a:endParaRPr>
           </a:p>
         </p:txBody>
@@ -8104,7 +8030,7 @@
         <p:spPr>
           <a:xfrm>
             <a:off x="0" y="5253203"/>
-            <a:ext cx="12192000" cy="748988"/>
+            <a:ext cx="12192000" cy="584775"/>
           </a:xfrm>
           <a:prstGeom prst="rect">
             <a:avLst/>
@@ -8119,37 +8045,21 @@
           <a:p>
             <a:pPr algn="ctr"/>
             <a:r>
-              <a:rPr lang="en-US" sz="4267" b="1" dirty="0">
+              <a:rPr lang="en-US" sz="3200" b="1" dirty="0">
                 <a:solidFill>
                   <a:srgbClr val="000066"/>
                 </a:solidFill>
                 <a:effectLst/>
-              </a:rPr>
-              <a:t>( </a:t>
-            </a:r>
-            <a:r>
-              <a:rPr lang="en-US" sz="4267" b="1" dirty="0" smtClean="0">
-                <a:solidFill>
-                  <a:srgbClr val="000066"/>
-                </a:solidFill>
-                <a:effectLst/>
-              </a:rPr>
-              <a:t>1 / 6 </a:t>
-            </a:r>
-            <a:r>
-              <a:rPr lang="en-US" sz="4267" b="1" dirty="0">
-                <a:solidFill>
-                  <a:srgbClr val="000066"/>
-                </a:solidFill>
-                <a:effectLst/>
-              </a:rPr>
-              <a:t>)</a:t>
-            </a:r>
-            <a:endParaRPr lang="vi-VN" sz="4267" b="1" dirty="0">
+                <a:ea typeface="Microsoft JhengHei" panose="020B0604030504040204" pitchFamily="34" charset="-120"/>
+              </a:rPr>
+              <a:t>( 1 / 6 )</a:t>
+            </a:r>
+            <a:endParaRPr lang="vi-VN" sz="3200" b="1" dirty="0">
               <a:solidFill>
                 <a:srgbClr val="000066"/>
               </a:solidFill>
               <a:effectLst/>
+              <a:ea typeface="Microsoft JhengHei" panose="020B0604030504040204" pitchFamily="34" charset="-120"/>
             </a:endParaRPr>
           </a:p>
         </p:txBody>
@@ -8382,200 +8292,197 @@
           </a:lstStyle>
           <a:p>
             <a:pPr marL="0" indent="0" algn="ctr">
-              <a:lnSpc>
-                <a:spcPts val="9000"/>
-              </a:lnSpc>
               <a:buNone/>
               <a:defRPr/>
             </a:pPr>
             <a:r>
-              <a:rPr lang="en-US" altLang="zh-TW" sz="4000" b="1" dirty="0" err="1">
-                <a:solidFill>
-                  <a:srgbClr val="660033"/>
-                </a:solidFill>
-                <a:effectLst/>
-                <a:latin typeface="Calibri" panose="020F0502020204030204" pitchFamily="34" charset="0"/>
-                <a:ea typeface="微軟正黑體" pitchFamily="34" charset="-120"/>
-                <a:cs typeface="Calibri" panose="020F0502020204030204" pitchFamily="34" charset="0"/>
+              <a:rPr lang="en-US" altLang="zh-TW" sz="3733" b="1" dirty="0" err="1">
+                <a:solidFill>
+                  <a:srgbClr val="660033"/>
+                </a:solidFill>
+                <a:effectLst/>
+                <a:latin typeface="Times New Roman" panose="02020603050405020304" pitchFamily="18" charset="0"/>
+                <a:ea typeface="微軟正黑體" pitchFamily="34" charset="-120"/>
+                <a:cs typeface="Times New Roman" panose="02020603050405020304" pitchFamily="18" charset="0"/>
               </a:rPr>
               <a:t>Chúa</a:t>
             </a:r>
             <a:r>
-              <a:rPr lang="en-US" altLang="zh-TW" sz="4000" b="1" dirty="0">
-                <a:solidFill>
-                  <a:srgbClr val="660033"/>
-                </a:solidFill>
-                <a:effectLst/>
-                <a:latin typeface="Calibri" panose="020F0502020204030204" pitchFamily="34" charset="0"/>
-                <a:ea typeface="微軟正黑體" pitchFamily="34" charset="-120"/>
-                <a:cs typeface="Calibri" panose="020F0502020204030204" pitchFamily="34" charset="0"/>
+              <a:rPr lang="en-US" altLang="zh-TW" sz="3733" b="1" dirty="0">
+                <a:solidFill>
+                  <a:srgbClr val="660033"/>
+                </a:solidFill>
+                <a:effectLst/>
+                <a:latin typeface="Times New Roman" panose="02020603050405020304" pitchFamily="18" charset="0"/>
+                <a:ea typeface="微軟正黑體" pitchFamily="34" charset="-120"/>
+                <a:cs typeface="Times New Roman" panose="02020603050405020304" pitchFamily="18" charset="0"/>
               </a:rPr>
               <a:t> </a:t>
             </a:r>
             <a:r>
-              <a:rPr lang="en-US" altLang="zh-TW" sz="4000" b="1" dirty="0" err="1">
-                <a:solidFill>
-                  <a:srgbClr val="660033"/>
-                </a:solidFill>
-                <a:effectLst/>
-                <a:latin typeface="Calibri" panose="020F0502020204030204" pitchFamily="34" charset="0"/>
-                <a:ea typeface="微軟正黑體" pitchFamily="34" charset="-120"/>
-                <a:cs typeface="Calibri" panose="020F0502020204030204" pitchFamily="34" charset="0"/>
+              <a:rPr lang="en-US" altLang="zh-TW" sz="3733" b="1" dirty="0" err="1">
+                <a:solidFill>
+                  <a:srgbClr val="660033"/>
+                </a:solidFill>
+                <a:effectLst/>
+                <a:latin typeface="Times New Roman" panose="02020603050405020304" pitchFamily="18" charset="0"/>
+                <a:ea typeface="微軟正黑體" pitchFamily="34" charset="-120"/>
+                <a:cs typeface="Times New Roman" panose="02020603050405020304" pitchFamily="18" charset="0"/>
               </a:rPr>
               <a:t>ôi</a:t>
             </a:r>
             <a:r>
-              <a:rPr lang="en-US" altLang="zh-TW" sz="4000" b="1" dirty="0">
-                <a:solidFill>
-                  <a:srgbClr val="660033"/>
-                </a:solidFill>
-                <a:effectLst/>
-                <a:latin typeface="Calibri" panose="020F0502020204030204" pitchFamily="34" charset="0"/>
-                <a:ea typeface="微軟正黑體" pitchFamily="34" charset="-120"/>
-                <a:cs typeface="Calibri" panose="020F0502020204030204" pitchFamily="34" charset="0"/>
+              <a:rPr lang="en-US" altLang="zh-TW" sz="3733" b="1" dirty="0">
+                <a:solidFill>
+                  <a:srgbClr val="660033"/>
+                </a:solidFill>
+                <a:effectLst/>
+                <a:latin typeface="Times New Roman" panose="02020603050405020304" pitchFamily="18" charset="0"/>
+                <a:ea typeface="微軟正黑體" pitchFamily="34" charset="-120"/>
+                <a:cs typeface="Times New Roman" panose="02020603050405020304" pitchFamily="18" charset="0"/>
               </a:rPr>
               <a:t>, </a:t>
             </a:r>
             <a:r>
-              <a:rPr lang="en-US" altLang="zh-TW" sz="4000" b="1" dirty="0" err="1">
-                <a:solidFill>
-                  <a:srgbClr val="660033"/>
-                </a:solidFill>
-                <a:effectLst/>
-                <a:latin typeface="Calibri" panose="020F0502020204030204" pitchFamily="34" charset="0"/>
-                <a:ea typeface="微軟正黑體" pitchFamily="34" charset="-120"/>
-                <a:cs typeface="Calibri" panose="020F0502020204030204" pitchFamily="34" charset="0"/>
+              <a:rPr lang="en-US" altLang="zh-TW" sz="3733" b="1" dirty="0" err="1">
+                <a:solidFill>
+                  <a:srgbClr val="660033"/>
+                </a:solidFill>
+                <a:effectLst/>
+                <a:latin typeface="Times New Roman" panose="02020603050405020304" pitchFamily="18" charset="0"/>
+                <a:ea typeface="微軟正黑體" pitchFamily="34" charset="-120"/>
+                <a:cs typeface="Times New Roman" panose="02020603050405020304" pitchFamily="18" charset="0"/>
               </a:rPr>
               <a:t>thân</a:t>
             </a:r>
             <a:r>
-              <a:rPr lang="en-US" altLang="zh-TW" sz="4000" b="1" dirty="0">
-                <a:solidFill>
-                  <a:srgbClr val="660033"/>
-                </a:solidFill>
-                <a:effectLst/>
-                <a:latin typeface="Calibri" panose="020F0502020204030204" pitchFamily="34" charset="0"/>
-                <a:ea typeface="微軟正黑體" pitchFamily="34" charset="-120"/>
-                <a:cs typeface="Calibri" panose="020F0502020204030204" pitchFamily="34" charset="0"/>
+              <a:rPr lang="en-US" altLang="zh-TW" sz="3733" b="1" dirty="0">
+                <a:solidFill>
+                  <a:srgbClr val="660033"/>
+                </a:solidFill>
+                <a:effectLst/>
+                <a:latin typeface="Times New Roman" panose="02020603050405020304" pitchFamily="18" charset="0"/>
+                <a:ea typeface="微軟正黑體" pitchFamily="34" charset="-120"/>
+                <a:cs typeface="Times New Roman" panose="02020603050405020304" pitchFamily="18" charset="0"/>
               </a:rPr>
               <a:t> </a:t>
             </a:r>
             <a:r>
-              <a:rPr lang="en-US" altLang="zh-TW" sz="4000" b="1" dirty="0" err="1">
-                <a:solidFill>
-                  <a:srgbClr val="660033"/>
-                </a:solidFill>
-                <a:effectLst/>
-                <a:latin typeface="Calibri" panose="020F0502020204030204" pitchFamily="34" charset="0"/>
-                <a:ea typeface="微軟正黑體" pitchFamily="34" charset="-120"/>
-                <a:cs typeface="Calibri" panose="020F0502020204030204" pitchFamily="34" charset="0"/>
+              <a:rPr lang="en-US" altLang="zh-TW" sz="3733" b="1" dirty="0" err="1">
+                <a:solidFill>
+                  <a:srgbClr val="660033"/>
+                </a:solidFill>
+                <a:effectLst/>
+                <a:latin typeface="Times New Roman" panose="02020603050405020304" pitchFamily="18" charset="0"/>
+                <a:ea typeface="微軟正黑體" pitchFamily="34" charset="-120"/>
+                <a:cs typeface="Times New Roman" panose="02020603050405020304" pitchFamily="18" charset="0"/>
               </a:rPr>
               <a:t>Ngài</a:t>
             </a:r>
             <a:r>
-              <a:rPr lang="en-US" altLang="zh-TW" sz="4000" b="1" dirty="0">
-                <a:solidFill>
-                  <a:srgbClr val="660033"/>
-                </a:solidFill>
-                <a:effectLst/>
-                <a:latin typeface="Calibri" panose="020F0502020204030204" pitchFamily="34" charset="0"/>
-                <a:ea typeface="微軟正黑體" pitchFamily="34" charset="-120"/>
-                <a:cs typeface="Calibri" panose="020F0502020204030204" pitchFamily="34" charset="0"/>
+              <a:rPr lang="en-US" altLang="zh-TW" sz="3733" b="1" dirty="0">
+                <a:solidFill>
+                  <a:srgbClr val="660033"/>
+                </a:solidFill>
+                <a:effectLst/>
+                <a:latin typeface="Times New Roman" panose="02020603050405020304" pitchFamily="18" charset="0"/>
+                <a:ea typeface="微軟正黑體" pitchFamily="34" charset="-120"/>
+                <a:cs typeface="Times New Roman" panose="02020603050405020304" pitchFamily="18" charset="0"/>
               </a:rPr>
               <a:t> </a:t>
             </a:r>
             <a:r>
-              <a:rPr lang="en-US" altLang="zh-TW" sz="4000" b="1" dirty="0" err="1">
-                <a:solidFill>
-                  <a:srgbClr val="660033"/>
-                </a:solidFill>
-                <a:effectLst/>
-                <a:latin typeface="Calibri" panose="020F0502020204030204" pitchFamily="34" charset="0"/>
-                <a:ea typeface="微軟正黑體" pitchFamily="34" charset="-120"/>
-                <a:cs typeface="Calibri" panose="020F0502020204030204" pitchFamily="34" charset="0"/>
+              <a:rPr lang="en-US" altLang="zh-TW" sz="3733" b="1" dirty="0" err="1">
+                <a:solidFill>
+                  <a:srgbClr val="660033"/>
+                </a:solidFill>
+                <a:effectLst/>
+                <a:latin typeface="Times New Roman" panose="02020603050405020304" pitchFamily="18" charset="0"/>
+                <a:ea typeface="微軟正黑體" pitchFamily="34" charset="-120"/>
+                <a:cs typeface="Times New Roman" panose="02020603050405020304" pitchFamily="18" charset="0"/>
               </a:rPr>
               <a:t>tuôn</a:t>
             </a:r>
             <a:r>
-              <a:rPr lang="en-US" altLang="zh-TW" sz="4000" b="1" dirty="0">
-                <a:solidFill>
-                  <a:srgbClr val="660033"/>
-                </a:solidFill>
-                <a:effectLst/>
-                <a:latin typeface="Calibri" panose="020F0502020204030204" pitchFamily="34" charset="0"/>
-                <a:ea typeface="微軟正黑體" pitchFamily="34" charset="-120"/>
-                <a:cs typeface="Calibri" panose="020F0502020204030204" pitchFamily="34" charset="0"/>
+              <a:rPr lang="en-US" altLang="zh-TW" sz="3733" b="1" dirty="0">
+                <a:solidFill>
+                  <a:srgbClr val="660033"/>
+                </a:solidFill>
+                <a:effectLst/>
+                <a:latin typeface="Times New Roman" panose="02020603050405020304" pitchFamily="18" charset="0"/>
+                <a:ea typeface="微軟正黑體" pitchFamily="34" charset="-120"/>
+                <a:cs typeface="Times New Roman" panose="02020603050405020304" pitchFamily="18" charset="0"/>
               </a:rPr>
               <a:t> </a:t>
             </a:r>
             <a:r>
-              <a:rPr lang="en-US" altLang="zh-TW" sz="4000" b="1" dirty="0" err="1">
-                <a:solidFill>
-                  <a:srgbClr val="660033"/>
-                </a:solidFill>
-                <a:effectLst/>
-                <a:latin typeface="Calibri" panose="020F0502020204030204" pitchFamily="34" charset="0"/>
-                <a:ea typeface="微軟正黑體" pitchFamily="34" charset="-120"/>
-                <a:cs typeface="Calibri" panose="020F0502020204030204" pitchFamily="34" charset="0"/>
+              <a:rPr lang="en-US" altLang="zh-TW" sz="3733" b="1" dirty="0" err="1">
+                <a:solidFill>
+                  <a:srgbClr val="660033"/>
+                </a:solidFill>
+                <a:effectLst/>
+                <a:latin typeface="Times New Roman" panose="02020603050405020304" pitchFamily="18" charset="0"/>
+                <a:ea typeface="微軟正黑體" pitchFamily="34" charset="-120"/>
+                <a:cs typeface="Times New Roman" panose="02020603050405020304" pitchFamily="18" charset="0"/>
               </a:rPr>
               <a:t>huyết</a:t>
             </a:r>
             <a:r>
-              <a:rPr lang="en-US" altLang="zh-TW" sz="4000" b="1" dirty="0">
-                <a:solidFill>
-                  <a:srgbClr val="660033"/>
-                </a:solidFill>
-                <a:effectLst/>
-                <a:latin typeface="Calibri" panose="020F0502020204030204" pitchFamily="34" charset="0"/>
-                <a:ea typeface="微軟正黑體" pitchFamily="34" charset="-120"/>
-                <a:cs typeface="Calibri" panose="020F0502020204030204" pitchFamily="34" charset="0"/>
+              <a:rPr lang="en-US" altLang="zh-TW" sz="3733" b="1" dirty="0">
+                <a:solidFill>
+                  <a:srgbClr val="660033"/>
+                </a:solidFill>
+                <a:effectLst/>
+                <a:latin typeface="Times New Roman" panose="02020603050405020304" pitchFamily="18" charset="0"/>
+                <a:ea typeface="微軟正黑體" pitchFamily="34" charset="-120"/>
+                <a:cs typeface="Times New Roman" panose="02020603050405020304" pitchFamily="18" charset="0"/>
               </a:rPr>
               <a:t> </a:t>
             </a:r>
             <a:r>
-              <a:rPr lang="en-US" altLang="zh-TW" sz="4000" b="1" dirty="0" err="1">
-                <a:solidFill>
-                  <a:srgbClr val="660033"/>
-                </a:solidFill>
-                <a:effectLst/>
-                <a:latin typeface="Calibri" panose="020F0502020204030204" pitchFamily="34" charset="0"/>
-                <a:ea typeface="微軟正黑體" pitchFamily="34" charset="-120"/>
-                <a:cs typeface="Calibri" panose="020F0502020204030204" pitchFamily="34" charset="0"/>
+              <a:rPr lang="en-US" altLang="zh-TW" sz="3733" b="1" dirty="0" err="1">
+                <a:solidFill>
+                  <a:srgbClr val="660033"/>
+                </a:solidFill>
+                <a:effectLst/>
+                <a:latin typeface="Times New Roman" panose="02020603050405020304" pitchFamily="18" charset="0"/>
+                <a:ea typeface="微軟正黑體" pitchFamily="34" charset="-120"/>
+                <a:cs typeface="Times New Roman" panose="02020603050405020304" pitchFamily="18" charset="0"/>
               </a:rPr>
               <a:t>thắm</a:t>
             </a:r>
             <a:r>
-              <a:rPr lang="en-US" altLang="zh-TW" sz="4000" b="1" dirty="0">
-                <a:solidFill>
-                  <a:srgbClr val="660033"/>
-                </a:solidFill>
-                <a:effectLst/>
-                <a:latin typeface="Calibri" panose="020F0502020204030204" pitchFamily="34" charset="0"/>
-                <a:ea typeface="微軟正黑體" pitchFamily="34" charset="-120"/>
-                <a:cs typeface="Calibri" panose="020F0502020204030204" pitchFamily="34" charset="0"/>
+              <a:rPr lang="en-US" altLang="zh-TW" sz="3733" b="1" dirty="0">
+                <a:solidFill>
+                  <a:srgbClr val="660033"/>
+                </a:solidFill>
+                <a:effectLst/>
+                <a:latin typeface="Times New Roman" panose="02020603050405020304" pitchFamily="18" charset="0"/>
+                <a:ea typeface="微軟正黑體" pitchFamily="34" charset="-120"/>
+                <a:cs typeface="Times New Roman" panose="02020603050405020304" pitchFamily="18" charset="0"/>
               </a:rPr>
               <a:t> </a:t>
             </a:r>
             <a:r>
-              <a:rPr lang="en-US" altLang="zh-TW" sz="4000" b="1" dirty="0" err="1">
-                <a:solidFill>
-                  <a:srgbClr val="660033"/>
-                </a:solidFill>
-                <a:effectLst/>
-                <a:latin typeface="Calibri" panose="020F0502020204030204" pitchFamily="34" charset="0"/>
-                <a:ea typeface="微軟正黑體" pitchFamily="34" charset="-120"/>
-                <a:cs typeface="Calibri" panose="020F0502020204030204" pitchFamily="34" charset="0"/>
+              <a:rPr lang="en-US" altLang="zh-TW" sz="3733" b="1" dirty="0" err="1">
+                <a:solidFill>
+                  <a:srgbClr val="660033"/>
+                </a:solidFill>
+                <a:effectLst/>
+                <a:latin typeface="Times New Roman" panose="02020603050405020304" pitchFamily="18" charset="0"/>
+                <a:ea typeface="微軟正黑體" pitchFamily="34" charset="-120"/>
+                <a:cs typeface="Times New Roman" panose="02020603050405020304" pitchFamily="18" charset="0"/>
               </a:rPr>
               <a:t>thay</a:t>
             </a:r>
-            <a:endParaRPr lang="en-US" sz="4000" b="1" dirty="0">
+            <a:endParaRPr lang="en-US" sz="3733" b="1" dirty="0">
               <a:solidFill>
                 <a:srgbClr val="660033"/>
               </a:solidFill>
               <a:effectLst/>
-              <a:latin typeface="Calibri" panose="020F0502020204030204" pitchFamily="34" charset="0"/>
+              <a:latin typeface="Times New Roman" panose="02020603050405020304" pitchFamily="18" charset="0"/>
               <a:ea typeface="微軟正黑體" pitchFamily="34" charset="-120"/>
-              <a:cs typeface="Calibri" panose="020F0502020204030204" pitchFamily="34" charset="0"/>
+              <a:cs typeface="Times New Roman" panose="02020603050405020304" pitchFamily="18" charset="0"/>
             </a:endParaRPr>
           </a:p>
         </p:txBody>
@@ -8589,7 +8496,7 @@
         <p:spPr>
           <a:xfrm>
             <a:off x="0" y="5253203"/>
-            <a:ext cx="12192000" cy="748988"/>
+            <a:ext cx="12192000" cy="584775"/>
           </a:xfrm>
           <a:prstGeom prst="rect">
             <a:avLst/>
@@ -8604,17 +8511,21 @@
           <a:p>
             <a:pPr algn="ctr"/>
             <a:r>
-              <a:rPr lang="en-US" sz="4267" b="1" dirty="0">
+              <a:rPr lang="en-US" sz="3200" b="1" dirty="0">
                 <a:solidFill>
                   <a:srgbClr val="000066"/>
                 </a:solidFill>
+                <a:effectLst/>
+                <a:ea typeface="Microsoft JhengHei" panose="020B0604030504040204" pitchFamily="34" charset="-120"/>
               </a:rPr>
               <a:t>( 5 / 6 )</a:t>
             </a:r>
-            <a:endParaRPr lang="vi-VN" sz="4267" b="1" dirty="0">
+            <a:endParaRPr lang="vi-VN" sz="3200" b="1" dirty="0">
               <a:solidFill>
                 <a:srgbClr val="000066"/>
               </a:solidFill>
+              <a:effectLst/>
+              <a:ea typeface="Microsoft JhengHei" panose="020B0604030504040204" pitchFamily="34" charset="-120"/>
             </a:endParaRPr>
           </a:p>
         </p:txBody>
@@ -8847,140 +8758,137 @@
           </a:lstStyle>
           <a:p>
             <a:pPr marL="0" indent="0" algn="ctr">
-              <a:lnSpc>
-                <a:spcPts val="9000"/>
-              </a:lnSpc>
               <a:buNone/>
               <a:defRPr/>
             </a:pPr>
             <a:r>
-              <a:rPr lang="en-US" altLang="zh-TW" sz="4000" b="1" dirty="0" err="1">
-                <a:solidFill>
-                  <a:srgbClr val="660033"/>
-                </a:solidFill>
-                <a:effectLst/>
-                <a:latin typeface="Calibri" panose="020F0502020204030204" pitchFamily="34" charset="0"/>
-                <a:ea typeface="微軟正黑體" pitchFamily="34" charset="-120"/>
-                <a:cs typeface="Calibri" panose="020F0502020204030204" pitchFamily="34" charset="0"/>
+              <a:rPr lang="en-US" altLang="zh-TW" sz="3733" b="1" dirty="0" err="1">
+                <a:solidFill>
+                  <a:srgbClr val="660033"/>
+                </a:solidFill>
+                <a:effectLst/>
+                <a:latin typeface="Times New Roman" panose="02020603050405020304" pitchFamily="18" charset="0"/>
+                <a:ea typeface="微軟正黑體" pitchFamily="34" charset="-120"/>
+                <a:cs typeface="Times New Roman" panose="02020603050405020304" pitchFamily="18" charset="0"/>
               </a:rPr>
               <a:t>khổ</a:t>
             </a:r>
             <a:r>
-              <a:rPr lang="en-US" altLang="zh-TW" sz="4000" b="1" dirty="0">
-                <a:solidFill>
-                  <a:srgbClr val="660033"/>
-                </a:solidFill>
-                <a:effectLst/>
-                <a:latin typeface="Calibri" panose="020F0502020204030204" pitchFamily="34" charset="0"/>
-                <a:ea typeface="微軟正黑體" pitchFamily="34" charset="-120"/>
-                <a:cs typeface="Calibri" panose="020F0502020204030204" pitchFamily="34" charset="0"/>
+              <a:rPr lang="en-US" altLang="zh-TW" sz="3733" b="1" dirty="0">
+                <a:solidFill>
+                  <a:srgbClr val="660033"/>
+                </a:solidFill>
+                <a:effectLst/>
+                <a:latin typeface="Times New Roman" panose="02020603050405020304" pitchFamily="18" charset="0"/>
+                <a:ea typeface="微軟正黑體" pitchFamily="34" charset="-120"/>
+                <a:cs typeface="Times New Roman" panose="02020603050405020304" pitchFamily="18" charset="0"/>
               </a:rPr>
               <a:t> </a:t>
             </a:r>
             <a:r>
-              <a:rPr lang="en-US" altLang="zh-TW" sz="4000" b="1" dirty="0" err="1">
-                <a:solidFill>
-                  <a:srgbClr val="660033"/>
-                </a:solidFill>
-                <a:effectLst/>
-                <a:latin typeface="Calibri" panose="020F0502020204030204" pitchFamily="34" charset="0"/>
-                <a:ea typeface="微軟正黑體" pitchFamily="34" charset="-120"/>
-                <a:cs typeface="Calibri" panose="020F0502020204030204" pitchFamily="34" charset="0"/>
+              <a:rPr lang="en-US" altLang="zh-TW" sz="3733" b="1" dirty="0" err="1">
+                <a:solidFill>
+                  <a:srgbClr val="660033"/>
+                </a:solidFill>
+                <a:effectLst/>
+                <a:latin typeface="Times New Roman" panose="02020603050405020304" pitchFamily="18" charset="0"/>
+                <a:ea typeface="微軟正黑體" pitchFamily="34" charset="-120"/>
+                <a:cs typeface="Times New Roman" panose="02020603050405020304" pitchFamily="18" charset="0"/>
               </a:rPr>
               <a:t>hình</a:t>
             </a:r>
             <a:r>
-              <a:rPr lang="en-US" altLang="zh-TW" sz="4000" b="1" dirty="0">
-                <a:solidFill>
-                  <a:srgbClr val="660033"/>
-                </a:solidFill>
-                <a:effectLst/>
-                <a:latin typeface="Calibri" panose="020F0502020204030204" pitchFamily="34" charset="0"/>
-                <a:ea typeface="微軟正黑體" pitchFamily="34" charset="-120"/>
-                <a:cs typeface="Calibri" panose="020F0502020204030204" pitchFamily="34" charset="0"/>
+              <a:rPr lang="en-US" altLang="zh-TW" sz="3733" b="1" dirty="0">
+                <a:solidFill>
+                  <a:srgbClr val="660033"/>
+                </a:solidFill>
+                <a:effectLst/>
+                <a:latin typeface="Times New Roman" panose="02020603050405020304" pitchFamily="18" charset="0"/>
+                <a:ea typeface="微軟正黑體" pitchFamily="34" charset="-120"/>
+                <a:cs typeface="Times New Roman" panose="02020603050405020304" pitchFamily="18" charset="0"/>
               </a:rPr>
               <a:t> </a:t>
             </a:r>
             <a:r>
-              <a:rPr lang="en-US" altLang="zh-TW" sz="4000" b="1" dirty="0" err="1">
-                <a:solidFill>
-                  <a:srgbClr val="660033"/>
-                </a:solidFill>
-                <a:effectLst/>
-                <a:latin typeface="Calibri" panose="020F0502020204030204" pitchFamily="34" charset="0"/>
-                <a:ea typeface="微軟正黑體" pitchFamily="34" charset="-120"/>
-                <a:cs typeface="Calibri" panose="020F0502020204030204" pitchFamily="34" charset="0"/>
+              <a:rPr lang="en-US" altLang="zh-TW" sz="3733" b="1" dirty="0" err="1">
+                <a:solidFill>
+                  <a:srgbClr val="660033"/>
+                </a:solidFill>
+                <a:effectLst/>
+                <a:latin typeface="Times New Roman" panose="02020603050405020304" pitchFamily="18" charset="0"/>
+                <a:ea typeface="微軟正黑體" pitchFamily="34" charset="-120"/>
+                <a:cs typeface="Times New Roman" panose="02020603050405020304" pitchFamily="18" charset="0"/>
               </a:rPr>
               <a:t>bởi</a:t>
             </a:r>
             <a:r>
-              <a:rPr lang="en-US" altLang="zh-TW" sz="4000" b="1" dirty="0">
-                <a:solidFill>
-                  <a:srgbClr val="660033"/>
-                </a:solidFill>
-                <a:effectLst/>
-                <a:latin typeface="Calibri" panose="020F0502020204030204" pitchFamily="34" charset="0"/>
-                <a:ea typeface="微軟正黑體" pitchFamily="34" charset="-120"/>
-                <a:cs typeface="Calibri" panose="020F0502020204030204" pitchFamily="34" charset="0"/>
+              <a:rPr lang="en-US" altLang="zh-TW" sz="3733" b="1" dirty="0">
+                <a:solidFill>
+                  <a:srgbClr val="660033"/>
+                </a:solidFill>
+                <a:effectLst/>
+                <a:latin typeface="Times New Roman" panose="02020603050405020304" pitchFamily="18" charset="0"/>
+                <a:ea typeface="微軟正黑體" pitchFamily="34" charset="-120"/>
+                <a:cs typeface="Times New Roman" panose="02020603050405020304" pitchFamily="18" charset="0"/>
               </a:rPr>
               <a:t> </a:t>
             </a:r>
             <a:r>
-              <a:rPr lang="en-US" altLang="zh-TW" sz="4000" b="1" dirty="0" err="1">
-                <a:solidFill>
-                  <a:srgbClr val="660033"/>
-                </a:solidFill>
-                <a:effectLst/>
-                <a:latin typeface="Calibri" panose="020F0502020204030204" pitchFamily="34" charset="0"/>
-                <a:ea typeface="微軟正黑體" pitchFamily="34" charset="-120"/>
-                <a:cs typeface="Calibri" panose="020F0502020204030204" pitchFamily="34" charset="0"/>
+              <a:rPr lang="en-US" altLang="zh-TW" sz="3733" b="1" dirty="0" err="1">
+                <a:solidFill>
+                  <a:srgbClr val="660033"/>
+                </a:solidFill>
+                <a:effectLst/>
+                <a:latin typeface="Times New Roman" panose="02020603050405020304" pitchFamily="18" charset="0"/>
+                <a:ea typeface="微軟正黑體" pitchFamily="34" charset="-120"/>
+                <a:cs typeface="Times New Roman" panose="02020603050405020304" pitchFamily="18" charset="0"/>
               </a:rPr>
               <a:t>chúng</a:t>
             </a:r>
             <a:r>
-              <a:rPr lang="en-US" altLang="zh-TW" sz="4000" b="1" dirty="0">
-                <a:solidFill>
-                  <a:srgbClr val="660033"/>
-                </a:solidFill>
-                <a:effectLst/>
-                <a:latin typeface="Calibri" panose="020F0502020204030204" pitchFamily="34" charset="0"/>
-                <a:ea typeface="微軟正黑體" pitchFamily="34" charset="-120"/>
-                <a:cs typeface="Calibri" panose="020F0502020204030204" pitchFamily="34" charset="0"/>
+              <a:rPr lang="en-US" altLang="zh-TW" sz="3733" b="1" dirty="0">
+                <a:solidFill>
+                  <a:srgbClr val="660033"/>
+                </a:solidFill>
+                <a:effectLst/>
+                <a:latin typeface="Times New Roman" panose="02020603050405020304" pitchFamily="18" charset="0"/>
+                <a:ea typeface="微軟正黑體" pitchFamily="34" charset="-120"/>
+                <a:cs typeface="Times New Roman" panose="02020603050405020304" pitchFamily="18" charset="0"/>
               </a:rPr>
               <a:t> </a:t>
             </a:r>
             <a:r>
-              <a:rPr lang="en-US" altLang="zh-TW" sz="4000" b="1" dirty="0" err="1">
-                <a:solidFill>
-                  <a:srgbClr val="660033"/>
-                </a:solidFill>
-                <a:effectLst/>
-                <a:latin typeface="Calibri" panose="020F0502020204030204" pitchFamily="34" charset="0"/>
-                <a:ea typeface="微軟正黑體" pitchFamily="34" charset="-120"/>
-                <a:cs typeface="Calibri" panose="020F0502020204030204" pitchFamily="34" charset="0"/>
+              <a:rPr lang="en-US" altLang="zh-TW" sz="3733" b="1" dirty="0" err="1">
+                <a:solidFill>
+                  <a:srgbClr val="660033"/>
+                </a:solidFill>
+                <a:effectLst/>
+                <a:latin typeface="Times New Roman" panose="02020603050405020304" pitchFamily="18" charset="0"/>
+                <a:ea typeface="微軟正黑體" pitchFamily="34" charset="-120"/>
+                <a:cs typeface="Times New Roman" panose="02020603050405020304" pitchFamily="18" charset="0"/>
               </a:rPr>
               <a:t>tôi</a:t>
             </a:r>
             <a:r>
-              <a:rPr lang="en-US" altLang="zh-TW" sz="4000" b="1" dirty="0">
-                <a:solidFill>
-                  <a:srgbClr val="660033"/>
-                </a:solidFill>
-                <a:effectLst/>
-                <a:latin typeface="Calibri" panose="020F0502020204030204" pitchFamily="34" charset="0"/>
-                <a:ea typeface="微軟正黑體" pitchFamily="34" charset="-120"/>
-                <a:cs typeface="Calibri" panose="020F0502020204030204" pitchFamily="34" charset="0"/>
+              <a:rPr lang="en-US" altLang="zh-TW" sz="3733" b="1" dirty="0">
+                <a:solidFill>
+                  <a:srgbClr val="660033"/>
+                </a:solidFill>
+                <a:effectLst/>
+                <a:latin typeface="Times New Roman" panose="02020603050405020304" pitchFamily="18" charset="0"/>
+                <a:ea typeface="微軟正黑體" pitchFamily="34" charset="-120"/>
+                <a:cs typeface="Times New Roman" panose="02020603050405020304" pitchFamily="18" charset="0"/>
               </a:rPr>
               <a:t> nay</a:t>
             </a:r>
-            <a:endParaRPr lang="en-US" sz="4000" b="1" dirty="0">
+            <a:endParaRPr lang="en-US" sz="3733" b="1" dirty="0">
               <a:solidFill>
                 <a:srgbClr val="660033"/>
               </a:solidFill>
               <a:effectLst/>
-              <a:latin typeface="Calibri" panose="020F0502020204030204" pitchFamily="34" charset="0"/>
+              <a:latin typeface="Times New Roman" panose="02020603050405020304" pitchFamily="18" charset="0"/>
               <a:ea typeface="微軟正黑體" pitchFamily="34" charset="-120"/>
-              <a:cs typeface="Calibri" panose="020F0502020204030204" pitchFamily="34" charset="0"/>
+              <a:cs typeface="Times New Roman" panose="02020603050405020304" pitchFamily="18" charset="0"/>
             </a:endParaRPr>
           </a:p>
         </p:txBody>
@@ -8994,7 +8902,7 @@
         <p:spPr>
           <a:xfrm>
             <a:off x="0" y="5253203"/>
-            <a:ext cx="12192000" cy="748988"/>
+            <a:ext cx="12192000" cy="584775"/>
           </a:xfrm>
           <a:prstGeom prst="rect">
             <a:avLst/>
@@ -9009,17 +8917,21 @@
           <a:p>
             <a:pPr algn="ctr"/>
             <a:r>
-              <a:rPr lang="en-US" sz="4267" b="1" dirty="0">
+              <a:rPr lang="en-US" sz="3200" b="1" dirty="0">
                 <a:solidFill>
                   <a:srgbClr val="000066"/>
                 </a:solidFill>
+                <a:effectLst/>
+                <a:ea typeface="Microsoft JhengHei" panose="020B0604030504040204" pitchFamily="34" charset="-120"/>
               </a:rPr>
               <a:t>( 5 / 6 )</a:t>
             </a:r>
-            <a:endParaRPr lang="vi-VN" sz="4267" b="1" dirty="0">
+            <a:endParaRPr lang="vi-VN" sz="3200" b="1" dirty="0">
               <a:solidFill>
                 <a:srgbClr val="000066"/>
               </a:solidFill>
+              <a:effectLst/>
+              <a:ea typeface="Microsoft JhengHei" panose="020B0604030504040204" pitchFamily="34" charset="-120"/>
             </a:endParaRPr>
           </a:p>
         </p:txBody>
@@ -9252,200 +9164,197 @@
           </a:lstStyle>
           <a:p>
             <a:pPr marL="0" indent="0" algn="ctr">
-              <a:lnSpc>
-                <a:spcPts val="9000"/>
-              </a:lnSpc>
               <a:buNone/>
               <a:defRPr/>
             </a:pPr>
             <a:r>
-              <a:rPr lang="en-US" altLang="zh-TW" sz="4000" b="1" dirty="0" err="1">
-                <a:solidFill>
-                  <a:srgbClr val="660033"/>
-                </a:solidFill>
-                <a:effectLst/>
-                <a:latin typeface="Calibri" panose="020F0502020204030204" pitchFamily="34" charset="0"/>
-                <a:ea typeface="微軟正黑體" pitchFamily="34" charset="-120"/>
-                <a:cs typeface="Calibri" panose="020F0502020204030204" pitchFamily="34" charset="0"/>
+              <a:rPr lang="en-US" altLang="zh-TW" sz="3733" b="1" dirty="0" err="1">
+                <a:solidFill>
+                  <a:srgbClr val="660033"/>
+                </a:solidFill>
+                <a:effectLst/>
+                <a:latin typeface="Times New Roman" panose="02020603050405020304" pitchFamily="18" charset="0"/>
+                <a:ea typeface="微軟正黑體" pitchFamily="34" charset="-120"/>
+                <a:cs typeface="Times New Roman" panose="02020603050405020304" pitchFamily="18" charset="0"/>
               </a:rPr>
               <a:t>Kìa</a:t>
             </a:r>
             <a:r>
-              <a:rPr lang="en-US" altLang="zh-TW" sz="4000" b="1" dirty="0">
-                <a:solidFill>
-                  <a:srgbClr val="660033"/>
-                </a:solidFill>
-                <a:effectLst/>
-                <a:latin typeface="Calibri" panose="020F0502020204030204" pitchFamily="34" charset="0"/>
-                <a:ea typeface="微軟正黑體" pitchFamily="34" charset="-120"/>
-                <a:cs typeface="Calibri" panose="020F0502020204030204" pitchFamily="34" charset="0"/>
+              <a:rPr lang="en-US" altLang="zh-TW" sz="3733" b="1" dirty="0">
+                <a:solidFill>
+                  <a:srgbClr val="660033"/>
+                </a:solidFill>
+                <a:effectLst/>
+                <a:latin typeface="Times New Roman" panose="02020603050405020304" pitchFamily="18" charset="0"/>
+                <a:ea typeface="微軟正黑體" pitchFamily="34" charset="-120"/>
+                <a:cs typeface="Times New Roman" panose="02020603050405020304" pitchFamily="18" charset="0"/>
               </a:rPr>
               <a:t> </a:t>
             </a:r>
             <a:r>
-              <a:rPr lang="en-US" altLang="zh-TW" sz="4000" b="1" dirty="0" err="1">
-                <a:solidFill>
-                  <a:srgbClr val="660033"/>
-                </a:solidFill>
-                <a:effectLst/>
-                <a:latin typeface="Calibri" panose="020F0502020204030204" pitchFamily="34" charset="0"/>
-                <a:ea typeface="微軟正黑體" pitchFamily="34" charset="-120"/>
-                <a:cs typeface="Calibri" panose="020F0502020204030204" pitchFamily="34" charset="0"/>
+              <a:rPr lang="en-US" altLang="zh-TW" sz="3733" b="1" dirty="0" err="1">
+                <a:solidFill>
+                  <a:srgbClr val="660033"/>
+                </a:solidFill>
+                <a:effectLst/>
+                <a:latin typeface="Times New Roman" panose="02020603050405020304" pitchFamily="18" charset="0"/>
+                <a:ea typeface="微軟正黑體" pitchFamily="34" charset="-120"/>
+                <a:cs typeface="Times New Roman" panose="02020603050405020304" pitchFamily="18" charset="0"/>
               </a:rPr>
               <a:t>xem</a:t>
             </a:r>
             <a:r>
-              <a:rPr lang="en-US" altLang="zh-TW" sz="4000" b="1" dirty="0">
-                <a:solidFill>
-                  <a:srgbClr val="660033"/>
-                </a:solidFill>
-                <a:effectLst/>
-                <a:latin typeface="Calibri" panose="020F0502020204030204" pitchFamily="34" charset="0"/>
-                <a:ea typeface="微軟正黑體" pitchFamily="34" charset="-120"/>
-                <a:cs typeface="Calibri" panose="020F0502020204030204" pitchFamily="34" charset="0"/>
+              <a:rPr lang="en-US" altLang="zh-TW" sz="3733" b="1" dirty="0">
+                <a:solidFill>
+                  <a:srgbClr val="660033"/>
+                </a:solidFill>
+                <a:effectLst/>
+                <a:latin typeface="Times New Roman" panose="02020603050405020304" pitchFamily="18" charset="0"/>
+                <a:ea typeface="微軟正黑體" pitchFamily="34" charset="-120"/>
+                <a:cs typeface="Times New Roman" panose="02020603050405020304" pitchFamily="18" charset="0"/>
               </a:rPr>
               <a:t> </a:t>
             </a:r>
             <a:r>
-              <a:rPr lang="en-US" altLang="zh-TW" sz="4000" b="1" dirty="0" err="1">
-                <a:solidFill>
-                  <a:srgbClr val="660033"/>
-                </a:solidFill>
-                <a:effectLst/>
-                <a:latin typeface="Calibri" panose="020F0502020204030204" pitchFamily="34" charset="0"/>
-                <a:ea typeface="微軟正黑體" pitchFamily="34" charset="-120"/>
-                <a:cs typeface="Calibri" panose="020F0502020204030204" pitchFamily="34" charset="0"/>
+              <a:rPr lang="en-US" altLang="zh-TW" sz="3733" b="1" dirty="0" err="1">
+                <a:solidFill>
+                  <a:srgbClr val="660033"/>
+                </a:solidFill>
+                <a:effectLst/>
+                <a:latin typeface="Times New Roman" panose="02020603050405020304" pitchFamily="18" charset="0"/>
+                <a:ea typeface="微軟正黑體" pitchFamily="34" charset="-120"/>
+                <a:cs typeface="Times New Roman" panose="02020603050405020304" pitchFamily="18" charset="0"/>
               </a:rPr>
               <a:t>bầu</a:t>
             </a:r>
             <a:r>
-              <a:rPr lang="en-US" altLang="zh-TW" sz="4000" b="1" dirty="0">
-                <a:solidFill>
-                  <a:srgbClr val="660033"/>
-                </a:solidFill>
-                <a:effectLst/>
-                <a:latin typeface="Calibri" panose="020F0502020204030204" pitchFamily="34" charset="0"/>
-                <a:ea typeface="微軟正黑體" pitchFamily="34" charset="-120"/>
-                <a:cs typeface="Calibri" panose="020F0502020204030204" pitchFamily="34" charset="0"/>
+              <a:rPr lang="en-US" altLang="zh-TW" sz="3733" b="1" dirty="0">
+                <a:solidFill>
+                  <a:srgbClr val="660033"/>
+                </a:solidFill>
+                <a:effectLst/>
+                <a:latin typeface="Times New Roman" panose="02020603050405020304" pitchFamily="18" charset="0"/>
+                <a:ea typeface="微軟正黑體" pitchFamily="34" charset="-120"/>
+                <a:cs typeface="Times New Roman" panose="02020603050405020304" pitchFamily="18" charset="0"/>
               </a:rPr>
               <a:t> </a:t>
             </a:r>
             <a:r>
-              <a:rPr lang="en-US" altLang="zh-TW" sz="4000" b="1" dirty="0" err="1">
-                <a:solidFill>
-                  <a:srgbClr val="660033"/>
-                </a:solidFill>
-                <a:effectLst/>
-                <a:latin typeface="Calibri" panose="020F0502020204030204" pitchFamily="34" charset="0"/>
-                <a:ea typeface="微軟正黑體" pitchFamily="34" charset="-120"/>
-                <a:cs typeface="Calibri" panose="020F0502020204030204" pitchFamily="34" charset="0"/>
+              <a:rPr lang="en-US" altLang="zh-TW" sz="3733" b="1" dirty="0" err="1">
+                <a:solidFill>
+                  <a:srgbClr val="660033"/>
+                </a:solidFill>
+                <a:effectLst/>
+                <a:latin typeface="Times New Roman" panose="02020603050405020304" pitchFamily="18" charset="0"/>
+                <a:ea typeface="微軟正黑體" pitchFamily="34" charset="-120"/>
+                <a:cs typeface="Times New Roman" panose="02020603050405020304" pitchFamily="18" charset="0"/>
               </a:rPr>
               <a:t>trời</a:t>
             </a:r>
             <a:r>
-              <a:rPr lang="en-US" altLang="zh-TW" sz="4000" b="1" dirty="0">
-                <a:solidFill>
-                  <a:srgbClr val="660033"/>
-                </a:solidFill>
-                <a:effectLst/>
-                <a:latin typeface="Calibri" panose="020F0502020204030204" pitchFamily="34" charset="0"/>
-                <a:ea typeface="微軟正黑體" pitchFamily="34" charset="-120"/>
-                <a:cs typeface="Calibri" panose="020F0502020204030204" pitchFamily="34" charset="0"/>
+              <a:rPr lang="en-US" altLang="zh-TW" sz="3733" b="1" dirty="0">
+                <a:solidFill>
+                  <a:srgbClr val="660033"/>
+                </a:solidFill>
+                <a:effectLst/>
+                <a:latin typeface="Times New Roman" panose="02020603050405020304" pitchFamily="18" charset="0"/>
+                <a:ea typeface="微軟正黑體" pitchFamily="34" charset="-120"/>
+                <a:cs typeface="Times New Roman" panose="02020603050405020304" pitchFamily="18" charset="0"/>
               </a:rPr>
               <a:t> </a:t>
             </a:r>
             <a:r>
-              <a:rPr lang="en-US" altLang="zh-TW" sz="4000" b="1" dirty="0" err="1">
-                <a:solidFill>
-                  <a:srgbClr val="660033"/>
-                </a:solidFill>
-                <a:effectLst/>
-                <a:latin typeface="Calibri" panose="020F0502020204030204" pitchFamily="34" charset="0"/>
-                <a:ea typeface="微軟正黑體" pitchFamily="34" charset="-120"/>
-                <a:cs typeface="Calibri" panose="020F0502020204030204" pitchFamily="34" charset="0"/>
+              <a:rPr lang="en-US" altLang="zh-TW" sz="3733" b="1" dirty="0" err="1">
+                <a:solidFill>
+                  <a:srgbClr val="660033"/>
+                </a:solidFill>
+                <a:effectLst/>
+                <a:latin typeface="Times New Roman" panose="02020603050405020304" pitchFamily="18" charset="0"/>
+                <a:ea typeface="微軟正黑體" pitchFamily="34" charset="-120"/>
+                <a:cs typeface="Times New Roman" panose="02020603050405020304" pitchFamily="18" charset="0"/>
               </a:rPr>
               <a:t>tăm</a:t>
             </a:r>
             <a:r>
-              <a:rPr lang="en-US" altLang="zh-TW" sz="4000" b="1" dirty="0">
-                <a:solidFill>
-                  <a:srgbClr val="660033"/>
-                </a:solidFill>
-                <a:effectLst/>
-                <a:latin typeface="Calibri" panose="020F0502020204030204" pitchFamily="34" charset="0"/>
-                <a:ea typeface="微軟正黑體" pitchFamily="34" charset="-120"/>
-                <a:cs typeface="Calibri" panose="020F0502020204030204" pitchFamily="34" charset="0"/>
+              <a:rPr lang="en-US" altLang="zh-TW" sz="3733" b="1" dirty="0">
+                <a:solidFill>
+                  <a:srgbClr val="660033"/>
+                </a:solidFill>
+                <a:effectLst/>
+                <a:latin typeface="Times New Roman" panose="02020603050405020304" pitchFamily="18" charset="0"/>
+                <a:ea typeface="微軟正黑體" pitchFamily="34" charset="-120"/>
+                <a:cs typeface="Times New Roman" panose="02020603050405020304" pitchFamily="18" charset="0"/>
               </a:rPr>
               <a:t> </a:t>
             </a:r>
             <a:r>
-              <a:rPr lang="en-US" altLang="zh-TW" sz="4000" b="1" dirty="0" err="1">
-                <a:solidFill>
-                  <a:srgbClr val="660033"/>
-                </a:solidFill>
-                <a:effectLst/>
-                <a:latin typeface="Calibri" panose="020F0502020204030204" pitchFamily="34" charset="0"/>
-                <a:ea typeface="微軟正黑體" pitchFamily="34" charset="-120"/>
-                <a:cs typeface="Calibri" panose="020F0502020204030204" pitchFamily="34" charset="0"/>
+              <a:rPr lang="en-US" altLang="zh-TW" sz="3733" b="1" dirty="0" err="1">
+                <a:solidFill>
+                  <a:srgbClr val="660033"/>
+                </a:solidFill>
+                <a:effectLst/>
+                <a:latin typeface="Times New Roman" panose="02020603050405020304" pitchFamily="18" charset="0"/>
+                <a:ea typeface="微軟正黑體" pitchFamily="34" charset="-120"/>
+                <a:cs typeface="Times New Roman" panose="02020603050405020304" pitchFamily="18" charset="0"/>
               </a:rPr>
               <a:t>tối</a:t>
             </a:r>
             <a:r>
-              <a:rPr lang="en-US" altLang="zh-TW" sz="4000" b="1" dirty="0">
-                <a:solidFill>
-                  <a:srgbClr val="660033"/>
-                </a:solidFill>
-                <a:effectLst/>
-                <a:latin typeface="Calibri" panose="020F0502020204030204" pitchFamily="34" charset="0"/>
-                <a:ea typeface="微軟正黑體" pitchFamily="34" charset="-120"/>
-                <a:cs typeface="Calibri" panose="020F0502020204030204" pitchFamily="34" charset="0"/>
+              <a:rPr lang="en-US" altLang="zh-TW" sz="3733" b="1" dirty="0">
+                <a:solidFill>
+                  <a:srgbClr val="660033"/>
+                </a:solidFill>
+                <a:effectLst/>
+                <a:latin typeface="Times New Roman" panose="02020603050405020304" pitchFamily="18" charset="0"/>
+                <a:ea typeface="微軟正黑體" pitchFamily="34" charset="-120"/>
+                <a:cs typeface="Times New Roman" panose="02020603050405020304" pitchFamily="18" charset="0"/>
               </a:rPr>
               <a:t> </a:t>
             </a:r>
             <a:r>
-              <a:rPr lang="en-US" altLang="zh-TW" sz="4000" b="1" dirty="0" err="1">
-                <a:solidFill>
-                  <a:srgbClr val="660033"/>
-                </a:solidFill>
-                <a:effectLst/>
-                <a:latin typeface="Calibri" panose="020F0502020204030204" pitchFamily="34" charset="0"/>
-                <a:ea typeface="微軟正黑體" pitchFamily="34" charset="-120"/>
-                <a:cs typeface="Calibri" panose="020F0502020204030204" pitchFamily="34" charset="0"/>
+              <a:rPr lang="en-US" altLang="zh-TW" sz="3733" b="1" dirty="0" err="1">
+                <a:solidFill>
+                  <a:srgbClr val="660033"/>
+                </a:solidFill>
+                <a:effectLst/>
+                <a:latin typeface="Times New Roman" panose="02020603050405020304" pitchFamily="18" charset="0"/>
+                <a:ea typeface="微軟正黑體" pitchFamily="34" charset="-120"/>
+                <a:cs typeface="Times New Roman" panose="02020603050405020304" pitchFamily="18" charset="0"/>
               </a:rPr>
               <a:t>đê</a:t>
             </a:r>
             <a:r>
-              <a:rPr lang="en-US" altLang="zh-TW" sz="4000" b="1" dirty="0">
-                <a:solidFill>
-                  <a:srgbClr val="660033"/>
-                </a:solidFill>
-                <a:effectLst/>
-                <a:latin typeface="Calibri" panose="020F0502020204030204" pitchFamily="34" charset="0"/>
-                <a:ea typeface="微軟正黑體" pitchFamily="34" charset="-120"/>
-                <a:cs typeface="Calibri" panose="020F0502020204030204" pitchFamily="34" charset="0"/>
+              <a:rPr lang="en-US" altLang="zh-TW" sz="3733" b="1" dirty="0">
+                <a:solidFill>
+                  <a:srgbClr val="660033"/>
+                </a:solidFill>
+                <a:effectLst/>
+                <a:latin typeface="Times New Roman" panose="02020603050405020304" pitchFamily="18" charset="0"/>
+                <a:ea typeface="微軟正黑體" pitchFamily="34" charset="-120"/>
+                <a:cs typeface="Times New Roman" panose="02020603050405020304" pitchFamily="18" charset="0"/>
               </a:rPr>
               <a:t> </a:t>
             </a:r>
             <a:r>
-              <a:rPr lang="en-US" altLang="zh-TW" sz="4000" b="1" dirty="0" err="1">
-                <a:solidFill>
-                  <a:srgbClr val="660033"/>
-                </a:solidFill>
-                <a:effectLst/>
-                <a:latin typeface="Calibri" panose="020F0502020204030204" pitchFamily="34" charset="0"/>
-                <a:ea typeface="微軟正黑體" pitchFamily="34" charset="-120"/>
-                <a:cs typeface="Calibri" panose="020F0502020204030204" pitchFamily="34" charset="0"/>
+              <a:rPr lang="en-US" altLang="zh-TW" sz="3733" b="1" dirty="0" err="1">
+                <a:solidFill>
+                  <a:srgbClr val="660033"/>
+                </a:solidFill>
+                <a:effectLst/>
+                <a:latin typeface="Times New Roman" panose="02020603050405020304" pitchFamily="18" charset="0"/>
+                <a:ea typeface="微軟正黑體" pitchFamily="34" charset="-120"/>
+                <a:cs typeface="Times New Roman" panose="02020603050405020304" pitchFamily="18" charset="0"/>
               </a:rPr>
               <a:t>mê</a:t>
             </a:r>
-            <a:endParaRPr lang="en-US" sz="4000" b="1" dirty="0">
+            <a:endParaRPr lang="en-US" sz="3733" b="1" dirty="0">
               <a:solidFill>
                 <a:srgbClr val="660033"/>
               </a:solidFill>
               <a:effectLst/>
-              <a:latin typeface="Calibri" panose="020F0502020204030204" pitchFamily="34" charset="0"/>
+              <a:latin typeface="Times New Roman" panose="02020603050405020304" pitchFamily="18" charset="0"/>
               <a:ea typeface="微軟正黑體" pitchFamily="34" charset="-120"/>
-              <a:cs typeface="Calibri" panose="020F0502020204030204" pitchFamily="34" charset="0"/>
+              <a:cs typeface="Times New Roman" panose="02020603050405020304" pitchFamily="18" charset="0"/>
             </a:endParaRPr>
           </a:p>
         </p:txBody>
@@ -9459,7 +9368,7 @@
         <p:spPr>
           <a:xfrm>
             <a:off x="0" y="5253203"/>
-            <a:ext cx="12192000" cy="748988"/>
+            <a:ext cx="12192000" cy="584775"/>
           </a:xfrm>
           <a:prstGeom prst="rect">
             <a:avLst/>
@@ -9474,37 +9383,21 @@
           <a:p>
             <a:pPr algn="ctr"/>
             <a:r>
-              <a:rPr lang="en-US" sz="4267" b="1" dirty="0">
+              <a:rPr lang="en-US" sz="3200" b="1" dirty="0">
                 <a:solidFill>
                   <a:srgbClr val="000066"/>
                 </a:solidFill>
                 <a:effectLst/>
-              </a:rPr>
-              <a:t>( </a:t>
-            </a:r>
-            <a:r>
-              <a:rPr lang="en-US" sz="4267" b="1" dirty="0" smtClean="0">
-                <a:solidFill>
-                  <a:srgbClr val="000066"/>
-                </a:solidFill>
-                <a:effectLst/>
-              </a:rPr>
-              <a:t>6 / 6 </a:t>
-            </a:r>
-            <a:r>
-              <a:rPr lang="en-US" sz="4267" b="1" dirty="0">
-                <a:solidFill>
-                  <a:srgbClr val="000066"/>
-                </a:solidFill>
-                <a:effectLst/>
-              </a:rPr>
-              <a:t>)</a:t>
-            </a:r>
-            <a:endParaRPr lang="vi-VN" sz="4267" b="1" dirty="0">
+                <a:ea typeface="Microsoft JhengHei" panose="020B0604030504040204" pitchFamily="34" charset="-120"/>
+              </a:rPr>
+              <a:t>( 6 / 6 )</a:t>
+            </a:r>
+            <a:endParaRPr lang="vi-VN" sz="3200" b="1" dirty="0">
               <a:solidFill>
                 <a:srgbClr val="000066"/>
               </a:solidFill>
               <a:effectLst/>
+              <a:ea typeface="Microsoft JhengHei" panose="020B0604030504040204" pitchFamily="34" charset="-120"/>
             </a:endParaRPr>
           </a:p>
         </p:txBody>
@@ -9737,128 +9630,125 @@
           </a:lstStyle>
           <a:p>
             <a:pPr marL="0" indent="0" algn="ctr">
-              <a:lnSpc>
-                <a:spcPts val="9000"/>
-              </a:lnSpc>
               <a:buNone/>
               <a:defRPr/>
             </a:pPr>
             <a:r>
-              <a:rPr lang="en-US" altLang="zh-TW" sz="4000" b="1" dirty="0" err="1">
-                <a:solidFill>
-                  <a:srgbClr val="660033"/>
-                </a:solidFill>
-                <a:effectLst/>
-                <a:latin typeface="Calibri" panose="020F0502020204030204" pitchFamily="34" charset="0"/>
-                <a:ea typeface="微軟正黑體" pitchFamily="34" charset="-120"/>
-                <a:cs typeface="Calibri" panose="020F0502020204030204" pitchFamily="34" charset="0"/>
+              <a:rPr lang="en-US" altLang="zh-TW" sz="3733" b="1" dirty="0" err="1">
+                <a:solidFill>
+                  <a:srgbClr val="660033"/>
+                </a:solidFill>
+                <a:effectLst/>
+                <a:latin typeface="Times New Roman" panose="02020603050405020304" pitchFamily="18" charset="0"/>
+                <a:ea typeface="微軟正黑體" pitchFamily="34" charset="-120"/>
+                <a:cs typeface="Times New Roman" panose="02020603050405020304" pitchFamily="18" charset="0"/>
               </a:rPr>
               <a:t>đương</a:t>
             </a:r>
             <a:r>
-              <a:rPr lang="en-US" altLang="zh-TW" sz="4000" b="1" dirty="0">
-                <a:solidFill>
-                  <a:srgbClr val="660033"/>
-                </a:solidFill>
-                <a:effectLst/>
-                <a:latin typeface="Calibri" panose="020F0502020204030204" pitchFamily="34" charset="0"/>
-                <a:ea typeface="微軟正黑體" pitchFamily="34" charset="-120"/>
-                <a:cs typeface="Calibri" panose="020F0502020204030204" pitchFamily="34" charset="0"/>
+              <a:rPr lang="en-US" altLang="zh-TW" sz="3733" b="1" dirty="0">
+                <a:solidFill>
+                  <a:srgbClr val="660033"/>
+                </a:solidFill>
+                <a:effectLst/>
+                <a:latin typeface="Times New Roman" panose="02020603050405020304" pitchFamily="18" charset="0"/>
+                <a:ea typeface="微軟正黑體" pitchFamily="34" charset="-120"/>
+                <a:cs typeface="Times New Roman" panose="02020603050405020304" pitchFamily="18" charset="0"/>
               </a:rPr>
               <a:t> </a:t>
             </a:r>
             <a:r>
-              <a:rPr lang="en-US" altLang="zh-TW" sz="4000" b="1" dirty="0" err="1">
-                <a:solidFill>
-                  <a:srgbClr val="660033"/>
-                </a:solidFill>
-                <a:effectLst/>
-                <a:latin typeface="Calibri" panose="020F0502020204030204" pitchFamily="34" charset="0"/>
-                <a:ea typeface="微軟正黑體" pitchFamily="34" charset="-120"/>
-                <a:cs typeface="Calibri" panose="020F0502020204030204" pitchFamily="34" charset="0"/>
+              <a:rPr lang="en-US" altLang="zh-TW" sz="3733" b="1" dirty="0" err="1">
+                <a:solidFill>
+                  <a:srgbClr val="660033"/>
+                </a:solidFill>
+                <a:effectLst/>
+                <a:latin typeface="Times New Roman" panose="02020603050405020304" pitchFamily="18" charset="0"/>
+                <a:ea typeface="微軟正黑體" pitchFamily="34" charset="-120"/>
+                <a:cs typeface="Times New Roman" panose="02020603050405020304" pitchFamily="18" charset="0"/>
               </a:rPr>
               <a:t>giữa</a:t>
             </a:r>
             <a:r>
-              <a:rPr lang="en-US" altLang="zh-TW" sz="4000" b="1" dirty="0">
-                <a:solidFill>
-                  <a:srgbClr val="660033"/>
-                </a:solidFill>
-                <a:effectLst/>
-                <a:latin typeface="Calibri" panose="020F0502020204030204" pitchFamily="34" charset="0"/>
-                <a:ea typeface="微軟正黑體" pitchFamily="34" charset="-120"/>
-                <a:cs typeface="Calibri" panose="020F0502020204030204" pitchFamily="34" charset="0"/>
+              <a:rPr lang="en-US" altLang="zh-TW" sz="3733" b="1" dirty="0">
+                <a:solidFill>
+                  <a:srgbClr val="660033"/>
+                </a:solidFill>
+                <a:effectLst/>
+                <a:latin typeface="Times New Roman" panose="02020603050405020304" pitchFamily="18" charset="0"/>
+                <a:ea typeface="微軟正黑體" pitchFamily="34" charset="-120"/>
+                <a:cs typeface="Times New Roman" panose="02020603050405020304" pitchFamily="18" charset="0"/>
               </a:rPr>
               <a:t> ban </a:t>
             </a:r>
             <a:r>
-              <a:rPr lang="en-US" altLang="zh-TW" sz="4000" b="1" dirty="0" err="1">
-                <a:solidFill>
-                  <a:srgbClr val="660033"/>
-                </a:solidFill>
-                <a:effectLst/>
-                <a:latin typeface="Calibri" panose="020F0502020204030204" pitchFamily="34" charset="0"/>
-                <a:ea typeface="微軟正黑體" pitchFamily="34" charset="-120"/>
-                <a:cs typeface="Calibri" panose="020F0502020204030204" pitchFamily="34" charset="0"/>
+              <a:rPr lang="en-US" altLang="zh-TW" sz="3733" b="1" dirty="0" err="1">
+                <a:solidFill>
+                  <a:srgbClr val="660033"/>
+                </a:solidFill>
+                <a:effectLst/>
+                <a:latin typeface="Times New Roman" panose="02020603050405020304" pitchFamily="18" charset="0"/>
+                <a:ea typeface="微軟正黑體" pitchFamily="34" charset="-120"/>
+                <a:cs typeface="Times New Roman" panose="02020603050405020304" pitchFamily="18" charset="0"/>
               </a:rPr>
               <a:t>ngày</a:t>
             </a:r>
             <a:r>
-              <a:rPr lang="en-US" altLang="zh-TW" sz="4000" b="1" dirty="0">
-                <a:solidFill>
-                  <a:srgbClr val="660033"/>
-                </a:solidFill>
-                <a:effectLst/>
-                <a:latin typeface="Calibri" panose="020F0502020204030204" pitchFamily="34" charset="0"/>
-                <a:ea typeface="微軟正黑體" pitchFamily="34" charset="-120"/>
-                <a:cs typeface="Calibri" panose="020F0502020204030204" pitchFamily="34" charset="0"/>
+              <a:rPr lang="en-US" altLang="zh-TW" sz="3733" b="1" dirty="0">
+                <a:solidFill>
+                  <a:srgbClr val="660033"/>
+                </a:solidFill>
+                <a:effectLst/>
+                <a:latin typeface="Times New Roman" panose="02020603050405020304" pitchFamily="18" charset="0"/>
+                <a:ea typeface="微軟正黑體" pitchFamily="34" charset="-120"/>
+                <a:cs typeface="Times New Roman" panose="02020603050405020304" pitchFamily="18" charset="0"/>
               </a:rPr>
               <a:t> </a:t>
             </a:r>
             <a:r>
-              <a:rPr lang="en-US" altLang="zh-TW" sz="4000" b="1" dirty="0" err="1">
-                <a:solidFill>
-                  <a:srgbClr val="660033"/>
-                </a:solidFill>
-                <a:effectLst/>
-                <a:latin typeface="Calibri" panose="020F0502020204030204" pitchFamily="34" charset="0"/>
-                <a:ea typeface="微軟正黑體" pitchFamily="34" charset="-120"/>
-                <a:cs typeface="Calibri" panose="020F0502020204030204" pitchFamily="34" charset="0"/>
+              <a:rPr lang="en-US" altLang="zh-TW" sz="3733" b="1" dirty="0" err="1">
+                <a:solidFill>
+                  <a:srgbClr val="660033"/>
+                </a:solidFill>
+                <a:effectLst/>
+                <a:latin typeface="Times New Roman" panose="02020603050405020304" pitchFamily="18" charset="0"/>
+                <a:ea typeface="微軟正黑體" pitchFamily="34" charset="-120"/>
+                <a:cs typeface="Times New Roman" panose="02020603050405020304" pitchFamily="18" charset="0"/>
               </a:rPr>
               <a:t>gớm</a:t>
             </a:r>
             <a:r>
-              <a:rPr lang="en-US" altLang="zh-TW" sz="4000" b="1" dirty="0">
-                <a:solidFill>
-                  <a:srgbClr val="660033"/>
-                </a:solidFill>
-                <a:effectLst/>
-                <a:latin typeface="Calibri" panose="020F0502020204030204" pitchFamily="34" charset="0"/>
-                <a:ea typeface="微軟正黑體" pitchFamily="34" charset="-120"/>
-                <a:cs typeface="Calibri" panose="020F0502020204030204" pitchFamily="34" charset="0"/>
+              <a:rPr lang="en-US" altLang="zh-TW" sz="3733" b="1" dirty="0">
+                <a:solidFill>
+                  <a:srgbClr val="660033"/>
+                </a:solidFill>
+                <a:effectLst/>
+                <a:latin typeface="Times New Roman" panose="02020603050405020304" pitchFamily="18" charset="0"/>
+                <a:ea typeface="微軟正黑體" pitchFamily="34" charset="-120"/>
+                <a:cs typeface="Times New Roman" panose="02020603050405020304" pitchFamily="18" charset="0"/>
               </a:rPr>
               <a:t> </a:t>
             </a:r>
             <a:r>
-              <a:rPr lang="en-US" altLang="zh-TW" sz="4000" b="1" dirty="0" err="1">
-                <a:solidFill>
-                  <a:srgbClr val="660033"/>
-                </a:solidFill>
-                <a:effectLst/>
-                <a:latin typeface="Calibri" panose="020F0502020204030204" pitchFamily="34" charset="0"/>
-                <a:ea typeface="微軟正黑體" pitchFamily="34" charset="-120"/>
-                <a:cs typeface="Calibri" panose="020F0502020204030204" pitchFamily="34" charset="0"/>
+              <a:rPr lang="en-US" altLang="zh-TW" sz="3733" b="1" dirty="0" err="1">
+                <a:solidFill>
+                  <a:srgbClr val="660033"/>
+                </a:solidFill>
+                <a:effectLst/>
+                <a:latin typeface="Times New Roman" panose="02020603050405020304" pitchFamily="18" charset="0"/>
+                <a:ea typeface="微軟正黑體" pitchFamily="34" charset="-120"/>
+                <a:cs typeface="Times New Roman" panose="02020603050405020304" pitchFamily="18" charset="0"/>
               </a:rPr>
               <a:t>ghê</a:t>
             </a:r>
-            <a:endParaRPr lang="en-US" sz="4000" b="1" dirty="0">
+            <a:endParaRPr lang="en-US" sz="3733" b="1" dirty="0">
               <a:solidFill>
                 <a:srgbClr val="660033"/>
               </a:solidFill>
               <a:effectLst/>
-              <a:latin typeface="Calibri" panose="020F0502020204030204" pitchFamily="34" charset="0"/>
+              <a:latin typeface="Times New Roman" panose="02020603050405020304" pitchFamily="18" charset="0"/>
               <a:ea typeface="微軟正黑體" pitchFamily="34" charset="-120"/>
-              <a:cs typeface="Calibri" panose="020F0502020204030204" pitchFamily="34" charset="0"/>
+              <a:cs typeface="Times New Roman" panose="02020603050405020304" pitchFamily="18" charset="0"/>
             </a:endParaRPr>
           </a:p>
         </p:txBody>
@@ -9872,7 +9762,7 @@
         <p:spPr>
           <a:xfrm>
             <a:off x="0" y="5253203"/>
-            <a:ext cx="12192000" cy="748988"/>
+            <a:ext cx="12192000" cy="584775"/>
           </a:xfrm>
           <a:prstGeom prst="rect">
             <a:avLst/>
@@ -9887,17 +9777,21 @@
           <a:p>
             <a:pPr algn="ctr"/>
             <a:r>
-              <a:rPr lang="en-US" sz="4267" b="1" dirty="0">
+              <a:rPr lang="en-US" sz="3200" b="1" dirty="0">
                 <a:solidFill>
                   <a:srgbClr val="000066"/>
                 </a:solidFill>
+                <a:effectLst/>
+                <a:ea typeface="Microsoft JhengHei" panose="020B0604030504040204" pitchFamily="34" charset="-120"/>
               </a:rPr>
               <a:t>( 6 / 6 )</a:t>
             </a:r>
-            <a:endParaRPr lang="vi-VN" sz="4267" b="1" dirty="0">
+            <a:endParaRPr lang="vi-VN" sz="3200" b="1" dirty="0">
               <a:solidFill>
                 <a:srgbClr val="000066"/>
               </a:solidFill>
+              <a:effectLst/>
+              <a:ea typeface="Microsoft JhengHei" panose="020B0604030504040204" pitchFamily="34" charset="-120"/>
             </a:endParaRPr>
           </a:p>
         </p:txBody>
@@ -10130,152 +10024,149 @@
           </a:lstStyle>
           <a:p>
             <a:pPr marL="0" indent="0" algn="ctr">
-              <a:lnSpc>
-                <a:spcPts val="9000"/>
-              </a:lnSpc>
               <a:buNone/>
               <a:defRPr/>
             </a:pPr>
             <a:r>
-              <a:rPr lang="en-US" altLang="zh-TW" sz="4000" b="1" dirty="0" err="1">
-                <a:solidFill>
-                  <a:srgbClr val="660033"/>
-                </a:solidFill>
-                <a:effectLst/>
-                <a:latin typeface="Calibri" panose="020F0502020204030204" pitchFamily="34" charset="0"/>
-                <a:ea typeface="微軟正黑體" pitchFamily="34" charset="-120"/>
-                <a:cs typeface="Calibri" panose="020F0502020204030204" pitchFamily="34" charset="0"/>
+              <a:rPr lang="en-US" altLang="zh-TW" sz="3733" b="1" dirty="0" err="1">
+                <a:solidFill>
+                  <a:srgbClr val="660033"/>
+                </a:solidFill>
+                <a:effectLst/>
+                <a:latin typeface="Times New Roman" panose="02020603050405020304" pitchFamily="18" charset="0"/>
+                <a:ea typeface="微軟正黑體" pitchFamily="34" charset="-120"/>
+                <a:cs typeface="Times New Roman" panose="02020603050405020304" pitchFamily="18" charset="0"/>
               </a:rPr>
               <a:t>Chính</a:t>
             </a:r>
             <a:r>
-              <a:rPr lang="en-US" altLang="zh-TW" sz="4000" b="1" dirty="0">
-                <a:solidFill>
-                  <a:srgbClr val="660033"/>
-                </a:solidFill>
-                <a:effectLst/>
-                <a:latin typeface="Calibri" panose="020F0502020204030204" pitchFamily="34" charset="0"/>
-                <a:ea typeface="微軟正黑體" pitchFamily="34" charset="-120"/>
-                <a:cs typeface="Calibri" panose="020F0502020204030204" pitchFamily="34" charset="0"/>
+              <a:rPr lang="en-US" altLang="zh-TW" sz="3733" b="1" dirty="0">
+                <a:solidFill>
+                  <a:srgbClr val="660033"/>
+                </a:solidFill>
+                <a:effectLst/>
+                <a:latin typeface="Times New Roman" panose="02020603050405020304" pitchFamily="18" charset="0"/>
+                <a:ea typeface="微軟正黑體" pitchFamily="34" charset="-120"/>
+                <a:cs typeface="Times New Roman" panose="02020603050405020304" pitchFamily="18" charset="0"/>
               </a:rPr>
               <a:t> </a:t>
             </a:r>
             <a:r>
-              <a:rPr lang="en-US" altLang="zh-TW" sz="4000" b="1" dirty="0" err="1">
-                <a:solidFill>
-                  <a:srgbClr val="660033"/>
-                </a:solidFill>
-                <a:effectLst/>
-                <a:latin typeface="Calibri" panose="020F0502020204030204" pitchFamily="34" charset="0"/>
-                <a:ea typeface="微軟正黑體" pitchFamily="34" charset="-120"/>
-                <a:cs typeface="Calibri" panose="020F0502020204030204" pitchFamily="34" charset="0"/>
+              <a:rPr lang="en-US" altLang="zh-TW" sz="3733" b="1" dirty="0" err="1">
+                <a:solidFill>
+                  <a:srgbClr val="660033"/>
+                </a:solidFill>
+                <a:effectLst/>
+                <a:latin typeface="Times New Roman" panose="02020603050405020304" pitchFamily="18" charset="0"/>
+                <a:ea typeface="微軟正黑體" pitchFamily="34" charset="-120"/>
+                <a:cs typeface="Times New Roman" panose="02020603050405020304" pitchFamily="18" charset="0"/>
               </a:rPr>
               <a:t>trong</a:t>
             </a:r>
             <a:r>
-              <a:rPr lang="en-US" altLang="zh-TW" sz="4000" b="1" dirty="0">
-                <a:solidFill>
-                  <a:srgbClr val="660033"/>
-                </a:solidFill>
-                <a:effectLst/>
-                <a:latin typeface="Calibri" panose="020F0502020204030204" pitchFamily="34" charset="0"/>
-                <a:ea typeface="微軟正黑體" pitchFamily="34" charset="-120"/>
-                <a:cs typeface="Calibri" panose="020F0502020204030204" pitchFamily="34" charset="0"/>
+              <a:rPr lang="en-US" altLang="zh-TW" sz="3733" b="1" dirty="0">
+                <a:solidFill>
+                  <a:srgbClr val="660033"/>
+                </a:solidFill>
+                <a:effectLst/>
+                <a:latin typeface="Times New Roman" panose="02020603050405020304" pitchFamily="18" charset="0"/>
+                <a:ea typeface="微軟正黑體" pitchFamily="34" charset="-120"/>
+                <a:cs typeface="Times New Roman" panose="02020603050405020304" pitchFamily="18" charset="0"/>
               </a:rPr>
               <a:t> </a:t>
             </a:r>
             <a:r>
-              <a:rPr lang="en-US" altLang="zh-TW" sz="4000" b="1" dirty="0" err="1">
-                <a:solidFill>
-                  <a:srgbClr val="660033"/>
-                </a:solidFill>
-                <a:effectLst/>
-                <a:latin typeface="Calibri" panose="020F0502020204030204" pitchFamily="34" charset="0"/>
-                <a:ea typeface="微軟正黑體" pitchFamily="34" charset="-120"/>
-                <a:cs typeface="Calibri" panose="020F0502020204030204" pitchFamily="34" charset="0"/>
+              <a:rPr lang="en-US" altLang="zh-TW" sz="3733" b="1" dirty="0" err="1">
+                <a:solidFill>
+                  <a:srgbClr val="660033"/>
+                </a:solidFill>
+                <a:effectLst/>
+                <a:latin typeface="Times New Roman" panose="02020603050405020304" pitchFamily="18" charset="0"/>
+                <a:ea typeface="微軟正黑體" pitchFamily="34" charset="-120"/>
+                <a:cs typeface="Times New Roman" panose="02020603050405020304" pitchFamily="18" charset="0"/>
               </a:rPr>
               <a:t>điện</a:t>
             </a:r>
             <a:r>
-              <a:rPr lang="en-US" altLang="zh-TW" sz="4000" b="1" dirty="0">
-                <a:solidFill>
-                  <a:srgbClr val="660033"/>
-                </a:solidFill>
-                <a:effectLst/>
-                <a:latin typeface="Calibri" panose="020F0502020204030204" pitchFamily="34" charset="0"/>
-                <a:ea typeface="微軟正黑體" pitchFamily="34" charset="-120"/>
-                <a:cs typeface="Calibri" panose="020F0502020204030204" pitchFamily="34" charset="0"/>
+              <a:rPr lang="en-US" altLang="zh-TW" sz="3733" b="1" dirty="0">
+                <a:solidFill>
+                  <a:srgbClr val="660033"/>
+                </a:solidFill>
+                <a:effectLst/>
+                <a:latin typeface="Times New Roman" panose="02020603050405020304" pitchFamily="18" charset="0"/>
+                <a:ea typeface="微軟正黑體" pitchFamily="34" charset="-120"/>
+                <a:cs typeface="Times New Roman" panose="02020603050405020304" pitchFamily="18" charset="0"/>
               </a:rPr>
               <a:t> </a:t>
             </a:r>
             <a:r>
-              <a:rPr lang="en-US" altLang="zh-TW" sz="4000" b="1" dirty="0" err="1">
-                <a:solidFill>
-                  <a:srgbClr val="660033"/>
-                </a:solidFill>
-                <a:effectLst/>
-                <a:latin typeface="Calibri" panose="020F0502020204030204" pitchFamily="34" charset="0"/>
-                <a:ea typeface="微軟正黑體" pitchFamily="34" charset="-120"/>
-                <a:cs typeface="Calibri" panose="020F0502020204030204" pitchFamily="34" charset="0"/>
+              <a:rPr lang="en-US" altLang="zh-TW" sz="3733" b="1" dirty="0" err="1">
+                <a:solidFill>
+                  <a:srgbClr val="660033"/>
+                </a:solidFill>
+                <a:effectLst/>
+                <a:latin typeface="Times New Roman" panose="02020603050405020304" pitchFamily="18" charset="0"/>
+                <a:ea typeface="微軟正黑體" pitchFamily="34" charset="-120"/>
+                <a:cs typeface="Times New Roman" panose="02020603050405020304" pitchFamily="18" charset="0"/>
               </a:rPr>
               <a:t>thờ</a:t>
             </a:r>
             <a:r>
-              <a:rPr lang="en-US" altLang="zh-TW" sz="4000" b="1" dirty="0">
-                <a:solidFill>
-                  <a:srgbClr val="660033"/>
-                </a:solidFill>
-                <a:effectLst/>
-                <a:latin typeface="Calibri" panose="020F0502020204030204" pitchFamily="34" charset="0"/>
-                <a:ea typeface="微軟正黑體" pitchFamily="34" charset="-120"/>
-                <a:cs typeface="Calibri" panose="020F0502020204030204" pitchFamily="34" charset="0"/>
+              <a:rPr lang="en-US" altLang="zh-TW" sz="3733" b="1" dirty="0">
+                <a:solidFill>
+                  <a:srgbClr val="660033"/>
+                </a:solidFill>
+                <a:effectLst/>
+                <a:latin typeface="Times New Roman" panose="02020603050405020304" pitchFamily="18" charset="0"/>
+                <a:ea typeface="微軟正黑體" pitchFamily="34" charset="-120"/>
+                <a:cs typeface="Times New Roman" panose="02020603050405020304" pitchFamily="18" charset="0"/>
               </a:rPr>
               <a:t> </a:t>
             </a:r>
             <a:r>
-              <a:rPr lang="en-US" altLang="zh-TW" sz="4000" b="1" dirty="0" err="1">
-                <a:solidFill>
-                  <a:srgbClr val="660033"/>
-                </a:solidFill>
-                <a:effectLst/>
-                <a:latin typeface="Calibri" panose="020F0502020204030204" pitchFamily="34" charset="0"/>
-                <a:ea typeface="微軟正黑體" pitchFamily="34" charset="-120"/>
-                <a:cs typeface="Calibri" panose="020F0502020204030204" pitchFamily="34" charset="0"/>
+              <a:rPr lang="en-US" altLang="zh-TW" sz="3733" b="1" dirty="0" err="1">
+                <a:solidFill>
+                  <a:srgbClr val="660033"/>
+                </a:solidFill>
+                <a:effectLst/>
+                <a:latin typeface="Times New Roman" panose="02020603050405020304" pitchFamily="18" charset="0"/>
+                <a:ea typeface="微軟正黑體" pitchFamily="34" charset="-120"/>
+                <a:cs typeface="Times New Roman" panose="02020603050405020304" pitchFamily="18" charset="0"/>
               </a:rPr>
               <a:t>Đức</a:t>
             </a:r>
             <a:r>
-              <a:rPr lang="en-US" altLang="zh-TW" sz="4000" b="1" dirty="0">
-                <a:solidFill>
-                  <a:srgbClr val="660033"/>
-                </a:solidFill>
-                <a:effectLst/>
-                <a:latin typeface="Calibri" panose="020F0502020204030204" pitchFamily="34" charset="0"/>
-                <a:ea typeface="微軟正黑體" pitchFamily="34" charset="-120"/>
-                <a:cs typeface="Calibri" panose="020F0502020204030204" pitchFamily="34" charset="0"/>
+              <a:rPr lang="en-US" altLang="zh-TW" sz="3733" b="1" dirty="0">
+                <a:solidFill>
+                  <a:srgbClr val="660033"/>
+                </a:solidFill>
+                <a:effectLst/>
+                <a:latin typeface="Times New Roman" panose="02020603050405020304" pitchFamily="18" charset="0"/>
+                <a:ea typeface="微軟正黑體" pitchFamily="34" charset="-120"/>
+                <a:cs typeface="Times New Roman" panose="02020603050405020304" pitchFamily="18" charset="0"/>
               </a:rPr>
               <a:t> </a:t>
             </a:r>
             <a:r>
-              <a:rPr lang="en-US" altLang="zh-TW" sz="4000" b="1" dirty="0" err="1">
-                <a:solidFill>
-                  <a:srgbClr val="660033"/>
-                </a:solidFill>
-                <a:effectLst/>
-                <a:latin typeface="Calibri" panose="020F0502020204030204" pitchFamily="34" charset="0"/>
-                <a:ea typeface="微軟正黑體" pitchFamily="34" charset="-120"/>
-                <a:cs typeface="Calibri" panose="020F0502020204030204" pitchFamily="34" charset="0"/>
+              <a:rPr lang="en-US" altLang="zh-TW" sz="3733" b="1" dirty="0" err="1">
+                <a:solidFill>
+                  <a:srgbClr val="660033"/>
+                </a:solidFill>
+                <a:effectLst/>
+                <a:latin typeface="Times New Roman" panose="02020603050405020304" pitchFamily="18" charset="0"/>
+                <a:ea typeface="微軟正黑體" pitchFamily="34" charset="-120"/>
+                <a:cs typeface="Times New Roman" panose="02020603050405020304" pitchFamily="18" charset="0"/>
               </a:rPr>
               <a:t>Giê-hô-va</a:t>
             </a:r>
-            <a:endParaRPr lang="en-US" sz="4000" b="1" dirty="0">
+            <a:endParaRPr lang="en-US" sz="3733" b="1" dirty="0">
               <a:solidFill>
                 <a:srgbClr val="660033"/>
               </a:solidFill>
               <a:effectLst/>
-              <a:latin typeface="Calibri" panose="020F0502020204030204" pitchFamily="34" charset="0"/>
+              <a:latin typeface="Times New Roman" panose="02020603050405020304" pitchFamily="18" charset="0"/>
               <a:ea typeface="微軟正黑體" pitchFamily="34" charset="-120"/>
-              <a:cs typeface="Calibri" panose="020F0502020204030204" pitchFamily="34" charset="0"/>
+              <a:cs typeface="Times New Roman" panose="02020603050405020304" pitchFamily="18" charset="0"/>
             </a:endParaRPr>
           </a:p>
         </p:txBody>
@@ -10289,7 +10180,7 @@
         <p:spPr>
           <a:xfrm>
             <a:off x="0" y="5253203"/>
-            <a:ext cx="12192000" cy="748988"/>
+            <a:ext cx="12192000" cy="584775"/>
           </a:xfrm>
           <a:prstGeom prst="rect">
             <a:avLst/>
@@ -10304,17 +10195,21 @@
           <a:p>
             <a:pPr algn="ctr"/>
             <a:r>
-              <a:rPr lang="en-US" sz="4267" b="1" dirty="0">
+              <a:rPr lang="en-US" sz="3200" b="1" dirty="0">
                 <a:solidFill>
                   <a:srgbClr val="000066"/>
                 </a:solidFill>
+                <a:effectLst/>
+                <a:ea typeface="Microsoft JhengHei" panose="020B0604030504040204" pitchFamily="34" charset="-120"/>
               </a:rPr>
               <a:t>( 6 / 6 )</a:t>
             </a:r>
-            <a:endParaRPr lang="vi-VN" sz="4267" b="1" dirty="0">
+            <a:endParaRPr lang="vi-VN" sz="3200" b="1" dirty="0">
               <a:solidFill>
                 <a:srgbClr val="000066"/>
               </a:solidFill>
+              <a:effectLst/>
+              <a:ea typeface="Microsoft JhengHei" panose="020B0604030504040204" pitchFamily="34" charset="-120"/>
             </a:endParaRPr>
           </a:p>
         </p:txBody>
@@ -10547,152 +10442,149 @@
           </a:lstStyle>
           <a:p>
             <a:pPr marL="0" indent="0" algn="ctr">
-              <a:lnSpc>
-                <a:spcPts val="9000"/>
-              </a:lnSpc>
               <a:buNone/>
               <a:defRPr/>
             </a:pPr>
             <a:r>
-              <a:rPr lang="en-US" altLang="zh-TW" sz="4000" b="1" dirty="0" err="1">
-                <a:solidFill>
-                  <a:srgbClr val="660033"/>
-                </a:solidFill>
-                <a:effectLst/>
-                <a:latin typeface="Calibri" panose="020F0502020204030204" pitchFamily="34" charset="0"/>
-                <a:ea typeface="微軟正黑體" pitchFamily="34" charset="-120"/>
-                <a:cs typeface="Calibri" panose="020F0502020204030204" pitchFamily="34" charset="0"/>
+              <a:rPr lang="en-US" altLang="zh-TW" sz="3733" b="1" dirty="0" err="1">
+                <a:solidFill>
+                  <a:srgbClr val="660033"/>
+                </a:solidFill>
+                <a:effectLst/>
+                <a:latin typeface="Times New Roman" panose="02020603050405020304" pitchFamily="18" charset="0"/>
+                <a:ea typeface="微軟正黑體" pitchFamily="34" charset="-120"/>
+                <a:cs typeface="Times New Roman" panose="02020603050405020304" pitchFamily="18" charset="0"/>
               </a:rPr>
               <a:t>bức</a:t>
             </a:r>
             <a:r>
-              <a:rPr lang="en-US" altLang="zh-TW" sz="4000" b="1" dirty="0">
-                <a:solidFill>
-                  <a:srgbClr val="660033"/>
-                </a:solidFill>
-                <a:effectLst/>
-                <a:latin typeface="Calibri" panose="020F0502020204030204" pitchFamily="34" charset="0"/>
-                <a:ea typeface="微軟正黑體" pitchFamily="34" charset="-120"/>
-                <a:cs typeface="Calibri" panose="020F0502020204030204" pitchFamily="34" charset="0"/>
+              <a:rPr lang="en-US" altLang="zh-TW" sz="3733" b="1" dirty="0">
+                <a:solidFill>
+                  <a:srgbClr val="660033"/>
+                </a:solidFill>
+                <a:effectLst/>
+                <a:latin typeface="Times New Roman" panose="02020603050405020304" pitchFamily="18" charset="0"/>
+                <a:ea typeface="微軟正黑體" pitchFamily="34" charset="-120"/>
+                <a:cs typeface="Times New Roman" panose="02020603050405020304" pitchFamily="18" charset="0"/>
               </a:rPr>
               <a:t> </a:t>
             </a:r>
             <a:r>
-              <a:rPr lang="en-US" altLang="zh-TW" sz="4000" b="1" dirty="0" err="1">
-                <a:solidFill>
-                  <a:srgbClr val="660033"/>
-                </a:solidFill>
-                <a:effectLst/>
-                <a:latin typeface="Calibri" panose="020F0502020204030204" pitchFamily="34" charset="0"/>
-                <a:ea typeface="微軟正黑體" pitchFamily="34" charset="-120"/>
-                <a:cs typeface="Calibri" panose="020F0502020204030204" pitchFamily="34" charset="0"/>
+              <a:rPr lang="en-US" altLang="zh-TW" sz="3733" b="1" dirty="0" err="1">
+                <a:solidFill>
+                  <a:srgbClr val="660033"/>
+                </a:solidFill>
+                <a:effectLst/>
+                <a:latin typeface="Times New Roman" panose="02020603050405020304" pitchFamily="18" charset="0"/>
+                <a:ea typeface="微軟正黑體" pitchFamily="34" charset="-120"/>
+                <a:cs typeface="Times New Roman" panose="02020603050405020304" pitchFamily="18" charset="0"/>
               </a:rPr>
               <a:t>màn</a:t>
             </a:r>
             <a:r>
-              <a:rPr lang="en-US" altLang="zh-TW" sz="4000" b="1" dirty="0">
-                <a:solidFill>
-                  <a:srgbClr val="660033"/>
-                </a:solidFill>
-                <a:effectLst/>
-                <a:latin typeface="Calibri" panose="020F0502020204030204" pitchFamily="34" charset="0"/>
-                <a:ea typeface="微軟正黑體" pitchFamily="34" charset="-120"/>
-                <a:cs typeface="Calibri" panose="020F0502020204030204" pitchFamily="34" charset="0"/>
+              <a:rPr lang="en-US" altLang="zh-TW" sz="3733" b="1" dirty="0">
+                <a:solidFill>
+                  <a:srgbClr val="660033"/>
+                </a:solidFill>
+                <a:effectLst/>
+                <a:latin typeface="Times New Roman" panose="02020603050405020304" pitchFamily="18" charset="0"/>
+                <a:ea typeface="微軟正黑體" pitchFamily="34" charset="-120"/>
+                <a:cs typeface="Times New Roman" panose="02020603050405020304" pitchFamily="18" charset="0"/>
               </a:rPr>
               <a:t> </a:t>
             </a:r>
             <a:r>
-              <a:rPr lang="en-US" altLang="zh-TW" sz="4000" b="1" dirty="0" err="1">
-                <a:solidFill>
-                  <a:srgbClr val="660033"/>
-                </a:solidFill>
-                <a:effectLst/>
-                <a:latin typeface="Calibri" panose="020F0502020204030204" pitchFamily="34" charset="0"/>
-                <a:ea typeface="微軟正黑體" pitchFamily="34" charset="-120"/>
-                <a:cs typeface="Calibri" panose="020F0502020204030204" pitchFamily="34" charset="0"/>
+              <a:rPr lang="en-US" altLang="zh-TW" sz="3733" b="1" dirty="0" err="1">
+                <a:solidFill>
+                  <a:srgbClr val="660033"/>
+                </a:solidFill>
+                <a:effectLst/>
+                <a:latin typeface="Times New Roman" panose="02020603050405020304" pitchFamily="18" charset="0"/>
+                <a:ea typeface="微軟正黑體" pitchFamily="34" charset="-120"/>
+                <a:cs typeface="Times New Roman" panose="02020603050405020304" pitchFamily="18" charset="0"/>
               </a:rPr>
               <a:t>phải</a:t>
             </a:r>
             <a:r>
-              <a:rPr lang="en-US" altLang="zh-TW" sz="4000" b="1" dirty="0">
-                <a:solidFill>
-                  <a:srgbClr val="660033"/>
-                </a:solidFill>
-                <a:effectLst/>
-                <a:latin typeface="Calibri" panose="020F0502020204030204" pitchFamily="34" charset="0"/>
-                <a:ea typeface="微軟正黑體" pitchFamily="34" charset="-120"/>
-                <a:cs typeface="Calibri" panose="020F0502020204030204" pitchFamily="34" charset="0"/>
+              <a:rPr lang="en-US" altLang="zh-TW" sz="3733" b="1" dirty="0">
+                <a:solidFill>
+                  <a:srgbClr val="660033"/>
+                </a:solidFill>
+                <a:effectLst/>
+                <a:latin typeface="Times New Roman" panose="02020603050405020304" pitchFamily="18" charset="0"/>
+                <a:ea typeface="微軟正黑體" pitchFamily="34" charset="-120"/>
+                <a:cs typeface="Times New Roman" panose="02020603050405020304" pitchFamily="18" charset="0"/>
               </a:rPr>
               <a:t> </a:t>
             </a:r>
             <a:r>
-              <a:rPr lang="en-US" altLang="zh-TW" sz="4000" b="1" dirty="0" err="1">
-                <a:solidFill>
-                  <a:srgbClr val="660033"/>
-                </a:solidFill>
-                <a:effectLst/>
-                <a:latin typeface="Calibri" panose="020F0502020204030204" pitchFamily="34" charset="0"/>
-                <a:ea typeface="微軟正黑體" pitchFamily="34" charset="-120"/>
-                <a:cs typeface="Calibri" panose="020F0502020204030204" pitchFamily="34" charset="0"/>
+              <a:rPr lang="en-US" altLang="zh-TW" sz="3733" b="1" dirty="0" err="1">
+                <a:solidFill>
+                  <a:srgbClr val="660033"/>
+                </a:solidFill>
+                <a:effectLst/>
+                <a:latin typeface="Times New Roman" panose="02020603050405020304" pitchFamily="18" charset="0"/>
+                <a:ea typeface="微軟正黑體" pitchFamily="34" charset="-120"/>
+                <a:cs typeface="Times New Roman" panose="02020603050405020304" pitchFamily="18" charset="0"/>
               </a:rPr>
               <a:t>xé</a:t>
             </a:r>
             <a:r>
-              <a:rPr lang="en-US" altLang="zh-TW" sz="4000" b="1" dirty="0">
-                <a:solidFill>
-                  <a:srgbClr val="660033"/>
-                </a:solidFill>
-                <a:effectLst/>
-                <a:latin typeface="Calibri" panose="020F0502020204030204" pitchFamily="34" charset="0"/>
-                <a:ea typeface="微軟正黑體" pitchFamily="34" charset="-120"/>
-                <a:cs typeface="Calibri" panose="020F0502020204030204" pitchFamily="34" charset="0"/>
+              <a:rPr lang="en-US" altLang="zh-TW" sz="3733" b="1" dirty="0">
+                <a:solidFill>
+                  <a:srgbClr val="660033"/>
+                </a:solidFill>
+                <a:effectLst/>
+                <a:latin typeface="Times New Roman" panose="02020603050405020304" pitchFamily="18" charset="0"/>
+                <a:ea typeface="微軟正黑體" pitchFamily="34" charset="-120"/>
+                <a:cs typeface="Times New Roman" panose="02020603050405020304" pitchFamily="18" charset="0"/>
               </a:rPr>
               <a:t> </a:t>
             </a:r>
             <a:r>
-              <a:rPr lang="en-US" altLang="zh-TW" sz="4000" b="1" dirty="0" err="1">
-                <a:solidFill>
-                  <a:srgbClr val="660033"/>
-                </a:solidFill>
-                <a:effectLst/>
-                <a:latin typeface="Calibri" panose="020F0502020204030204" pitchFamily="34" charset="0"/>
-                <a:ea typeface="微軟正黑體" pitchFamily="34" charset="-120"/>
-                <a:cs typeface="Calibri" panose="020F0502020204030204" pitchFamily="34" charset="0"/>
+              <a:rPr lang="en-US" altLang="zh-TW" sz="3733" b="1" dirty="0" err="1">
+                <a:solidFill>
+                  <a:srgbClr val="660033"/>
+                </a:solidFill>
+                <a:effectLst/>
+                <a:latin typeface="Times New Roman" panose="02020603050405020304" pitchFamily="18" charset="0"/>
+                <a:ea typeface="微軟正黑體" pitchFamily="34" charset="-120"/>
+                <a:cs typeface="Times New Roman" panose="02020603050405020304" pitchFamily="18" charset="0"/>
               </a:rPr>
               <a:t>hai</a:t>
             </a:r>
             <a:r>
-              <a:rPr lang="en-US" altLang="zh-TW" sz="4000" b="1" dirty="0">
-                <a:solidFill>
-                  <a:srgbClr val="660033"/>
-                </a:solidFill>
-                <a:effectLst/>
-                <a:latin typeface="Calibri" panose="020F0502020204030204" pitchFamily="34" charset="0"/>
-                <a:ea typeface="微軟正黑體" pitchFamily="34" charset="-120"/>
-                <a:cs typeface="Calibri" panose="020F0502020204030204" pitchFamily="34" charset="0"/>
+              <a:rPr lang="en-US" altLang="zh-TW" sz="3733" b="1" dirty="0">
+                <a:solidFill>
+                  <a:srgbClr val="660033"/>
+                </a:solidFill>
+                <a:effectLst/>
+                <a:latin typeface="Times New Roman" panose="02020603050405020304" pitchFamily="18" charset="0"/>
+                <a:ea typeface="微軟正黑體" pitchFamily="34" charset="-120"/>
+                <a:cs typeface="Times New Roman" panose="02020603050405020304" pitchFamily="18" charset="0"/>
               </a:rPr>
               <a:t> </a:t>
             </a:r>
             <a:r>
-              <a:rPr lang="en-US" altLang="zh-TW" sz="4000" b="1" dirty="0" err="1">
-                <a:solidFill>
-                  <a:srgbClr val="660033"/>
-                </a:solidFill>
-                <a:effectLst/>
-                <a:latin typeface="Calibri" panose="020F0502020204030204" pitchFamily="34" charset="0"/>
-                <a:ea typeface="微軟正黑體" pitchFamily="34" charset="-120"/>
-                <a:cs typeface="Calibri" panose="020F0502020204030204" pitchFamily="34" charset="0"/>
+              <a:rPr lang="en-US" altLang="zh-TW" sz="3733" b="1" dirty="0" err="1">
+                <a:solidFill>
+                  <a:srgbClr val="660033"/>
+                </a:solidFill>
+                <a:effectLst/>
+                <a:latin typeface="Times New Roman" panose="02020603050405020304" pitchFamily="18" charset="0"/>
+                <a:ea typeface="微軟正黑體" pitchFamily="34" charset="-120"/>
+                <a:cs typeface="Times New Roman" panose="02020603050405020304" pitchFamily="18" charset="0"/>
               </a:rPr>
               <a:t>ra</a:t>
             </a:r>
-            <a:endParaRPr lang="en-US" sz="4000" b="1" dirty="0">
+            <a:endParaRPr lang="en-US" sz="3733" b="1" dirty="0">
               <a:solidFill>
                 <a:srgbClr val="660033"/>
               </a:solidFill>
               <a:effectLst/>
-              <a:latin typeface="Calibri" panose="020F0502020204030204" pitchFamily="34" charset="0"/>
+              <a:latin typeface="Times New Roman" panose="02020603050405020304" pitchFamily="18" charset="0"/>
               <a:ea typeface="微軟正黑體" pitchFamily="34" charset="-120"/>
-              <a:cs typeface="Calibri" panose="020F0502020204030204" pitchFamily="34" charset="0"/>
+              <a:cs typeface="Times New Roman" panose="02020603050405020304" pitchFamily="18" charset="0"/>
             </a:endParaRPr>
           </a:p>
         </p:txBody>
@@ -10706,7 +10598,7 @@
         <p:spPr>
           <a:xfrm>
             <a:off x="0" y="5253203"/>
-            <a:ext cx="12192000" cy="748988"/>
+            <a:ext cx="12192000" cy="584775"/>
           </a:xfrm>
           <a:prstGeom prst="rect">
             <a:avLst/>
@@ -10721,17 +10613,21 @@
           <a:p>
             <a:pPr algn="ctr"/>
             <a:r>
-              <a:rPr lang="en-US" sz="4267" b="1" dirty="0">
+              <a:rPr lang="en-US" sz="3200" b="1" dirty="0">
                 <a:solidFill>
                   <a:srgbClr val="000066"/>
                 </a:solidFill>
+                <a:effectLst/>
+                <a:ea typeface="Microsoft JhengHei" panose="020B0604030504040204" pitchFamily="34" charset="-120"/>
               </a:rPr>
               <a:t>( 6 / 6 )</a:t>
             </a:r>
-            <a:endParaRPr lang="vi-VN" sz="4267" b="1" dirty="0">
+            <a:endParaRPr lang="vi-VN" sz="3200" b="1" dirty="0">
               <a:solidFill>
                 <a:srgbClr val="000066"/>
               </a:solidFill>
+              <a:effectLst/>
+              <a:ea typeface="Microsoft JhengHei" panose="020B0604030504040204" pitchFamily="34" charset="-120"/>
             </a:endParaRPr>
           </a:p>
         </p:txBody>
@@ -10796,6 +10692,7 @@
                 <a:solidFill>
                   <a:srgbClr val="000066"/>
                 </a:solidFill>
+                <a:effectLst/>
                 <a:latin typeface="微軟正黑體" pitchFamily="34" charset="-120"/>
                 <a:ea typeface="微軟正黑體" pitchFamily="34" charset="-120"/>
               </a:rPr>
@@ -10964,152 +10861,149 @@
           </a:lstStyle>
           <a:p>
             <a:pPr marL="0" indent="0" algn="ctr">
-              <a:lnSpc>
-                <a:spcPts val="9000"/>
-              </a:lnSpc>
               <a:buNone/>
               <a:defRPr/>
             </a:pPr>
             <a:r>
-              <a:rPr lang="en-US" altLang="zh-TW" sz="4000" b="1" dirty="0" err="1">
-                <a:solidFill>
-                  <a:srgbClr val="660033"/>
-                </a:solidFill>
-                <a:effectLst/>
-                <a:latin typeface="Calibri" panose="020F0502020204030204" pitchFamily="34" charset="0"/>
-                <a:ea typeface="微軟正黑體" pitchFamily="34" charset="-120"/>
-                <a:cs typeface="Calibri" panose="020F0502020204030204" pitchFamily="34" charset="0"/>
+              <a:rPr lang="en-US" altLang="zh-TW" sz="3733" b="1" dirty="0" err="1">
+                <a:solidFill>
+                  <a:srgbClr val="660033"/>
+                </a:solidFill>
+                <a:effectLst/>
+                <a:latin typeface="Times New Roman" panose="02020603050405020304" pitchFamily="18" charset="0"/>
+                <a:ea typeface="微軟正黑體" pitchFamily="34" charset="-120"/>
+                <a:cs typeface="Times New Roman" panose="02020603050405020304" pitchFamily="18" charset="0"/>
               </a:rPr>
               <a:t>phải</a:t>
             </a:r>
             <a:r>
-              <a:rPr lang="en-US" altLang="zh-TW" sz="4000" b="1" dirty="0">
-                <a:solidFill>
-                  <a:srgbClr val="660033"/>
-                </a:solidFill>
-                <a:effectLst/>
-                <a:latin typeface="Calibri" panose="020F0502020204030204" pitchFamily="34" charset="0"/>
-                <a:ea typeface="微軟正黑體" pitchFamily="34" charset="-120"/>
-                <a:cs typeface="Calibri" panose="020F0502020204030204" pitchFamily="34" charset="0"/>
+              <a:rPr lang="en-US" altLang="zh-TW" sz="3733" b="1" dirty="0">
+                <a:solidFill>
+                  <a:srgbClr val="660033"/>
+                </a:solidFill>
+                <a:effectLst/>
+                <a:latin typeface="Times New Roman" panose="02020603050405020304" pitchFamily="18" charset="0"/>
+                <a:ea typeface="微軟正黑體" pitchFamily="34" charset="-120"/>
+                <a:cs typeface="Times New Roman" panose="02020603050405020304" pitchFamily="18" charset="0"/>
               </a:rPr>
               <a:t> </a:t>
             </a:r>
             <a:r>
-              <a:rPr lang="en-US" altLang="zh-TW" sz="4000" b="1" dirty="0" err="1">
-                <a:solidFill>
-                  <a:srgbClr val="660033"/>
-                </a:solidFill>
-                <a:effectLst/>
-                <a:latin typeface="Calibri" panose="020F0502020204030204" pitchFamily="34" charset="0"/>
-                <a:ea typeface="微軟正黑體" pitchFamily="34" charset="-120"/>
-                <a:cs typeface="Calibri" panose="020F0502020204030204" pitchFamily="34" charset="0"/>
+              <a:rPr lang="en-US" altLang="zh-TW" sz="3733" b="1" dirty="0" err="1">
+                <a:solidFill>
+                  <a:srgbClr val="660033"/>
+                </a:solidFill>
+                <a:effectLst/>
+                <a:latin typeface="Times New Roman" panose="02020603050405020304" pitchFamily="18" charset="0"/>
+                <a:ea typeface="微軟正黑體" pitchFamily="34" charset="-120"/>
+                <a:cs typeface="Times New Roman" panose="02020603050405020304" pitchFamily="18" charset="0"/>
               </a:rPr>
               <a:t>đóng</a:t>
             </a:r>
             <a:r>
-              <a:rPr lang="en-US" altLang="zh-TW" sz="4000" b="1" dirty="0">
-                <a:solidFill>
-                  <a:srgbClr val="660033"/>
-                </a:solidFill>
-                <a:effectLst/>
-                <a:latin typeface="Calibri" panose="020F0502020204030204" pitchFamily="34" charset="0"/>
-                <a:ea typeface="微軟正黑體" pitchFamily="34" charset="-120"/>
-                <a:cs typeface="Calibri" panose="020F0502020204030204" pitchFamily="34" charset="0"/>
+              <a:rPr lang="en-US" altLang="zh-TW" sz="3733" b="1" dirty="0">
+                <a:solidFill>
+                  <a:srgbClr val="660033"/>
+                </a:solidFill>
+                <a:effectLst/>
+                <a:latin typeface="Times New Roman" panose="02020603050405020304" pitchFamily="18" charset="0"/>
+                <a:ea typeface="微軟正黑體" pitchFamily="34" charset="-120"/>
+                <a:cs typeface="Times New Roman" panose="02020603050405020304" pitchFamily="18" charset="0"/>
               </a:rPr>
               <a:t> </a:t>
             </a:r>
             <a:r>
-              <a:rPr lang="en-US" altLang="zh-TW" sz="4000" b="1" dirty="0" err="1">
-                <a:solidFill>
-                  <a:srgbClr val="660033"/>
-                </a:solidFill>
-                <a:effectLst/>
-                <a:latin typeface="Calibri" panose="020F0502020204030204" pitchFamily="34" charset="0"/>
-                <a:ea typeface="微軟正黑體" pitchFamily="34" charset="-120"/>
-                <a:cs typeface="Calibri" panose="020F0502020204030204" pitchFamily="34" charset="0"/>
+              <a:rPr lang="en-US" altLang="zh-TW" sz="3733" b="1" dirty="0" err="1">
+                <a:solidFill>
+                  <a:srgbClr val="660033"/>
+                </a:solidFill>
+                <a:effectLst/>
+                <a:latin typeface="Times New Roman" panose="02020603050405020304" pitchFamily="18" charset="0"/>
+                <a:ea typeface="微軟正黑體" pitchFamily="34" charset="-120"/>
+                <a:cs typeface="Times New Roman" panose="02020603050405020304" pitchFamily="18" charset="0"/>
               </a:rPr>
               <a:t>đinh</a:t>
             </a:r>
             <a:r>
-              <a:rPr lang="en-US" altLang="zh-TW" sz="4000" b="1" dirty="0">
-                <a:solidFill>
-                  <a:srgbClr val="660033"/>
-                </a:solidFill>
-                <a:effectLst/>
-                <a:latin typeface="Calibri" panose="020F0502020204030204" pitchFamily="34" charset="0"/>
-                <a:ea typeface="微軟正黑體" pitchFamily="34" charset="-120"/>
-                <a:cs typeface="Calibri" panose="020F0502020204030204" pitchFamily="34" charset="0"/>
+              <a:rPr lang="en-US" altLang="zh-TW" sz="3733" b="1" dirty="0">
+                <a:solidFill>
+                  <a:srgbClr val="660033"/>
+                </a:solidFill>
+                <a:effectLst/>
+                <a:latin typeface="Times New Roman" panose="02020603050405020304" pitchFamily="18" charset="0"/>
+                <a:ea typeface="微軟正黑體" pitchFamily="34" charset="-120"/>
+                <a:cs typeface="Times New Roman" panose="02020603050405020304" pitchFamily="18" charset="0"/>
               </a:rPr>
               <a:t> </a:t>
             </a:r>
             <a:r>
-              <a:rPr lang="en-US" altLang="zh-TW" sz="4000" b="1" dirty="0" err="1">
-                <a:solidFill>
-                  <a:srgbClr val="660033"/>
-                </a:solidFill>
-                <a:effectLst/>
-                <a:latin typeface="Calibri" panose="020F0502020204030204" pitchFamily="34" charset="0"/>
-                <a:ea typeface="微軟正黑體" pitchFamily="34" charset="-120"/>
-                <a:cs typeface="Calibri" panose="020F0502020204030204" pitchFamily="34" charset="0"/>
+              <a:rPr lang="en-US" altLang="zh-TW" sz="3733" b="1" dirty="0" err="1">
+                <a:solidFill>
+                  <a:srgbClr val="660033"/>
+                </a:solidFill>
+                <a:effectLst/>
+                <a:latin typeface="Times New Roman" panose="02020603050405020304" pitchFamily="18" charset="0"/>
+                <a:ea typeface="微軟正黑體" pitchFamily="34" charset="-120"/>
+                <a:cs typeface="Times New Roman" panose="02020603050405020304" pitchFamily="18" charset="0"/>
               </a:rPr>
               <a:t>chịu</a:t>
             </a:r>
             <a:r>
-              <a:rPr lang="en-US" altLang="zh-TW" sz="4000" b="1" dirty="0">
-                <a:solidFill>
-                  <a:srgbClr val="660033"/>
-                </a:solidFill>
-                <a:effectLst/>
-                <a:latin typeface="Calibri" panose="020F0502020204030204" pitchFamily="34" charset="0"/>
-                <a:ea typeface="微軟正黑體" pitchFamily="34" charset="-120"/>
-                <a:cs typeface="Calibri" panose="020F0502020204030204" pitchFamily="34" charset="0"/>
+              <a:rPr lang="en-US" altLang="zh-TW" sz="3733" b="1" dirty="0">
+                <a:solidFill>
+                  <a:srgbClr val="660033"/>
+                </a:solidFill>
+                <a:effectLst/>
+                <a:latin typeface="Times New Roman" panose="02020603050405020304" pitchFamily="18" charset="0"/>
+                <a:ea typeface="微軟正黑體" pitchFamily="34" charset="-120"/>
+                <a:cs typeface="Times New Roman" panose="02020603050405020304" pitchFamily="18" charset="0"/>
               </a:rPr>
               <a:t> </a:t>
             </a:r>
             <a:r>
-              <a:rPr lang="en-US" altLang="zh-TW" sz="4000" b="1" dirty="0" err="1">
-                <a:solidFill>
-                  <a:srgbClr val="660033"/>
-                </a:solidFill>
-                <a:effectLst/>
-                <a:latin typeface="Calibri" panose="020F0502020204030204" pitchFamily="34" charset="0"/>
-                <a:ea typeface="微軟正黑體" pitchFamily="34" charset="-120"/>
-                <a:cs typeface="Calibri" panose="020F0502020204030204" pitchFamily="34" charset="0"/>
+              <a:rPr lang="en-US" altLang="zh-TW" sz="3733" b="1" dirty="0" err="1">
+                <a:solidFill>
+                  <a:srgbClr val="660033"/>
+                </a:solidFill>
+                <a:effectLst/>
+                <a:latin typeface="Times New Roman" panose="02020603050405020304" pitchFamily="18" charset="0"/>
+                <a:ea typeface="微軟正黑體" pitchFamily="34" charset="-120"/>
+                <a:cs typeface="Times New Roman" panose="02020603050405020304" pitchFamily="18" charset="0"/>
               </a:rPr>
               <a:t>khổ</a:t>
             </a:r>
             <a:r>
-              <a:rPr lang="en-US" altLang="zh-TW" sz="4000" b="1" dirty="0">
-                <a:solidFill>
-                  <a:srgbClr val="660033"/>
-                </a:solidFill>
-                <a:effectLst/>
-                <a:latin typeface="Calibri" panose="020F0502020204030204" pitchFamily="34" charset="0"/>
-                <a:ea typeface="微軟正黑體" pitchFamily="34" charset="-120"/>
-                <a:cs typeface="Calibri" panose="020F0502020204030204" pitchFamily="34" charset="0"/>
+              <a:rPr lang="en-US" altLang="zh-TW" sz="3733" b="1" dirty="0">
+                <a:solidFill>
+                  <a:srgbClr val="660033"/>
+                </a:solidFill>
+                <a:effectLst/>
+                <a:latin typeface="Times New Roman" panose="02020603050405020304" pitchFamily="18" charset="0"/>
+                <a:ea typeface="微軟正黑體" pitchFamily="34" charset="-120"/>
+                <a:cs typeface="Times New Roman" panose="02020603050405020304" pitchFamily="18" charset="0"/>
               </a:rPr>
               <a:t> </a:t>
             </a:r>
             <a:r>
-              <a:rPr lang="en-US" altLang="zh-TW" sz="4000" b="1" dirty="0" err="1">
-                <a:solidFill>
-                  <a:srgbClr val="660033"/>
-                </a:solidFill>
-                <a:effectLst/>
-                <a:latin typeface="Calibri" panose="020F0502020204030204" pitchFamily="34" charset="0"/>
-                <a:ea typeface="微軟正黑體" pitchFamily="34" charset="-120"/>
-                <a:cs typeface="Calibri" panose="020F0502020204030204" pitchFamily="34" charset="0"/>
+              <a:rPr lang="en-US" altLang="zh-TW" sz="3733" b="1" dirty="0" err="1">
+                <a:solidFill>
+                  <a:srgbClr val="660033"/>
+                </a:solidFill>
+                <a:effectLst/>
+                <a:latin typeface="Times New Roman" panose="02020603050405020304" pitchFamily="18" charset="0"/>
+                <a:ea typeface="微軟正黑體" pitchFamily="34" charset="-120"/>
+                <a:cs typeface="Times New Roman" panose="02020603050405020304" pitchFamily="18" charset="0"/>
               </a:rPr>
               <a:t>đau</a:t>
             </a:r>
-            <a:endParaRPr lang="en-US" sz="4000" b="1" dirty="0">
+            <a:endParaRPr lang="en-US" sz="3733" b="1" dirty="0">
               <a:solidFill>
                 <a:srgbClr val="660033"/>
               </a:solidFill>
               <a:effectLst/>
-              <a:latin typeface="Calibri" panose="020F0502020204030204" pitchFamily="34" charset="0"/>
+              <a:latin typeface="Times New Roman" panose="02020603050405020304" pitchFamily="18" charset="0"/>
               <a:ea typeface="微軟正黑體" pitchFamily="34" charset="-120"/>
-              <a:cs typeface="Calibri" panose="020F0502020204030204" pitchFamily="34" charset="0"/>
+              <a:cs typeface="Times New Roman" panose="02020603050405020304" pitchFamily="18" charset="0"/>
             </a:endParaRPr>
           </a:p>
         </p:txBody>
@@ -11123,7 +11017,7 @@
         <p:spPr>
           <a:xfrm>
             <a:off x="0" y="5253203"/>
-            <a:ext cx="12192000" cy="748988"/>
+            <a:ext cx="12192000" cy="584775"/>
           </a:xfrm>
           <a:prstGeom prst="rect">
             <a:avLst/>
@@ -11138,37 +11032,21 @@
           <a:p>
             <a:pPr algn="ctr"/>
             <a:r>
-              <a:rPr lang="en-US" sz="4267" b="1" dirty="0">
+              <a:rPr lang="en-US" sz="3200" b="1" dirty="0">
                 <a:solidFill>
                   <a:srgbClr val="000066"/>
                 </a:solidFill>
                 <a:effectLst/>
-              </a:rPr>
-              <a:t>( </a:t>
-            </a:r>
-            <a:r>
-              <a:rPr lang="en-US" sz="4267" b="1" dirty="0" smtClean="0">
-                <a:solidFill>
-                  <a:srgbClr val="000066"/>
-                </a:solidFill>
-                <a:effectLst/>
-              </a:rPr>
-              <a:t>1 / 6 </a:t>
-            </a:r>
-            <a:r>
-              <a:rPr lang="en-US" sz="4267" b="1" dirty="0">
-                <a:solidFill>
-                  <a:srgbClr val="000066"/>
-                </a:solidFill>
-                <a:effectLst/>
-              </a:rPr>
-              <a:t>)</a:t>
-            </a:r>
-            <a:endParaRPr lang="vi-VN" sz="4267" b="1" dirty="0">
+                <a:ea typeface="Microsoft JhengHei" panose="020B0604030504040204" pitchFamily="34" charset="-120"/>
+              </a:rPr>
+              <a:t>( 1 / 6 )</a:t>
+            </a:r>
+            <a:endParaRPr lang="vi-VN" sz="3200" b="1" dirty="0">
               <a:solidFill>
                 <a:srgbClr val="000066"/>
               </a:solidFill>
               <a:effectLst/>
+              <a:ea typeface="Microsoft JhengHei" panose="020B0604030504040204" pitchFamily="34" charset="-120"/>
             </a:endParaRPr>
           </a:p>
         </p:txBody>
@@ -11401,200 +11279,197 @@
           </a:lstStyle>
           <a:p>
             <a:pPr marL="0" indent="0" algn="ctr">
-              <a:lnSpc>
-                <a:spcPts val="9000"/>
-              </a:lnSpc>
               <a:buNone/>
               <a:defRPr/>
             </a:pPr>
             <a:r>
-              <a:rPr lang="en-US" altLang="zh-TW" sz="4000" b="1" dirty="0" err="1">
-                <a:solidFill>
-                  <a:srgbClr val="660033"/>
-                </a:solidFill>
-                <a:effectLst/>
-                <a:latin typeface="Calibri" panose="020F0502020204030204" pitchFamily="34" charset="0"/>
-                <a:ea typeface="微軟正黑體" pitchFamily="34" charset="-120"/>
-                <a:cs typeface="Calibri" panose="020F0502020204030204" pitchFamily="34" charset="0"/>
+              <a:rPr lang="en-US" altLang="zh-TW" sz="3733" b="1" dirty="0" err="1">
+                <a:solidFill>
+                  <a:srgbClr val="660033"/>
+                </a:solidFill>
+                <a:effectLst/>
+                <a:latin typeface="Times New Roman" panose="02020603050405020304" pitchFamily="18" charset="0"/>
+                <a:ea typeface="微軟正黑體" pitchFamily="34" charset="-120"/>
+                <a:cs typeface="Times New Roman" panose="02020603050405020304" pitchFamily="18" charset="0"/>
               </a:rPr>
               <a:t>Chúa</a:t>
             </a:r>
             <a:r>
-              <a:rPr lang="en-US" altLang="zh-TW" sz="4000" b="1" dirty="0">
-                <a:solidFill>
-                  <a:srgbClr val="660033"/>
-                </a:solidFill>
-                <a:effectLst/>
-                <a:latin typeface="Calibri" panose="020F0502020204030204" pitchFamily="34" charset="0"/>
-                <a:ea typeface="微軟正黑體" pitchFamily="34" charset="-120"/>
-                <a:cs typeface="Calibri" panose="020F0502020204030204" pitchFamily="34" charset="0"/>
+              <a:rPr lang="en-US" altLang="zh-TW" sz="3733" b="1" dirty="0">
+                <a:solidFill>
+                  <a:srgbClr val="660033"/>
+                </a:solidFill>
+                <a:effectLst/>
+                <a:latin typeface="Times New Roman" panose="02020603050405020304" pitchFamily="18" charset="0"/>
+                <a:ea typeface="微軟正黑體" pitchFamily="34" charset="-120"/>
+                <a:cs typeface="Times New Roman" panose="02020603050405020304" pitchFamily="18" charset="0"/>
               </a:rPr>
               <a:t> </a:t>
             </a:r>
             <a:r>
-              <a:rPr lang="en-US" altLang="zh-TW" sz="4000" b="1" dirty="0" err="1">
-                <a:solidFill>
-                  <a:srgbClr val="660033"/>
-                </a:solidFill>
-                <a:effectLst/>
-                <a:latin typeface="Calibri" panose="020F0502020204030204" pitchFamily="34" charset="0"/>
-                <a:ea typeface="微軟正黑體" pitchFamily="34" charset="-120"/>
-                <a:cs typeface="Calibri" panose="020F0502020204030204" pitchFamily="34" charset="0"/>
+              <a:rPr lang="en-US" altLang="zh-TW" sz="3733" b="1" dirty="0" err="1">
+                <a:solidFill>
+                  <a:srgbClr val="660033"/>
+                </a:solidFill>
+                <a:effectLst/>
+                <a:latin typeface="Times New Roman" panose="02020603050405020304" pitchFamily="18" charset="0"/>
+                <a:ea typeface="微軟正黑體" pitchFamily="34" charset="-120"/>
+                <a:cs typeface="Times New Roman" panose="02020603050405020304" pitchFamily="18" charset="0"/>
               </a:rPr>
               <a:t>ôi</a:t>
             </a:r>
             <a:r>
-              <a:rPr lang="en-US" altLang="zh-TW" sz="4000" b="1" dirty="0">
-                <a:solidFill>
-                  <a:srgbClr val="660033"/>
-                </a:solidFill>
-                <a:effectLst/>
-                <a:latin typeface="Calibri" panose="020F0502020204030204" pitchFamily="34" charset="0"/>
-                <a:ea typeface="微軟正黑體" pitchFamily="34" charset="-120"/>
-                <a:cs typeface="Calibri" panose="020F0502020204030204" pitchFamily="34" charset="0"/>
+              <a:rPr lang="en-US" altLang="zh-TW" sz="3733" b="1" dirty="0">
+                <a:solidFill>
+                  <a:srgbClr val="660033"/>
+                </a:solidFill>
+                <a:effectLst/>
+                <a:latin typeface="Times New Roman" panose="02020603050405020304" pitchFamily="18" charset="0"/>
+                <a:ea typeface="微軟正黑體" pitchFamily="34" charset="-120"/>
+                <a:cs typeface="Times New Roman" panose="02020603050405020304" pitchFamily="18" charset="0"/>
               </a:rPr>
               <a:t>, </a:t>
             </a:r>
             <a:r>
-              <a:rPr lang="en-US" altLang="zh-TW" sz="4000" b="1" dirty="0" err="1">
-                <a:solidFill>
-                  <a:srgbClr val="660033"/>
-                </a:solidFill>
-                <a:effectLst/>
-                <a:latin typeface="Calibri" panose="020F0502020204030204" pitchFamily="34" charset="0"/>
-                <a:ea typeface="微軟正黑體" pitchFamily="34" charset="-120"/>
-                <a:cs typeface="Calibri" panose="020F0502020204030204" pitchFamily="34" charset="0"/>
+              <a:rPr lang="en-US" altLang="zh-TW" sz="3733" b="1" dirty="0" err="1">
+                <a:solidFill>
+                  <a:srgbClr val="660033"/>
+                </a:solidFill>
+                <a:effectLst/>
+                <a:latin typeface="Times New Roman" panose="02020603050405020304" pitchFamily="18" charset="0"/>
+                <a:ea typeface="微軟正黑體" pitchFamily="34" charset="-120"/>
+                <a:cs typeface="Times New Roman" panose="02020603050405020304" pitchFamily="18" charset="0"/>
               </a:rPr>
               <a:t>thân</a:t>
             </a:r>
             <a:r>
-              <a:rPr lang="en-US" altLang="zh-TW" sz="4000" b="1" dirty="0">
-                <a:solidFill>
-                  <a:srgbClr val="660033"/>
-                </a:solidFill>
-                <a:effectLst/>
-                <a:latin typeface="Calibri" panose="020F0502020204030204" pitchFamily="34" charset="0"/>
-                <a:ea typeface="微軟正黑體" pitchFamily="34" charset="-120"/>
-                <a:cs typeface="Calibri" panose="020F0502020204030204" pitchFamily="34" charset="0"/>
+              <a:rPr lang="en-US" altLang="zh-TW" sz="3733" b="1" dirty="0">
+                <a:solidFill>
+                  <a:srgbClr val="660033"/>
+                </a:solidFill>
+                <a:effectLst/>
+                <a:latin typeface="Times New Roman" panose="02020603050405020304" pitchFamily="18" charset="0"/>
+                <a:ea typeface="微軟正黑體" pitchFamily="34" charset="-120"/>
+                <a:cs typeface="Times New Roman" panose="02020603050405020304" pitchFamily="18" charset="0"/>
               </a:rPr>
               <a:t> </a:t>
             </a:r>
             <a:r>
-              <a:rPr lang="en-US" altLang="zh-TW" sz="4000" b="1" dirty="0" err="1">
-                <a:solidFill>
-                  <a:srgbClr val="660033"/>
-                </a:solidFill>
-                <a:effectLst/>
-                <a:latin typeface="Calibri" panose="020F0502020204030204" pitchFamily="34" charset="0"/>
-                <a:ea typeface="微軟正黑體" pitchFamily="34" charset="-120"/>
-                <a:cs typeface="Calibri" panose="020F0502020204030204" pitchFamily="34" charset="0"/>
+              <a:rPr lang="en-US" altLang="zh-TW" sz="3733" b="1" dirty="0" err="1">
+                <a:solidFill>
+                  <a:srgbClr val="660033"/>
+                </a:solidFill>
+                <a:effectLst/>
+                <a:latin typeface="Times New Roman" panose="02020603050405020304" pitchFamily="18" charset="0"/>
+                <a:ea typeface="微軟正黑體" pitchFamily="34" charset="-120"/>
+                <a:cs typeface="Times New Roman" panose="02020603050405020304" pitchFamily="18" charset="0"/>
               </a:rPr>
               <a:t>Ngài</a:t>
             </a:r>
             <a:r>
-              <a:rPr lang="en-US" altLang="zh-TW" sz="4000" b="1" dirty="0">
-                <a:solidFill>
-                  <a:srgbClr val="660033"/>
-                </a:solidFill>
-                <a:effectLst/>
-                <a:latin typeface="Calibri" panose="020F0502020204030204" pitchFamily="34" charset="0"/>
-                <a:ea typeface="微軟正黑體" pitchFamily="34" charset="-120"/>
-                <a:cs typeface="Calibri" panose="020F0502020204030204" pitchFamily="34" charset="0"/>
+              <a:rPr lang="en-US" altLang="zh-TW" sz="3733" b="1" dirty="0">
+                <a:solidFill>
+                  <a:srgbClr val="660033"/>
+                </a:solidFill>
+                <a:effectLst/>
+                <a:latin typeface="Times New Roman" panose="02020603050405020304" pitchFamily="18" charset="0"/>
+                <a:ea typeface="微軟正黑體" pitchFamily="34" charset="-120"/>
+                <a:cs typeface="Times New Roman" panose="02020603050405020304" pitchFamily="18" charset="0"/>
               </a:rPr>
               <a:t> </a:t>
             </a:r>
             <a:r>
-              <a:rPr lang="en-US" altLang="zh-TW" sz="4000" b="1" dirty="0" err="1">
-                <a:solidFill>
-                  <a:srgbClr val="660033"/>
-                </a:solidFill>
-                <a:effectLst/>
-                <a:latin typeface="Calibri" panose="020F0502020204030204" pitchFamily="34" charset="0"/>
-                <a:ea typeface="微軟正黑體" pitchFamily="34" charset="-120"/>
-                <a:cs typeface="Calibri" panose="020F0502020204030204" pitchFamily="34" charset="0"/>
+              <a:rPr lang="en-US" altLang="zh-TW" sz="3733" b="1" dirty="0" err="1">
+                <a:solidFill>
+                  <a:srgbClr val="660033"/>
+                </a:solidFill>
+                <a:effectLst/>
+                <a:latin typeface="Times New Roman" panose="02020603050405020304" pitchFamily="18" charset="0"/>
+                <a:ea typeface="微軟正黑體" pitchFamily="34" charset="-120"/>
+                <a:cs typeface="Times New Roman" panose="02020603050405020304" pitchFamily="18" charset="0"/>
               </a:rPr>
               <a:t>tuôn</a:t>
             </a:r>
             <a:r>
-              <a:rPr lang="en-US" altLang="zh-TW" sz="4000" b="1" dirty="0">
-                <a:solidFill>
-                  <a:srgbClr val="660033"/>
-                </a:solidFill>
-                <a:effectLst/>
-                <a:latin typeface="Calibri" panose="020F0502020204030204" pitchFamily="34" charset="0"/>
-                <a:ea typeface="微軟正黑體" pitchFamily="34" charset="-120"/>
-                <a:cs typeface="Calibri" panose="020F0502020204030204" pitchFamily="34" charset="0"/>
+              <a:rPr lang="en-US" altLang="zh-TW" sz="3733" b="1" dirty="0">
+                <a:solidFill>
+                  <a:srgbClr val="660033"/>
+                </a:solidFill>
+                <a:effectLst/>
+                <a:latin typeface="Times New Roman" panose="02020603050405020304" pitchFamily="18" charset="0"/>
+                <a:ea typeface="微軟正黑體" pitchFamily="34" charset="-120"/>
+                <a:cs typeface="Times New Roman" panose="02020603050405020304" pitchFamily="18" charset="0"/>
               </a:rPr>
               <a:t> </a:t>
             </a:r>
             <a:r>
-              <a:rPr lang="en-US" altLang="zh-TW" sz="4000" b="1" dirty="0" err="1">
-                <a:solidFill>
-                  <a:srgbClr val="660033"/>
-                </a:solidFill>
-                <a:effectLst/>
-                <a:latin typeface="Calibri" panose="020F0502020204030204" pitchFamily="34" charset="0"/>
-                <a:ea typeface="微軟正黑體" pitchFamily="34" charset="-120"/>
-                <a:cs typeface="Calibri" panose="020F0502020204030204" pitchFamily="34" charset="0"/>
+              <a:rPr lang="en-US" altLang="zh-TW" sz="3733" b="1" dirty="0" err="1">
+                <a:solidFill>
+                  <a:srgbClr val="660033"/>
+                </a:solidFill>
+                <a:effectLst/>
+                <a:latin typeface="Times New Roman" panose="02020603050405020304" pitchFamily="18" charset="0"/>
+                <a:ea typeface="微軟正黑體" pitchFamily="34" charset="-120"/>
+                <a:cs typeface="Times New Roman" panose="02020603050405020304" pitchFamily="18" charset="0"/>
               </a:rPr>
               <a:t>huyết</a:t>
             </a:r>
             <a:r>
-              <a:rPr lang="en-US" altLang="zh-TW" sz="4000" b="1" dirty="0">
-                <a:solidFill>
-                  <a:srgbClr val="660033"/>
-                </a:solidFill>
-                <a:effectLst/>
-                <a:latin typeface="Calibri" panose="020F0502020204030204" pitchFamily="34" charset="0"/>
-                <a:ea typeface="微軟正黑體" pitchFamily="34" charset="-120"/>
-                <a:cs typeface="Calibri" panose="020F0502020204030204" pitchFamily="34" charset="0"/>
+              <a:rPr lang="en-US" altLang="zh-TW" sz="3733" b="1" dirty="0">
+                <a:solidFill>
+                  <a:srgbClr val="660033"/>
+                </a:solidFill>
+                <a:effectLst/>
+                <a:latin typeface="Times New Roman" panose="02020603050405020304" pitchFamily="18" charset="0"/>
+                <a:ea typeface="微軟正黑體" pitchFamily="34" charset="-120"/>
+                <a:cs typeface="Times New Roman" panose="02020603050405020304" pitchFamily="18" charset="0"/>
               </a:rPr>
               <a:t> </a:t>
             </a:r>
             <a:r>
-              <a:rPr lang="en-US" altLang="zh-TW" sz="4000" b="1" dirty="0" err="1">
-                <a:solidFill>
-                  <a:srgbClr val="660033"/>
-                </a:solidFill>
-                <a:effectLst/>
-                <a:latin typeface="Calibri" panose="020F0502020204030204" pitchFamily="34" charset="0"/>
-                <a:ea typeface="微軟正黑體" pitchFamily="34" charset="-120"/>
-                <a:cs typeface="Calibri" panose="020F0502020204030204" pitchFamily="34" charset="0"/>
+              <a:rPr lang="en-US" altLang="zh-TW" sz="3733" b="1" dirty="0" err="1">
+                <a:solidFill>
+                  <a:srgbClr val="660033"/>
+                </a:solidFill>
+                <a:effectLst/>
+                <a:latin typeface="Times New Roman" panose="02020603050405020304" pitchFamily="18" charset="0"/>
+                <a:ea typeface="微軟正黑體" pitchFamily="34" charset="-120"/>
+                <a:cs typeface="Times New Roman" panose="02020603050405020304" pitchFamily="18" charset="0"/>
               </a:rPr>
               <a:t>thắm</a:t>
             </a:r>
             <a:r>
-              <a:rPr lang="en-US" altLang="zh-TW" sz="4000" b="1" dirty="0">
-                <a:solidFill>
-                  <a:srgbClr val="660033"/>
-                </a:solidFill>
-                <a:effectLst/>
-                <a:latin typeface="Calibri" panose="020F0502020204030204" pitchFamily="34" charset="0"/>
-                <a:ea typeface="微軟正黑體" pitchFamily="34" charset="-120"/>
-                <a:cs typeface="Calibri" panose="020F0502020204030204" pitchFamily="34" charset="0"/>
+              <a:rPr lang="en-US" altLang="zh-TW" sz="3733" b="1" dirty="0">
+                <a:solidFill>
+                  <a:srgbClr val="660033"/>
+                </a:solidFill>
+                <a:effectLst/>
+                <a:latin typeface="Times New Roman" panose="02020603050405020304" pitchFamily="18" charset="0"/>
+                <a:ea typeface="微軟正黑體" pitchFamily="34" charset="-120"/>
+                <a:cs typeface="Times New Roman" panose="02020603050405020304" pitchFamily="18" charset="0"/>
               </a:rPr>
               <a:t> </a:t>
             </a:r>
             <a:r>
-              <a:rPr lang="en-US" altLang="zh-TW" sz="4000" b="1" dirty="0" err="1">
-                <a:solidFill>
-                  <a:srgbClr val="660033"/>
-                </a:solidFill>
-                <a:effectLst/>
-                <a:latin typeface="Calibri" panose="020F0502020204030204" pitchFamily="34" charset="0"/>
-                <a:ea typeface="微軟正黑體" pitchFamily="34" charset="-120"/>
-                <a:cs typeface="Calibri" panose="020F0502020204030204" pitchFamily="34" charset="0"/>
+              <a:rPr lang="en-US" altLang="zh-TW" sz="3733" b="1" dirty="0" err="1">
+                <a:solidFill>
+                  <a:srgbClr val="660033"/>
+                </a:solidFill>
+                <a:effectLst/>
+                <a:latin typeface="Times New Roman" panose="02020603050405020304" pitchFamily="18" charset="0"/>
+                <a:ea typeface="微軟正黑體" pitchFamily="34" charset="-120"/>
+                <a:cs typeface="Times New Roman" panose="02020603050405020304" pitchFamily="18" charset="0"/>
               </a:rPr>
               <a:t>thay</a:t>
             </a:r>
-            <a:endParaRPr lang="en-US" sz="4000" b="1" dirty="0">
+            <a:endParaRPr lang="en-US" sz="3733" b="1" dirty="0">
               <a:solidFill>
                 <a:srgbClr val="660033"/>
               </a:solidFill>
               <a:effectLst/>
-              <a:latin typeface="Calibri" panose="020F0502020204030204" pitchFamily="34" charset="0"/>
+              <a:latin typeface="Times New Roman" panose="02020603050405020304" pitchFamily="18" charset="0"/>
               <a:ea typeface="微軟正黑體" pitchFamily="34" charset="-120"/>
-              <a:cs typeface="Calibri" panose="020F0502020204030204" pitchFamily="34" charset="0"/>
+              <a:cs typeface="Times New Roman" panose="02020603050405020304" pitchFamily="18" charset="0"/>
             </a:endParaRPr>
           </a:p>
         </p:txBody>
@@ -11608,7 +11483,7 @@
         <p:spPr>
           <a:xfrm>
             <a:off x="0" y="5253203"/>
-            <a:ext cx="12192000" cy="748988"/>
+            <a:ext cx="12192000" cy="584775"/>
           </a:xfrm>
           <a:prstGeom prst="rect">
             <a:avLst/>
@@ -11623,37 +11498,21 @@
           <a:p>
             <a:pPr algn="ctr"/>
             <a:r>
-              <a:rPr lang="en-US" sz="4267" b="1" dirty="0">
+              <a:rPr lang="en-US" sz="3200" b="1" dirty="0">
                 <a:solidFill>
                   <a:srgbClr val="000066"/>
                 </a:solidFill>
                 <a:effectLst/>
-              </a:rPr>
-              <a:t>( </a:t>
-            </a:r>
-            <a:r>
-              <a:rPr lang="en-US" sz="4267" b="1" dirty="0" smtClean="0">
-                <a:solidFill>
-                  <a:srgbClr val="000066"/>
-                </a:solidFill>
-                <a:effectLst/>
-              </a:rPr>
-              <a:t>1 / 6 </a:t>
-            </a:r>
-            <a:r>
-              <a:rPr lang="en-US" sz="4267" b="1" dirty="0">
-                <a:solidFill>
-                  <a:srgbClr val="000066"/>
-                </a:solidFill>
-                <a:effectLst/>
-              </a:rPr>
-              <a:t>)</a:t>
-            </a:r>
-            <a:endParaRPr lang="vi-VN" sz="4267" b="1" dirty="0">
+                <a:ea typeface="Microsoft JhengHei" panose="020B0604030504040204" pitchFamily="34" charset="-120"/>
+              </a:rPr>
+              <a:t>( 1 / 6 )</a:t>
+            </a:r>
+            <a:endParaRPr lang="vi-VN" sz="3200" b="1" dirty="0">
               <a:solidFill>
                 <a:srgbClr val="000066"/>
               </a:solidFill>
               <a:effectLst/>
+              <a:ea typeface="Microsoft JhengHei" panose="020B0604030504040204" pitchFamily="34" charset="-120"/>
             </a:endParaRPr>
           </a:p>
         </p:txBody>
@@ -11886,140 +11745,137 @@
           </a:lstStyle>
           <a:p>
             <a:pPr marL="0" indent="0" algn="ctr">
-              <a:lnSpc>
-                <a:spcPts val="9000"/>
-              </a:lnSpc>
               <a:buNone/>
               <a:defRPr/>
             </a:pPr>
             <a:r>
-              <a:rPr lang="en-US" altLang="zh-TW" sz="4000" b="1" dirty="0" err="1">
-                <a:solidFill>
-                  <a:srgbClr val="660033"/>
-                </a:solidFill>
-                <a:effectLst/>
-                <a:latin typeface="Calibri" panose="020F0502020204030204" pitchFamily="34" charset="0"/>
-                <a:ea typeface="微軟正黑體" pitchFamily="34" charset="-120"/>
-                <a:cs typeface="Calibri" panose="020F0502020204030204" pitchFamily="34" charset="0"/>
+              <a:rPr lang="en-US" altLang="zh-TW" sz="3733" b="1" dirty="0" err="1">
+                <a:solidFill>
+                  <a:srgbClr val="660033"/>
+                </a:solidFill>
+                <a:effectLst/>
+                <a:latin typeface="Times New Roman" panose="02020603050405020304" pitchFamily="18" charset="0"/>
+                <a:ea typeface="微軟正黑體" pitchFamily="34" charset="-120"/>
+                <a:cs typeface="Times New Roman" panose="02020603050405020304" pitchFamily="18" charset="0"/>
               </a:rPr>
               <a:t>khổ</a:t>
             </a:r>
             <a:r>
-              <a:rPr lang="en-US" altLang="zh-TW" sz="4000" b="1" dirty="0">
-                <a:solidFill>
-                  <a:srgbClr val="660033"/>
-                </a:solidFill>
-                <a:effectLst/>
-                <a:latin typeface="Calibri" panose="020F0502020204030204" pitchFamily="34" charset="0"/>
-                <a:ea typeface="微軟正黑體" pitchFamily="34" charset="-120"/>
-                <a:cs typeface="Calibri" panose="020F0502020204030204" pitchFamily="34" charset="0"/>
+              <a:rPr lang="en-US" altLang="zh-TW" sz="3733" b="1" dirty="0">
+                <a:solidFill>
+                  <a:srgbClr val="660033"/>
+                </a:solidFill>
+                <a:effectLst/>
+                <a:latin typeface="Times New Roman" panose="02020603050405020304" pitchFamily="18" charset="0"/>
+                <a:ea typeface="微軟正黑體" pitchFamily="34" charset="-120"/>
+                <a:cs typeface="Times New Roman" panose="02020603050405020304" pitchFamily="18" charset="0"/>
               </a:rPr>
               <a:t> </a:t>
             </a:r>
             <a:r>
-              <a:rPr lang="en-US" altLang="zh-TW" sz="4000" b="1" dirty="0" err="1">
-                <a:solidFill>
-                  <a:srgbClr val="660033"/>
-                </a:solidFill>
-                <a:effectLst/>
-                <a:latin typeface="Calibri" panose="020F0502020204030204" pitchFamily="34" charset="0"/>
-                <a:ea typeface="微軟正黑體" pitchFamily="34" charset="-120"/>
-                <a:cs typeface="Calibri" panose="020F0502020204030204" pitchFamily="34" charset="0"/>
+              <a:rPr lang="en-US" altLang="zh-TW" sz="3733" b="1" dirty="0" err="1">
+                <a:solidFill>
+                  <a:srgbClr val="660033"/>
+                </a:solidFill>
+                <a:effectLst/>
+                <a:latin typeface="Times New Roman" panose="02020603050405020304" pitchFamily="18" charset="0"/>
+                <a:ea typeface="微軟正黑體" pitchFamily="34" charset="-120"/>
+                <a:cs typeface="Times New Roman" panose="02020603050405020304" pitchFamily="18" charset="0"/>
               </a:rPr>
               <a:t>hình</a:t>
             </a:r>
             <a:r>
-              <a:rPr lang="en-US" altLang="zh-TW" sz="4000" b="1" dirty="0">
-                <a:solidFill>
-                  <a:srgbClr val="660033"/>
-                </a:solidFill>
-                <a:effectLst/>
-                <a:latin typeface="Calibri" panose="020F0502020204030204" pitchFamily="34" charset="0"/>
-                <a:ea typeface="微軟正黑體" pitchFamily="34" charset="-120"/>
-                <a:cs typeface="Calibri" panose="020F0502020204030204" pitchFamily="34" charset="0"/>
+              <a:rPr lang="en-US" altLang="zh-TW" sz="3733" b="1" dirty="0">
+                <a:solidFill>
+                  <a:srgbClr val="660033"/>
+                </a:solidFill>
+                <a:effectLst/>
+                <a:latin typeface="Times New Roman" panose="02020603050405020304" pitchFamily="18" charset="0"/>
+                <a:ea typeface="微軟正黑體" pitchFamily="34" charset="-120"/>
+                <a:cs typeface="Times New Roman" panose="02020603050405020304" pitchFamily="18" charset="0"/>
               </a:rPr>
               <a:t> </a:t>
             </a:r>
             <a:r>
-              <a:rPr lang="en-US" altLang="zh-TW" sz="4000" b="1" dirty="0" err="1">
-                <a:solidFill>
-                  <a:srgbClr val="660033"/>
-                </a:solidFill>
-                <a:effectLst/>
-                <a:latin typeface="Calibri" panose="020F0502020204030204" pitchFamily="34" charset="0"/>
-                <a:ea typeface="微軟正黑體" pitchFamily="34" charset="-120"/>
-                <a:cs typeface="Calibri" panose="020F0502020204030204" pitchFamily="34" charset="0"/>
+              <a:rPr lang="en-US" altLang="zh-TW" sz="3733" b="1" dirty="0" err="1">
+                <a:solidFill>
+                  <a:srgbClr val="660033"/>
+                </a:solidFill>
+                <a:effectLst/>
+                <a:latin typeface="Times New Roman" panose="02020603050405020304" pitchFamily="18" charset="0"/>
+                <a:ea typeface="微軟正黑體" pitchFamily="34" charset="-120"/>
+                <a:cs typeface="Times New Roman" panose="02020603050405020304" pitchFamily="18" charset="0"/>
               </a:rPr>
               <a:t>bởi</a:t>
             </a:r>
             <a:r>
-              <a:rPr lang="en-US" altLang="zh-TW" sz="4000" b="1" dirty="0">
-                <a:solidFill>
-                  <a:srgbClr val="660033"/>
-                </a:solidFill>
-                <a:effectLst/>
-                <a:latin typeface="Calibri" panose="020F0502020204030204" pitchFamily="34" charset="0"/>
-                <a:ea typeface="微軟正黑體" pitchFamily="34" charset="-120"/>
-                <a:cs typeface="Calibri" panose="020F0502020204030204" pitchFamily="34" charset="0"/>
+              <a:rPr lang="en-US" altLang="zh-TW" sz="3733" b="1" dirty="0">
+                <a:solidFill>
+                  <a:srgbClr val="660033"/>
+                </a:solidFill>
+                <a:effectLst/>
+                <a:latin typeface="Times New Roman" panose="02020603050405020304" pitchFamily="18" charset="0"/>
+                <a:ea typeface="微軟正黑體" pitchFamily="34" charset="-120"/>
+                <a:cs typeface="Times New Roman" panose="02020603050405020304" pitchFamily="18" charset="0"/>
               </a:rPr>
               <a:t> </a:t>
             </a:r>
             <a:r>
-              <a:rPr lang="en-US" altLang="zh-TW" sz="4000" b="1" dirty="0" err="1">
-                <a:solidFill>
-                  <a:srgbClr val="660033"/>
-                </a:solidFill>
-                <a:effectLst/>
-                <a:latin typeface="Calibri" panose="020F0502020204030204" pitchFamily="34" charset="0"/>
-                <a:ea typeface="微軟正黑體" pitchFamily="34" charset="-120"/>
-                <a:cs typeface="Calibri" panose="020F0502020204030204" pitchFamily="34" charset="0"/>
+              <a:rPr lang="en-US" altLang="zh-TW" sz="3733" b="1" dirty="0" err="1">
+                <a:solidFill>
+                  <a:srgbClr val="660033"/>
+                </a:solidFill>
+                <a:effectLst/>
+                <a:latin typeface="Times New Roman" panose="02020603050405020304" pitchFamily="18" charset="0"/>
+                <a:ea typeface="微軟正黑體" pitchFamily="34" charset="-120"/>
+                <a:cs typeface="Times New Roman" panose="02020603050405020304" pitchFamily="18" charset="0"/>
               </a:rPr>
               <a:t>chúng</a:t>
             </a:r>
             <a:r>
-              <a:rPr lang="en-US" altLang="zh-TW" sz="4000" b="1" dirty="0">
-                <a:solidFill>
-                  <a:srgbClr val="660033"/>
-                </a:solidFill>
-                <a:effectLst/>
-                <a:latin typeface="Calibri" panose="020F0502020204030204" pitchFamily="34" charset="0"/>
-                <a:ea typeface="微軟正黑體" pitchFamily="34" charset="-120"/>
-                <a:cs typeface="Calibri" panose="020F0502020204030204" pitchFamily="34" charset="0"/>
+              <a:rPr lang="en-US" altLang="zh-TW" sz="3733" b="1" dirty="0">
+                <a:solidFill>
+                  <a:srgbClr val="660033"/>
+                </a:solidFill>
+                <a:effectLst/>
+                <a:latin typeface="Times New Roman" panose="02020603050405020304" pitchFamily="18" charset="0"/>
+                <a:ea typeface="微軟正黑體" pitchFamily="34" charset="-120"/>
+                <a:cs typeface="Times New Roman" panose="02020603050405020304" pitchFamily="18" charset="0"/>
               </a:rPr>
               <a:t> </a:t>
             </a:r>
             <a:r>
-              <a:rPr lang="en-US" altLang="zh-TW" sz="4000" b="1" dirty="0" err="1">
-                <a:solidFill>
-                  <a:srgbClr val="660033"/>
-                </a:solidFill>
-                <a:effectLst/>
-                <a:latin typeface="Calibri" panose="020F0502020204030204" pitchFamily="34" charset="0"/>
-                <a:ea typeface="微軟正黑體" pitchFamily="34" charset="-120"/>
-                <a:cs typeface="Calibri" panose="020F0502020204030204" pitchFamily="34" charset="0"/>
+              <a:rPr lang="en-US" altLang="zh-TW" sz="3733" b="1" dirty="0" err="1">
+                <a:solidFill>
+                  <a:srgbClr val="660033"/>
+                </a:solidFill>
+                <a:effectLst/>
+                <a:latin typeface="Times New Roman" panose="02020603050405020304" pitchFamily="18" charset="0"/>
+                <a:ea typeface="微軟正黑體" pitchFamily="34" charset="-120"/>
+                <a:cs typeface="Times New Roman" panose="02020603050405020304" pitchFamily="18" charset="0"/>
               </a:rPr>
               <a:t>tôi</a:t>
             </a:r>
             <a:r>
-              <a:rPr lang="en-US" altLang="zh-TW" sz="4000" b="1" dirty="0">
-                <a:solidFill>
-                  <a:srgbClr val="660033"/>
-                </a:solidFill>
-                <a:effectLst/>
-                <a:latin typeface="Calibri" panose="020F0502020204030204" pitchFamily="34" charset="0"/>
-                <a:ea typeface="微軟正黑體" pitchFamily="34" charset="-120"/>
-                <a:cs typeface="Calibri" panose="020F0502020204030204" pitchFamily="34" charset="0"/>
+              <a:rPr lang="en-US" altLang="zh-TW" sz="3733" b="1" dirty="0">
+                <a:solidFill>
+                  <a:srgbClr val="660033"/>
+                </a:solidFill>
+                <a:effectLst/>
+                <a:latin typeface="Times New Roman" panose="02020603050405020304" pitchFamily="18" charset="0"/>
+                <a:ea typeface="微軟正黑體" pitchFamily="34" charset="-120"/>
+                <a:cs typeface="Times New Roman" panose="02020603050405020304" pitchFamily="18" charset="0"/>
               </a:rPr>
               <a:t> nay</a:t>
             </a:r>
-            <a:endParaRPr lang="en-US" sz="4000" b="1" dirty="0">
+            <a:endParaRPr lang="en-US" sz="3733" b="1" dirty="0">
               <a:solidFill>
                 <a:srgbClr val="660033"/>
               </a:solidFill>
               <a:effectLst/>
-              <a:latin typeface="Calibri" panose="020F0502020204030204" pitchFamily="34" charset="0"/>
+              <a:latin typeface="Times New Roman" panose="02020603050405020304" pitchFamily="18" charset="0"/>
               <a:ea typeface="微軟正黑體" pitchFamily="34" charset="-120"/>
-              <a:cs typeface="Calibri" panose="020F0502020204030204" pitchFamily="34" charset="0"/>
+              <a:cs typeface="Times New Roman" panose="02020603050405020304" pitchFamily="18" charset="0"/>
             </a:endParaRPr>
           </a:p>
         </p:txBody>
@@ -12033,7 +11889,7 @@
         <p:spPr>
           <a:xfrm>
             <a:off x="0" y="5253203"/>
-            <a:ext cx="12192000" cy="748988"/>
+            <a:ext cx="12192000" cy="584775"/>
           </a:xfrm>
           <a:prstGeom prst="rect">
             <a:avLst/>
@@ -12048,37 +11904,21 @@
           <a:p>
             <a:pPr algn="ctr"/>
             <a:r>
-              <a:rPr lang="en-US" sz="4267" b="1" dirty="0">
+              <a:rPr lang="en-US" sz="3200" b="1" dirty="0">
                 <a:solidFill>
                   <a:srgbClr val="000066"/>
                 </a:solidFill>
                 <a:effectLst/>
-              </a:rPr>
-              <a:t>( </a:t>
-            </a:r>
-            <a:r>
-              <a:rPr lang="en-US" sz="4267" b="1" dirty="0" smtClean="0">
-                <a:solidFill>
-                  <a:srgbClr val="000066"/>
-                </a:solidFill>
-                <a:effectLst/>
-              </a:rPr>
-              <a:t>1 / 6 </a:t>
-            </a:r>
-            <a:r>
-              <a:rPr lang="en-US" sz="4267" b="1" dirty="0">
-                <a:solidFill>
-                  <a:srgbClr val="000066"/>
-                </a:solidFill>
-                <a:effectLst/>
-              </a:rPr>
-              <a:t>)</a:t>
-            </a:r>
-            <a:endParaRPr lang="vi-VN" sz="4267" b="1" dirty="0">
+                <a:ea typeface="Microsoft JhengHei" panose="020B0604030504040204" pitchFamily="34" charset="-120"/>
+              </a:rPr>
+              <a:t>( 1 / 6 )</a:t>
+            </a:r>
+            <a:endParaRPr lang="vi-VN" sz="3200" b="1" dirty="0">
               <a:solidFill>
                 <a:srgbClr val="000066"/>
               </a:solidFill>
               <a:effectLst/>
+              <a:ea typeface="Microsoft JhengHei" panose="020B0604030504040204" pitchFamily="34" charset="-120"/>
             </a:endParaRPr>
           </a:p>
         </p:txBody>
@@ -12311,200 +12151,197 @@
           </a:lstStyle>
           <a:p>
             <a:pPr marL="0" indent="0" algn="ctr">
-              <a:lnSpc>
-                <a:spcPts val="9000"/>
-              </a:lnSpc>
               <a:buNone/>
               <a:defRPr/>
             </a:pPr>
             <a:r>
-              <a:rPr lang="en-US" altLang="zh-TW" sz="4000" b="1" dirty="0" err="1">
-                <a:solidFill>
-                  <a:srgbClr val="660033"/>
-                </a:solidFill>
-                <a:effectLst/>
-                <a:latin typeface="Calibri" panose="020F0502020204030204" pitchFamily="34" charset="0"/>
-                <a:ea typeface="微軟正黑體" pitchFamily="34" charset="-120"/>
-                <a:cs typeface="Calibri" panose="020F0502020204030204" pitchFamily="34" charset="0"/>
+              <a:rPr lang="en-US" altLang="zh-TW" sz="3733" b="1" dirty="0" err="1">
+                <a:solidFill>
+                  <a:srgbClr val="660033"/>
+                </a:solidFill>
+                <a:effectLst/>
+                <a:latin typeface="Times New Roman" panose="02020603050405020304" pitchFamily="18" charset="0"/>
+                <a:ea typeface="微軟正黑體" pitchFamily="34" charset="-120"/>
+                <a:cs typeface="Times New Roman" panose="02020603050405020304" pitchFamily="18" charset="0"/>
               </a:rPr>
               <a:t>Kìa</a:t>
             </a:r>
             <a:r>
-              <a:rPr lang="en-US" altLang="zh-TW" sz="4000" b="1" dirty="0">
-                <a:solidFill>
-                  <a:srgbClr val="660033"/>
-                </a:solidFill>
-                <a:effectLst/>
-                <a:latin typeface="Calibri" panose="020F0502020204030204" pitchFamily="34" charset="0"/>
-                <a:ea typeface="微軟正黑體" pitchFamily="34" charset="-120"/>
-                <a:cs typeface="Calibri" panose="020F0502020204030204" pitchFamily="34" charset="0"/>
+              <a:rPr lang="en-US" altLang="zh-TW" sz="3733" b="1" dirty="0">
+                <a:solidFill>
+                  <a:srgbClr val="660033"/>
+                </a:solidFill>
+                <a:effectLst/>
+                <a:latin typeface="Times New Roman" panose="02020603050405020304" pitchFamily="18" charset="0"/>
+                <a:ea typeface="微軟正黑體" pitchFamily="34" charset="-120"/>
+                <a:cs typeface="Times New Roman" panose="02020603050405020304" pitchFamily="18" charset="0"/>
               </a:rPr>
               <a:t> </a:t>
             </a:r>
             <a:r>
-              <a:rPr lang="en-US" altLang="zh-TW" sz="4000" b="1" dirty="0" err="1">
-                <a:solidFill>
-                  <a:srgbClr val="660033"/>
-                </a:solidFill>
-                <a:effectLst/>
-                <a:latin typeface="Calibri" panose="020F0502020204030204" pitchFamily="34" charset="0"/>
-                <a:ea typeface="微軟正黑體" pitchFamily="34" charset="-120"/>
-                <a:cs typeface="Calibri" panose="020F0502020204030204" pitchFamily="34" charset="0"/>
+              <a:rPr lang="en-US" altLang="zh-TW" sz="3733" b="1" dirty="0" err="1">
+                <a:solidFill>
+                  <a:srgbClr val="660033"/>
+                </a:solidFill>
+                <a:effectLst/>
+                <a:latin typeface="Times New Roman" panose="02020603050405020304" pitchFamily="18" charset="0"/>
+                <a:ea typeface="微軟正黑體" pitchFamily="34" charset="-120"/>
+                <a:cs typeface="Times New Roman" panose="02020603050405020304" pitchFamily="18" charset="0"/>
               </a:rPr>
               <a:t>xem</a:t>
             </a:r>
             <a:r>
-              <a:rPr lang="en-US" altLang="zh-TW" sz="4000" b="1" dirty="0">
-                <a:solidFill>
-                  <a:srgbClr val="660033"/>
-                </a:solidFill>
-                <a:effectLst/>
-                <a:latin typeface="Calibri" panose="020F0502020204030204" pitchFamily="34" charset="0"/>
-                <a:ea typeface="微軟正黑體" pitchFamily="34" charset="-120"/>
-                <a:cs typeface="Calibri" panose="020F0502020204030204" pitchFamily="34" charset="0"/>
+              <a:rPr lang="en-US" altLang="zh-TW" sz="3733" b="1" dirty="0">
+                <a:solidFill>
+                  <a:srgbClr val="660033"/>
+                </a:solidFill>
+                <a:effectLst/>
+                <a:latin typeface="Times New Roman" panose="02020603050405020304" pitchFamily="18" charset="0"/>
+                <a:ea typeface="微軟正黑體" pitchFamily="34" charset="-120"/>
+                <a:cs typeface="Times New Roman" panose="02020603050405020304" pitchFamily="18" charset="0"/>
               </a:rPr>
               <a:t> </a:t>
             </a:r>
             <a:r>
-              <a:rPr lang="en-US" altLang="zh-TW" sz="4000" b="1" dirty="0" err="1">
-                <a:solidFill>
-                  <a:srgbClr val="660033"/>
-                </a:solidFill>
-                <a:effectLst/>
-                <a:latin typeface="Calibri" panose="020F0502020204030204" pitchFamily="34" charset="0"/>
-                <a:ea typeface="微軟正黑體" pitchFamily="34" charset="-120"/>
-                <a:cs typeface="Calibri" panose="020F0502020204030204" pitchFamily="34" charset="0"/>
+              <a:rPr lang="en-US" altLang="zh-TW" sz="3733" b="1" dirty="0" err="1">
+                <a:solidFill>
+                  <a:srgbClr val="660033"/>
+                </a:solidFill>
+                <a:effectLst/>
+                <a:latin typeface="Times New Roman" panose="02020603050405020304" pitchFamily="18" charset="0"/>
+                <a:ea typeface="微軟正黑體" pitchFamily="34" charset="-120"/>
+                <a:cs typeface="Times New Roman" panose="02020603050405020304" pitchFamily="18" charset="0"/>
               </a:rPr>
               <a:t>bầu</a:t>
             </a:r>
             <a:r>
-              <a:rPr lang="en-US" altLang="zh-TW" sz="4000" b="1" dirty="0">
-                <a:solidFill>
-                  <a:srgbClr val="660033"/>
-                </a:solidFill>
-                <a:effectLst/>
-                <a:latin typeface="Calibri" panose="020F0502020204030204" pitchFamily="34" charset="0"/>
-                <a:ea typeface="微軟正黑體" pitchFamily="34" charset="-120"/>
-                <a:cs typeface="Calibri" panose="020F0502020204030204" pitchFamily="34" charset="0"/>
+              <a:rPr lang="en-US" altLang="zh-TW" sz="3733" b="1" dirty="0">
+                <a:solidFill>
+                  <a:srgbClr val="660033"/>
+                </a:solidFill>
+                <a:effectLst/>
+                <a:latin typeface="Times New Roman" panose="02020603050405020304" pitchFamily="18" charset="0"/>
+                <a:ea typeface="微軟正黑體" pitchFamily="34" charset="-120"/>
+                <a:cs typeface="Times New Roman" panose="02020603050405020304" pitchFamily="18" charset="0"/>
               </a:rPr>
               <a:t> </a:t>
             </a:r>
             <a:r>
-              <a:rPr lang="en-US" altLang="zh-TW" sz="4000" b="1" dirty="0" err="1">
-                <a:solidFill>
-                  <a:srgbClr val="660033"/>
-                </a:solidFill>
-                <a:effectLst/>
-                <a:latin typeface="Calibri" panose="020F0502020204030204" pitchFamily="34" charset="0"/>
-                <a:ea typeface="微軟正黑體" pitchFamily="34" charset="-120"/>
-                <a:cs typeface="Calibri" panose="020F0502020204030204" pitchFamily="34" charset="0"/>
+              <a:rPr lang="en-US" altLang="zh-TW" sz="3733" b="1" dirty="0" err="1">
+                <a:solidFill>
+                  <a:srgbClr val="660033"/>
+                </a:solidFill>
+                <a:effectLst/>
+                <a:latin typeface="Times New Roman" panose="02020603050405020304" pitchFamily="18" charset="0"/>
+                <a:ea typeface="微軟正黑體" pitchFamily="34" charset="-120"/>
+                <a:cs typeface="Times New Roman" panose="02020603050405020304" pitchFamily="18" charset="0"/>
               </a:rPr>
               <a:t>trời</a:t>
             </a:r>
             <a:r>
-              <a:rPr lang="en-US" altLang="zh-TW" sz="4000" b="1" dirty="0">
-                <a:solidFill>
-                  <a:srgbClr val="660033"/>
-                </a:solidFill>
-                <a:effectLst/>
-                <a:latin typeface="Calibri" panose="020F0502020204030204" pitchFamily="34" charset="0"/>
-                <a:ea typeface="微軟正黑體" pitchFamily="34" charset="-120"/>
-                <a:cs typeface="Calibri" panose="020F0502020204030204" pitchFamily="34" charset="0"/>
+              <a:rPr lang="en-US" altLang="zh-TW" sz="3733" b="1" dirty="0">
+                <a:solidFill>
+                  <a:srgbClr val="660033"/>
+                </a:solidFill>
+                <a:effectLst/>
+                <a:latin typeface="Times New Roman" panose="02020603050405020304" pitchFamily="18" charset="0"/>
+                <a:ea typeface="微軟正黑體" pitchFamily="34" charset="-120"/>
+                <a:cs typeface="Times New Roman" panose="02020603050405020304" pitchFamily="18" charset="0"/>
               </a:rPr>
               <a:t> </a:t>
             </a:r>
             <a:r>
-              <a:rPr lang="en-US" altLang="zh-TW" sz="4000" b="1" dirty="0" err="1">
-                <a:solidFill>
-                  <a:srgbClr val="660033"/>
-                </a:solidFill>
-                <a:effectLst/>
-                <a:latin typeface="Calibri" panose="020F0502020204030204" pitchFamily="34" charset="0"/>
-                <a:ea typeface="微軟正黑體" pitchFamily="34" charset="-120"/>
-                <a:cs typeface="Calibri" panose="020F0502020204030204" pitchFamily="34" charset="0"/>
+              <a:rPr lang="en-US" altLang="zh-TW" sz="3733" b="1" dirty="0" err="1">
+                <a:solidFill>
+                  <a:srgbClr val="660033"/>
+                </a:solidFill>
+                <a:effectLst/>
+                <a:latin typeface="Times New Roman" panose="02020603050405020304" pitchFamily="18" charset="0"/>
+                <a:ea typeface="微軟正黑體" pitchFamily="34" charset="-120"/>
+                <a:cs typeface="Times New Roman" panose="02020603050405020304" pitchFamily="18" charset="0"/>
               </a:rPr>
               <a:t>tăm</a:t>
             </a:r>
             <a:r>
-              <a:rPr lang="en-US" altLang="zh-TW" sz="4000" b="1" dirty="0">
-                <a:solidFill>
-                  <a:srgbClr val="660033"/>
-                </a:solidFill>
-                <a:effectLst/>
-                <a:latin typeface="Calibri" panose="020F0502020204030204" pitchFamily="34" charset="0"/>
-                <a:ea typeface="微軟正黑體" pitchFamily="34" charset="-120"/>
-                <a:cs typeface="Calibri" panose="020F0502020204030204" pitchFamily="34" charset="0"/>
+              <a:rPr lang="en-US" altLang="zh-TW" sz="3733" b="1" dirty="0">
+                <a:solidFill>
+                  <a:srgbClr val="660033"/>
+                </a:solidFill>
+                <a:effectLst/>
+                <a:latin typeface="Times New Roman" panose="02020603050405020304" pitchFamily="18" charset="0"/>
+                <a:ea typeface="微軟正黑體" pitchFamily="34" charset="-120"/>
+                <a:cs typeface="Times New Roman" panose="02020603050405020304" pitchFamily="18" charset="0"/>
               </a:rPr>
               <a:t> </a:t>
             </a:r>
             <a:r>
-              <a:rPr lang="en-US" altLang="zh-TW" sz="4000" b="1" dirty="0" err="1">
-                <a:solidFill>
-                  <a:srgbClr val="660033"/>
-                </a:solidFill>
-                <a:effectLst/>
-                <a:latin typeface="Calibri" panose="020F0502020204030204" pitchFamily="34" charset="0"/>
-                <a:ea typeface="微軟正黑體" pitchFamily="34" charset="-120"/>
-                <a:cs typeface="Calibri" panose="020F0502020204030204" pitchFamily="34" charset="0"/>
+              <a:rPr lang="en-US" altLang="zh-TW" sz="3733" b="1" dirty="0" err="1">
+                <a:solidFill>
+                  <a:srgbClr val="660033"/>
+                </a:solidFill>
+                <a:effectLst/>
+                <a:latin typeface="Times New Roman" panose="02020603050405020304" pitchFamily="18" charset="0"/>
+                <a:ea typeface="微軟正黑體" pitchFamily="34" charset="-120"/>
+                <a:cs typeface="Times New Roman" panose="02020603050405020304" pitchFamily="18" charset="0"/>
               </a:rPr>
               <a:t>tối</a:t>
             </a:r>
             <a:r>
-              <a:rPr lang="en-US" altLang="zh-TW" sz="4000" b="1" dirty="0">
-                <a:solidFill>
-                  <a:srgbClr val="660033"/>
-                </a:solidFill>
-                <a:effectLst/>
-                <a:latin typeface="Calibri" panose="020F0502020204030204" pitchFamily="34" charset="0"/>
-                <a:ea typeface="微軟正黑體" pitchFamily="34" charset="-120"/>
-                <a:cs typeface="Calibri" panose="020F0502020204030204" pitchFamily="34" charset="0"/>
+              <a:rPr lang="en-US" altLang="zh-TW" sz="3733" b="1" dirty="0">
+                <a:solidFill>
+                  <a:srgbClr val="660033"/>
+                </a:solidFill>
+                <a:effectLst/>
+                <a:latin typeface="Times New Roman" panose="02020603050405020304" pitchFamily="18" charset="0"/>
+                <a:ea typeface="微軟正黑體" pitchFamily="34" charset="-120"/>
+                <a:cs typeface="Times New Roman" panose="02020603050405020304" pitchFamily="18" charset="0"/>
               </a:rPr>
               <a:t> </a:t>
             </a:r>
             <a:r>
-              <a:rPr lang="en-US" altLang="zh-TW" sz="4000" b="1" dirty="0" err="1">
-                <a:solidFill>
-                  <a:srgbClr val="660033"/>
-                </a:solidFill>
-                <a:effectLst/>
-                <a:latin typeface="Calibri" panose="020F0502020204030204" pitchFamily="34" charset="0"/>
-                <a:ea typeface="微軟正黑體" pitchFamily="34" charset="-120"/>
-                <a:cs typeface="Calibri" panose="020F0502020204030204" pitchFamily="34" charset="0"/>
+              <a:rPr lang="en-US" altLang="zh-TW" sz="3733" b="1" dirty="0" err="1">
+                <a:solidFill>
+                  <a:srgbClr val="660033"/>
+                </a:solidFill>
+                <a:effectLst/>
+                <a:latin typeface="Times New Roman" panose="02020603050405020304" pitchFamily="18" charset="0"/>
+                <a:ea typeface="微軟正黑體" pitchFamily="34" charset="-120"/>
+                <a:cs typeface="Times New Roman" panose="02020603050405020304" pitchFamily="18" charset="0"/>
               </a:rPr>
               <a:t>đê</a:t>
             </a:r>
             <a:r>
-              <a:rPr lang="en-US" altLang="zh-TW" sz="4000" b="1" dirty="0">
-                <a:solidFill>
-                  <a:srgbClr val="660033"/>
-                </a:solidFill>
-                <a:effectLst/>
-                <a:latin typeface="Calibri" panose="020F0502020204030204" pitchFamily="34" charset="0"/>
-                <a:ea typeface="微軟正黑體" pitchFamily="34" charset="-120"/>
-                <a:cs typeface="Calibri" panose="020F0502020204030204" pitchFamily="34" charset="0"/>
+              <a:rPr lang="en-US" altLang="zh-TW" sz="3733" b="1" dirty="0">
+                <a:solidFill>
+                  <a:srgbClr val="660033"/>
+                </a:solidFill>
+                <a:effectLst/>
+                <a:latin typeface="Times New Roman" panose="02020603050405020304" pitchFamily="18" charset="0"/>
+                <a:ea typeface="微軟正黑體" pitchFamily="34" charset="-120"/>
+                <a:cs typeface="Times New Roman" panose="02020603050405020304" pitchFamily="18" charset="0"/>
               </a:rPr>
               <a:t> </a:t>
             </a:r>
             <a:r>
-              <a:rPr lang="en-US" altLang="zh-TW" sz="4000" b="1" dirty="0" err="1">
-                <a:solidFill>
-                  <a:srgbClr val="660033"/>
-                </a:solidFill>
-                <a:effectLst/>
-                <a:latin typeface="Calibri" panose="020F0502020204030204" pitchFamily="34" charset="0"/>
-                <a:ea typeface="微軟正黑體" pitchFamily="34" charset="-120"/>
-                <a:cs typeface="Calibri" panose="020F0502020204030204" pitchFamily="34" charset="0"/>
+              <a:rPr lang="en-US" altLang="zh-TW" sz="3733" b="1" dirty="0" err="1">
+                <a:solidFill>
+                  <a:srgbClr val="660033"/>
+                </a:solidFill>
+                <a:effectLst/>
+                <a:latin typeface="Times New Roman" panose="02020603050405020304" pitchFamily="18" charset="0"/>
+                <a:ea typeface="微軟正黑體" pitchFamily="34" charset="-120"/>
+                <a:cs typeface="Times New Roman" panose="02020603050405020304" pitchFamily="18" charset="0"/>
               </a:rPr>
               <a:t>mê</a:t>
             </a:r>
-            <a:endParaRPr lang="en-US" sz="4000" b="1" dirty="0">
+            <a:endParaRPr lang="en-US" sz="3733" b="1" dirty="0">
               <a:solidFill>
                 <a:srgbClr val="660033"/>
               </a:solidFill>
               <a:effectLst/>
-              <a:latin typeface="Calibri" panose="020F0502020204030204" pitchFamily="34" charset="0"/>
+              <a:latin typeface="Times New Roman" panose="02020603050405020304" pitchFamily="18" charset="0"/>
               <a:ea typeface="微軟正黑體" pitchFamily="34" charset="-120"/>
-              <a:cs typeface="Calibri" panose="020F0502020204030204" pitchFamily="34" charset="0"/>
+              <a:cs typeface="Times New Roman" panose="02020603050405020304" pitchFamily="18" charset="0"/>
             </a:endParaRPr>
           </a:p>
         </p:txBody>
@@ -12518,7 +12355,7 @@
         <p:spPr>
           <a:xfrm>
             <a:off x="0" y="5253203"/>
-            <a:ext cx="12192000" cy="748988"/>
+            <a:ext cx="12192000" cy="584775"/>
           </a:xfrm>
           <a:prstGeom prst="rect">
             <a:avLst/>
@@ -12533,37 +12370,21 @@
           <a:p>
             <a:pPr algn="ctr"/>
             <a:r>
-              <a:rPr lang="en-US" sz="4267" b="1" dirty="0">
+              <a:rPr lang="en-US" sz="3200" b="1" dirty="0">
                 <a:solidFill>
                   <a:srgbClr val="000066"/>
                 </a:solidFill>
                 <a:effectLst/>
-              </a:rPr>
-              <a:t>( </a:t>
-            </a:r>
-            <a:r>
-              <a:rPr lang="en-US" sz="4267" b="1" dirty="0" smtClean="0">
-                <a:solidFill>
-                  <a:srgbClr val="000066"/>
-                </a:solidFill>
-                <a:effectLst/>
-              </a:rPr>
-              <a:t>2 / 6 </a:t>
-            </a:r>
-            <a:r>
-              <a:rPr lang="en-US" sz="4267" b="1" dirty="0">
-                <a:solidFill>
-                  <a:srgbClr val="000066"/>
-                </a:solidFill>
-                <a:effectLst/>
-              </a:rPr>
-              <a:t>)</a:t>
-            </a:r>
-            <a:endParaRPr lang="vi-VN" sz="4267" b="1" dirty="0">
+                <a:ea typeface="Microsoft JhengHei" panose="020B0604030504040204" pitchFamily="34" charset="-120"/>
+              </a:rPr>
+              <a:t>( 2 / 6 )</a:t>
+            </a:r>
+            <a:endParaRPr lang="vi-VN" sz="3200" b="1" dirty="0">
               <a:solidFill>
                 <a:srgbClr val="000066"/>
               </a:solidFill>
               <a:effectLst/>
+              <a:ea typeface="Microsoft JhengHei" panose="020B0604030504040204" pitchFamily="34" charset="-120"/>
             </a:endParaRPr>
           </a:p>
         </p:txBody>
@@ -12796,128 +12617,125 @@
           </a:lstStyle>
           <a:p>
             <a:pPr marL="0" indent="0" algn="ctr">
-              <a:lnSpc>
-                <a:spcPts val="9000"/>
-              </a:lnSpc>
               <a:buNone/>
               <a:defRPr/>
             </a:pPr>
             <a:r>
-              <a:rPr lang="en-US" altLang="zh-TW" sz="4000" b="1" dirty="0" err="1">
-                <a:solidFill>
-                  <a:srgbClr val="660033"/>
-                </a:solidFill>
-                <a:effectLst/>
-                <a:latin typeface="Calibri" panose="020F0502020204030204" pitchFamily="34" charset="0"/>
-                <a:ea typeface="微軟正黑體" pitchFamily="34" charset="-120"/>
-                <a:cs typeface="Calibri" panose="020F0502020204030204" pitchFamily="34" charset="0"/>
+              <a:rPr lang="en-US" altLang="zh-TW" sz="3733" b="1" dirty="0" err="1">
+                <a:solidFill>
+                  <a:srgbClr val="660033"/>
+                </a:solidFill>
+                <a:effectLst/>
+                <a:latin typeface="Times New Roman" panose="02020603050405020304" pitchFamily="18" charset="0"/>
+                <a:ea typeface="微軟正黑體" pitchFamily="34" charset="-120"/>
+                <a:cs typeface="Times New Roman" panose="02020603050405020304" pitchFamily="18" charset="0"/>
               </a:rPr>
               <a:t>đương</a:t>
             </a:r>
             <a:r>
-              <a:rPr lang="en-US" altLang="zh-TW" sz="4000" b="1" dirty="0">
-                <a:solidFill>
-                  <a:srgbClr val="660033"/>
-                </a:solidFill>
-                <a:effectLst/>
-                <a:latin typeface="Calibri" panose="020F0502020204030204" pitchFamily="34" charset="0"/>
-                <a:ea typeface="微軟正黑體" pitchFamily="34" charset="-120"/>
-                <a:cs typeface="Calibri" panose="020F0502020204030204" pitchFamily="34" charset="0"/>
+              <a:rPr lang="en-US" altLang="zh-TW" sz="3733" b="1" dirty="0">
+                <a:solidFill>
+                  <a:srgbClr val="660033"/>
+                </a:solidFill>
+                <a:effectLst/>
+                <a:latin typeface="Times New Roman" panose="02020603050405020304" pitchFamily="18" charset="0"/>
+                <a:ea typeface="微軟正黑體" pitchFamily="34" charset="-120"/>
+                <a:cs typeface="Times New Roman" panose="02020603050405020304" pitchFamily="18" charset="0"/>
               </a:rPr>
               <a:t> </a:t>
             </a:r>
             <a:r>
-              <a:rPr lang="en-US" altLang="zh-TW" sz="4000" b="1" dirty="0" err="1">
-                <a:solidFill>
-                  <a:srgbClr val="660033"/>
-                </a:solidFill>
-                <a:effectLst/>
-                <a:latin typeface="Calibri" panose="020F0502020204030204" pitchFamily="34" charset="0"/>
-                <a:ea typeface="微軟正黑體" pitchFamily="34" charset="-120"/>
-                <a:cs typeface="Calibri" panose="020F0502020204030204" pitchFamily="34" charset="0"/>
+              <a:rPr lang="en-US" altLang="zh-TW" sz="3733" b="1" dirty="0" err="1">
+                <a:solidFill>
+                  <a:srgbClr val="660033"/>
+                </a:solidFill>
+                <a:effectLst/>
+                <a:latin typeface="Times New Roman" panose="02020603050405020304" pitchFamily="18" charset="0"/>
+                <a:ea typeface="微軟正黑體" pitchFamily="34" charset="-120"/>
+                <a:cs typeface="Times New Roman" panose="02020603050405020304" pitchFamily="18" charset="0"/>
               </a:rPr>
               <a:t>giữa</a:t>
             </a:r>
             <a:r>
-              <a:rPr lang="en-US" altLang="zh-TW" sz="4000" b="1" dirty="0">
-                <a:solidFill>
-                  <a:srgbClr val="660033"/>
-                </a:solidFill>
-                <a:effectLst/>
-                <a:latin typeface="Calibri" panose="020F0502020204030204" pitchFamily="34" charset="0"/>
-                <a:ea typeface="微軟正黑體" pitchFamily="34" charset="-120"/>
-                <a:cs typeface="Calibri" panose="020F0502020204030204" pitchFamily="34" charset="0"/>
+              <a:rPr lang="en-US" altLang="zh-TW" sz="3733" b="1" dirty="0">
+                <a:solidFill>
+                  <a:srgbClr val="660033"/>
+                </a:solidFill>
+                <a:effectLst/>
+                <a:latin typeface="Times New Roman" panose="02020603050405020304" pitchFamily="18" charset="0"/>
+                <a:ea typeface="微軟正黑體" pitchFamily="34" charset="-120"/>
+                <a:cs typeface="Times New Roman" panose="02020603050405020304" pitchFamily="18" charset="0"/>
               </a:rPr>
               <a:t> ban </a:t>
             </a:r>
             <a:r>
-              <a:rPr lang="en-US" altLang="zh-TW" sz="4000" b="1" dirty="0" err="1">
-                <a:solidFill>
-                  <a:srgbClr val="660033"/>
-                </a:solidFill>
-                <a:effectLst/>
-                <a:latin typeface="Calibri" panose="020F0502020204030204" pitchFamily="34" charset="0"/>
-                <a:ea typeface="微軟正黑體" pitchFamily="34" charset="-120"/>
-                <a:cs typeface="Calibri" panose="020F0502020204030204" pitchFamily="34" charset="0"/>
+              <a:rPr lang="en-US" altLang="zh-TW" sz="3733" b="1" dirty="0" err="1">
+                <a:solidFill>
+                  <a:srgbClr val="660033"/>
+                </a:solidFill>
+                <a:effectLst/>
+                <a:latin typeface="Times New Roman" panose="02020603050405020304" pitchFamily="18" charset="0"/>
+                <a:ea typeface="微軟正黑體" pitchFamily="34" charset="-120"/>
+                <a:cs typeface="Times New Roman" panose="02020603050405020304" pitchFamily="18" charset="0"/>
               </a:rPr>
               <a:t>ngày</a:t>
             </a:r>
             <a:r>
-              <a:rPr lang="en-US" altLang="zh-TW" sz="4000" b="1" dirty="0">
-                <a:solidFill>
-                  <a:srgbClr val="660033"/>
-                </a:solidFill>
-                <a:effectLst/>
-                <a:latin typeface="Calibri" panose="020F0502020204030204" pitchFamily="34" charset="0"/>
-                <a:ea typeface="微軟正黑體" pitchFamily="34" charset="-120"/>
-                <a:cs typeface="Calibri" panose="020F0502020204030204" pitchFamily="34" charset="0"/>
+              <a:rPr lang="en-US" altLang="zh-TW" sz="3733" b="1" dirty="0">
+                <a:solidFill>
+                  <a:srgbClr val="660033"/>
+                </a:solidFill>
+                <a:effectLst/>
+                <a:latin typeface="Times New Roman" panose="02020603050405020304" pitchFamily="18" charset="0"/>
+                <a:ea typeface="微軟正黑體" pitchFamily="34" charset="-120"/>
+                <a:cs typeface="Times New Roman" panose="02020603050405020304" pitchFamily="18" charset="0"/>
               </a:rPr>
               <a:t> </a:t>
             </a:r>
             <a:r>
-              <a:rPr lang="en-US" altLang="zh-TW" sz="4000" b="1" dirty="0" err="1">
-                <a:solidFill>
-                  <a:srgbClr val="660033"/>
-                </a:solidFill>
-                <a:effectLst/>
-                <a:latin typeface="Calibri" panose="020F0502020204030204" pitchFamily="34" charset="0"/>
-                <a:ea typeface="微軟正黑體" pitchFamily="34" charset="-120"/>
-                <a:cs typeface="Calibri" panose="020F0502020204030204" pitchFamily="34" charset="0"/>
+              <a:rPr lang="en-US" altLang="zh-TW" sz="3733" b="1" dirty="0" err="1">
+                <a:solidFill>
+                  <a:srgbClr val="660033"/>
+                </a:solidFill>
+                <a:effectLst/>
+                <a:latin typeface="Times New Roman" panose="02020603050405020304" pitchFamily="18" charset="0"/>
+                <a:ea typeface="微軟正黑體" pitchFamily="34" charset="-120"/>
+                <a:cs typeface="Times New Roman" panose="02020603050405020304" pitchFamily="18" charset="0"/>
               </a:rPr>
               <a:t>gớm</a:t>
             </a:r>
             <a:r>
-              <a:rPr lang="en-US" altLang="zh-TW" sz="4000" b="1" dirty="0">
-                <a:solidFill>
-                  <a:srgbClr val="660033"/>
-                </a:solidFill>
-                <a:effectLst/>
-                <a:latin typeface="Calibri" panose="020F0502020204030204" pitchFamily="34" charset="0"/>
-                <a:ea typeface="微軟正黑體" pitchFamily="34" charset="-120"/>
-                <a:cs typeface="Calibri" panose="020F0502020204030204" pitchFamily="34" charset="0"/>
+              <a:rPr lang="en-US" altLang="zh-TW" sz="3733" b="1" dirty="0">
+                <a:solidFill>
+                  <a:srgbClr val="660033"/>
+                </a:solidFill>
+                <a:effectLst/>
+                <a:latin typeface="Times New Roman" panose="02020603050405020304" pitchFamily="18" charset="0"/>
+                <a:ea typeface="微軟正黑體" pitchFamily="34" charset="-120"/>
+                <a:cs typeface="Times New Roman" panose="02020603050405020304" pitchFamily="18" charset="0"/>
               </a:rPr>
               <a:t> </a:t>
             </a:r>
             <a:r>
-              <a:rPr lang="en-US" altLang="zh-TW" sz="4000" b="1" dirty="0" err="1">
-                <a:solidFill>
-                  <a:srgbClr val="660033"/>
-                </a:solidFill>
-                <a:effectLst/>
-                <a:latin typeface="Calibri" panose="020F0502020204030204" pitchFamily="34" charset="0"/>
-                <a:ea typeface="微軟正黑體" pitchFamily="34" charset="-120"/>
-                <a:cs typeface="Calibri" panose="020F0502020204030204" pitchFamily="34" charset="0"/>
+              <a:rPr lang="en-US" altLang="zh-TW" sz="3733" b="1" dirty="0" err="1">
+                <a:solidFill>
+                  <a:srgbClr val="660033"/>
+                </a:solidFill>
+                <a:effectLst/>
+                <a:latin typeface="Times New Roman" panose="02020603050405020304" pitchFamily="18" charset="0"/>
+                <a:ea typeface="微軟正黑體" pitchFamily="34" charset="-120"/>
+                <a:cs typeface="Times New Roman" panose="02020603050405020304" pitchFamily="18" charset="0"/>
               </a:rPr>
               <a:t>ghê</a:t>
             </a:r>
-            <a:endParaRPr lang="en-US" sz="4000" b="1" dirty="0">
+            <a:endParaRPr lang="en-US" sz="3733" b="1" dirty="0">
               <a:solidFill>
                 <a:srgbClr val="660033"/>
               </a:solidFill>
               <a:effectLst/>
-              <a:latin typeface="Calibri" panose="020F0502020204030204" pitchFamily="34" charset="0"/>
+              <a:latin typeface="Times New Roman" panose="02020603050405020304" pitchFamily="18" charset="0"/>
               <a:ea typeface="微軟正黑體" pitchFamily="34" charset="-120"/>
-              <a:cs typeface="Calibri" panose="020F0502020204030204" pitchFamily="34" charset="0"/>
+              <a:cs typeface="Times New Roman" panose="02020603050405020304" pitchFamily="18" charset="0"/>
             </a:endParaRPr>
           </a:p>
         </p:txBody>
@@ -12931,7 +12749,7 @@
         <p:spPr>
           <a:xfrm>
             <a:off x="0" y="5253203"/>
-            <a:ext cx="12192000" cy="748988"/>
+            <a:ext cx="12192000" cy="584775"/>
           </a:xfrm>
           <a:prstGeom prst="rect">
             <a:avLst/>
@@ -12946,37 +12764,21 @@
           <a:p>
             <a:pPr algn="ctr"/>
             <a:r>
-              <a:rPr lang="en-US" sz="4267" b="1" dirty="0">
+              <a:rPr lang="en-US" sz="3200" b="1" dirty="0">
                 <a:solidFill>
                   <a:srgbClr val="000066"/>
                 </a:solidFill>
                 <a:effectLst/>
-              </a:rPr>
-              <a:t>( </a:t>
-            </a:r>
-            <a:r>
-              <a:rPr lang="en-US" sz="4267" b="1" dirty="0" smtClean="0">
-                <a:solidFill>
-                  <a:srgbClr val="000066"/>
-                </a:solidFill>
-                <a:effectLst/>
-              </a:rPr>
-              <a:t>2 / 6 </a:t>
-            </a:r>
-            <a:r>
-              <a:rPr lang="en-US" sz="4267" b="1" dirty="0">
-                <a:solidFill>
-                  <a:srgbClr val="000066"/>
-                </a:solidFill>
-                <a:effectLst/>
-              </a:rPr>
-              <a:t>)</a:t>
-            </a:r>
-            <a:endParaRPr lang="vi-VN" sz="4267" b="1" dirty="0">
+                <a:ea typeface="Microsoft JhengHei" panose="020B0604030504040204" pitchFamily="34" charset="-120"/>
+              </a:rPr>
+              <a:t>( 2 / 6 )</a:t>
+            </a:r>
+            <a:endParaRPr lang="vi-VN" sz="3200" b="1" dirty="0">
               <a:solidFill>
                 <a:srgbClr val="000066"/>
               </a:solidFill>
               <a:effectLst/>
+              <a:ea typeface="Microsoft JhengHei" panose="020B0604030504040204" pitchFamily="34" charset="-120"/>
             </a:endParaRPr>
           </a:p>
         </p:txBody>
@@ -13209,152 +13011,149 @@
           </a:lstStyle>
           <a:p>
             <a:pPr marL="0" indent="0" algn="ctr">
-              <a:lnSpc>
-                <a:spcPts val="9000"/>
-              </a:lnSpc>
               <a:buNone/>
               <a:defRPr/>
             </a:pPr>
             <a:r>
-              <a:rPr lang="en-US" altLang="zh-TW" sz="4000" b="1" dirty="0" err="1">
-                <a:solidFill>
-                  <a:srgbClr val="660033"/>
-                </a:solidFill>
-                <a:effectLst/>
-                <a:latin typeface="Calibri" panose="020F0502020204030204" pitchFamily="34" charset="0"/>
-                <a:ea typeface="微軟正黑體" pitchFamily="34" charset="-120"/>
-                <a:cs typeface="Calibri" panose="020F0502020204030204" pitchFamily="34" charset="0"/>
+              <a:rPr lang="en-US" altLang="zh-TW" sz="3733" b="1" dirty="0" err="1">
+                <a:solidFill>
+                  <a:srgbClr val="660033"/>
+                </a:solidFill>
+                <a:effectLst/>
+                <a:latin typeface="Times New Roman" panose="02020603050405020304" pitchFamily="18" charset="0"/>
+                <a:ea typeface="微軟正黑體" pitchFamily="34" charset="-120"/>
+                <a:cs typeface="Times New Roman" panose="02020603050405020304" pitchFamily="18" charset="0"/>
               </a:rPr>
               <a:t>Chính</a:t>
             </a:r>
             <a:r>
-              <a:rPr lang="en-US" altLang="zh-TW" sz="4000" b="1" dirty="0">
-                <a:solidFill>
-                  <a:srgbClr val="660033"/>
-                </a:solidFill>
-                <a:effectLst/>
-                <a:latin typeface="Calibri" panose="020F0502020204030204" pitchFamily="34" charset="0"/>
-                <a:ea typeface="微軟正黑體" pitchFamily="34" charset="-120"/>
-                <a:cs typeface="Calibri" panose="020F0502020204030204" pitchFamily="34" charset="0"/>
+              <a:rPr lang="en-US" altLang="zh-TW" sz="3733" b="1" dirty="0">
+                <a:solidFill>
+                  <a:srgbClr val="660033"/>
+                </a:solidFill>
+                <a:effectLst/>
+                <a:latin typeface="Times New Roman" panose="02020603050405020304" pitchFamily="18" charset="0"/>
+                <a:ea typeface="微軟正黑體" pitchFamily="34" charset="-120"/>
+                <a:cs typeface="Times New Roman" panose="02020603050405020304" pitchFamily="18" charset="0"/>
               </a:rPr>
               <a:t> </a:t>
             </a:r>
             <a:r>
-              <a:rPr lang="en-US" altLang="zh-TW" sz="4000" b="1" dirty="0" err="1">
-                <a:solidFill>
-                  <a:srgbClr val="660033"/>
-                </a:solidFill>
-                <a:effectLst/>
-                <a:latin typeface="Calibri" panose="020F0502020204030204" pitchFamily="34" charset="0"/>
-                <a:ea typeface="微軟正黑體" pitchFamily="34" charset="-120"/>
-                <a:cs typeface="Calibri" panose="020F0502020204030204" pitchFamily="34" charset="0"/>
+              <a:rPr lang="en-US" altLang="zh-TW" sz="3733" b="1" dirty="0" err="1">
+                <a:solidFill>
+                  <a:srgbClr val="660033"/>
+                </a:solidFill>
+                <a:effectLst/>
+                <a:latin typeface="Times New Roman" panose="02020603050405020304" pitchFamily="18" charset="0"/>
+                <a:ea typeface="微軟正黑體" pitchFamily="34" charset="-120"/>
+                <a:cs typeface="Times New Roman" panose="02020603050405020304" pitchFamily="18" charset="0"/>
               </a:rPr>
               <a:t>trong</a:t>
             </a:r>
             <a:r>
-              <a:rPr lang="en-US" altLang="zh-TW" sz="4000" b="1" dirty="0">
-                <a:solidFill>
-                  <a:srgbClr val="660033"/>
-                </a:solidFill>
-                <a:effectLst/>
-                <a:latin typeface="Calibri" panose="020F0502020204030204" pitchFamily="34" charset="0"/>
-                <a:ea typeface="微軟正黑體" pitchFamily="34" charset="-120"/>
-                <a:cs typeface="Calibri" panose="020F0502020204030204" pitchFamily="34" charset="0"/>
+              <a:rPr lang="en-US" altLang="zh-TW" sz="3733" b="1" dirty="0">
+                <a:solidFill>
+                  <a:srgbClr val="660033"/>
+                </a:solidFill>
+                <a:effectLst/>
+                <a:latin typeface="Times New Roman" panose="02020603050405020304" pitchFamily="18" charset="0"/>
+                <a:ea typeface="微軟正黑體" pitchFamily="34" charset="-120"/>
+                <a:cs typeface="Times New Roman" panose="02020603050405020304" pitchFamily="18" charset="0"/>
               </a:rPr>
               <a:t> </a:t>
             </a:r>
             <a:r>
-              <a:rPr lang="en-US" altLang="zh-TW" sz="4000" b="1" dirty="0" err="1">
-                <a:solidFill>
-                  <a:srgbClr val="660033"/>
-                </a:solidFill>
-                <a:effectLst/>
-                <a:latin typeface="Calibri" panose="020F0502020204030204" pitchFamily="34" charset="0"/>
-                <a:ea typeface="微軟正黑體" pitchFamily="34" charset="-120"/>
-                <a:cs typeface="Calibri" panose="020F0502020204030204" pitchFamily="34" charset="0"/>
+              <a:rPr lang="en-US" altLang="zh-TW" sz="3733" b="1" dirty="0" err="1">
+                <a:solidFill>
+                  <a:srgbClr val="660033"/>
+                </a:solidFill>
+                <a:effectLst/>
+                <a:latin typeface="Times New Roman" panose="02020603050405020304" pitchFamily="18" charset="0"/>
+                <a:ea typeface="微軟正黑體" pitchFamily="34" charset="-120"/>
+                <a:cs typeface="Times New Roman" panose="02020603050405020304" pitchFamily="18" charset="0"/>
               </a:rPr>
               <a:t>điện</a:t>
             </a:r>
             <a:r>
-              <a:rPr lang="en-US" altLang="zh-TW" sz="4000" b="1" dirty="0">
-                <a:solidFill>
-                  <a:srgbClr val="660033"/>
-                </a:solidFill>
-                <a:effectLst/>
-                <a:latin typeface="Calibri" panose="020F0502020204030204" pitchFamily="34" charset="0"/>
-                <a:ea typeface="微軟正黑體" pitchFamily="34" charset="-120"/>
-                <a:cs typeface="Calibri" panose="020F0502020204030204" pitchFamily="34" charset="0"/>
+              <a:rPr lang="en-US" altLang="zh-TW" sz="3733" b="1" dirty="0">
+                <a:solidFill>
+                  <a:srgbClr val="660033"/>
+                </a:solidFill>
+                <a:effectLst/>
+                <a:latin typeface="Times New Roman" panose="02020603050405020304" pitchFamily="18" charset="0"/>
+                <a:ea typeface="微軟正黑體" pitchFamily="34" charset="-120"/>
+                <a:cs typeface="Times New Roman" panose="02020603050405020304" pitchFamily="18" charset="0"/>
               </a:rPr>
               <a:t> </a:t>
             </a:r>
             <a:r>
-              <a:rPr lang="en-US" altLang="zh-TW" sz="4000" b="1" dirty="0" err="1">
-                <a:solidFill>
-                  <a:srgbClr val="660033"/>
-                </a:solidFill>
-                <a:effectLst/>
-                <a:latin typeface="Calibri" panose="020F0502020204030204" pitchFamily="34" charset="0"/>
-                <a:ea typeface="微軟正黑體" pitchFamily="34" charset="-120"/>
-                <a:cs typeface="Calibri" panose="020F0502020204030204" pitchFamily="34" charset="0"/>
+              <a:rPr lang="en-US" altLang="zh-TW" sz="3733" b="1" dirty="0" err="1">
+                <a:solidFill>
+                  <a:srgbClr val="660033"/>
+                </a:solidFill>
+                <a:effectLst/>
+                <a:latin typeface="Times New Roman" panose="02020603050405020304" pitchFamily="18" charset="0"/>
+                <a:ea typeface="微軟正黑體" pitchFamily="34" charset="-120"/>
+                <a:cs typeface="Times New Roman" panose="02020603050405020304" pitchFamily="18" charset="0"/>
               </a:rPr>
               <a:t>thờ</a:t>
             </a:r>
             <a:r>
-              <a:rPr lang="en-US" altLang="zh-TW" sz="4000" b="1" dirty="0">
-                <a:solidFill>
-                  <a:srgbClr val="660033"/>
-                </a:solidFill>
-                <a:effectLst/>
-                <a:latin typeface="Calibri" panose="020F0502020204030204" pitchFamily="34" charset="0"/>
-                <a:ea typeface="微軟正黑體" pitchFamily="34" charset="-120"/>
-                <a:cs typeface="Calibri" panose="020F0502020204030204" pitchFamily="34" charset="0"/>
+              <a:rPr lang="en-US" altLang="zh-TW" sz="3733" b="1" dirty="0">
+                <a:solidFill>
+                  <a:srgbClr val="660033"/>
+                </a:solidFill>
+                <a:effectLst/>
+                <a:latin typeface="Times New Roman" panose="02020603050405020304" pitchFamily="18" charset="0"/>
+                <a:ea typeface="微軟正黑體" pitchFamily="34" charset="-120"/>
+                <a:cs typeface="Times New Roman" panose="02020603050405020304" pitchFamily="18" charset="0"/>
               </a:rPr>
               <a:t> </a:t>
             </a:r>
             <a:r>
-              <a:rPr lang="en-US" altLang="zh-TW" sz="4000" b="1" dirty="0" err="1">
-                <a:solidFill>
-                  <a:srgbClr val="660033"/>
-                </a:solidFill>
-                <a:effectLst/>
-                <a:latin typeface="Calibri" panose="020F0502020204030204" pitchFamily="34" charset="0"/>
-                <a:ea typeface="微軟正黑體" pitchFamily="34" charset="-120"/>
-                <a:cs typeface="Calibri" panose="020F0502020204030204" pitchFamily="34" charset="0"/>
+              <a:rPr lang="en-US" altLang="zh-TW" sz="3733" b="1" dirty="0" err="1">
+                <a:solidFill>
+                  <a:srgbClr val="660033"/>
+                </a:solidFill>
+                <a:effectLst/>
+                <a:latin typeface="Times New Roman" panose="02020603050405020304" pitchFamily="18" charset="0"/>
+                <a:ea typeface="微軟正黑體" pitchFamily="34" charset="-120"/>
+                <a:cs typeface="Times New Roman" panose="02020603050405020304" pitchFamily="18" charset="0"/>
               </a:rPr>
               <a:t>Đức</a:t>
             </a:r>
             <a:r>
-              <a:rPr lang="en-US" altLang="zh-TW" sz="4000" b="1" dirty="0">
-                <a:solidFill>
-                  <a:srgbClr val="660033"/>
-                </a:solidFill>
-                <a:effectLst/>
-                <a:latin typeface="Calibri" panose="020F0502020204030204" pitchFamily="34" charset="0"/>
-                <a:ea typeface="微軟正黑體" pitchFamily="34" charset="-120"/>
-                <a:cs typeface="Calibri" panose="020F0502020204030204" pitchFamily="34" charset="0"/>
+              <a:rPr lang="en-US" altLang="zh-TW" sz="3733" b="1" dirty="0">
+                <a:solidFill>
+                  <a:srgbClr val="660033"/>
+                </a:solidFill>
+                <a:effectLst/>
+                <a:latin typeface="Times New Roman" panose="02020603050405020304" pitchFamily="18" charset="0"/>
+                <a:ea typeface="微軟正黑體" pitchFamily="34" charset="-120"/>
+                <a:cs typeface="Times New Roman" panose="02020603050405020304" pitchFamily="18" charset="0"/>
               </a:rPr>
               <a:t> </a:t>
             </a:r>
             <a:r>
-              <a:rPr lang="en-US" altLang="zh-TW" sz="4000" b="1" dirty="0" err="1">
-                <a:solidFill>
-                  <a:srgbClr val="660033"/>
-                </a:solidFill>
-                <a:effectLst/>
-                <a:latin typeface="Calibri" panose="020F0502020204030204" pitchFamily="34" charset="0"/>
-                <a:ea typeface="微軟正黑體" pitchFamily="34" charset="-120"/>
-                <a:cs typeface="Calibri" panose="020F0502020204030204" pitchFamily="34" charset="0"/>
+              <a:rPr lang="en-US" altLang="zh-TW" sz="3733" b="1" dirty="0" err="1">
+                <a:solidFill>
+                  <a:srgbClr val="660033"/>
+                </a:solidFill>
+                <a:effectLst/>
+                <a:latin typeface="Times New Roman" panose="02020603050405020304" pitchFamily="18" charset="0"/>
+                <a:ea typeface="微軟正黑體" pitchFamily="34" charset="-120"/>
+                <a:cs typeface="Times New Roman" panose="02020603050405020304" pitchFamily="18" charset="0"/>
               </a:rPr>
               <a:t>Giê-hô-va</a:t>
             </a:r>
-            <a:endParaRPr lang="en-US" sz="4000" b="1" dirty="0">
+            <a:endParaRPr lang="en-US" sz="3733" b="1" dirty="0">
               <a:solidFill>
                 <a:srgbClr val="660033"/>
               </a:solidFill>
               <a:effectLst/>
-              <a:latin typeface="Calibri" panose="020F0502020204030204" pitchFamily="34" charset="0"/>
+              <a:latin typeface="Times New Roman" panose="02020603050405020304" pitchFamily="18" charset="0"/>
               <a:ea typeface="微軟正黑體" pitchFamily="34" charset="-120"/>
-              <a:cs typeface="Calibri" panose="020F0502020204030204" pitchFamily="34" charset="0"/>
+              <a:cs typeface="Times New Roman" panose="02020603050405020304" pitchFamily="18" charset="0"/>
             </a:endParaRPr>
           </a:p>
         </p:txBody>
@@ -13368,7 +13167,7 @@
         <p:spPr>
           <a:xfrm>
             <a:off x="0" y="5253203"/>
-            <a:ext cx="12192000" cy="748988"/>
+            <a:ext cx="12192000" cy="584775"/>
           </a:xfrm>
           <a:prstGeom prst="rect">
             <a:avLst/>
@@ -13383,37 +13182,21 @@
           <a:p>
             <a:pPr algn="ctr"/>
             <a:r>
-              <a:rPr lang="en-US" sz="4267" b="1" dirty="0">
+              <a:rPr lang="en-US" sz="3200" b="1" dirty="0">
                 <a:solidFill>
                   <a:srgbClr val="000066"/>
                 </a:solidFill>
                 <a:effectLst/>
-              </a:rPr>
-              <a:t>( </a:t>
-            </a:r>
-            <a:r>
-              <a:rPr lang="en-US" sz="4267" b="1" dirty="0" smtClean="0">
-                <a:solidFill>
-                  <a:srgbClr val="000066"/>
-                </a:solidFill>
-                <a:effectLst/>
-              </a:rPr>
-              <a:t>2 / 6 </a:t>
-            </a:r>
-            <a:r>
-              <a:rPr lang="en-US" sz="4267" b="1" dirty="0">
-                <a:solidFill>
-                  <a:srgbClr val="000066"/>
-                </a:solidFill>
-                <a:effectLst/>
-              </a:rPr>
-              <a:t>)</a:t>
-            </a:r>
-            <a:endParaRPr lang="vi-VN" sz="4267" b="1" dirty="0">
+                <a:ea typeface="Microsoft JhengHei" panose="020B0604030504040204" pitchFamily="34" charset="-120"/>
+              </a:rPr>
+              <a:t>( 2 / 6 )</a:t>
+            </a:r>
+            <a:endParaRPr lang="vi-VN" sz="3200" b="1" dirty="0">
               <a:solidFill>
                 <a:srgbClr val="000066"/>
               </a:solidFill>
               <a:effectLst/>
+              <a:ea typeface="Microsoft JhengHei" panose="020B0604030504040204" pitchFamily="34" charset="-120"/>
             </a:endParaRPr>
           </a:p>
         </p:txBody>
@@ -13646,152 +13429,149 @@
           </a:lstStyle>
           <a:p>
             <a:pPr marL="0" indent="0" algn="ctr">
-              <a:lnSpc>
-                <a:spcPts val="9000"/>
-              </a:lnSpc>
               <a:buNone/>
               <a:defRPr/>
             </a:pPr>
             <a:r>
-              <a:rPr lang="en-US" altLang="zh-TW" sz="4000" b="1" dirty="0" err="1">
-                <a:solidFill>
-                  <a:srgbClr val="660033"/>
-                </a:solidFill>
-                <a:effectLst/>
-                <a:latin typeface="Calibri" panose="020F0502020204030204" pitchFamily="34" charset="0"/>
-                <a:ea typeface="微軟正黑體" pitchFamily="34" charset="-120"/>
-                <a:cs typeface="Calibri" panose="020F0502020204030204" pitchFamily="34" charset="0"/>
+              <a:rPr lang="en-US" altLang="zh-TW" sz="3733" b="1" dirty="0" err="1">
+                <a:solidFill>
+                  <a:srgbClr val="660033"/>
+                </a:solidFill>
+                <a:effectLst/>
+                <a:latin typeface="Times New Roman" panose="02020603050405020304" pitchFamily="18" charset="0"/>
+                <a:ea typeface="微軟正黑體" pitchFamily="34" charset="-120"/>
+                <a:cs typeface="Times New Roman" panose="02020603050405020304" pitchFamily="18" charset="0"/>
               </a:rPr>
               <a:t>bức</a:t>
             </a:r>
             <a:r>
-              <a:rPr lang="en-US" altLang="zh-TW" sz="4000" b="1" dirty="0">
-                <a:solidFill>
-                  <a:srgbClr val="660033"/>
-                </a:solidFill>
-                <a:effectLst/>
-                <a:latin typeface="Calibri" panose="020F0502020204030204" pitchFamily="34" charset="0"/>
-                <a:ea typeface="微軟正黑體" pitchFamily="34" charset="-120"/>
-                <a:cs typeface="Calibri" panose="020F0502020204030204" pitchFamily="34" charset="0"/>
+              <a:rPr lang="en-US" altLang="zh-TW" sz="3733" b="1" dirty="0">
+                <a:solidFill>
+                  <a:srgbClr val="660033"/>
+                </a:solidFill>
+                <a:effectLst/>
+                <a:latin typeface="Times New Roman" panose="02020603050405020304" pitchFamily="18" charset="0"/>
+                <a:ea typeface="微軟正黑體" pitchFamily="34" charset="-120"/>
+                <a:cs typeface="Times New Roman" panose="02020603050405020304" pitchFamily="18" charset="0"/>
               </a:rPr>
               <a:t> </a:t>
             </a:r>
             <a:r>
-              <a:rPr lang="en-US" altLang="zh-TW" sz="4000" b="1" dirty="0" err="1">
-                <a:solidFill>
-                  <a:srgbClr val="660033"/>
-                </a:solidFill>
-                <a:effectLst/>
-                <a:latin typeface="Calibri" panose="020F0502020204030204" pitchFamily="34" charset="0"/>
-                <a:ea typeface="微軟正黑體" pitchFamily="34" charset="-120"/>
-                <a:cs typeface="Calibri" panose="020F0502020204030204" pitchFamily="34" charset="0"/>
+              <a:rPr lang="en-US" altLang="zh-TW" sz="3733" b="1" dirty="0" err="1">
+                <a:solidFill>
+                  <a:srgbClr val="660033"/>
+                </a:solidFill>
+                <a:effectLst/>
+                <a:latin typeface="Times New Roman" panose="02020603050405020304" pitchFamily="18" charset="0"/>
+                <a:ea typeface="微軟正黑體" pitchFamily="34" charset="-120"/>
+                <a:cs typeface="Times New Roman" panose="02020603050405020304" pitchFamily="18" charset="0"/>
               </a:rPr>
               <a:t>màn</a:t>
             </a:r>
             <a:r>
-              <a:rPr lang="en-US" altLang="zh-TW" sz="4000" b="1" dirty="0">
-                <a:solidFill>
-                  <a:srgbClr val="660033"/>
-                </a:solidFill>
-                <a:effectLst/>
-                <a:latin typeface="Calibri" panose="020F0502020204030204" pitchFamily="34" charset="0"/>
-                <a:ea typeface="微軟正黑體" pitchFamily="34" charset="-120"/>
-                <a:cs typeface="Calibri" panose="020F0502020204030204" pitchFamily="34" charset="0"/>
+              <a:rPr lang="en-US" altLang="zh-TW" sz="3733" b="1" dirty="0">
+                <a:solidFill>
+                  <a:srgbClr val="660033"/>
+                </a:solidFill>
+                <a:effectLst/>
+                <a:latin typeface="Times New Roman" panose="02020603050405020304" pitchFamily="18" charset="0"/>
+                <a:ea typeface="微軟正黑體" pitchFamily="34" charset="-120"/>
+                <a:cs typeface="Times New Roman" panose="02020603050405020304" pitchFamily="18" charset="0"/>
               </a:rPr>
               <a:t> </a:t>
             </a:r>
             <a:r>
-              <a:rPr lang="en-US" altLang="zh-TW" sz="4000" b="1" dirty="0" err="1">
-                <a:solidFill>
-                  <a:srgbClr val="660033"/>
-                </a:solidFill>
-                <a:effectLst/>
-                <a:latin typeface="Calibri" panose="020F0502020204030204" pitchFamily="34" charset="0"/>
-                <a:ea typeface="微軟正黑體" pitchFamily="34" charset="-120"/>
-                <a:cs typeface="Calibri" panose="020F0502020204030204" pitchFamily="34" charset="0"/>
+              <a:rPr lang="en-US" altLang="zh-TW" sz="3733" b="1" dirty="0" err="1">
+                <a:solidFill>
+                  <a:srgbClr val="660033"/>
+                </a:solidFill>
+                <a:effectLst/>
+                <a:latin typeface="Times New Roman" panose="02020603050405020304" pitchFamily="18" charset="0"/>
+                <a:ea typeface="微軟正黑體" pitchFamily="34" charset="-120"/>
+                <a:cs typeface="Times New Roman" panose="02020603050405020304" pitchFamily="18" charset="0"/>
               </a:rPr>
               <a:t>phải</a:t>
             </a:r>
             <a:r>
-              <a:rPr lang="en-US" altLang="zh-TW" sz="4000" b="1" dirty="0">
-                <a:solidFill>
-                  <a:srgbClr val="660033"/>
-                </a:solidFill>
-                <a:effectLst/>
-                <a:latin typeface="Calibri" panose="020F0502020204030204" pitchFamily="34" charset="0"/>
-                <a:ea typeface="微軟正黑體" pitchFamily="34" charset="-120"/>
-                <a:cs typeface="Calibri" panose="020F0502020204030204" pitchFamily="34" charset="0"/>
+              <a:rPr lang="en-US" altLang="zh-TW" sz="3733" b="1" dirty="0">
+                <a:solidFill>
+                  <a:srgbClr val="660033"/>
+                </a:solidFill>
+                <a:effectLst/>
+                <a:latin typeface="Times New Roman" panose="02020603050405020304" pitchFamily="18" charset="0"/>
+                <a:ea typeface="微軟正黑體" pitchFamily="34" charset="-120"/>
+                <a:cs typeface="Times New Roman" panose="02020603050405020304" pitchFamily="18" charset="0"/>
               </a:rPr>
               <a:t> </a:t>
             </a:r>
             <a:r>
-              <a:rPr lang="en-US" altLang="zh-TW" sz="4000" b="1" dirty="0" err="1">
-                <a:solidFill>
-                  <a:srgbClr val="660033"/>
-                </a:solidFill>
-                <a:effectLst/>
-                <a:latin typeface="Calibri" panose="020F0502020204030204" pitchFamily="34" charset="0"/>
-                <a:ea typeface="微軟正黑體" pitchFamily="34" charset="-120"/>
-                <a:cs typeface="Calibri" panose="020F0502020204030204" pitchFamily="34" charset="0"/>
+              <a:rPr lang="en-US" altLang="zh-TW" sz="3733" b="1" dirty="0" err="1">
+                <a:solidFill>
+                  <a:srgbClr val="660033"/>
+                </a:solidFill>
+                <a:effectLst/>
+                <a:latin typeface="Times New Roman" panose="02020603050405020304" pitchFamily="18" charset="0"/>
+                <a:ea typeface="微軟正黑體" pitchFamily="34" charset="-120"/>
+                <a:cs typeface="Times New Roman" panose="02020603050405020304" pitchFamily="18" charset="0"/>
               </a:rPr>
               <a:t>xé</a:t>
             </a:r>
             <a:r>
-              <a:rPr lang="en-US" altLang="zh-TW" sz="4000" b="1" dirty="0">
-                <a:solidFill>
-                  <a:srgbClr val="660033"/>
-                </a:solidFill>
-                <a:effectLst/>
-                <a:latin typeface="Calibri" panose="020F0502020204030204" pitchFamily="34" charset="0"/>
-                <a:ea typeface="微軟正黑體" pitchFamily="34" charset="-120"/>
-                <a:cs typeface="Calibri" panose="020F0502020204030204" pitchFamily="34" charset="0"/>
+              <a:rPr lang="en-US" altLang="zh-TW" sz="3733" b="1" dirty="0">
+                <a:solidFill>
+                  <a:srgbClr val="660033"/>
+                </a:solidFill>
+                <a:effectLst/>
+                <a:latin typeface="Times New Roman" panose="02020603050405020304" pitchFamily="18" charset="0"/>
+                <a:ea typeface="微軟正黑體" pitchFamily="34" charset="-120"/>
+                <a:cs typeface="Times New Roman" panose="02020603050405020304" pitchFamily="18" charset="0"/>
               </a:rPr>
               <a:t> </a:t>
             </a:r>
             <a:r>
-              <a:rPr lang="en-US" altLang="zh-TW" sz="4000" b="1" dirty="0" err="1">
-                <a:solidFill>
-                  <a:srgbClr val="660033"/>
-                </a:solidFill>
-                <a:effectLst/>
-                <a:latin typeface="Calibri" panose="020F0502020204030204" pitchFamily="34" charset="0"/>
-                <a:ea typeface="微軟正黑體" pitchFamily="34" charset="-120"/>
-                <a:cs typeface="Calibri" panose="020F0502020204030204" pitchFamily="34" charset="0"/>
+              <a:rPr lang="en-US" altLang="zh-TW" sz="3733" b="1" dirty="0" err="1">
+                <a:solidFill>
+                  <a:srgbClr val="660033"/>
+                </a:solidFill>
+                <a:effectLst/>
+                <a:latin typeface="Times New Roman" panose="02020603050405020304" pitchFamily="18" charset="0"/>
+                <a:ea typeface="微軟正黑體" pitchFamily="34" charset="-120"/>
+                <a:cs typeface="Times New Roman" panose="02020603050405020304" pitchFamily="18" charset="0"/>
               </a:rPr>
               <a:t>hai</a:t>
             </a:r>
             <a:r>
-              <a:rPr lang="en-US" altLang="zh-TW" sz="4000" b="1" dirty="0">
-                <a:solidFill>
-                  <a:srgbClr val="660033"/>
-                </a:solidFill>
-                <a:effectLst/>
-                <a:latin typeface="Calibri" panose="020F0502020204030204" pitchFamily="34" charset="0"/>
-                <a:ea typeface="微軟正黑體" pitchFamily="34" charset="-120"/>
-                <a:cs typeface="Calibri" panose="020F0502020204030204" pitchFamily="34" charset="0"/>
+              <a:rPr lang="en-US" altLang="zh-TW" sz="3733" b="1" dirty="0">
+                <a:solidFill>
+                  <a:srgbClr val="660033"/>
+                </a:solidFill>
+                <a:effectLst/>
+                <a:latin typeface="Times New Roman" panose="02020603050405020304" pitchFamily="18" charset="0"/>
+                <a:ea typeface="微軟正黑體" pitchFamily="34" charset="-120"/>
+                <a:cs typeface="Times New Roman" panose="02020603050405020304" pitchFamily="18" charset="0"/>
               </a:rPr>
               <a:t> </a:t>
             </a:r>
             <a:r>
-              <a:rPr lang="en-US" altLang="zh-TW" sz="4000" b="1" dirty="0" err="1">
-                <a:solidFill>
-                  <a:srgbClr val="660033"/>
-                </a:solidFill>
-                <a:effectLst/>
-                <a:latin typeface="Calibri" panose="020F0502020204030204" pitchFamily="34" charset="0"/>
-                <a:ea typeface="微軟正黑體" pitchFamily="34" charset="-120"/>
-                <a:cs typeface="Calibri" panose="020F0502020204030204" pitchFamily="34" charset="0"/>
+              <a:rPr lang="en-US" altLang="zh-TW" sz="3733" b="1" dirty="0" err="1">
+                <a:solidFill>
+                  <a:srgbClr val="660033"/>
+                </a:solidFill>
+                <a:effectLst/>
+                <a:latin typeface="Times New Roman" panose="02020603050405020304" pitchFamily="18" charset="0"/>
+                <a:ea typeface="微軟正黑體" pitchFamily="34" charset="-120"/>
+                <a:cs typeface="Times New Roman" panose="02020603050405020304" pitchFamily="18" charset="0"/>
               </a:rPr>
               <a:t>ra</a:t>
             </a:r>
-            <a:endParaRPr lang="en-US" sz="4000" b="1" dirty="0">
+            <a:endParaRPr lang="en-US" sz="3733" b="1" dirty="0">
               <a:solidFill>
                 <a:srgbClr val="660033"/>
               </a:solidFill>
               <a:effectLst/>
-              <a:latin typeface="Calibri" panose="020F0502020204030204" pitchFamily="34" charset="0"/>
+              <a:latin typeface="Times New Roman" panose="02020603050405020304" pitchFamily="18" charset="0"/>
               <a:ea typeface="微軟正黑體" pitchFamily="34" charset="-120"/>
-              <a:cs typeface="Calibri" panose="020F0502020204030204" pitchFamily="34" charset="0"/>
+              <a:cs typeface="Times New Roman" panose="02020603050405020304" pitchFamily="18" charset="0"/>
             </a:endParaRPr>
           </a:p>
         </p:txBody>
@@ -13805,7 +13585,7 @@
         <p:spPr>
           <a:xfrm>
             <a:off x="0" y="5253203"/>
-            <a:ext cx="12192000" cy="748988"/>
+            <a:ext cx="12192000" cy="584775"/>
           </a:xfrm>
           <a:prstGeom prst="rect">
             <a:avLst/>
@@ -13820,37 +13600,21 @@
           <a:p>
             <a:pPr algn="ctr"/>
             <a:r>
-              <a:rPr lang="en-US" sz="4267" b="1" dirty="0">
+              <a:rPr lang="en-US" sz="3200" b="1" dirty="0">
                 <a:solidFill>
                   <a:srgbClr val="000066"/>
                 </a:solidFill>
                 <a:effectLst/>
-              </a:rPr>
-              <a:t>( </a:t>
-            </a:r>
-            <a:r>
-              <a:rPr lang="en-US" sz="4267" b="1" dirty="0" smtClean="0">
-                <a:solidFill>
-                  <a:srgbClr val="000066"/>
-                </a:solidFill>
-                <a:effectLst/>
-              </a:rPr>
-              <a:t>2 / 6 </a:t>
-            </a:r>
-            <a:r>
-              <a:rPr lang="en-US" sz="4267" b="1" dirty="0">
-                <a:solidFill>
-                  <a:srgbClr val="000066"/>
-                </a:solidFill>
-                <a:effectLst/>
-              </a:rPr>
-              <a:t>)</a:t>
-            </a:r>
-            <a:endParaRPr lang="vi-VN" sz="4267" b="1" dirty="0">
+                <a:ea typeface="Microsoft JhengHei" panose="020B0604030504040204" pitchFamily="34" charset="-120"/>
+              </a:rPr>
+              <a:t>( 2 / 6 )</a:t>
+            </a:r>
+            <a:endParaRPr lang="vi-VN" sz="3200" b="1" dirty="0">
               <a:solidFill>
                 <a:srgbClr val="000066"/>
               </a:solidFill>
               <a:effectLst/>
+              <a:ea typeface="Microsoft JhengHei" panose="020B0604030504040204" pitchFamily="34" charset="-120"/>
             </a:endParaRPr>
           </a:p>
         </p:txBody>
